--- a/docs/hackathon/slides/lifecompass-slides.pptx
+++ b/docs/hackathon/slides/lifecompass-slides.pptx
@@ -5715,7 +5715,7 @@
                 <a:latin typeface="Hiragino Sans"/>
                 <a:ea typeface="Hiragino Sans"/>
               </a:rPr>
-              <a:t>出典: 東京都「男女雇用平等参画状況調査」（令和7年度）。男性の育休取得率61.2%。ただし取得期間の最多は1〜3か月未満。</a:t>
+              <a:t>出典: 東京都「男女雇用平等参画状況調査」（令和7年度）。男性の育休取得率61.2%。</a:t>
             </a:r>
           </a:p>
         </p:txBody>

--- a/docs/hackathon/slides/lifecompass-slides.pptx
+++ b/docs/hackathon/slides/lifecompass-slides.pptx
@@ -11,6 +11,7 @@
     <p:sldId id="259" r:id="rId11"/>
     <p:sldId id="260" r:id="rId12"/>
     <p:sldId id="261" r:id="rId13"/>
+    <p:sldId id="262" r:id="rId14"/>
   </p:sldIdLst>
   <p:sldSz cx="12191695" cy="6858000" type="screen4x3"/>
   <p:notesSz cx="6858000" cy="9144000"/>
@@ -864,6 +865,76 @@
           <a:p>
             <a:r>
               <a:t>制度情報はオープンデータと法令から出典付きで取り込んでいます。一人ひとりが実際にどんなライフプランを描き、どこで諦めたかのデータは、都にも国にもまだありません。ここで積み重なるプランが、いずれ東京都や国が女性を支援する施策を増やすきっかけになることを願っています。決めるのはいつも本人です。ライフコンパス東京で、自分らしい人生を描き直せる選択肢を届けます。</a:t>
+            </a:r>
+          </a:p>
+        </p:txBody>
+      </p:sp>
+      <p:sp>
+        <p:nvSpPr>
+          <p:cNvPr id="4" name="Slide Number Placeholder 3"/>
+          <p:cNvSpPr>
+            <a:spLocks noGrp="1"/>
+          </p:cNvSpPr>
+          <p:nvPr>
+            <p:ph type="sldNum" idx="5" sz="quarter"/>
+          </p:nvPr>
+        </p:nvSpPr>
+        <p:spPr/>
+      </p:sp>
+    </p:spTree>
+  </p:cSld>
+  <p:clrMapOvr>
+    <a:masterClrMapping/>
+  </p:clrMapOvr>
+</p:notes>
+</file>
+
+<file path=ppt/notesSlides/notesSlide7.xml><?xml version="1.0" encoding="utf-8"?>
+<p:notes xmlns:a="http://schemas.openxmlformats.org/drawingml/2006/main" xmlns:p="http://schemas.openxmlformats.org/presentationml/2006/main" xmlns:r="http://schemas.openxmlformats.org/officeDocument/2006/relationships">
+  <p:cSld>
+    <p:spTree>
+      <p:nvGrpSpPr>
+        <p:cNvPr id="1" name=""/>
+        <p:cNvGrpSpPr/>
+        <p:nvPr/>
+      </p:nvGrpSpPr>
+      <p:grpSpPr>
+        <a:xfrm>
+          <a:off x="0" y="0"/>
+          <a:ext cx="0" cy="0"/>
+          <a:chOff x="0" y="0"/>
+          <a:chExt cx="0" cy="0"/>
+        </a:xfrm>
+      </p:grpSpPr>
+      <p:sp>
+        <p:nvSpPr>
+          <p:cNvPr id="2" name="Slide Image Placeholder 1"/>
+          <p:cNvSpPr>
+            <a:spLocks noGrp="1"/>
+          </p:cNvSpPr>
+          <p:nvPr>
+            <p:ph type="sldImg" idx="2"/>
+          </p:nvPr>
+        </p:nvSpPr>
+        <p:spPr/>
+      </p:sp>
+      <p:sp>
+        <p:nvSpPr>
+          <p:cNvPr id="3" name="Notes Placeholder 2"/>
+          <p:cNvSpPr>
+            <a:spLocks noGrp="1"/>
+          </p:cNvSpPr>
+          <p:nvPr>
+            <p:ph type="body" idx="3" sz="quarter"/>
+          </p:nvPr>
+        </p:nvSpPr>
+        <p:spPr/>
+        <p:txBody>
+          <a:bodyPr/>
+          <a:lstStyle/>
+          <a:p>
+            <a:r>
+              <a:t>[付録：本編2分では話さない。質疑で聞かれたときのための補足]アプリ画面に表示する制度上限は、東京都福祉局の不妊検査等助成事業と、育児・介護休業法など国の法令から出典付きで取り込んでいます。課題の根拠として資料・プレゼンで引用した東京都の調査データは、利用者の画面には表示していません。</a:t>
             </a:r>
           </a:p>
         </p:txBody>
@@ -6348,6 +6419,525 @@
                 <a:ea typeface="Hiragino Sans"/>
               </a:rPr>
               <a:t>06</a:t>
+            </a:r>
+          </a:p>
+        </p:txBody>
+      </p:sp>
+    </p:spTree>
+  </p:cSld>
+  <p:clrMapOvr>
+    <a:masterClrMapping/>
+  </p:clrMapOvr>
+</p:sld>
+</file>
+
+<file path=ppt/slides/slide7.xml><?xml version="1.0" encoding="utf-8"?>
+<p:sld xmlns:a="http://schemas.openxmlformats.org/drawingml/2006/main" xmlns:p="http://schemas.openxmlformats.org/presentationml/2006/main" xmlns:r="http://schemas.openxmlformats.org/officeDocument/2006/relationships">
+  <p:cSld>
+    <p:bg>
+      <p:bgPr>
+        <a:solidFill>
+          <a:srgbClr val="FFFFFF"/>
+        </a:solidFill>
+        <a:effectLst/>
+      </p:bgPr>
+    </p:bg>
+    <p:spTree>
+      <p:nvGrpSpPr>
+        <p:cNvPr id="1" name=""/>
+        <p:cNvGrpSpPr/>
+        <p:nvPr/>
+      </p:nvGrpSpPr>
+      <p:grpSpPr/>
+      <p:sp>
+        <p:nvSpPr>
+          <p:cNvPr id="2" name="TextBox 1"/>
+          <p:cNvSpPr txBox="1"/>
+          <p:nvPr/>
+        </p:nvSpPr>
+        <p:spPr>
+          <a:xfrm>
+            <a:off x="640080" y="457200"/>
+            <a:ext cx="10515600" cy="822960"/>
+          </a:xfrm>
+          <a:prstGeom prst="rect">
+            <a:avLst/>
+          </a:prstGeom>
+          <a:noFill/>
+        </p:spPr>
+        <p:txBody>
+          <a:bodyPr wrap="square" anchor="t">
+            <a:spAutoFit/>
+          </a:bodyPr>
+          <a:lstStyle/>
+          <a:p>
+            <a:pPr algn="l">
+              <a:lnSpc>
+                <a:spcPct val="125000"/>
+              </a:lnSpc>
+            </a:pPr>
+            <a:r>
+              <a:rPr sz="3000" b="1">
+                <a:solidFill>
+                  <a:srgbClr val="142842"/>
+                </a:solidFill>
+                <a:latin typeface="Hiragino Sans"/>
+                <a:ea typeface="Hiragino Sans"/>
+              </a:rPr>
+              <a:t>参考｜利用データと使い方</a:t>
+            </a:r>
+          </a:p>
+        </p:txBody>
+      </p:sp>
+      <p:sp>
+        <p:nvSpPr>
+          <p:cNvPr id="3" name="Rectangle 2"/>
+          <p:cNvSpPr/>
+          <p:nvPr/>
+        </p:nvSpPr>
+        <p:spPr>
+          <a:xfrm>
+            <a:off x="640080" y="1371600"/>
+            <a:ext cx="10881360" cy="1874519"/>
+          </a:xfrm>
+          <a:prstGeom prst="rect">
+            <a:avLst/>
+          </a:prstGeom>
+          <a:solidFill>
+            <a:srgbClr val="F2F4F7"/>
+          </a:solidFill>
+          <a:ln>
+            <a:noFill/>
+          </a:ln>
+          <a:effectLst/>
+        </p:spPr>
+        <p:style>
+          <a:lnRef idx="1">
+            <a:schemeClr val="accent1"/>
+          </a:lnRef>
+          <a:fillRef idx="3">
+            <a:schemeClr val="accent1"/>
+          </a:fillRef>
+          <a:effectRef idx="2">
+            <a:schemeClr val="accent1"/>
+          </a:effectRef>
+          <a:fontRef idx="minor">
+            <a:schemeClr val="lt1"/>
+          </a:fontRef>
+        </p:style>
+        <p:txBody>
+          <a:bodyPr rtlCol="0" anchor="ctr"/>
+          <a:lstStyle/>
+          <a:p>
+            <a:pPr algn="ctr"/>
+          </a:p>
+        </p:txBody>
+      </p:sp>
+      <p:sp>
+        <p:nvSpPr>
+          <p:cNvPr id="4" name="TextBox 3"/>
+          <p:cNvSpPr txBox="1"/>
+          <p:nvPr/>
+        </p:nvSpPr>
+        <p:spPr>
+          <a:xfrm>
+            <a:off x="868680" y="1508760"/>
+            <a:ext cx="10424160" cy="365760"/>
+          </a:xfrm>
+          <a:prstGeom prst="rect">
+            <a:avLst/>
+          </a:prstGeom>
+          <a:noFill/>
+        </p:spPr>
+        <p:txBody>
+          <a:bodyPr wrap="square" anchor="t">
+            <a:spAutoFit/>
+          </a:bodyPr>
+          <a:lstStyle/>
+          <a:p>
+            <a:pPr algn="l">
+              <a:lnSpc>
+                <a:spcPct val="125000"/>
+              </a:lnSpc>
+            </a:pPr>
+            <a:r>
+              <a:rPr sz="1600" b="1">
+                <a:solidFill>
+                  <a:srgbClr val="1E3A5F"/>
+                </a:solidFill>
+                <a:latin typeface="Hiragino Sans"/>
+                <a:ea typeface="Hiragino Sans"/>
+              </a:rPr>
+              <a:t>(B) アプリ内に出典付きで表示するデータ</a:t>
+            </a:r>
+          </a:p>
+        </p:txBody>
+      </p:sp>
+      <p:sp>
+        <p:nvSpPr>
+          <p:cNvPr id="5" name="TextBox 4"/>
+          <p:cNvSpPr txBox="1"/>
+          <p:nvPr/>
+        </p:nvSpPr>
+        <p:spPr>
+          <a:xfrm>
+            <a:off x="868680" y="1920240"/>
+            <a:ext cx="10195560" cy="1234440"/>
+          </a:xfrm>
+          <a:prstGeom prst="rect">
+            <a:avLst/>
+          </a:prstGeom>
+          <a:noFill/>
+        </p:spPr>
+        <p:txBody>
+          <a:bodyPr wrap="square" anchor="t">
+            <a:spAutoFit/>
+          </a:bodyPr>
+          <a:lstStyle/>
+          <a:p>
+            <a:pPr algn="l">
+              <a:lnSpc>
+                <a:spcPct val="140000"/>
+              </a:lnSpc>
+            </a:pPr>
+            <a:r>
+              <a:rPr sz="1400" b="0">
+                <a:solidFill>
+                  <a:srgbClr val="20242B"/>
+                </a:solidFill>
+                <a:latin typeface="Hiragino Sans"/>
+                <a:ea typeface="Hiragino Sans"/>
+              </a:rPr>
+              <a:t>・東京都不妊検査等助成事業／東京都福祉局／公的な制度情報</a:t>
+            </a:r>
+          </a:p>
+          <a:p>
+            <a:pPr algn="l">
+              <a:lnSpc>
+                <a:spcPct val="140000"/>
+              </a:lnSpc>
+            </a:pPr>
+            <a:r>
+              <a:rPr sz="1400" b="0">
+                <a:solidFill>
+                  <a:srgbClr val="20242B"/>
+                </a:solidFill>
+                <a:latin typeface="Hiragino Sans"/>
+                <a:ea typeface="Hiragino Sans"/>
+              </a:rPr>
+              <a:t>・育児・介護休業法、労働基準法、母子保健法／厚生労働省・こども家庭庁／公的な法令情報</a:t>
+            </a:r>
+          </a:p>
+        </p:txBody>
+      </p:sp>
+      <p:sp>
+        <p:nvSpPr>
+          <p:cNvPr id="6" name="Rectangle 5"/>
+          <p:cNvSpPr/>
+          <p:nvPr/>
+        </p:nvSpPr>
+        <p:spPr>
+          <a:xfrm>
+            <a:off x="640080" y="3429000"/>
+            <a:ext cx="10881360" cy="2331720"/>
+          </a:xfrm>
+          <a:prstGeom prst="rect">
+            <a:avLst/>
+          </a:prstGeom>
+          <a:noFill/>
+          <a:ln w="9525">
+            <a:solidFill>
+              <a:srgbClr val="D9D0BC"/>
+            </a:solidFill>
+          </a:ln>
+          <a:effectLst/>
+        </p:spPr>
+        <p:style>
+          <a:lnRef idx="1">
+            <a:schemeClr val="accent1"/>
+          </a:lnRef>
+          <a:fillRef idx="3">
+            <a:schemeClr val="accent1"/>
+          </a:fillRef>
+          <a:effectRef idx="2">
+            <a:schemeClr val="accent1"/>
+          </a:effectRef>
+          <a:fontRef idx="minor">
+            <a:schemeClr val="lt1"/>
+          </a:fontRef>
+        </p:style>
+        <p:txBody>
+          <a:bodyPr rtlCol="0" anchor="ctr"/>
+          <a:lstStyle/>
+          <a:p>
+            <a:pPr algn="ctr"/>
+          </a:p>
+        </p:txBody>
+      </p:sp>
+      <p:sp>
+        <p:nvSpPr>
+          <p:cNvPr id="7" name="TextBox 6"/>
+          <p:cNvSpPr txBox="1"/>
+          <p:nvPr/>
+        </p:nvSpPr>
+        <p:spPr>
+          <a:xfrm>
+            <a:off x="868680" y="3566160"/>
+            <a:ext cx="10424160" cy="365760"/>
+          </a:xfrm>
+          <a:prstGeom prst="rect">
+            <a:avLst/>
+          </a:prstGeom>
+          <a:noFill/>
+        </p:spPr>
+        <p:txBody>
+          <a:bodyPr wrap="square" anchor="t">
+            <a:spAutoFit/>
+          </a:bodyPr>
+          <a:lstStyle/>
+          <a:p>
+            <a:pPr algn="l">
+              <a:lnSpc>
+                <a:spcPct val="125000"/>
+              </a:lnSpc>
+            </a:pPr>
+            <a:r>
+              <a:rPr sz="1600" b="1">
+                <a:solidFill>
+                  <a:srgbClr val="1E3A5F"/>
+                </a:solidFill>
+                <a:latin typeface="Hiragino Sans"/>
+                <a:ea typeface="Hiragino Sans"/>
+              </a:rPr>
+              <a:t>(A) 課題の根拠として資料で引用するデータ（利用者の画面には出さない）</a:t>
+            </a:r>
+          </a:p>
+        </p:txBody>
+      </p:sp>
+      <p:sp>
+        <p:nvSpPr>
+          <p:cNvPr id="8" name="TextBox 7"/>
+          <p:cNvSpPr txBox="1"/>
+          <p:nvPr/>
+        </p:nvSpPr>
+        <p:spPr>
+          <a:xfrm>
+            <a:off x="868680" y="3977639"/>
+            <a:ext cx="10195560" cy="1691640"/>
+          </a:xfrm>
+          <a:prstGeom prst="rect">
+            <a:avLst/>
+          </a:prstGeom>
+          <a:noFill/>
+        </p:spPr>
+        <p:txBody>
+          <a:bodyPr wrap="square" anchor="t">
+            <a:spAutoFit/>
+          </a:bodyPr>
+          <a:lstStyle/>
+          <a:p>
+            <a:pPr algn="l">
+              <a:lnSpc>
+                <a:spcPct val="140000"/>
+              </a:lnSpc>
+            </a:pPr>
+            <a:r>
+              <a:rPr sz="1400" b="0">
+                <a:solidFill>
+                  <a:srgbClr val="20242B"/>
+                </a:solidFill>
+                <a:latin typeface="Hiragino Sans"/>
+                <a:ea typeface="Hiragino Sans"/>
+              </a:rPr>
+              <a:t>・男女雇用平等参画状況調査（令和7年度）／東京都産業労働局／CC BY 4.0</a:t>
+            </a:r>
+          </a:p>
+          <a:p>
+            <a:pPr algn="l">
+              <a:lnSpc>
+                <a:spcPct val="140000"/>
+              </a:lnSpc>
+            </a:pPr>
+            <a:r>
+              <a:rPr sz="1400" b="0">
+                <a:solidFill>
+                  <a:srgbClr val="20242B"/>
+                </a:solidFill>
+                <a:latin typeface="Hiragino Sans"/>
+                <a:ea typeface="Hiragino Sans"/>
+              </a:rPr>
+              <a:t>・男女平等参画に関する世論調査（令和2年度）／東京都（政策企画局・生活文化局）</a:t>
+            </a:r>
+          </a:p>
+          <a:p>
+            <a:pPr algn="l">
+              <a:lnSpc>
+                <a:spcPct val="140000"/>
+              </a:lnSpc>
+            </a:pPr>
+            <a:r>
+              <a:rPr sz="1400" b="0">
+                <a:solidFill>
+                  <a:srgbClr val="20242B"/>
+                </a:solidFill>
+                <a:latin typeface="Hiragino Sans"/>
+                <a:ea typeface="Hiragino Sans"/>
+              </a:rPr>
+              <a:t>・子育て支援制度レジストリ（東京デジタル2030ビジョン こどもDX）／東京都デジタルサービス局／</a:t>
+            </a:r>
+          </a:p>
+          <a:p>
+            <a:pPr algn="l">
+              <a:lnSpc>
+                <a:spcPct val="140000"/>
+              </a:lnSpc>
+            </a:pPr>
+            <a:r>
+              <a:rPr sz="1400" b="0">
+                <a:solidFill>
+                  <a:srgbClr val="20242B"/>
+                </a:solidFill>
+                <a:latin typeface="Hiragino Sans"/>
+                <a:ea typeface="Hiragino Sans"/>
+              </a:rPr>
+              <a:t>  CC BY 4.0（7,812件の根拠として引用。更新終了のため制度上限の一次情報は東京都福祉局の</a:t>
+            </a:r>
+          </a:p>
+          <a:p>
+            <a:pPr algn="l">
+              <a:lnSpc>
+                <a:spcPct val="140000"/>
+              </a:lnSpc>
+            </a:pPr>
+            <a:r>
+              <a:rPr sz="1400" b="0">
+                <a:solidFill>
+                  <a:srgbClr val="20242B"/>
+                </a:solidFill>
+                <a:latin typeface="Hiragino Sans"/>
+                <a:ea typeface="Hiragino Sans"/>
+              </a:rPr>
+              <a:t>  公式ページを採用）</a:t>
+            </a:r>
+          </a:p>
+        </p:txBody>
+      </p:sp>
+      <p:sp>
+        <p:nvSpPr>
+          <p:cNvPr id="9" name="TextBox 8"/>
+          <p:cNvSpPr txBox="1"/>
+          <p:nvPr/>
+        </p:nvSpPr>
+        <p:spPr>
+          <a:xfrm>
+            <a:off x="640080" y="5897880"/>
+            <a:ext cx="10881360" cy="457200"/>
+          </a:xfrm>
+          <a:prstGeom prst="rect">
+            <a:avLst/>
+          </a:prstGeom>
+          <a:noFill/>
+        </p:spPr>
+        <p:txBody>
+          <a:bodyPr wrap="square" anchor="t">
+            <a:spAutoFit/>
+          </a:bodyPr>
+          <a:lstStyle/>
+          <a:p>
+            <a:pPr algn="l">
+              <a:lnSpc>
+                <a:spcPct val="125000"/>
+              </a:lnSpc>
+            </a:pPr>
+            <a:r>
+              <a:rPr sz="1400" b="1">
+                <a:solidFill>
+                  <a:srgbClr val="1E3A5F"/>
+                </a:solidFill>
+                <a:latin typeface="Hiragino Sans"/>
+                <a:ea typeface="Hiragino Sans"/>
+              </a:rPr>
+              <a:t>平均値・中央値は画面に出さず、制度上の上限だけを実施主体・出典付きで示す（PDR-008）</a:t>
+            </a:r>
+          </a:p>
+        </p:txBody>
+      </p:sp>
+      <p:sp>
+        <p:nvSpPr>
+          <p:cNvPr id="10" name="TextBox 9"/>
+          <p:cNvSpPr txBox="1"/>
+          <p:nvPr/>
+        </p:nvSpPr>
+        <p:spPr>
+          <a:xfrm>
+            <a:off x="548640" y="6355080"/>
+            <a:ext cx="11109960" cy="457200"/>
+          </a:xfrm>
+          <a:prstGeom prst="rect">
+            <a:avLst/>
+          </a:prstGeom>
+          <a:noFill/>
+        </p:spPr>
+        <p:txBody>
+          <a:bodyPr wrap="square" anchor="t">
+            <a:spAutoFit/>
+          </a:bodyPr>
+          <a:lstStyle/>
+          <a:p>
+            <a:pPr algn="l">
+              <a:lnSpc>
+                <a:spcPct val="115000"/>
+              </a:lnSpc>
+            </a:pPr>
+            <a:r>
+              <a:rPr sz="1000" b="0">
+                <a:solidFill>
+                  <a:srgbClr val="565B62"/>
+                </a:solidFill>
+                <a:latin typeface="Hiragino Sans"/>
+                <a:ea typeface="Hiragino Sans"/>
+              </a:rPr>
+              <a:t>各データの出典URL・ライセンス表記の詳細は提出フォーム 4-1 に記載。</a:t>
+            </a:r>
+          </a:p>
+        </p:txBody>
+      </p:sp>
+      <p:sp>
+        <p:nvSpPr>
+          <p:cNvPr id="11" name="TextBox 10"/>
+          <p:cNvSpPr txBox="1"/>
+          <p:nvPr/>
+        </p:nvSpPr>
+        <p:spPr>
+          <a:xfrm>
+            <a:off x="11475720" y="228600"/>
+            <a:ext cx="548640" cy="365760"/>
+          </a:xfrm>
+          <a:prstGeom prst="rect">
+            <a:avLst/>
+          </a:prstGeom>
+          <a:noFill/>
+        </p:spPr>
+        <p:txBody>
+          <a:bodyPr wrap="square" anchor="t">
+            <a:spAutoFit/>
+          </a:bodyPr>
+          <a:lstStyle/>
+          <a:p>
+            <a:pPr algn="r">
+              <a:lnSpc>
+                <a:spcPct val="125000"/>
+              </a:lnSpc>
+            </a:pPr>
+            <a:r>
+              <a:rPr sz="1200" b="0">
+                <a:solidFill>
+                  <a:srgbClr val="565B62"/>
+                </a:solidFill>
+                <a:latin typeface="Hiragino Sans"/>
+                <a:ea typeface="Hiragino Sans"/>
+              </a:rPr>
+              <a:t>07</a:t>
             </a:r>
           </a:p>
         </p:txBody>

--- a/docs/hackathon/slides/lifecompass-slides.pptx
+++ b/docs/hackathon/slides/lifecompass-slides.pptx
@@ -5162,7 +5162,7 @@
         <p:spPr>
           <a:xfrm>
             <a:off x="640080" y="1371600"/>
-            <a:ext cx="5212080" cy="2971800"/>
+            <a:ext cx="4023360" cy="2971800"/>
           </a:xfrm>
           <a:prstGeom prst="rect">
             <a:avLst/>
@@ -5176,7 +5176,7 @@
       </p:pic>
       <p:pic>
         <p:nvPicPr>
-          <p:cNvPr id="4" name="Picture 3" descr="event-detail-childbirth.jpg"/>
+          <p:cNvPr id="4" name="Picture 3" descr="timeline-mobile.jpg"/>
           <p:cNvPicPr>
             <a:picLocks noChangeAspect="1"/>
           </p:cNvPicPr>
@@ -5190,8 +5190,8 @@
         </p:blipFill>
         <p:spPr>
           <a:xfrm>
-            <a:off x="6035040" y="1371600"/>
-            <a:ext cx="5212080" cy="2971800"/>
+            <a:off x="4846320" y="1371600"/>
+            <a:ext cx="1371600" cy="2971800"/>
           </a:xfrm>
           <a:prstGeom prst="rect">
             <a:avLst/>
@@ -5203,9 +5203,38 @@
           </a:ln>
         </p:spPr>
       </p:pic>
-      <p:sp>
-        <p:nvSpPr>
-          <p:cNvPr id="5" name="TextBox 4"/>
+      <p:pic>
+        <p:nvPicPr>
+          <p:cNvPr id="5" name="Picture 4" descr="event-detail-childbirth.jpg"/>
+          <p:cNvPicPr>
+            <a:picLocks noChangeAspect="1"/>
+          </p:cNvPicPr>
+          <p:nvPr/>
+        </p:nvPicPr>
+        <p:blipFill>
+          <a:blip r:embed="rId4"/>
+          <a:stretch>
+            <a:fillRect/>
+          </a:stretch>
+        </p:blipFill>
+        <p:spPr>
+          <a:xfrm>
+            <a:off x="6400800" y="1371600"/>
+            <a:ext cx="4846320" cy="2971800"/>
+          </a:xfrm>
+          <a:prstGeom prst="rect">
+            <a:avLst/>
+          </a:prstGeom>
+          <a:ln w="12700">
+            <a:solidFill>
+              <a:srgbClr val="D9D0BC"/>
+            </a:solidFill>
+          </a:ln>
+        </p:spPr>
+      </p:pic>
+      <p:sp>
+        <p:nvSpPr>
+          <p:cNvPr id="6" name="TextBox 5"/>
           <p:cNvSpPr txBox="1"/>
           <p:nvPr/>
         </p:nvSpPr>
@@ -5262,7 +5291,7 @@
       </p:sp>
       <p:sp>
         <p:nvSpPr>
-          <p:cNvPr id="6" name="TextBox 5"/>
+          <p:cNvPr id="7" name="TextBox 6"/>
           <p:cNvSpPr txBox="1"/>
           <p:nvPr/>
         </p:nvSpPr>
@@ -5302,7 +5331,7 @@
       </p:sp>
       <p:sp>
         <p:nvSpPr>
-          <p:cNvPr id="7" name="TextBox 6"/>
+          <p:cNvPr id="8" name="TextBox 7"/>
           <p:cNvSpPr txBox="1"/>
           <p:nvPr/>
         </p:nvSpPr>
@@ -5342,7 +5371,7 @@
       </p:sp>
       <p:sp>
         <p:nvSpPr>
-          <p:cNvPr id="8" name="TextBox 7"/>
+          <p:cNvPr id="9" name="TextBox 8"/>
           <p:cNvSpPr txBox="1"/>
           <p:nvPr/>
         </p:nvSpPr>

--- a/docs/hackathon/slides/lifecompass-slides.pptx
+++ b/docs/hackathon/slides/lifecompass-slides.pptx
@@ -12,6 +12,7 @@
     <p:sldId id="260" r:id="rId12"/>
     <p:sldId id="261" r:id="rId13"/>
     <p:sldId id="262" r:id="rId14"/>
+    <p:sldId id="263" r:id="rId15"/>
   </p:sldIdLst>
   <p:sldSz cx="12191695" cy="6858000" type="screen4x3"/>
   <p:notesSz cx="6858000" cy="9144000"/>
@@ -508,7 +509,12 @@
           <a:lstStyle/>
           <a:p>
             <a:r>
-              <a:t>ライフコンパス東京は、結婚・妊娠・出産・子育てといったライフイベントとキャリアを、一つの時間軸の上で考え直せるWebアプリです。</a:t>
+              <a:t>[話者: あかり / 0:00-0:13]</a:t>
+            </a:r>
+          </a:p>
+          <a:p>
+            <a:r>
+              <a:t>浦安ライフのあかりです。エンジニアの夫、りょうと作りました。女性がもっとイキイキできる社会に。その思いで作った、ライフコンパス東京です。</a:t>
             </a:r>
           </a:p>
         </p:txBody>
@@ -578,7 +584,12 @@
           <a:lstStyle/>
           <a:p>
             <a:r>
-              <a:t>家庭もキャリアも全力でがんばりたい女性にとって、世の中には様々な制約があります。東京都の世論調査でも、家庭も仕事も大切にしたいという希望は34%ある一方、現実に叶うのは32%でした。この制約自体は無くせませんが、何が選べるかを知らないまま選択肢を狭めてしまう状況は変えられると考えました。</a:t>
+              <a:t>[話者: あかり / 0:13-0:39]</a:t>
+            </a:r>
+          </a:p>
+          <a:p>
+            <a:r>
+              <a:t>家庭もキャリアもがんばりたい女性は、日々悩んでいます。ひとつは、周りからの見られ方。育児は女性が向いていると考える人が68パーセント、男性は7パーセント。企業は「管理職を望む女性が少ない」と言う。でも本人の悩みは「家庭責任が重いイメージ」。諦めているのではないでしょうか。</a:t>
             </a:r>
           </a:p>
         </p:txBody>
@@ -648,7 +659,12 @@
           <a:lstStyle/>
           <a:p>
             <a:r>
-              <a:t>東京都の子育て支援制度は7,812件もあり、自分で読み切れる量ではありません。育休は子が2歳になるまで延長できる、産後パパ育休は8週間以内に4週間まで取れるなど、日本・東京都の制度上の上限を、実施主体と出典付きでタイムラインに表示します。平均値や他人と比べた遅れは表示しません。見せるのは『あなたが使える権利はどこまでか』という選べる余地だけです。</a:t>
+              <a:t>[話者: あかり / 0:39-0:56]</a:t>
+            </a:r>
+          </a:p>
+          <a:p>
+            <a:r>
+              <a:t>もうひとつは、使える制度を知らないこと。産前産後休暇を知らない人は6パーセント。でも出産障害休暇は、47パーセントが「職場にあるか分からない」。知らない制度は、選択肢に入りません。</a:t>
             </a:r>
           </a:p>
         </p:txBody>
@@ -718,13 +734,12 @@
           <a:lstStyle/>
           <a:p>
             <a:r>
-              <a:t>こちらが公開デモです。予定を動かすと、つながりのあるイベントも一緒に動きます。対話型AIに話しかけると、確認済みの制度情報だけを根拠に答えます。一度決めて終わりではなく、状況が変わるたびに何度でも軽やかに描き直せることを大切にしています。</a:t>
-            </a:r>
-          </a:p>
-          <a:p/>
-          <a:p>
-            <a:r>
-              <a:t>[登壇メモ] 対話型AI（Gemini Function Calling）の実際の応答画面は、未サインイン状態では取得できなかった（送信にGoogleサインインが必要なため）。登壇時は実機でサインインして見せるか、口頭説明にとどめる。</a:t>
+              <a:t>[話者: りょう / 0:56-1:14 ※ここから交代]</a:t>
+            </a:r>
+          </a:p>
+          <a:p>
+            <a:r>
+              <a:t>ここからは実装です。都の子育て支援制度は7,812件。読み切れる量ではありません。そこで、育休は子が2歳まで、といった国と都の制度上の上限だけを、実施主体と出典リンク付きで表示しました。</a:t>
             </a:r>
           </a:p>
         </p:txBody>
@@ -794,7 +809,18 @@
           <a:lstStyle/>
           <a:p>
             <a:r>
-              <a:t>今のところ、この画面はログインせずに誰でも触れます。まずは自分のプランを一緒に見て話すきっかけとして使ってほしいと考えています。将来は、これを男性自身が体験するプログラムにも発展させ、女性が抱える制約の多さを、当事者として実感してもらう場にしたいと考えています。</a:t>
+              <a:t>[話者: りょう / 1:14-1:31]</a:t>
+            </a:r>
+          </a:p>
+          <a:p>
+            <a:r>
+              <a:t>結婚、出産、転職の予定を、同じ時間軸に自由に置けます。ひとつ動かすと、つながるイベントも一緒に動く。AIも、確認済みの制度情報だけを根拠に答えます。何度でも描き直せます。</a:t>
+            </a:r>
+          </a:p>
+          <a:p/>
+          <a:p>
+            <a:r>
+              <a:t>[登壇メモ] 収録ではライブデモ（アプリ画面のリアルタイム操作）は一切できない（事務局「提出資料について」）。動く様子を見せる場合は、事前に収録した無音動画をこのスライドに埋め込み、画面共有オプションの2項目にチェックを入れて共有する。対話型AI（Gemini Function Calling）の応答画面は未サインインでは取得できないため（送信にGoogleサインインが必要）、サインイン状態で録画したものを使う。</a:t>
             </a:r>
           </a:p>
         </p:txBody>
@@ -864,7 +890,18 @@
           <a:lstStyle/>
           <a:p>
             <a:r>
-              <a:t>制度情報はオープンデータと法令から出典付きで取り込んでいます。一人ひとりが実際にどんなライフプランを描き、どこで諦めたかのデータは、都にも国にもまだありません。ここで積み重なるプランが、いずれ東京都や国が女性を支援する施策を増やすきっかけになることを願っています。決めるのはいつも本人です。ライフコンパス東京で、自分らしい人生を描き直せる選択肢を届けます。</a:t>
+              <a:t>[話者: りょう / 1:31-1:46]</a:t>
+            </a:r>
+          </a:p>
+          <a:p>
+            <a:r>
+              <a:t>この画面はログイン不要で、家庭で一緒に見られます。制度を「分からない」と答えた割合は、8項目すべてで男性の方が高い。男性が体験する場にも広げたいと考えています。</a:t>
+            </a:r>
+          </a:p>
+          <a:p/>
+          <a:p>
+            <a:r>
+              <a:t>[質疑用] 男性の育休取得率は61.2%まで上がったが、取得期間は「1か月〜3か月未満」38.6%が最多で、女性の「6か月〜1年未満」30.2%とは差がある。</a:t>
             </a:r>
           </a:p>
         </p:txBody>
@@ -890,6 +927,81 @@
 </file>
 
 <file path=ppt/notesSlides/notesSlide7.xml><?xml version="1.0" encoding="utf-8"?>
+<p:notes xmlns:a="http://schemas.openxmlformats.org/drawingml/2006/main" xmlns:p="http://schemas.openxmlformats.org/presentationml/2006/main" xmlns:r="http://schemas.openxmlformats.org/officeDocument/2006/relationships">
+  <p:cSld>
+    <p:spTree>
+      <p:nvGrpSpPr>
+        <p:cNvPr id="1" name=""/>
+        <p:cNvGrpSpPr/>
+        <p:nvPr/>
+      </p:nvGrpSpPr>
+      <p:grpSpPr>
+        <a:xfrm>
+          <a:off x="0" y="0"/>
+          <a:ext cx="0" cy="0"/>
+          <a:chOff x="0" y="0"/>
+          <a:chExt cx="0" cy="0"/>
+        </a:xfrm>
+      </p:grpSpPr>
+      <p:sp>
+        <p:nvSpPr>
+          <p:cNvPr id="2" name="Slide Image Placeholder 1"/>
+          <p:cNvSpPr>
+            <a:spLocks noGrp="1"/>
+          </p:cNvSpPr>
+          <p:nvPr>
+            <p:ph type="sldImg" idx="2"/>
+          </p:nvPr>
+        </p:nvSpPr>
+        <p:spPr/>
+      </p:sp>
+      <p:sp>
+        <p:nvSpPr>
+          <p:cNvPr id="3" name="Notes Placeholder 2"/>
+          <p:cNvSpPr>
+            <a:spLocks noGrp="1"/>
+          </p:cNvSpPr>
+          <p:nvPr>
+            <p:ph type="body" idx="3" sz="quarter"/>
+          </p:nvPr>
+        </p:nvSpPr>
+        <p:spPr/>
+        <p:txBody>
+          <a:bodyPr/>
+          <a:lstStyle/>
+          <a:p>
+            <a:r>
+              <a:t>[話者: あかり / 1:46-2:00 ※ここで交代して締める]</a:t>
+            </a:r>
+          </a:p>
+          <a:p>
+            <a:r>
+              <a:t>誰がどこで諦めたかのデータは、都にも国にもありません。ここで積み重なるプランが、次の施策につながることを願っています。決めるのは、いつも本人です。</a:t>
+            </a:r>
+          </a:p>
+        </p:txBody>
+      </p:sp>
+      <p:sp>
+        <p:nvSpPr>
+          <p:cNvPr id="4" name="Slide Number Placeholder 3"/>
+          <p:cNvSpPr>
+            <a:spLocks noGrp="1"/>
+          </p:cNvSpPr>
+          <p:nvPr>
+            <p:ph type="sldNum" idx="5" sz="quarter"/>
+          </p:nvPr>
+        </p:nvSpPr>
+        <p:spPr/>
+      </p:sp>
+    </p:spTree>
+  </p:cSld>
+  <p:clrMapOvr>
+    <a:masterClrMapping/>
+  </p:clrMapOvr>
+</p:notes>
+</file>
+
+<file path=ppt/notesSlides/notesSlide8.xml><?xml version="1.0" encoding="utf-8"?>
 <p:notes xmlns:a="http://schemas.openxmlformats.org/drawingml/2006/main" xmlns:p="http://schemas.openxmlformats.org/presentationml/2006/main" xmlns:r="http://schemas.openxmlformats.org/officeDocument/2006/relationships">
   <p:cSld>
     <p:spTree>
@@ -4067,7 +4179,7 @@
                 <a:latin typeface="Hiragino Sans"/>
                 <a:ea typeface="Hiragino Sans"/>
               </a:rPr>
-              <a:t>制度を知って、自分の人生を自分で描く</a:t>
+              <a:t>自分の人生を、自分で描き直す</a:t>
             </a:r>
           </a:p>
         </p:txBody>
@@ -4143,7 +4255,148 @@
       </p:pic>
       <p:sp>
         <p:nvSpPr>
-          <p:cNvPr id="7" name="TextBox 6"/>
+          <p:cNvPr id="7" name="Rectangle 6"/>
+          <p:cNvSpPr/>
+          <p:nvPr/>
+        </p:nvSpPr>
+        <p:spPr>
+          <a:xfrm>
+            <a:off x="640080" y="3246120"/>
+            <a:ext cx="5394960" cy="1508760"/>
+          </a:xfrm>
+          <a:prstGeom prst="rect">
+            <a:avLst/>
+          </a:prstGeom>
+          <a:solidFill>
+            <a:srgbClr val="F2F4F7"/>
+          </a:solidFill>
+          <a:ln>
+            <a:noFill/>
+          </a:ln>
+          <a:effectLst/>
+        </p:spPr>
+        <p:style>
+          <a:lnRef idx="1">
+            <a:schemeClr val="accent1"/>
+          </a:lnRef>
+          <a:fillRef idx="3">
+            <a:schemeClr val="accent1"/>
+          </a:fillRef>
+          <a:effectRef idx="2">
+            <a:schemeClr val="accent1"/>
+          </a:effectRef>
+          <a:fontRef idx="minor">
+            <a:schemeClr val="lt1"/>
+          </a:fontRef>
+        </p:style>
+        <p:txBody>
+          <a:bodyPr rtlCol="0" anchor="ctr"/>
+          <a:lstStyle/>
+          <a:p>
+            <a:pPr algn="ctr"/>
+          </a:p>
+        </p:txBody>
+      </p:sp>
+      <p:sp>
+        <p:nvSpPr>
+          <p:cNvPr id="8" name="TextBox 7"/>
+          <p:cNvSpPr txBox="1"/>
+          <p:nvPr/>
+        </p:nvSpPr>
+        <p:spPr>
+          <a:xfrm>
+            <a:off x="868680" y="3383280"/>
+            <a:ext cx="4937760" cy="365760"/>
+          </a:xfrm>
+          <a:prstGeom prst="rect">
+            <a:avLst/>
+          </a:prstGeom>
+          <a:noFill/>
+        </p:spPr>
+        <p:txBody>
+          <a:bodyPr wrap="square" anchor="t">
+            <a:spAutoFit/>
+          </a:bodyPr>
+          <a:lstStyle/>
+          <a:p>
+            <a:pPr algn="l">
+              <a:lnSpc>
+                <a:spcPct val="125000"/>
+              </a:lnSpc>
+            </a:pPr>
+            <a:r>
+              <a:rPr sz="1400" b="1">
+                <a:solidFill>
+                  <a:srgbClr val="1E3A5F"/>
+                </a:solidFill>
+                <a:latin typeface="Hiragino Sans"/>
+                <a:ea typeface="Hiragino Sans"/>
+              </a:rPr>
+              <a:t>チーム 浦安ライフ（2名）</a:t>
+            </a:r>
+          </a:p>
+        </p:txBody>
+      </p:sp>
+      <p:sp>
+        <p:nvSpPr>
+          <p:cNvPr id="9" name="TextBox 8"/>
+          <p:cNvSpPr txBox="1"/>
+          <p:nvPr/>
+        </p:nvSpPr>
+        <p:spPr>
+          <a:xfrm>
+            <a:off x="868680" y="3749039"/>
+            <a:ext cx="4937760" cy="914400"/>
+          </a:xfrm>
+          <a:prstGeom prst="rect">
+            <a:avLst/>
+          </a:prstGeom>
+          <a:noFill/>
+        </p:spPr>
+        <p:txBody>
+          <a:bodyPr wrap="square" anchor="t">
+            <a:spAutoFit/>
+          </a:bodyPr>
+          <a:lstStyle/>
+          <a:p>
+            <a:pPr algn="l">
+              <a:lnSpc>
+                <a:spcPct val="135000"/>
+              </a:lnSpc>
+            </a:pPr>
+            <a:r>
+              <a:rPr sz="1200" b="0">
+                <a:solidFill>
+                  <a:srgbClr val="20242B"/>
+                </a:solidFill>
+                <a:latin typeface="Hiragino Sans"/>
+                <a:ea typeface="Hiragino Sans"/>
+              </a:rPr>
+              <a:t>あかり（プロダクトオーナー・マーケター）／りょう（エンジニア）</a:t>
+            </a:r>
+          </a:p>
+          <a:p>
+            <a:pPr algn="l">
+              <a:lnSpc>
+                <a:spcPct val="135000"/>
+              </a:lnSpc>
+            </a:pPr>
+            <a:r>
+              <a:rPr sz="1200" b="0">
+                <a:solidFill>
+                  <a:srgbClr val="20242B"/>
+                </a:solidFill>
+                <a:latin typeface="Hiragino Sans"/>
+                <a:ea typeface="Hiragino Sans"/>
+              </a:rPr>
+              <a:t>浦安在住・東京で働く夫婦。「女性がもっとイキイキできる社会に」という思いから作りました。</a:t>
+            </a:r>
+          </a:p>
+        </p:txBody>
+      </p:sp>
+      <p:sp>
+        <p:nvSpPr>
+          <p:cNvPr id="10" name="TextBox 9"/>
           <p:cNvSpPr txBox="1"/>
           <p:nvPr/>
         </p:nvSpPr>
@@ -4183,7 +4436,7 @@
       </p:sp>
       <p:sp>
         <p:nvSpPr>
-          <p:cNvPr id="8" name="TextBox 7"/>
+          <p:cNvPr id="11" name="TextBox 10"/>
           <p:cNvSpPr txBox="1"/>
           <p:nvPr/>
         </p:nvSpPr>
@@ -4275,14 +4528,14 @@
               </a:lnSpc>
             </a:pPr>
             <a:r>
-              <a:rPr sz="3600" b="1">
+              <a:rPr sz="3200" b="1">
                 <a:solidFill>
                   <a:srgbClr val="142842"/>
                 </a:solidFill>
                 <a:latin typeface="Hiragino Sans"/>
                 <a:ea typeface="Hiragino Sans"/>
               </a:rPr>
-              <a:t>家庭もキャリアも、全力でがんばりたい</a:t>
+              <a:t>「女性は家庭の方が向いている」と言われる</a:t>
             </a:r>
           </a:p>
         </p:txBody>
@@ -4295,8 +4548,48 @@
         </p:nvSpPr>
         <p:spPr>
           <a:xfrm>
-            <a:off x="1645920" y="2011680"/>
-            <a:ext cx="3291840" cy="1463040"/>
+            <a:off x="640080" y="1188720"/>
+            <a:ext cx="10515600" cy="365760"/>
+          </a:xfrm>
+          <a:prstGeom prst="rect">
+            <a:avLst/>
+          </a:prstGeom>
+          <a:noFill/>
+        </p:spPr>
+        <p:txBody>
+          <a:bodyPr wrap="square" anchor="t">
+            <a:spAutoFit/>
+          </a:bodyPr>
+          <a:lstStyle/>
+          <a:p>
+            <a:pPr algn="l">
+              <a:lnSpc>
+                <a:spcPct val="125000"/>
+              </a:lnSpc>
+            </a:pPr>
+            <a:r>
+              <a:rPr sz="1600" b="0">
+                <a:solidFill>
+                  <a:srgbClr val="565B62"/>
+                </a:solidFill>
+                <a:latin typeface="Hiragino Sans"/>
+                <a:ea typeface="Hiragino Sans"/>
+              </a:rPr>
+              <a:t>「育児は◯◯の方が向いている」と思う人の割合</a:t>
+            </a:r>
+          </a:p>
+        </p:txBody>
+      </p:sp>
+      <p:sp>
+        <p:nvSpPr>
+          <p:cNvPr id="4" name="TextBox 3"/>
+          <p:cNvSpPr txBox="1"/>
+          <p:nvPr/>
+        </p:nvSpPr>
+        <p:spPr>
+          <a:xfrm>
+            <a:off x="822960" y="1737360"/>
+            <a:ext cx="4937760" cy="457200"/>
           </a:xfrm>
           <a:prstGeom prst="rect">
             <a:avLst/>
@@ -4315,16 +4608,39 @@
               </a:lnSpc>
             </a:pPr>
             <a:r>
-              <a:rPr sz="4800" b="1">
-                <a:solidFill>
-                  <a:srgbClr val="1E3A5F"/>
+              <a:rPr sz="2000" b="1">
+                <a:solidFill>
+                  <a:srgbClr val="C2708C"/>
                 </a:solidFill>
                 <a:latin typeface="Hiragino Sans"/>
                 <a:ea typeface="Hiragino Sans"/>
               </a:rPr>
-              <a:t>希望</a:t>
-            </a:r>
-          </a:p>
+              <a:t>育児は女性の方が向いている</a:t>
+            </a:r>
+          </a:p>
+        </p:txBody>
+      </p:sp>
+      <p:sp>
+        <p:nvSpPr>
+          <p:cNvPr id="5" name="TextBox 4"/>
+          <p:cNvSpPr txBox="1"/>
+          <p:nvPr/>
+        </p:nvSpPr>
+        <p:spPr>
+          <a:xfrm>
+            <a:off x="822960" y="2240280"/>
+            <a:ext cx="4937760" cy="1097280"/>
+          </a:xfrm>
+          <a:prstGeom prst="rect">
+            <a:avLst/>
+          </a:prstGeom>
+          <a:noFill/>
+        </p:spPr>
+        <p:txBody>
+          <a:bodyPr wrap="square" anchor="t">
+            <a:spAutoFit/>
+          </a:bodyPr>
+          <a:lstStyle/>
           <a:p>
             <a:pPr algn="ctr">
               <a:lnSpc>
@@ -4332,28 +4648,28 @@
               </a:lnSpc>
             </a:pPr>
             <a:r>
-              <a:rPr sz="4800" b="1">
-                <a:solidFill>
-                  <a:srgbClr val="1E3A5F"/>
+              <a:rPr sz="6000" b="1">
+                <a:solidFill>
+                  <a:srgbClr val="C2708C"/>
                 </a:solidFill>
                 <a:latin typeface="Hiragino Sans"/>
                 <a:ea typeface="Hiragino Sans"/>
               </a:rPr>
-              <a:t>34%</a:t>
-            </a:r>
-          </a:p>
-        </p:txBody>
-      </p:sp>
-      <p:sp>
-        <p:nvSpPr>
-          <p:cNvPr id="4" name="TextBox 3"/>
+              <a:t>68%</a:t>
+            </a:r>
+          </a:p>
+        </p:txBody>
+      </p:sp>
+      <p:sp>
+        <p:nvSpPr>
+          <p:cNvPr id="6" name="TextBox 5"/>
           <p:cNvSpPr txBox="1"/>
           <p:nvPr/>
         </p:nvSpPr>
         <p:spPr>
           <a:xfrm>
-            <a:off x="4937760" y="2514600"/>
-            <a:ext cx="2286000" cy="548640"/>
+            <a:off x="5806440" y="2514600"/>
+            <a:ext cx="640080" cy="548640"/>
           </a:xfrm>
           <a:prstGeom prst="rect">
             <a:avLst/>
@@ -4372,7 +4688,7 @@
               </a:lnSpc>
             </a:pPr>
             <a:r>
-              <a:rPr sz="3600" b="0">
+              <a:rPr sz="3200" b="0">
                 <a:solidFill>
                   <a:srgbClr val="565B62"/>
                 </a:solidFill>
@@ -4386,14 +4702,14 @@
       </p:sp>
       <p:sp>
         <p:nvSpPr>
-          <p:cNvPr id="5" name="TextBox 4"/>
+          <p:cNvPr id="7" name="TextBox 6"/>
           <p:cNvSpPr txBox="1"/>
           <p:nvPr/>
         </p:nvSpPr>
         <p:spPr>
           <a:xfrm>
-            <a:off x="7223760" y="2011680"/>
-            <a:ext cx="3291840" cy="1463040"/>
+            <a:off x="6446520" y="1737360"/>
+            <a:ext cx="4937760" cy="457200"/>
           </a:xfrm>
           <a:prstGeom prst="rect">
             <a:avLst/>
@@ -4412,16 +4728,39 @@
               </a:lnSpc>
             </a:pPr>
             <a:r>
-              <a:rPr sz="4800" b="1">
-                <a:solidFill>
-                  <a:srgbClr val="C2708C"/>
+              <a:rPr sz="2000" b="1">
+                <a:solidFill>
+                  <a:srgbClr val="1E3A5F"/>
                 </a:solidFill>
                 <a:latin typeface="Hiragino Sans"/>
                 <a:ea typeface="Hiragino Sans"/>
               </a:rPr>
-              <a:t>現実</a:t>
-            </a:r>
-          </a:p>
+              <a:t>育児は男性の方が向いている</a:t>
+            </a:r>
+          </a:p>
+        </p:txBody>
+      </p:sp>
+      <p:sp>
+        <p:nvSpPr>
+          <p:cNvPr id="8" name="TextBox 7"/>
+          <p:cNvSpPr txBox="1"/>
+          <p:nvPr/>
+        </p:nvSpPr>
+        <p:spPr>
+          <a:xfrm>
+            <a:off x="6446520" y="2240280"/>
+            <a:ext cx="4937760" cy="1097280"/>
+          </a:xfrm>
+          <a:prstGeom prst="rect">
+            <a:avLst/>
+          </a:prstGeom>
+          <a:noFill/>
+        </p:spPr>
+        <p:txBody>
+          <a:bodyPr wrap="square" anchor="t">
+            <a:spAutoFit/>
+          </a:bodyPr>
+          <a:lstStyle/>
           <a:p>
             <a:pPr algn="ctr">
               <a:lnSpc>
@@ -4429,28 +4768,28 @@
               </a:lnSpc>
             </a:pPr>
             <a:r>
-              <a:rPr sz="4800" b="1">
-                <a:solidFill>
-                  <a:srgbClr val="C2708C"/>
+              <a:rPr sz="6000" b="1">
+                <a:solidFill>
+                  <a:srgbClr val="1E3A5F"/>
                 </a:solidFill>
                 <a:latin typeface="Hiragino Sans"/>
                 <a:ea typeface="Hiragino Sans"/>
               </a:rPr>
-              <a:t>32%</a:t>
-            </a:r>
-          </a:p>
-        </p:txBody>
-      </p:sp>
-      <p:sp>
-        <p:nvSpPr>
-          <p:cNvPr id="6" name="TextBox 5"/>
+              <a:t>7%</a:t>
+            </a:r>
+          </a:p>
+        </p:txBody>
+      </p:sp>
+      <p:sp>
+        <p:nvSpPr>
+          <p:cNvPr id="9" name="TextBox 8"/>
           <p:cNvSpPr txBox="1"/>
           <p:nvPr/>
         </p:nvSpPr>
         <p:spPr>
           <a:xfrm>
-            <a:off x="640080" y="3749039"/>
-            <a:ext cx="10515600" cy="1188720"/>
+            <a:off x="640080" y="3657600"/>
+            <a:ext cx="10515600" cy="548640"/>
           </a:xfrm>
           <a:prstGeom prst="rect">
             <a:avLst/>
@@ -4463,61 +4802,84 @@
           </a:bodyPr>
           <a:lstStyle/>
           <a:p>
-            <a:pPr algn="l">
+            <a:pPr algn="ctr">
+              <a:lnSpc>
+                <a:spcPct val="125000"/>
+              </a:lnSpc>
+            </a:pPr>
+            <a:r>
+              <a:rPr sz="2400" b="1">
+                <a:solidFill>
+                  <a:srgbClr val="142842"/>
+                </a:solidFill>
+                <a:latin typeface="Hiragino Sans"/>
+                <a:ea typeface="Hiragino Sans"/>
+              </a:rPr>
+              <a:t>望んでいないのではなく、諦めざるを得ないのではないか。</a:t>
+            </a:r>
+          </a:p>
+        </p:txBody>
+      </p:sp>
+      <p:sp>
+        <p:nvSpPr>
+          <p:cNvPr id="10" name="TextBox 9"/>
+          <p:cNvSpPr txBox="1"/>
+          <p:nvPr/>
+        </p:nvSpPr>
+        <p:spPr>
+          <a:xfrm>
+            <a:off x="640080" y="4343400"/>
+            <a:ext cx="10515600" cy="1097280"/>
+          </a:xfrm>
+          <a:prstGeom prst="rect">
+            <a:avLst/>
+          </a:prstGeom>
+          <a:noFill/>
+        </p:spPr>
+        <p:txBody>
+          <a:bodyPr wrap="square" anchor="t">
+            <a:spAutoFit/>
+          </a:bodyPr>
+          <a:lstStyle/>
+          <a:p>
+            <a:pPr algn="ctr">
               <a:lnSpc>
                 <a:spcPct val="140000"/>
               </a:lnSpc>
             </a:pPr>
             <a:r>
-              <a:rPr sz="2000" b="0">
+              <a:rPr sz="1700" b="0">
                 <a:solidFill>
                   <a:srgbClr val="20242B"/>
                 </a:solidFill>
                 <a:latin typeface="Hiragino Sans"/>
                 <a:ea typeface="Hiragino Sans"/>
               </a:rPr>
-              <a:t>仕事・家庭生活・個人の生活すべてを大切にしたいという希望は34%ある一方、</a:t>
-            </a:r>
-          </a:p>
-          <a:p>
-            <a:pPr algn="l">
+              <a:t>企業が挙げる課題1位は「管理職を希望する女性が少ない」46.4%。</a:t>
+            </a:r>
+          </a:p>
+          <a:p>
+            <a:pPr algn="ctr">
               <a:lnSpc>
                 <a:spcPct val="140000"/>
               </a:lnSpc>
             </a:pPr>
             <a:r>
-              <a:rPr sz="2000" b="0">
+              <a:rPr sz="1700" b="0">
                 <a:solidFill>
                   <a:srgbClr val="20242B"/>
                 </a:solidFill>
                 <a:latin typeface="Hiragino Sans"/>
                 <a:ea typeface="Hiragino Sans"/>
               </a:rPr>
-              <a:t>現実には仕事を優先している人が32%。制約自体は無くなりません。</a:t>
-            </a:r>
-          </a:p>
-          <a:p>
-            <a:pPr algn="l">
-              <a:lnSpc>
-                <a:spcPct val="140000"/>
-              </a:lnSpc>
-            </a:pPr>
-            <a:r>
-              <a:rPr sz="2000" b="0">
-                <a:solidFill>
-                  <a:srgbClr val="20242B"/>
-                </a:solidFill>
-                <a:latin typeface="Hiragino Sans"/>
-                <a:ea typeface="Hiragino Sans"/>
-              </a:rPr>
-              <a:t>知らずに選択肢を狭めてしまう状況だけは、変えられると考えました。</a:t>
-            </a:r>
-          </a:p>
-        </p:txBody>
-      </p:sp>
-      <p:sp>
-        <p:nvSpPr>
-          <p:cNvPr id="7" name="TextBox 6"/>
+              <a:t>でも本人が挙げる1位は「家庭責任が重いイメージ」69.4%。</a:t>
+            </a:r>
+          </a:p>
+        </p:txBody>
+      </p:sp>
+      <p:sp>
+        <p:nvSpPr>
+          <p:cNvPr id="11" name="TextBox 10"/>
           <p:cNvSpPr txBox="1"/>
           <p:nvPr/>
         </p:nvSpPr>
@@ -4550,14 +4912,14 @@
                 <a:latin typeface="Hiragino Sans"/>
                 <a:ea typeface="Hiragino Sans"/>
               </a:rPr>
-              <a:t>出典: 東京都「男女平等参画に関する世論調査」（令和2年度）／東京都「男女雇用平等参画状況調査」（令和7年度、女性が挙げる課題1位「家庭責任が重いイメージ」69.4%）</a:t>
-            </a:r>
-          </a:p>
-        </p:txBody>
-      </p:sp>
-      <p:sp>
-        <p:nvSpPr>
-          <p:cNvPr id="8" name="TextBox 7"/>
+              <a:t>出典: 東京都「男女平等参画に関する世論調査」（令和7年8月調査, n=1,615。「性別で向いている仕事・向いていない仕事がある」は83%）／東京都「男女雇用平等参画状況調査」（令和7年度、事業所 n=347・従業員女性 n=556）</a:t>
+            </a:r>
+          </a:p>
+        </p:txBody>
+      </p:sp>
+      <p:sp>
+        <p:nvSpPr>
+          <p:cNvPr id="12" name="TextBox 11"/>
           <p:cNvSpPr txBox="1"/>
           <p:nvPr/>
         </p:nvSpPr>
@@ -4649,63 +5011,114 @@
               </a:lnSpc>
             </a:pPr>
             <a:r>
-              <a:rPr sz="3400" b="1">
+              <a:rPr sz="3200" b="1">
                 <a:solidFill>
                   <a:srgbClr val="142842"/>
                 </a:solidFill>
                 <a:latin typeface="Hiragino Sans"/>
                 <a:ea typeface="Hiragino Sans"/>
               </a:rPr>
-              <a:t>使える制度を、出典付きで手渡す</a:t>
-            </a:r>
-          </a:p>
-        </p:txBody>
-      </p:sp>
-      <p:pic>
-        <p:nvPicPr>
-          <p:cNvPr id="3" name="Picture 2" descr="event-detail-childbirth.jpg"/>
-          <p:cNvPicPr>
-            <a:picLocks noChangeAspect="1"/>
-          </p:cNvPicPr>
-          <p:nvPr/>
-        </p:nvPicPr>
-        <p:blipFill>
-          <a:blip r:embed="rId2"/>
-          <a:stretch>
-            <a:fillRect/>
-          </a:stretch>
-        </p:blipFill>
-        <p:spPr>
-          <a:xfrm>
-            <a:off x="640080" y="1371600"/>
-            <a:ext cx="6766560" cy="3867912"/>
-          </a:xfrm>
-          <a:prstGeom prst="rect">
-            <a:avLst/>
-          </a:prstGeom>
-          <a:ln w="12700">
-            <a:solidFill>
-              <a:srgbClr val="D9D0BC"/>
-            </a:solidFill>
-          </a:ln>
-        </p:spPr>
-      </p:pic>
-      <p:sp>
-        <p:nvSpPr>
-          <p:cNvPr id="4" name="Rectangle 3"/>
+              <a:t>もうひとつの悩み。使える制度を、知らない</a:t>
+            </a:r>
+          </a:p>
+        </p:txBody>
+      </p:sp>
+      <p:sp>
+        <p:nvSpPr>
+          <p:cNvPr id="3" name="TextBox 2"/>
+          <p:cNvSpPr txBox="1"/>
+          <p:nvPr/>
+        </p:nvSpPr>
+        <p:spPr>
+          <a:xfrm>
+            <a:off x="640080" y="1143000"/>
+            <a:ext cx="10515600" cy="365760"/>
+          </a:xfrm>
+          <a:prstGeom prst="rect">
+            <a:avLst/>
+          </a:prstGeom>
+          <a:noFill/>
+        </p:spPr>
+        <p:txBody>
+          <a:bodyPr wrap="square" anchor="t">
+            <a:spAutoFit/>
+          </a:bodyPr>
+          <a:lstStyle/>
+          <a:p>
+            <a:pPr algn="l">
+              <a:lnSpc>
+                <a:spcPct val="125000"/>
+              </a:lnSpc>
+            </a:pPr>
+            <a:r>
+              <a:rPr sz="1600" b="0">
+                <a:solidFill>
+                  <a:srgbClr val="565B62"/>
+                </a:solidFill>
+                <a:latin typeface="Hiragino Sans"/>
+                <a:ea typeface="Hiragino Sans"/>
+              </a:rPr>
+              <a:t>自分の職場に制度があるか「わからない」</a:t>
+            </a:r>
+          </a:p>
+        </p:txBody>
+      </p:sp>
+      <p:sp>
+        <p:nvSpPr>
+          <p:cNvPr id="4" name="TextBox 3"/>
+          <p:cNvSpPr txBox="1"/>
+          <p:nvPr/>
+        </p:nvSpPr>
+        <p:spPr>
+          <a:xfrm>
+            <a:off x="640080" y="1764792"/>
+            <a:ext cx="2011680" cy="457200"/>
+          </a:xfrm>
+          <a:prstGeom prst="rect">
+            <a:avLst/>
+          </a:prstGeom>
+          <a:noFill/>
+        </p:spPr>
+        <p:txBody>
+          <a:bodyPr wrap="square" anchor="t">
+            <a:spAutoFit/>
+          </a:bodyPr>
+          <a:lstStyle/>
+          <a:p>
+            <a:pPr algn="l">
+              <a:lnSpc>
+                <a:spcPct val="125000"/>
+              </a:lnSpc>
+            </a:pPr>
+            <a:r>
+              <a:rPr sz="1600" b="0">
+                <a:solidFill>
+                  <a:srgbClr val="20242B"/>
+                </a:solidFill>
+                <a:latin typeface="Hiragino Sans"/>
+                <a:ea typeface="Hiragino Sans"/>
+              </a:rPr>
+              <a:t>産前産後休暇</a:t>
+            </a:r>
+          </a:p>
+        </p:txBody>
+      </p:sp>
+      <p:sp>
+        <p:nvSpPr>
+          <p:cNvPr id="5" name="Rectangle 4"/>
           <p:cNvSpPr/>
           <p:nvPr/>
         </p:nvSpPr>
         <p:spPr>
           <a:xfrm>
-            <a:off x="7772400" y="1463040"/>
-            <a:ext cx="3657600" cy="777240"/>
+            <a:off x="2834640" y="1691640"/>
+            <a:ext cx="680313" cy="457200"/>
           </a:xfrm>
           <a:prstGeom prst="rect">
             <a:avLst/>
           </a:prstGeom>
           <a:solidFill>
-            <a:srgbClr val="F2F4F7"/>
+            <a:srgbClr val="1E3A5F"/>
           </a:solidFill>
           <a:ln>
             <a:noFill/>
@@ -4736,14 +5149,14 @@
       </p:sp>
       <p:sp>
         <p:nvSpPr>
-          <p:cNvPr id="5" name="TextBox 4"/>
+          <p:cNvPr id="6" name="TextBox 5"/>
           <p:cNvSpPr txBox="1"/>
           <p:nvPr/>
         </p:nvSpPr>
         <p:spPr>
           <a:xfrm>
-            <a:off x="7955279" y="1627632"/>
-            <a:ext cx="3291840" cy="457200"/>
+            <a:off x="3652113" y="1719072"/>
+            <a:ext cx="1371600" cy="457200"/>
           </a:xfrm>
           <a:prstGeom prst="rect">
             <a:avLst/>
@@ -4769,27 +5182,67 @@
                 <a:latin typeface="Hiragino Sans"/>
                 <a:ea typeface="Hiragino Sans"/>
               </a:rPr>
-              <a:t>01  同じ時間軸</a:t>
-            </a:r>
-          </a:p>
-        </p:txBody>
-      </p:sp>
-      <p:sp>
-        <p:nvSpPr>
-          <p:cNvPr id="6" name="Rectangle 5"/>
+              <a:t>6.0%</a:t>
+            </a:r>
+          </a:p>
+        </p:txBody>
+      </p:sp>
+      <p:sp>
+        <p:nvSpPr>
+          <p:cNvPr id="7" name="TextBox 6"/>
+          <p:cNvSpPr txBox="1"/>
+          <p:nvPr/>
+        </p:nvSpPr>
+        <p:spPr>
+          <a:xfrm>
+            <a:off x="640080" y="2542032"/>
+            <a:ext cx="2011680" cy="457200"/>
+          </a:xfrm>
+          <a:prstGeom prst="rect">
+            <a:avLst/>
+          </a:prstGeom>
+          <a:noFill/>
+        </p:spPr>
+        <p:txBody>
+          <a:bodyPr wrap="square" anchor="t">
+            <a:spAutoFit/>
+          </a:bodyPr>
+          <a:lstStyle/>
+          <a:p>
+            <a:pPr algn="l">
+              <a:lnSpc>
+                <a:spcPct val="125000"/>
+              </a:lnSpc>
+            </a:pPr>
+            <a:r>
+              <a:rPr sz="1600" b="0">
+                <a:solidFill>
+                  <a:srgbClr val="20242B"/>
+                </a:solidFill>
+                <a:latin typeface="Hiragino Sans"/>
+                <a:ea typeface="Hiragino Sans"/>
+              </a:rPr>
+              <a:t>通院休暇制度</a:t>
+            </a:r>
+          </a:p>
+        </p:txBody>
+      </p:sp>
+      <p:sp>
+        <p:nvSpPr>
+          <p:cNvPr id="8" name="Rectangle 7"/>
           <p:cNvSpPr/>
           <p:nvPr/>
         </p:nvSpPr>
         <p:spPr>
           <a:xfrm>
-            <a:off x="7772400" y="2514600"/>
-            <a:ext cx="3657600" cy="777240"/>
+            <a:off x="2834640" y="2468880"/>
+            <a:ext cx="3843771" cy="457200"/>
           </a:xfrm>
           <a:prstGeom prst="rect">
             <a:avLst/>
           </a:prstGeom>
           <a:solidFill>
-            <a:srgbClr val="F2F4F7"/>
+            <a:srgbClr val="1E3A5F"/>
           </a:solidFill>
           <a:ln>
             <a:noFill/>
@@ -4820,14 +5273,14 @@
       </p:sp>
       <p:sp>
         <p:nvSpPr>
-          <p:cNvPr id="7" name="TextBox 6"/>
+          <p:cNvPr id="9" name="TextBox 8"/>
           <p:cNvSpPr txBox="1"/>
           <p:nvPr/>
         </p:nvSpPr>
         <p:spPr>
           <a:xfrm>
-            <a:off x="7955279" y="2679192"/>
-            <a:ext cx="3291840" cy="457200"/>
+            <a:off x="6815571" y="2496312"/>
+            <a:ext cx="1371600" cy="457200"/>
           </a:xfrm>
           <a:prstGeom prst="rect">
             <a:avLst/>
@@ -4853,27 +5306,67 @@
                 <a:latin typeface="Hiragino Sans"/>
                 <a:ea typeface="Hiragino Sans"/>
               </a:rPr>
-              <a:t>02  出典付きの事実</a:t>
-            </a:r>
-          </a:p>
-        </p:txBody>
-      </p:sp>
-      <p:sp>
-        <p:nvSpPr>
-          <p:cNvPr id="8" name="Rectangle 7"/>
+              <a:t>33.9%</a:t>
+            </a:r>
+          </a:p>
+        </p:txBody>
+      </p:sp>
+      <p:sp>
+        <p:nvSpPr>
+          <p:cNvPr id="10" name="TextBox 9"/>
+          <p:cNvSpPr txBox="1"/>
+          <p:nvPr/>
+        </p:nvSpPr>
+        <p:spPr>
+          <a:xfrm>
+            <a:off x="640080" y="3319272"/>
+            <a:ext cx="2011680" cy="457200"/>
+          </a:xfrm>
+          <a:prstGeom prst="rect">
+            <a:avLst/>
+          </a:prstGeom>
+          <a:noFill/>
+        </p:spPr>
+        <p:txBody>
+          <a:bodyPr wrap="square" anchor="t">
+            <a:spAutoFit/>
+          </a:bodyPr>
+          <a:lstStyle/>
+          <a:p>
+            <a:pPr algn="l">
+              <a:lnSpc>
+                <a:spcPct val="125000"/>
+              </a:lnSpc>
+            </a:pPr>
+            <a:r>
+              <a:rPr sz="1600" b="0">
+                <a:solidFill>
+                  <a:srgbClr val="20242B"/>
+                </a:solidFill>
+                <a:latin typeface="Hiragino Sans"/>
+                <a:ea typeface="Hiragino Sans"/>
+              </a:rPr>
+              <a:t>妊娠障害休暇</a:t>
+            </a:r>
+          </a:p>
+        </p:txBody>
+      </p:sp>
+      <p:sp>
+        <p:nvSpPr>
+          <p:cNvPr id="11" name="Rectangle 10"/>
           <p:cNvSpPr/>
           <p:nvPr/>
         </p:nvSpPr>
         <p:spPr>
           <a:xfrm>
-            <a:off x="7772400" y="3566160"/>
-            <a:ext cx="3657600" cy="777240"/>
+            <a:off x="2834640" y="3246120"/>
+            <a:ext cx="4852903" cy="457200"/>
           </a:xfrm>
           <a:prstGeom prst="rect">
             <a:avLst/>
           </a:prstGeom>
           <a:solidFill>
-            <a:srgbClr val="F2F4F7"/>
+            <a:srgbClr val="1E3A5F"/>
           </a:solidFill>
           <a:ln>
             <a:noFill/>
@@ -4904,14 +5397,14 @@
       </p:sp>
       <p:sp>
         <p:nvSpPr>
-          <p:cNvPr id="9" name="TextBox 8"/>
+          <p:cNvPr id="12" name="TextBox 11"/>
           <p:cNvSpPr txBox="1"/>
           <p:nvPr/>
         </p:nvSpPr>
         <p:spPr>
           <a:xfrm>
-            <a:off x="7955279" y="3730752"/>
-            <a:ext cx="3291840" cy="457200"/>
+            <a:off x="7824703" y="3273552"/>
+            <a:ext cx="1371600" cy="457200"/>
           </a:xfrm>
           <a:prstGeom prst="rect">
             <a:avLst/>
@@ -4937,21 +5430,21 @@
                 <a:latin typeface="Hiragino Sans"/>
                 <a:ea typeface="Hiragino Sans"/>
               </a:rPr>
-              <a:t>03  決めるのは自分</a:t>
-            </a:r>
-          </a:p>
-        </p:txBody>
-      </p:sp>
-      <p:sp>
-        <p:nvSpPr>
-          <p:cNvPr id="10" name="TextBox 9"/>
+              <a:t>42.8%</a:t>
+            </a:r>
+          </a:p>
+        </p:txBody>
+      </p:sp>
+      <p:sp>
+        <p:nvSpPr>
+          <p:cNvPr id="13" name="TextBox 12"/>
           <p:cNvSpPr txBox="1"/>
           <p:nvPr/>
         </p:nvSpPr>
         <p:spPr>
           <a:xfrm>
-            <a:off x="7772400" y="4846320"/>
-            <a:ext cx="3657600" cy="1371600"/>
+            <a:off x="640080" y="4096512"/>
+            <a:ext cx="2011680" cy="457200"/>
           </a:xfrm>
           <a:prstGeom prst="rect">
             <a:avLst/>
@@ -4966,42 +5459,149 @@
           <a:p>
             <a:pPr algn="l">
               <a:lnSpc>
-                <a:spcPct val="130000"/>
+                <a:spcPct val="125000"/>
               </a:lnSpc>
             </a:pPr>
             <a:r>
-              <a:rPr sz="1400" b="0">
-                <a:solidFill>
-                  <a:srgbClr val="565B62"/>
+              <a:rPr sz="1600" b="1">
+                <a:solidFill>
+                  <a:srgbClr val="20242B"/>
                 </a:solidFill>
                 <a:latin typeface="Hiragino Sans"/>
                 <a:ea typeface="Hiragino Sans"/>
               </a:rPr>
-              <a:t>「国の制度」「東京都の制度」を実施主体ごとに明示し、</a:t>
-            </a:r>
-          </a:p>
+              <a:t>出産障害休暇</a:t>
+            </a:r>
+          </a:p>
+        </p:txBody>
+      </p:sp>
+      <p:sp>
+        <p:nvSpPr>
+          <p:cNvPr id="14" name="Rectangle 13"/>
+          <p:cNvSpPr/>
+          <p:nvPr/>
+        </p:nvSpPr>
+        <p:spPr>
+          <a:xfrm>
+            <a:off x="2834640" y="4023360"/>
+            <a:ext cx="5363138" cy="457200"/>
+          </a:xfrm>
+          <a:prstGeom prst="rect">
+            <a:avLst/>
+          </a:prstGeom>
+          <a:solidFill>
+            <a:srgbClr val="C2708C"/>
+          </a:solidFill>
+          <a:ln>
+            <a:noFill/>
+          </a:ln>
+          <a:effectLst/>
+        </p:spPr>
+        <p:style>
+          <a:lnRef idx="1">
+            <a:schemeClr val="accent1"/>
+          </a:lnRef>
+          <a:fillRef idx="3">
+            <a:schemeClr val="accent1"/>
+          </a:fillRef>
+          <a:effectRef idx="2">
+            <a:schemeClr val="accent1"/>
+          </a:effectRef>
+          <a:fontRef idx="minor">
+            <a:schemeClr val="lt1"/>
+          </a:fontRef>
+        </p:style>
+        <p:txBody>
+          <a:bodyPr rtlCol="0" anchor="ctr"/>
+          <a:lstStyle/>
+          <a:p>
+            <a:pPr algn="ctr"/>
+          </a:p>
+        </p:txBody>
+      </p:sp>
+      <p:sp>
+        <p:nvSpPr>
+          <p:cNvPr id="15" name="TextBox 14"/>
+          <p:cNvSpPr txBox="1"/>
+          <p:nvPr/>
+        </p:nvSpPr>
+        <p:spPr>
+          <a:xfrm>
+            <a:off x="8334938" y="4050792"/>
+            <a:ext cx="1371600" cy="457200"/>
+          </a:xfrm>
+          <a:prstGeom prst="rect">
+            <a:avLst/>
+          </a:prstGeom>
+          <a:noFill/>
+        </p:spPr>
+        <p:txBody>
+          <a:bodyPr wrap="square" anchor="t">
+            <a:spAutoFit/>
+          </a:bodyPr>
+          <a:lstStyle/>
           <a:p>
             <a:pPr algn="l">
               <a:lnSpc>
-                <a:spcPct val="130000"/>
+                <a:spcPct val="125000"/>
               </a:lnSpc>
             </a:pPr>
             <a:r>
-              <a:rPr sz="1400" b="0">
-                <a:solidFill>
-                  <a:srgbClr val="565B62"/>
+              <a:rPr sz="1800" b="1">
+                <a:solidFill>
+                  <a:srgbClr val="C2708C"/>
                 </a:solidFill>
                 <a:latin typeface="Hiragino Sans"/>
                 <a:ea typeface="Hiragino Sans"/>
               </a:rPr>
-              <a:t>公式ページへのリンクを常に添える。</a:t>
-            </a:r>
-          </a:p>
-        </p:txBody>
-      </p:sp>
-      <p:sp>
-        <p:nvSpPr>
-          <p:cNvPr id="11" name="TextBox 10"/>
+              <a:t>47.3%</a:t>
+            </a:r>
+          </a:p>
+        </p:txBody>
+      </p:sp>
+      <p:sp>
+        <p:nvSpPr>
+          <p:cNvPr id="16" name="TextBox 15"/>
+          <p:cNvSpPr txBox="1"/>
+          <p:nvPr/>
+        </p:nvSpPr>
+        <p:spPr>
+          <a:xfrm>
+            <a:off x="640080" y="5074920"/>
+            <a:ext cx="10515600" cy="548640"/>
+          </a:xfrm>
+          <a:prstGeom prst="rect">
+            <a:avLst/>
+          </a:prstGeom>
+          <a:noFill/>
+        </p:spPr>
+        <p:txBody>
+          <a:bodyPr wrap="square" anchor="t">
+            <a:spAutoFit/>
+          </a:bodyPr>
+          <a:lstStyle/>
+          <a:p>
+            <a:pPr algn="ctr">
+              <a:lnSpc>
+                <a:spcPct val="125000"/>
+              </a:lnSpc>
+            </a:pPr>
+            <a:r>
+              <a:rPr sz="2400" b="1">
+                <a:solidFill>
+                  <a:srgbClr val="142842"/>
+                </a:solidFill>
+                <a:latin typeface="Hiragino Sans"/>
+                <a:ea typeface="Hiragino Sans"/>
+              </a:rPr>
+              <a:t>知らない制度は、選択肢に入らない。</a:t>
+            </a:r>
+          </a:p>
+        </p:txBody>
+      </p:sp>
+      <p:sp>
+        <p:nvSpPr>
+          <p:cNvPr id="17" name="TextBox 16"/>
           <p:cNvSpPr txBox="1"/>
           <p:nvPr/>
         </p:nvSpPr>
@@ -5034,14 +5634,14 @@
                 <a:latin typeface="Hiragino Sans"/>
                 <a:ea typeface="Hiragino Sans"/>
               </a:rPr>
-              <a:t>出典: 育児・介護休業法／労働基準法／母子保健法（厚生労働省・こども家庭庁）、東京都不妊検査等助成事業（東京都福祉局）。平均値・他人との比較は表示しない。</a:t>
-            </a:r>
-          </a:p>
-        </p:txBody>
-      </p:sp>
-      <p:sp>
-        <p:nvSpPr>
-          <p:cNvPr id="12" name="TextBox 11"/>
+              <a:t>出典: 東京都「男女雇用平等参画状況調査」（令和7年度）従業員調査（n=1,076）。母性保護に関する制度ごとの「わからない」の割合</a:t>
+            </a:r>
+          </a:p>
+        </p:txBody>
+      </p:sp>
+      <p:sp>
+        <p:nvSpPr>
+          <p:cNvPr id="18" name="TextBox 17"/>
           <p:cNvSpPr txBox="1"/>
           <p:nvPr/>
         </p:nvSpPr>
@@ -5133,21 +5733,21 @@
               </a:lnSpc>
             </a:pPr>
             <a:r>
-              <a:rPr sz="3600" b="1">
+              <a:rPr sz="3400" b="1">
                 <a:solidFill>
                   <a:srgbClr val="142842"/>
                 </a:solidFill>
                 <a:latin typeface="Hiragino Sans"/>
                 <a:ea typeface="Hiragino Sans"/>
               </a:rPr>
-              <a:t>何度でも立て直せる</a:t>
+              <a:t>何が選べるかを知って、自分で決める</a:t>
             </a:r>
           </a:p>
         </p:txBody>
       </p:sp>
       <p:pic>
         <p:nvPicPr>
-          <p:cNvPr id="3" name="Picture 2" descr="timeline-overview.jpg"/>
+          <p:cNvPr id="3" name="Picture 2" descr="event-detail-childbirth.jpg"/>
           <p:cNvPicPr>
             <a:picLocks noChangeAspect="1"/>
           </p:cNvPicPr>
@@ -5162,7 +5762,7 @@
         <p:spPr>
           <a:xfrm>
             <a:off x="640080" y="1371600"/>
-            <a:ext cx="4023360" cy="2971800"/>
+            <a:ext cx="6766560" cy="3867912"/>
           </a:xfrm>
           <a:prstGeom prst="rect">
             <a:avLst/>
@@ -5174,131 +5774,60 @@
           </a:ln>
         </p:spPr>
       </p:pic>
-      <p:pic>
-        <p:nvPicPr>
-          <p:cNvPr id="4" name="Picture 3" descr="timeline-mobile.jpg"/>
-          <p:cNvPicPr>
-            <a:picLocks noChangeAspect="1"/>
-          </p:cNvPicPr>
-          <p:nvPr/>
-        </p:nvPicPr>
-        <p:blipFill>
-          <a:blip r:embed="rId3"/>
-          <a:stretch>
-            <a:fillRect/>
-          </a:stretch>
-        </p:blipFill>
-        <p:spPr>
-          <a:xfrm>
-            <a:off x="4846320" y="1371600"/>
-            <a:ext cx="1371600" cy="2971800"/>
-          </a:xfrm>
-          <a:prstGeom prst="rect">
-            <a:avLst/>
-          </a:prstGeom>
-          <a:ln w="12700">
-            <a:solidFill>
-              <a:srgbClr val="D9D0BC"/>
-            </a:solidFill>
+      <p:sp>
+        <p:nvSpPr>
+          <p:cNvPr id="4" name="Rectangle 3"/>
+          <p:cNvSpPr/>
+          <p:nvPr/>
+        </p:nvSpPr>
+        <p:spPr>
+          <a:xfrm>
+            <a:off x="7772400" y="1463040"/>
+            <a:ext cx="3657600" cy="777240"/>
+          </a:xfrm>
+          <a:prstGeom prst="rect">
+            <a:avLst/>
+          </a:prstGeom>
+          <a:solidFill>
+            <a:srgbClr val="F2F4F7"/>
+          </a:solidFill>
+          <a:ln>
+            <a:noFill/>
           </a:ln>
-        </p:spPr>
-      </p:pic>
-      <p:pic>
-        <p:nvPicPr>
-          <p:cNvPr id="5" name="Picture 4" descr="event-detail-childbirth.jpg"/>
-          <p:cNvPicPr>
-            <a:picLocks noChangeAspect="1"/>
-          </p:cNvPicPr>
-          <p:nvPr/>
-        </p:nvPicPr>
-        <p:blipFill>
-          <a:blip r:embed="rId4"/>
-          <a:stretch>
-            <a:fillRect/>
-          </a:stretch>
-        </p:blipFill>
-        <p:spPr>
-          <a:xfrm>
-            <a:off x="6400800" y="1371600"/>
-            <a:ext cx="4846320" cy="2971800"/>
-          </a:xfrm>
-          <a:prstGeom prst="rect">
-            <a:avLst/>
-          </a:prstGeom>
-          <a:ln w="12700">
-            <a:solidFill>
-              <a:srgbClr val="D9D0BC"/>
-            </a:solidFill>
-          </a:ln>
-        </p:spPr>
-      </p:pic>
-      <p:sp>
-        <p:nvSpPr>
-          <p:cNvPr id="6" name="TextBox 5"/>
+          <a:effectLst/>
+        </p:spPr>
+        <p:style>
+          <a:lnRef idx="1">
+            <a:schemeClr val="accent1"/>
+          </a:lnRef>
+          <a:fillRef idx="3">
+            <a:schemeClr val="accent1"/>
+          </a:fillRef>
+          <a:effectRef idx="2">
+            <a:schemeClr val="accent1"/>
+          </a:effectRef>
+          <a:fontRef idx="minor">
+            <a:schemeClr val="lt1"/>
+          </a:fontRef>
+        </p:style>
+        <p:txBody>
+          <a:bodyPr rtlCol="0" anchor="ctr"/>
+          <a:lstStyle/>
+          <a:p>
+            <a:pPr algn="ctr"/>
+          </a:p>
+        </p:txBody>
+      </p:sp>
+      <p:sp>
+        <p:nvSpPr>
+          <p:cNvPr id="5" name="TextBox 4"/>
           <p:cNvSpPr txBox="1"/>
           <p:nvPr/>
         </p:nvSpPr>
         <p:spPr>
           <a:xfrm>
-            <a:off x="640080" y="4572000"/>
-            <a:ext cx="10515600" cy="1188720"/>
-          </a:xfrm>
-          <a:prstGeom prst="rect">
-            <a:avLst/>
-          </a:prstGeom>
-          <a:noFill/>
-        </p:spPr>
-        <p:txBody>
-          <a:bodyPr wrap="square" anchor="t">
-            <a:spAutoFit/>
-          </a:bodyPr>
-          <a:lstStyle/>
-          <a:p>
-            <a:pPr algn="l">
-              <a:lnSpc>
-                <a:spcPct val="140000"/>
-              </a:lnSpc>
-            </a:pPr>
-            <a:r>
-              <a:rPr sz="2000" b="0">
-                <a:solidFill>
-                  <a:srgbClr val="20242B"/>
-                </a:solidFill>
-                <a:latin typeface="Hiragino Sans"/>
-                <a:ea typeface="Hiragino Sans"/>
-              </a:rPr>
-              <a:t>結婚・出産・転職などの予定を自由に置き、必要な制度情報をすぐに確認できます。</a:t>
-            </a:r>
-          </a:p>
-          <a:p>
-            <a:pPr algn="l">
-              <a:lnSpc>
-                <a:spcPct val="140000"/>
-              </a:lnSpc>
-            </a:pPr>
-            <a:r>
-              <a:rPr sz="2000" b="0">
-                <a:solidFill>
-                  <a:srgbClr val="20242B"/>
-                </a:solidFill>
-                <a:latin typeface="Hiragino Sans"/>
-                <a:ea typeface="Hiragino Sans"/>
-              </a:rPr>
-              <a:t>一度決めて終わりではなく、状況が変わるたびに何度でも軽やかに描き直せます。</a:t>
-            </a:r>
-          </a:p>
-        </p:txBody>
-      </p:sp>
-      <p:sp>
-        <p:nvSpPr>
-          <p:cNvPr id="7" name="TextBox 6"/>
-          <p:cNvSpPr txBox="1"/>
-          <p:nvPr/>
-        </p:nvSpPr>
-        <p:spPr>
-          <a:xfrm>
-            <a:off x="640080" y="5989320"/>
-            <a:ext cx="5486400" cy="365760"/>
+            <a:off x="7955279" y="1627632"/>
+            <a:ext cx="3291840" cy="457200"/>
           </a:xfrm>
           <a:prstGeom prst="rect">
             <a:avLst/>
@@ -5317,21 +5846,246 @@
               </a:lnSpc>
             </a:pPr>
             <a:r>
-              <a:rPr sz="1400" b="1">
+              <a:rPr sz="1800" b="1">
                 <a:solidFill>
                   <a:srgbClr val="1E3A5F"/>
                 </a:solidFill>
                 <a:latin typeface="Hiragino Sans"/>
                 <a:ea typeface="Hiragino Sans"/>
               </a:rPr>
-              <a:t>公開デモ: my-career-app-559fd.web.app</a:t>
-            </a:r>
-          </a:p>
-        </p:txBody>
-      </p:sp>
-      <p:sp>
-        <p:nvSpPr>
-          <p:cNvPr id="8" name="TextBox 7"/>
+              <a:t>01  決めるのは自分</a:t>
+            </a:r>
+          </a:p>
+        </p:txBody>
+      </p:sp>
+      <p:sp>
+        <p:nvSpPr>
+          <p:cNvPr id="6" name="Rectangle 5"/>
+          <p:cNvSpPr/>
+          <p:nvPr/>
+        </p:nvSpPr>
+        <p:spPr>
+          <a:xfrm>
+            <a:off x="7772400" y="2514600"/>
+            <a:ext cx="3657600" cy="777240"/>
+          </a:xfrm>
+          <a:prstGeom prst="rect">
+            <a:avLst/>
+          </a:prstGeom>
+          <a:solidFill>
+            <a:srgbClr val="F2F4F7"/>
+          </a:solidFill>
+          <a:ln>
+            <a:noFill/>
+          </a:ln>
+          <a:effectLst/>
+        </p:spPr>
+        <p:style>
+          <a:lnRef idx="1">
+            <a:schemeClr val="accent1"/>
+          </a:lnRef>
+          <a:fillRef idx="3">
+            <a:schemeClr val="accent1"/>
+          </a:fillRef>
+          <a:effectRef idx="2">
+            <a:schemeClr val="accent1"/>
+          </a:effectRef>
+          <a:fontRef idx="minor">
+            <a:schemeClr val="lt1"/>
+          </a:fontRef>
+        </p:style>
+        <p:txBody>
+          <a:bodyPr rtlCol="0" anchor="ctr"/>
+          <a:lstStyle/>
+          <a:p>
+            <a:pPr algn="ctr"/>
+          </a:p>
+        </p:txBody>
+      </p:sp>
+      <p:sp>
+        <p:nvSpPr>
+          <p:cNvPr id="7" name="TextBox 6"/>
+          <p:cNvSpPr txBox="1"/>
+          <p:nvPr/>
+        </p:nvSpPr>
+        <p:spPr>
+          <a:xfrm>
+            <a:off x="7955279" y="2679192"/>
+            <a:ext cx="3291840" cy="457200"/>
+          </a:xfrm>
+          <a:prstGeom prst="rect">
+            <a:avLst/>
+          </a:prstGeom>
+          <a:noFill/>
+        </p:spPr>
+        <p:txBody>
+          <a:bodyPr wrap="square" anchor="t">
+            <a:spAutoFit/>
+          </a:bodyPr>
+          <a:lstStyle/>
+          <a:p>
+            <a:pPr algn="l">
+              <a:lnSpc>
+                <a:spcPct val="125000"/>
+              </a:lnSpc>
+            </a:pPr>
+            <a:r>
+              <a:rPr sz="1800" b="1">
+                <a:solidFill>
+                  <a:srgbClr val="1E3A5F"/>
+                </a:solidFill>
+                <a:latin typeface="Hiragino Sans"/>
+                <a:ea typeface="Hiragino Sans"/>
+              </a:rPr>
+              <a:t>02  同じ時間軸</a:t>
+            </a:r>
+          </a:p>
+        </p:txBody>
+      </p:sp>
+      <p:sp>
+        <p:nvSpPr>
+          <p:cNvPr id="8" name="Rectangle 7"/>
+          <p:cNvSpPr/>
+          <p:nvPr/>
+        </p:nvSpPr>
+        <p:spPr>
+          <a:xfrm>
+            <a:off x="7772400" y="3566160"/>
+            <a:ext cx="3657600" cy="777240"/>
+          </a:xfrm>
+          <a:prstGeom prst="rect">
+            <a:avLst/>
+          </a:prstGeom>
+          <a:solidFill>
+            <a:srgbClr val="F2F4F7"/>
+          </a:solidFill>
+          <a:ln>
+            <a:noFill/>
+          </a:ln>
+          <a:effectLst/>
+        </p:spPr>
+        <p:style>
+          <a:lnRef idx="1">
+            <a:schemeClr val="accent1"/>
+          </a:lnRef>
+          <a:fillRef idx="3">
+            <a:schemeClr val="accent1"/>
+          </a:fillRef>
+          <a:effectRef idx="2">
+            <a:schemeClr val="accent1"/>
+          </a:effectRef>
+          <a:fontRef idx="minor">
+            <a:schemeClr val="lt1"/>
+          </a:fontRef>
+        </p:style>
+        <p:txBody>
+          <a:bodyPr rtlCol="0" anchor="ctr"/>
+          <a:lstStyle/>
+          <a:p>
+            <a:pPr algn="ctr"/>
+          </a:p>
+        </p:txBody>
+      </p:sp>
+      <p:sp>
+        <p:nvSpPr>
+          <p:cNvPr id="9" name="TextBox 8"/>
+          <p:cNvSpPr txBox="1"/>
+          <p:nvPr/>
+        </p:nvSpPr>
+        <p:spPr>
+          <a:xfrm>
+            <a:off x="7955279" y="3730752"/>
+            <a:ext cx="3291840" cy="457200"/>
+          </a:xfrm>
+          <a:prstGeom prst="rect">
+            <a:avLst/>
+          </a:prstGeom>
+          <a:noFill/>
+        </p:spPr>
+        <p:txBody>
+          <a:bodyPr wrap="square" anchor="t">
+            <a:spAutoFit/>
+          </a:bodyPr>
+          <a:lstStyle/>
+          <a:p>
+            <a:pPr algn="l">
+              <a:lnSpc>
+                <a:spcPct val="125000"/>
+              </a:lnSpc>
+            </a:pPr>
+            <a:r>
+              <a:rPr sz="1800" b="1">
+                <a:solidFill>
+                  <a:srgbClr val="1E3A5F"/>
+                </a:solidFill>
+                <a:latin typeface="Hiragino Sans"/>
+                <a:ea typeface="Hiragino Sans"/>
+              </a:rPr>
+              <a:t>03  出典付きの事実</a:t>
+            </a:r>
+          </a:p>
+        </p:txBody>
+      </p:sp>
+      <p:sp>
+        <p:nvSpPr>
+          <p:cNvPr id="10" name="TextBox 9"/>
+          <p:cNvSpPr txBox="1"/>
+          <p:nvPr/>
+        </p:nvSpPr>
+        <p:spPr>
+          <a:xfrm>
+            <a:off x="7772400" y="4846320"/>
+            <a:ext cx="3657600" cy="1371600"/>
+          </a:xfrm>
+          <a:prstGeom prst="rect">
+            <a:avLst/>
+          </a:prstGeom>
+          <a:noFill/>
+        </p:spPr>
+        <p:txBody>
+          <a:bodyPr wrap="square" anchor="t">
+            <a:spAutoFit/>
+          </a:bodyPr>
+          <a:lstStyle/>
+          <a:p>
+            <a:pPr algn="l">
+              <a:lnSpc>
+                <a:spcPct val="130000"/>
+              </a:lnSpc>
+            </a:pPr>
+            <a:r>
+              <a:rPr sz="1400" b="0">
+                <a:solidFill>
+                  <a:srgbClr val="565B62"/>
+                </a:solidFill>
+                <a:latin typeface="Hiragino Sans"/>
+                <a:ea typeface="Hiragino Sans"/>
+              </a:rPr>
+              <a:t>「国の制度」「東京都の制度」を実施主体ごとに明示し、</a:t>
+            </a:r>
+          </a:p>
+          <a:p>
+            <a:pPr algn="l">
+              <a:lnSpc>
+                <a:spcPct val="130000"/>
+              </a:lnSpc>
+            </a:pPr>
+            <a:r>
+              <a:rPr sz="1400" b="0">
+                <a:solidFill>
+                  <a:srgbClr val="565B62"/>
+                </a:solidFill>
+                <a:latin typeface="Hiragino Sans"/>
+                <a:ea typeface="Hiragino Sans"/>
+              </a:rPr>
+              <a:t>公式ページへのリンクを常に添える。</a:t>
+            </a:r>
+          </a:p>
+        </p:txBody>
+      </p:sp>
+      <p:sp>
+        <p:nvSpPr>
+          <p:cNvPr id="11" name="TextBox 10"/>
           <p:cNvSpPr txBox="1"/>
           <p:nvPr/>
         </p:nvSpPr>
@@ -5364,14 +6118,14 @@
                 <a:latin typeface="Hiragino Sans"/>
                 <a:ea typeface="Hiragino Sans"/>
               </a:rPr>
-              <a:t>希望される支援も「新しい休業」より「時間の組み替え」（有給53.7%・フレックス49.4%、東京都「男女雇用平等参画状況調査」令和7年度）</a:t>
-            </a:r>
-          </a:p>
-        </p:txBody>
-      </p:sp>
-      <p:sp>
-        <p:nvSpPr>
-          <p:cNvPr id="9" name="TextBox 8"/>
+              <a:t>出典: 育児・介護休業法／労働基準法／母子保健法（厚生労働省・こども家庭庁）、東京都不妊検査等助成事業（東京都福祉局）。平均値・他人との比較は表示しない。</a:t>
+            </a:r>
+          </a:p>
+        </p:txBody>
+      </p:sp>
+      <p:sp>
+        <p:nvSpPr>
+          <p:cNvPr id="12" name="TextBox 11"/>
           <p:cNvSpPr txBox="1"/>
           <p:nvPr/>
         </p:nvSpPr>
@@ -5463,28 +6217,115 @@
               </a:lnSpc>
             </a:pPr>
             <a:r>
-              <a:rPr sz="3200" b="1">
+              <a:rPr sz="3600" b="1">
                 <a:solidFill>
                   <a:srgbClr val="142842"/>
                 </a:solidFill>
                 <a:latin typeface="Hiragino Sans"/>
                 <a:ea typeface="Hiragino Sans"/>
               </a:rPr>
-              <a:t>一つの画面を、家庭で。男性が体験する</a:t>
-            </a:r>
-          </a:p>
-        </p:txBody>
-      </p:sp>
-      <p:sp>
-        <p:nvSpPr>
-          <p:cNvPr id="3" name="TextBox 2"/>
+              <a:t>何度でも立て直せる</a:t>
+            </a:r>
+          </a:p>
+        </p:txBody>
+      </p:sp>
+      <p:pic>
+        <p:nvPicPr>
+          <p:cNvPr id="3" name="Picture 2" descr="timeline-overview.jpg"/>
+          <p:cNvPicPr>
+            <a:picLocks noChangeAspect="1"/>
+          </p:cNvPicPr>
+          <p:nvPr/>
+        </p:nvPicPr>
+        <p:blipFill>
+          <a:blip r:embed="rId2"/>
+          <a:stretch>
+            <a:fillRect/>
+          </a:stretch>
+        </p:blipFill>
+        <p:spPr>
+          <a:xfrm>
+            <a:off x="640080" y="1371600"/>
+            <a:ext cx="4023360" cy="2971800"/>
+          </a:xfrm>
+          <a:prstGeom prst="rect">
+            <a:avLst/>
+          </a:prstGeom>
+          <a:ln w="12700">
+            <a:solidFill>
+              <a:srgbClr val="D9D0BC"/>
+            </a:solidFill>
+          </a:ln>
+        </p:spPr>
+      </p:pic>
+      <p:pic>
+        <p:nvPicPr>
+          <p:cNvPr id="4" name="Picture 3" descr="timeline-mobile.jpg"/>
+          <p:cNvPicPr>
+            <a:picLocks noChangeAspect="1"/>
+          </p:cNvPicPr>
+          <p:nvPr/>
+        </p:nvPicPr>
+        <p:blipFill>
+          <a:blip r:embed="rId3"/>
+          <a:stretch>
+            <a:fillRect/>
+          </a:stretch>
+        </p:blipFill>
+        <p:spPr>
+          <a:xfrm>
+            <a:off x="4846320" y="1371600"/>
+            <a:ext cx="1371600" cy="2971800"/>
+          </a:xfrm>
+          <a:prstGeom prst="rect">
+            <a:avLst/>
+          </a:prstGeom>
+          <a:ln w="12700">
+            <a:solidFill>
+              <a:srgbClr val="D9D0BC"/>
+            </a:solidFill>
+          </a:ln>
+        </p:spPr>
+      </p:pic>
+      <p:pic>
+        <p:nvPicPr>
+          <p:cNvPr id="5" name="Picture 4" descr="event-detail-childbirth.jpg"/>
+          <p:cNvPicPr>
+            <a:picLocks noChangeAspect="1"/>
+          </p:cNvPicPr>
+          <p:nvPr/>
+        </p:nvPicPr>
+        <p:blipFill>
+          <a:blip r:embed="rId4"/>
+          <a:stretch>
+            <a:fillRect/>
+          </a:stretch>
+        </p:blipFill>
+        <p:spPr>
+          <a:xfrm>
+            <a:off x="6400800" y="1371600"/>
+            <a:ext cx="4846320" cy="2971800"/>
+          </a:xfrm>
+          <a:prstGeom prst="rect">
+            <a:avLst/>
+          </a:prstGeom>
+          <a:ln w="12700">
+            <a:solidFill>
+              <a:srgbClr val="D9D0BC"/>
+            </a:solidFill>
+          </a:ln>
+        </p:spPr>
+      </p:pic>
+      <p:sp>
+        <p:nvSpPr>
+          <p:cNvPr id="6" name="TextBox 5"/>
           <p:cNvSpPr txBox="1"/>
           <p:nvPr/>
         </p:nvSpPr>
         <p:spPr>
           <a:xfrm>
-            <a:off x="640080" y="1463040"/>
-            <a:ext cx="10515600" cy="548640"/>
+            <a:off x="640080" y="4572000"/>
+            <a:ext cx="10515600" cy="1188720"/>
           </a:xfrm>
           <a:prstGeom prst="rect">
             <a:avLst/>
@@ -5497,78 +6338,51 @@
           </a:bodyPr>
           <a:lstStyle/>
           <a:p>
-            <a:pPr algn="ctr">
+            <a:pPr algn="l">
               <a:lnSpc>
-                <a:spcPct val="125000"/>
+                <a:spcPct val="140000"/>
               </a:lnSpc>
             </a:pPr>
             <a:r>
-              <a:rPr sz="2200" b="1">
+              <a:rPr sz="2000" b="0">
                 <a:solidFill>
                   <a:srgbClr val="20242B"/>
                 </a:solidFill>
                 <a:latin typeface="Hiragino Sans"/>
                 <a:ea typeface="Hiragino Sans"/>
               </a:rPr>
-              <a:t>同じ画面を、二人で見る</a:t>
-            </a:r>
-          </a:p>
-        </p:txBody>
-      </p:sp>
-      <p:sp>
-        <p:nvSpPr>
-          <p:cNvPr id="4" name="Rectangle 3"/>
-          <p:cNvSpPr/>
-          <p:nvPr/>
-        </p:nvSpPr>
-        <p:spPr>
-          <a:xfrm>
-            <a:off x="1097280" y="2377440"/>
-            <a:ext cx="4572000" cy="2103120"/>
-          </a:xfrm>
-          <a:prstGeom prst="rect">
-            <a:avLst/>
-          </a:prstGeom>
-          <a:solidFill>
-            <a:srgbClr val="F2F4F7"/>
-          </a:solidFill>
-          <a:ln>
-            <a:noFill/>
-          </a:ln>
-          <a:effectLst/>
-        </p:spPr>
-        <p:style>
-          <a:lnRef idx="1">
-            <a:schemeClr val="accent1"/>
-          </a:lnRef>
-          <a:fillRef idx="3">
-            <a:schemeClr val="accent1"/>
-          </a:fillRef>
-          <a:effectRef idx="2">
-            <a:schemeClr val="accent1"/>
-          </a:effectRef>
-          <a:fontRef idx="minor">
-            <a:schemeClr val="lt1"/>
-          </a:fontRef>
-        </p:style>
-        <p:txBody>
-          <a:bodyPr rtlCol="0" anchor="ctr"/>
-          <a:lstStyle/>
-          <a:p>
-            <a:pPr algn="ctr"/>
-          </a:p>
-        </p:txBody>
-      </p:sp>
-      <p:sp>
-        <p:nvSpPr>
-          <p:cNvPr id="5" name="TextBox 4"/>
+              <a:t>結婚・出産・転職などの予定を自由に置き、必要な制度情報をすぐに確認できます。</a:t>
+            </a:r>
+          </a:p>
+          <a:p>
+            <a:pPr algn="l">
+              <a:lnSpc>
+                <a:spcPct val="140000"/>
+              </a:lnSpc>
+            </a:pPr>
+            <a:r>
+              <a:rPr sz="2000" b="0">
+                <a:solidFill>
+                  <a:srgbClr val="20242B"/>
+                </a:solidFill>
+                <a:latin typeface="Hiragino Sans"/>
+                <a:ea typeface="Hiragino Sans"/>
+              </a:rPr>
+              <a:t>一度決めて終わりではなく、状況が変わるたびに何度でも軽やかに描き直せます。</a:t>
+            </a:r>
+          </a:p>
+        </p:txBody>
+      </p:sp>
+      <p:sp>
+        <p:nvSpPr>
+          <p:cNvPr id="7" name="TextBox 6"/>
           <p:cNvSpPr txBox="1"/>
           <p:nvPr/>
         </p:nvSpPr>
         <p:spPr>
           <a:xfrm>
-            <a:off x="1371600" y="2606040"/>
-            <a:ext cx="4023360" cy="457200"/>
+            <a:off x="640080" y="5989320"/>
+            <a:ext cx="5486400" cy="365760"/>
           </a:xfrm>
           <a:prstGeom prst="rect">
             <a:avLst/>
@@ -5594,195 +6408,14 @@
                 <a:latin typeface="Hiragino Sans"/>
                 <a:ea typeface="Hiragino Sans"/>
               </a:rPr>
-              <a:t>実装済み・ログイン不要</a:t>
-            </a:r>
-          </a:p>
-        </p:txBody>
-      </p:sp>
-      <p:sp>
-        <p:nvSpPr>
-          <p:cNvPr id="6" name="TextBox 5"/>
-          <p:cNvSpPr txBox="1"/>
-          <p:nvPr/>
-        </p:nvSpPr>
-        <p:spPr>
-          <a:xfrm>
-            <a:off x="1371600" y="3063240"/>
-            <a:ext cx="4023360" cy="1188720"/>
-          </a:xfrm>
-          <a:prstGeom prst="rect">
-            <a:avLst/>
-          </a:prstGeom>
-          <a:noFill/>
-        </p:spPr>
-        <p:txBody>
-          <a:bodyPr wrap="square" anchor="t">
-            <a:spAutoFit/>
-          </a:bodyPr>
-          <a:lstStyle/>
-          <a:p>
-            <a:pPr algn="l">
-              <a:lnSpc>
-                <a:spcPct val="125000"/>
-              </a:lnSpc>
-            </a:pPr>
-            <a:r>
-              <a:rPr sz="2600" b="1">
-                <a:solidFill>
-                  <a:srgbClr val="142842"/>
-                </a:solidFill>
-                <a:latin typeface="Hiragino Sans"/>
-                <a:ea typeface="Hiragino Sans"/>
-              </a:rPr>
-              <a:t>自分のプランを描く</a:t>
-            </a:r>
-          </a:p>
-        </p:txBody>
-      </p:sp>
-      <p:sp>
-        <p:nvSpPr>
-          <p:cNvPr id="7" name="Rectangle 6"/>
-          <p:cNvSpPr/>
-          <p:nvPr/>
-        </p:nvSpPr>
-        <p:spPr>
-          <a:xfrm>
-            <a:off x="6492240" y="2377440"/>
-            <a:ext cx="4572000" cy="2103120"/>
-          </a:xfrm>
-          <a:prstGeom prst="rect">
-            <a:avLst/>
-          </a:prstGeom>
-          <a:noFill/>
-          <a:ln w="9525">
-            <a:solidFill>
-              <a:srgbClr val="1E3A5F"/>
-            </a:solidFill>
-          </a:ln>
-          <a:effectLst/>
-        </p:spPr>
-        <p:style>
-          <a:lnRef idx="1">
-            <a:schemeClr val="accent1"/>
-          </a:lnRef>
-          <a:fillRef idx="3">
-            <a:schemeClr val="accent1"/>
-          </a:fillRef>
-          <a:effectRef idx="2">
-            <a:schemeClr val="accent1"/>
-          </a:effectRef>
-          <a:fontRef idx="minor">
-            <a:schemeClr val="lt1"/>
-          </a:fontRef>
-        </p:style>
-        <p:txBody>
-          <a:bodyPr rtlCol="0" anchor="ctr"/>
-          <a:lstStyle/>
-          <a:p>
-            <a:pPr algn="ctr"/>
+              <a:t>公開デモ: my-career-app-559fd.web.app</a:t>
+            </a:r>
           </a:p>
         </p:txBody>
       </p:sp>
       <p:sp>
         <p:nvSpPr>
           <p:cNvPr id="8" name="TextBox 7"/>
-          <p:cNvSpPr txBox="1"/>
-          <p:nvPr/>
-        </p:nvSpPr>
-        <p:spPr>
-          <a:xfrm>
-            <a:off x="6766560" y="2606040"/>
-            <a:ext cx="4023360" cy="457200"/>
-          </a:xfrm>
-          <a:prstGeom prst="rect">
-            <a:avLst/>
-          </a:prstGeom>
-          <a:noFill/>
-        </p:spPr>
-        <p:txBody>
-          <a:bodyPr wrap="square" anchor="t">
-            <a:spAutoFit/>
-          </a:bodyPr>
-          <a:lstStyle/>
-          <a:p>
-            <a:pPr algn="l">
-              <a:lnSpc>
-                <a:spcPct val="125000"/>
-              </a:lnSpc>
-            </a:pPr>
-            <a:r>
-              <a:rPr sz="1400" b="1">
-                <a:solidFill>
-                  <a:srgbClr val="C2708C"/>
-                </a:solidFill>
-                <a:latin typeface="Hiragino Sans"/>
-                <a:ea typeface="Hiragino Sans"/>
-              </a:rPr>
-              <a:t>構想中</a:t>
-            </a:r>
-          </a:p>
-        </p:txBody>
-      </p:sp>
-      <p:sp>
-        <p:nvSpPr>
-          <p:cNvPr id="9" name="TextBox 8"/>
-          <p:cNvSpPr txBox="1"/>
-          <p:nvPr/>
-        </p:nvSpPr>
-        <p:spPr>
-          <a:xfrm>
-            <a:off x="6766560" y="2971800"/>
-            <a:ext cx="4023360" cy="1371600"/>
-          </a:xfrm>
-          <a:prstGeom prst="rect">
-            <a:avLst/>
-          </a:prstGeom>
-          <a:noFill/>
-        </p:spPr>
-        <p:txBody>
-          <a:bodyPr wrap="square" anchor="t">
-            <a:spAutoFit/>
-          </a:bodyPr>
-          <a:lstStyle/>
-          <a:p>
-            <a:pPr algn="l">
-              <a:lnSpc>
-                <a:spcPct val="130000"/>
-              </a:lnSpc>
-            </a:pPr>
-            <a:r>
-              <a:rPr sz="2000" b="1">
-                <a:solidFill>
-                  <a:srgbClr val="142842"/>
-                </a:solidFill>
-                <a:latin typeface="Hiragino Sans"/>
-                <a:ea typeface="Hiragino Sans"/>
-              </a:rPr>
-              <a:t>パートナーと一緒に見る</a:t>
-            </a:r>
-          </a:p>
-          <a:p>
-            <a:pPr algn="l">
-              <a:lnSpc>
-                <a:spcPct val="130000"/>
-              </a:lnSpc>
-            </a:pPr>
-            <a:r>
-              <a:rPr sz="2000" b="1">
-                <a:solidFill>
-                  <a:srgbClr val="142842"/>
-                </a:solidFill>
-                <a:latin typeface="Hiragino Sans"/>
-                <a:ea typeface="Hiragino Sans"/>
-              </a:rPr>
-              <a:t>男性が自分ごととして体験する</a:t>
-            </a:r>
-          </a:p>
-        </p:txBody>
-      </p:sp>
-      <p:sp>
-        <p:nvSpPr>
-          <p:cNvPr id="10" name="TextBox 9"/>
           <p:cNvSpPr txBox="1"/>
           <p:nvPr/>
         </p:nvSpPr>
@@ -5815,14 +6448,14 @@
                 <a:latin typeface="Hiragino Sans"/>
                 <a:ea typeface="Hiragino Sans"/>
               </a:rPr>
-              <a:t>出典: 東京都「男女雇用平等参画状況調査」（令和7年度）。男性の育休取得率61.2%。</a:t>
-            </a:r>
-          </a:p>
-        </p:txBody>
-      </p:sp>
-      <p:sp>
-        <p:nvSpPr>
-          <p:cNvPr id="11" name="TextBox 10"/>
+              <a:t>希望される支援も「新しい休業」より「時間の組み替え」（有給53.7%・フレックス49.4%、東京都「男女雇用平等参画状況調査」令和7年度）</a:t>
+            </a:r>
+          </a:p>
+        </p:txBody>
+      </p:sp>
+      <p:sp>
+        <p:nvSpPr>
+          <p:cNvPr id="9" name="TextBox 8"/>
           <p:cNvSpPr txBox="1"/>
           <p:nvPr/>
         </p:nvSpPr>
@@ -5914,28 +6547,68 @@
               </a:lnSpc>
             </a:pPr>
             <a:r>
-              <a:rPr sz="3400" b="1">
+              <a:rPr sz="3200" b="1">
                 <a:solidFill>
                   <a:srgbClr val="142842"/>
                 </a:solidFill>
                 <a:latin typeface="Hiragino Sans"/>
                 <a:ea typeface="Hiragino Sans"/>
               </a:rPr>
-              <a:t>このデータが、次の施策を動かす</a:t>
-            </a:r>
-          </a:p>
-        </p:txBody>
-      </p:sp>
-      <p:sp>
-        <p:nvSpPr>
-          <p:cNvPr id="3" name="Rectangle 2"/>
+              <a:t>一つの画面を、家庭で。男性が体験する</a:t>
+            </a:r>
+          </a:p>
+        </p:txBody>
+      </p:sp>
+      <p:sp>
+        <p:nvSpPr>
+          <p:cNvPr id="3" name="TextBox 2"/>
+          <p:cNvSpPr txBox="1"/>
+          <p:nvPr/>
+        </p:nvSpPr>
+        <p:spPr>
+          <a:xfrm>
+            <a:off x="640080" y="1463040"/>
+            <a:ext cx="10515600" cy="548640"/>
+          </a:xfrm>
+          <a:prstGeom prst="rect">
+            <a:avLst/>
+          </a:prstGeom>
+          <a:noFill/>
+        </p:spPr>
+        <p:txBody>
+          <a:bodyPr wrap="square" anchor="t">
+            <a:spAutoFit/>
+          </a:bodyPr>
+          <a:lstStyle/>
+          <a:p>
+            <a:pPr algn="ctr">
+              <a:lnSpc>
+                <a:spcPct val="125000"/>
+              </a:lnSpc>
+            </a:pPr>
+            <a:r>
+              <a:rPr sz="2200" b="1">
+                <a:solidFill>
+                  <a:srgbClr val="20242B"/>
+                </a:solidFill>
+                <a:latin typeface="Hiragino Sans"/>
+                <a:ea typeface="Hiragino Sans"/>
+              </a:rPr>
+              <a:t>同じ画面を、二人で見る</a:t>
+            </a:r>
+          </a:p>
+        </p:txBody>
+      </p:sp>
+      <p:sp>
+        <p:nvSpPr>
+          <p:cNvPr id="4" name="Rectangle 3"/>
           <p:cNvSpPr/>
           <p:nvPr/>
         </p:nvSpPr>
         <p:spPr>
           <a:xfrm>
-            <a:off x="822960" y="1737360"/>
-            <a:ext cx="3108960" cy="1371600"/>
+            <a:off x="1097280" y="2377440"/>
+            <a:ext cx="4572000" cy="2103120"/>
           </a:xfrm>
           <a:prstGeom prst="rect">
             <a:avLst/>
@@ -5972,14 +6645,14 @@
       </p:sp>
       <p:sp>
         <p:nvSpPr>
-          <p:cNvPr id="4" name="TextBox 3"/>
+          <p:cNvPr id="5" name="TextBox 4"/>
           <p:cNvSpPr txBox="1"/>
           <p:nvPr/>
         </p:nvSpPr>
         <p:spPr>
           <a:xfrm>
-            <a:off x="822960" y="1965960"/>
-            <a:ext cx="3108960" cy="914400"/>
+            <a:off x="1371600" y="2606040"/>
+            <a:ext cx="4023360" cy="457200"/>
           </a:xfrm>
           <a:prstGeom prst="rect">
             <a:avLst/>
@@ -5992,100 +6665,83 @@
           </a:bodyPr>
           <a:lstStyle/>
           <a:p>
-            <a:pPr algn="ctr">
-              <a:lnSpc>
-                <a:spcPct val="120000"/>
-              </a:lnSpc>
-            </a:pPr>
-            <a:r>
-              <a:rPr sz="1800" b="1">
-                <a:solidFill>
-                  <a:srgbClr val="142842"/>
-                </a:solidFill>
-                <a:latin typeface="Hiragino Sans"/>
-                <a:ea typeface="Hiragino Sans"/>
-              </a:rPr>
-              <a:t>東京都・国の</a:t>
-            </a:r>
-          </a:p>
-          <a:p>
-            <a:pPr algn="ctr">
-              <a:lnSpc>
-                <a:spcPct val="120000"/>
-              </a:lnSpc>
-            </a:pPr>
-            <a:r>
-              <a:rPr sz="1800" b="1">
-                <a:solidFill>
-                  <a:srgbClr val="142842"/>
-                </a:solidFill>
-                <a:latin typeface="Hiragino Sans"/>
-                <a:ea typeface="Hiragino Sans"/>
-              </a:rPr>
-              <a:t>オープンデータ</a:t>
-            </a:r>
-          </a:p>
-        </p:txBody>
-      </p:sp>
-      <p:sp>
-        <p:nvSpPr>
-          <p:cNvPr id="5" name="TextBox 4"/>
-          <p:cNvSpPr txBox="1"/>
-          <p:nvPr/>
-        </p:nvSpPr>
-        <p:spPr>
-          <a:xfrm>
-            <a:off x="3931920" y="2148840"/>
-            <a:ext cx="457200" cy="548640"/>
-          </a:xfrm>
-          <a:prstGeom prst="rect">
-            <a:avLst/>
-          </a:prstGeom>
-          <a:noFill/>
-        </p:spPr>
-        <p:txBody>
-          <a:bodyPr wrap="square" anchor="t">
-            <a:spAutoFit/>
-          </a:bodyPr>
-          <a:lstStyle/>
-          <a:p>
-            <a:pPr algn="ctr">
+            <a:pPr algn="l">
               <a:lnSpc>
                 <a:spcPct val="125000"/>
               </a:lnSpc>
             </a:pPr>
             <a:r>
-              <a:rPr sz="2400" b="0">
-                <a:solidFill>
-                  <a:srgbClr val="565B62"/>
+              <a:rPr sz="1400" b="1">
+                <a:solidFill>
+                  <a:srgbClr val="1E3A5F"/>
                 </a:solidFill>
                 <a:latin typeface="Hiragino Sans"/>
                 <a:ea typeface="Hiragino Sans"/>
               </a:rPr>
-              <a:t>→</a:t>
-            </a:r>
-          </a:p>
-        </p:txBody>
-      </p:sp>
-      <p:sp>
-        <p:nvSpPr>
-          <p:cNvPr id="6" name="Rectangle 5"/>
+              <a:t>実装済み・ログイン不要</a:t>
+            </a:r>
+          </a:p>
+        </p:txBody>
+      </p:sp>
+      <p:sp>
+        <p:nvSpPr>
+          <p:cNvPr id="6" name="TextBox 5"/>
+          <p:cNvSpPr txBox="1"/>
+          <p:nvPr/>
+        </p:nvSpPr>
+        <p:spPr>
+          <a:xfrm>
+            <a:off x="1371600" y="3063240"/>
+            <a:ext cx="4023360" cy="1188720"/>
+          </a:xfrm>
+          <a:prstGeom prst="rect">
+            <a:avLst/>
+          </a:prstGeom>
+          <a:noFill/>
+        </p:spPr>
+        <p:txBody>
+          <a:bodyPr wrap="square" anchor="t">
+            <a:spAutoFit/>
+          </a:bodyPr>
+          <a:lstStyle/>
+          <a:p>
+            <a:pPr algn="l">
+              <a:lnSpc>
+                <a:spcPct val="125000"/>
+              </a:lnSpc>
+            </a:pPr>
+            <a:r>
+              <a:rPr sz="2600" b="1">
+                <a:solidFill>
+                  <a:srgbClr val="142842"/>
+                </a:solidFill>
+                <a:latin typeface="Hiragino Sans"/>
+                <a:ea typeface="Hiragino Sans"/>
+              </a:rPr>
+              <a:t>自分のプランを描く</a:t>
+            </a:r>
+          </a:p>
+        </p:txBody>
+      </p:sp>
+      <p:sp>
+        <p:nvSpPr>
+          <p:cNvPr id="7" name="Rectangle 6"/>
           <p:cNvSpPr/>
           <p:nvPr/>
         </p:nvSpPr>
         <p:spPr>
           <a:xfrm>
-            <a:off x="4389120" y="1737360"/>
-            <a:ext cx="3108960" cy="1371600"/>
-          </a:xfrm>
-          <a:prstGeom prst="rect">
-            <a:avLst/>
-          </a:prstGeom>
-          <a:solidFill>
-            <a:srgbClr val="F2F4F7"/>
-          </a:solidFill>
-          <a:ln>
-            <a:noFill/>
+            <a:off x="6492240" y="2377440"/>
+            <a:ext cx="4572000" cy="2103120"/>
+          </a:xfrm>
+          <a:prstGeom prst="rect">
+            <a:avLst/>
+          </a:prstGeom>
+          <a:noFill/>
+          <a:ln w="9525">
+            <a:solidFill>
+              <a:srgbClr val="1E3A5F"/>
+            </a:solidFill>
           </a:ln>
           <a:effectLst/>
         </p:spPr>
@@ -6113,14 +6769,14 @@
       </p:sp>
       <p:sp>
         <p:nvSpPr>
-          <p:cNvPr id="7" name="TextBox 6"/>
+          <p:cNvPr id="8" name="TextBox 7"/>
           <p:cNvSpPr txBox="1"/>
           <p:nvPr/>
         </p:nvSpPr>
         <p:spPr>
           <a:xfrm>
-            <a:off x="4389120" y="1965960"/>
-            <a:ext cx="3108960" cy="914400"/>
+            <a:off x="6766560" y="2606040"/>
+            <a:ext cx="4023360" cy="457200"/>
           </a:xfrm>
           <a:prstGeom prst="rect">
             <a:avLst/>
@@ -6133,135 +6789,34 @@
           </a:bodyPr>
           <a:lstStyle/>
           <a:p>
-            <a:pPr algn="ctr">
-              <a:lnSpc>
-                <a:spcPct val="120000"/>
-              </a:lnSpc>
-            </a:pPr>
-            <a:r>
-              <a:rPr sz="1800" b="1">
-                <a:solidFill>
-                  <a:srgbClr val="142842"/>
-                </a:solidFill>
-                <a:latin typeface="Hiragino Sans"/>
-                <a:ea typeface="Hiragino Sans"/>
-              </a:rPr>
-              <a:t>一人ひとりの</a:t>
-            </a:r>
-          </a:p>
-          <a:p>
-            <a:pPr algn="ctr">
-              <a:lnSpc>
-                <a:spcPct val="120000"/>
-              </a:lnSpc>
-            </a:pPr>
-            <a:r>
-              <a:rPr sz="1800" b="1">
-                <a:solidFill>
-                  <a:srgbClr val="142842"/>
-                </a:solidFill>
-                <a:latin typeface="Hiragino Sans"/>
-                <a:ea typeface="Hiragino Sans"/>
-              </a:rPr>
-              <a:t>ライフプラン</a:t>
-            </a:r>
-          </a:p>
-        </p:txBody>
-      </p:sp>
-      <p:sp>
-        <p:nvSpPr>
-          <p:cNvPr id="8" name="TextBox 7"/>
-          <p:cNvSpPr txBox="1"/>
-          <p:nvPr/>
-        </p:nvSpPr>
-        <p:spPr>
-          <a:xfrm>
-            <a:off x="7498080" y="2148840"/>
-            <a:ext cx="457200" cy="548640"/>
-          </a:xfrm>
-          <a:prstGeom prst="rect">
-            <a:avLst/>
-          </a:prstGeom>
-          <a:noFill/>
-        </p:spPr>
-        <p:txBody>
-          <a:bodyPr wrap="square" anchor="t">
-            <a:spAutoFit/>
-          </a:bodyPr>
-          <a:lstStyle/>
-          <a:p>
-            <a:pPr algn="ctr">
+            <a:pPr algn="l">
               <a:lnSpc>
                 <a:spcPct val="125000"/>
               </a:lnSpc>
             </a:pPr>
             <a:r>
-              <a:rPr sz="2400" b="0">
-                <a:solidFill>
-                  <a:srgbClr val="565B62"/>
+              <a:rPr sz="1400" b="1">
+                <a:solidFill>
+                  <a:srgbClr val="C2708C"/>
                 </a:solidFill>
                 <a:latin typeface="Hiragino Sans"/>
                 <a:ea typeface="Hiragino Sans"/>
               </a:rPr>
-              <a:t>→</a:t>
-            </a:r>
-          </a:p>
-        </p:txBody>
-      </p:sp>
-      <p:sp>
-        <p:nvSpPr>
-          <p:cNvPr id="9" name="Rectangle 8"/>
-          <p:cNvSpPr/>
-          <p:nvPr/>
-        </p:nvSpPr>
-        <p:spPr>
-          <a:xfrm>
-            <a:off x="7955280" y="1737360"/>
-            <a:ext cx="3108960" cy="1371600"/>
-          </a:xfrm>
-          <a:prstGeom prst="rect">
-            <a:avLst/>
-          </a:prstGeom>
-          <a:solidFill>
-            <a:srgbClr val="F2F4F7"/>
-          </a:solidFill>
-          <a:ln>
-            <a:noFill/>
-          </a:ln>
-          <a:effectLst/>
-        </p:spPr>
-        <p:style>
-          <a:lnRef idx="1">
-            <a:schemeClr val="accent1"/>
-          </a:lnRef>
-          <a:fillRef idx="3">
-            <a:schemeClr val="accent1"/>
-          </a:fillRef>
-          <a:effectRef idx="2">
-            <a:schemeClr val="accent1"/>
-          </a:effectRef>
-          <a:fontRef idx="minor">
-            <a:schemeClr val="lt1"/>
-          </a:fontRef>
-        </p:style>
-        <p:txBody>
-          <a:bodyPr rtlCol="0" anchor="ctr"/>
-          <a:lstStyle/>
-          <a:p>
-            <a:pPr algn="ctr"/>
-          </a:p>
-        </p:txBody>
-      </p:sp>
-      <p:sp>
-        <p:nvSpPr>
-          <p:cNvPr id="10" name="TextBox 9"/>
+              <a:t>構想中</a:t>
+            </a:r>
+          </a:p>
+        </p:txBody>
+      </p:sp>
+      <p:sp>
+        <p:nvSpPr>
+          <p:cNvPr id="9" name="TextBox 8"/>
           <p:cNvSpPr txBox="1"/>
           <p:nvPr/>
         </p:nvSpPr>
         <p:spPr>
           <a:xfrm>
-            <a:off x="7955280" y="1965960"/>
-            <a:ext cx="3108960" cy="914400"/>
+            <a:off x="6766560" y="2971800"/>
+            <a:ext cx="4023360" cy="1371600"/>
           </a:xfrm>
           <a:prstGeom prst="rect">
             <a:avLst/>
@@ -6274,107 +6829,44 @@
           </a:bodyPr>
           <a:lstStyle/>
           <a:p>
-            <a:pPr algn="ctr">
+            <a:pPr algn="l">
               <a:lnSpc>
-                <a:spcPct val="120000"/>
+                <a:spcPct val="130000"/>
               </a:lnSpc>
             </a:pPr>
             <a:r>
-              <a:rPr sz="1800" b="1">
+              <a:rPr sz="2000" b="1">
                 <a:solidFill>
                   <a:srgbClr val="142842"/>
                 </a:solidFill>
                 <a:latin typeface="Hiragino Sans"/>
                 <a:ea typeface="Hiragino Sans"/>
               </a:rPr>
-              <a:t>次の施策へ</a:t>
-            </a:r>
-          </a:p>
-        </p:txBody>
-      </p:sp>
-      <p:sp>
-        <p:nvSpPr>
-          <p:cNvPr id="11" name="TextBox 10"/>
-          <p:cNvSpPr txBox="1"/>
-          <p:nvPr/>
-        </p:nvSpPr>
-        <p:spPr>
-          <a:xfrm>
-            <a:off x="640080" y="3840480"/>
-            <a:ext cx="10515600" cy="914400"/>
-          </a:xfrm>
-          <a:prstGeom prst="rect">
-            <a:avLst/>
-          </a:prstGeom>
-          <a:noFill/>
-        </p:spPr>
-        <p:txBody>
-          <a:bodyPr wrap="square" anchor="t">
-            <a:spAutoFit/>
-          </a:bodyPr>
-          <a:lstStyle/>
-          <a:p>
-            <a:pPr algn="ctr">
+              <a:t>パートナーと一緒に見る</a:t>
+            </a:r>
+          </a:p>
+          <a:p>
+            <a:pPr algn="l">
               <a:lnSpc>
-                <a:spcPct val="125000"/>
+                <a:spcPct val="130000"/>
               </a:lnSpc>
             </a:pPr>
             <a:r>
-              <a:rPr sz="3200" b="1">
-                <a:solidFill>
-                  <a:srgbClr val="1E3A5F"/>
+              <a:rPr sz="2000" b="1">
+                <a:solidFill>
+                  <a:srgbClr val="142842"/>
                 </a:solidFill>
                 <a:latin typeface="Hiragino Sans"/>
                 <a:ea typeface="Hiragino Sans"/>
               </a:rPr>
-              <a:t>知ったうえで、自分で決める</a:t>
-            </a:r>
-          </a:p>
-        </p:txBody>
-      </p:sp>
-      <p:sp>
-        <p:nvSpPr>
-          <p:cNvPr id="12" name="TextBox 11"/>
-          <p:cNvSpPr txBox="1"/>
-          <p:nvPr/>
-        </p:nvSpPr>
-        <p:spPr>
-          <a:xfrm>
-            <a:off x="640080" y="4937760"/>
-            <a:ext cx="10515600" cy="457200"/>
-          </a:xfrm>
-          <a:prstGeom prst="rect">
-            <a:avLst/>
-          </a:prstGeom>
-          <a:noFill/>
-        </p:spPr>
-        <p:txBody>
-          <a:bodyPr wrap="square" anchor="t">
-            <a:spAutoFit/>
-          </a:bodyPr>
-          <a:lstStyle/>
-          <a:p>
-            <a:pPr algn="ctr">
-              <a:lnSpc>
-                <a:spcPct val="125000"/>
-              </a:lnSpc>
-            </a:pPr>
-            <a:r>
-              <a:rPr sz="1600" b="1">
-                <a:solidFill>
-                  <a:srgbClr val="142842"/>
-                </a:solidFill>
-                <a:latin typeface="Hiragino Sans"/>
-                <a:ea typeface="Hiragino Sans"/>
-              </a:rPr>
-              <a:t>公開デモ: my-career-app-559fd.web.app</a:t>
-            </a:r>
-          </a:p>
-        </p:txBody>
-      </p:sp>
-      <p:sp>
-        <p:nvSpPr>
-          <p:cNvPr id="13" name="TextBox 12"/>
+              <a:t>男性が自分ごととして体験する</a:t>
+            </a:r>
+          </a:p>
+        </p:txBody>
+      </p:sp>
+      <p:sp>
+        <p:nvSpPr>
+          <p:cNvPr id="10" name="TextBox 9"/>
           <p:cNvSpPr txBox="1"/>
           <p:nvPr/>
         </p:nvSpPr>
@@ -6407,14 +6899,14 @@
                 <a:latin typeface="Hiragino Sans"/>
                 <a:ea typeface="Hiragino Sans"/>
               </a:rPr>
-              <a:t>制度情報の出典は各スライド記載のとおり。データはオープンデータと法令から出典付きで取り込む。</a:t>
-            </a:r>
-          </a:p>
-        </p:txBody>
-      </p:sp>
-      <p:sp>
-        <p:nvSpPr>
-          <p:cNvPr id="14" name="TextBox 13"/>
+              <a:t>出典: 東京都「男女雇用平等参画状況調査」（令和7年度）。母性保護に関する制度8項目すべてで、男性の「わからない」が女性より高い（出産障害休暇: 男性52.6%／女性42.4%）。</a:t>
+            </a:r>
+          </a:p>
+        </p:txBody>
+      </p:sp>
+      <p:sp>
+        <p:nvSpPr>
+          <p:cNvPr id="11" name="TextBox 10"/>
           <p:cNvSpPr txBox="1"/>
           <p:nvPr/>
         </p:nvSpPr>
@@ -6506,14 +6998,14 @@
               </a:lnSpc>
             </a:pPr>
             <a:r>
-              <a:rPr sz="3000" b="1">
+              <a:rPr sz="3400" b="1">
                 <a:solidFill>
                   <a:srgbClr val="142842"/>
                 </a:solidFill>
                 <a:latin typeface="Hiragino Sans"/>
                 <a:ea typeface="Hiragino Sans"/>
               </a:rPr>
-              <a:t>参考｜利用データと使い方</a:t>
+              <a:t>このデータが、次の施策を動かす</a:t>
             </a:r>
           </a:p>
         </p:txBody>
@@ -6526,8 +7018,8 @@
         </p:nvSpPr>
         <p:spPr>
           <a:xfrm>
-            <a:off x="640080" y="1371600"/>
-            <a:ext cx="10881360" cy="1874519"/>
+            <a:off x="822960" y="1737360"/>
+            <a:ext cx="3108960" cy="1371600"/>
           </a:xfrm>
           <a:prstGeom prst="rect">
             <a:avLst/>
@@ -6570,8 +7062,8 @@
         </p:nvSpPr>
         <p:spPr>
           <a:xfrm>
-            <a:off x="868680" y="1508760"/>
-            <a:ext cx="10424160" cy="365760"/>
+            <a:off x="822960" y="1965960"/>
+            <a:ext cx="3108960" cy="914400"/>
           </a:xfrm>
           <a:prstGeom prst="rect">
             <a:avLst/>
@@ -6584,77 +7076,77 @@
           </a:bodyPr>
           <a:lstStyle/>
           <a:p>
-            <a:pPr algn="l">
+            <a:pPr algn="ctr">
+              <a:lnSpc>
+                <a:spcPct val="120000"/>
+              </a:lnSpc>
+            </a:pPr>
+            <a:r>
+              <a:rPr sz="1800" b="1">
+                <a:solidFill>
+                  <a:srgbClr val="142842"/>
+                </a:solidFill>
+                <a:latin typeface="Hiragino Sans"/>
+                <a:ea typeface="Hiragino Sans"/>
+              </a:rPr>
+              <a:t>東京都・国の</a:t>
+            </a:r>
+          </a:p>
+          <a:p>
+            <a:pPr algn="ctr">
+              <a:lnSpc>
+                <a:spcPct val="120000"/>
+              </a:lnSpc>
+            </a:pPr>
+            <a:r>
+              <a:rPr sz="1800" b="1">
+                <a:solidFill>
+                  <a:srgbClr val="142842"/>
+                </a:solidFill>
+                <a:latin typeface="Hiragino Sans"/>
+                <a:ea typeface="Hiragino Sans"/>
+              </a:rPr>
+              <a:t>オープンデータ</a:t>
+            </a:r>
+          </a:p>
+        </p:txBody>
+      </p:sp>
+      <p:sp>
+        <p:nvSpPr>
+          <p:cNvPr id="5" name="TextBox 4"/>
+          <p:cNvSpPr txBox="1"/>
+          <p:nvPr/>
+        </p:nvSpPr>
+        <p:spPr>
+          <a:xfrm>
+            <a:off x="3931920" y="2148840"/>
+            <a:ext cx="457200" cy="548640"/>
+          </a:xfrm>
+          <a:prstGeom prst="rect">
+            <a:avLst/>
+          </a:prstGeom>
+          <a:noFill/>
+        </p:spPr>
+        <p:txBody>
+          <a:bodyPr wrap="square" anchor="t">
+            <a:spAutoFit/>
+          </a:bodyPr>
+          <a:lstStyle/>
+          <a:p>
+            <a:pPr algn="ctr">
               <a:lnSpc>
                 <a:spcPct val="125000"/>
               </a:lnSpc>
             </a:pPr>
             <a:r>
-              <a:rPr sz="1600" b="1">
-                <a:solidFill>
-                  <a:srgbClr val="1E3A5F"/>
+              <a:rPr sz="2400" b="0">
+                <a:solidFill>
+                  <a:srgbClr val="565B62"/>
                 </a:solidFill>
                 <a:latin typeface="Hiragino Sans"/>
                 <a:ea typeface="Hiragino Sans"/>
               </a:rPr>
-              <a:t>(B) アプリ内に出典付きで表示するデータ</a:t>
-            </a:r>
-          </a:p>
-        </p:txBody>
-      </p:sp>
-      <p:sp>
-        <p:nvSpPr>
-          <p:cNvPr id="5" name="TextBox 4"/>
-          <p:cNvSpPr txBox="1"/>
-          <p:nvPr/>
-        </p:nvSpPr>
-        <p:spPr>
-          <a:xfrm>
-            <a:off x="868680" y="1920240"/>
-            <a:ext cx="10195560" cy="1234440"/>
-          </a:xfrm>
-          <a:prstGeom prst="rect">
-            <a:avLst/>
-          </a:prstGeom>
-          <a:noFill/>
-        </p:spPr>
-        <p:txBody>
-          <a:bodyPr wrap="square" anchor="t">
-            <a:spAutoFit/>
-          </a:bodyPr>
-          <a:lstStyle/>
-          <a:p>
-            <a:pPr algn="l">
-              <a:lnSpc>
-                <a:spcPct val="140000"/>
-              </a:lnSpc>
-            </a:pPr>
-            <a:r>
-              <a:rPr sz="1400" b="0">
-                <a:solidFill>
-                  <a:srgbClr val="20242B"/>
-                </a:solidFill>
-                <a:latin typeface="Hiragino Sans"/>
-                <a:ea typeface="Hiragino Sans"/>
-              </a:rPr>
-              <a:t>・東京都不妊検査等助成事業／東京都福祉局／公的な制度情報</a:t>
-            </a:r>
-          </a:p>
-          <a:p>
-            <a:pPr algn="l">
-              <a:lnSpc>
-                <a:spcPct val="140000"/>
-              </a:lnSpc>
-            </a:pPr>
-            <a:r>
-              <a:rPr sz="1400" b="0">
-                <a:solidFill>
-                  <a:srgbClr val="20242B"/>
-                </a:solidFill>
-                <a:latin typeface="Hiragino Sans"/>
-                <a:ea typeface="Hiragino Sans"/>
-              </a:rPr>
-              <a:t>・育児・介護休業法、労働基準法、母子保健法／厚生労働省・こども家庭庁／公的な法令情報</a:t>
+              <a:t>→</a:t>
             </a:r>
           </a:p>
         </p:txBody>
@@ -6667,17 +7159,17 @@
         </p:nvSpPr>
         <p:spPr>
           <a:xfrm>
-            <a:off x="640080" y="3429000"/>
-            <a:ext cx="10881360" cy="2331720"/>
-          </a:xfrm>
-          <a:prstGeom prst="rect">
-            <a:avLst/>
-          </a:prstGeom>
-          <a:noFill/>
-          <a:ln w="9525">
-            <a:solidFill>
-              <a:srgbClr val="D9D0BC"/>
-            </a:solidFill>
+            <a:off x="4389120" y="1737360"/>
+            <a:ext cx="3108960" cy="1371600"/>
+          </a:xfrm>
+          <a:prstGeom prst="rect">
+            <a:avLst/>
+          </a:prstGeom>
+          <a:solidFill>
+            <a:srgbClr val="F2F4F7"/>
+          </a:solidFill>
+          <a:ln>
+            <a:noFill/>
           </a:ln>
           <a:effectLst/>
         </p:spPr>
@@ -6711,8 +7203,375 @@
         </p:nvSpPr>
         <p:spPr>
           <a:xfrm>
-            <a:off x="868680" y="3566160"/>
-            <a:ext cx="10424160" cy="365760"/>
+            <a:off x="4389120" y="1965960"/>
+            <a:ext cx="3108960" cy="914400"/>
+          </a:xfrm>
+          <a:prstGeom prst="rect">
+            <a:avLst/>
+          </a:prstGeom>
+          <a:noFill/>
+        </p:spPr>
+        <p:txBody>
+          <a:bodyPr wrap="square" anchor="t">
+            <a:spAutoFit/>
+          </a:bodyPr>
+          <a:lstStyle/>
+          <a:p>
+            <a:pPr algn="ctr">
+              <a:lnSpc>
+                <a:spcPct val="120000"/>
+              </a:lnSpc>
+            </a:pPr>
+            <a:r>
+              <a:rPr sz="1800" b="1">
+                <a:solidFill>
+                  <a:srgbClr val="142842"/>
+                </a:solidFill>
+                <a:latin typeface="Hiragino Sans"/>
+                <a:ea typeface="Hiragino Sans"/>
+              </a:rPr>
+              <a:t>一人ひとりの</a:t>
+            </a:r>
+          </a:p>
+          <a:p>
+            <a:pPr algn="ctr">
+              <a:lnSpc>
+                <a:spcPct val="120000"/>
+              </a:lnSpc>
+            </a:pPr>
+            <a:r>
+              <a:rPr sz="1800" b="1">
+                <a:solidFill>
+                  <a:srgbClr val="142842"/>
+                </a:solidFill>
+                <a:latin typeface="Hiragino Sans"/>
+                <a:ea typeface="Hiragino Sans"/>
+              </a:rPr>
+              <a:t>ライフプラン</a:t>
+            </a:r>
+          </a:p>
+        </p:txBody>
+      </p:sp>
+      <p:sp>
+        <p:nvSpPr>
+          <p:cNvPr id="8" name="TextBox 7"/>
+          <p:cNvSpPr txBox="1"/>
+          <p:nvPr/>
+        </p:nvSpPr>
+        <p:spPr>
+          <a:xfrm>
+            <a:off x="7498080" y="2148840"/>
+            <a:ext cx="457200" cy="548640"/>
+          </a:xfrm>
+          <a:prstGeom prst="rect">
+            <a:avLst/>
+          </a:prstGeom>
+          <a:noFill/>
+        </p:spPr>
+        <p:txBody>
+          <a:bodyPr wrap="square" anchor="t">
+            <a:spAutoFit/>
+          </a:bodyPr>
+          <a:lstStyle/>
+          <a:p>
+            <a:pPr algn="ctr">
+              <a:lnSpc>
+                <a:spcPct val="125000"/>
+              </a:lnSpc>
+            </a:pPr>
+            <a:r>
+              <a:rPr sz="2400" b="0">
+                <a:solidFill>
+                  <a:srgbClr val="565B62"/>
+                </a:solidFill>
+                <a:latin typeface="Hiragino Sans"/>
+                <a:ea typeface="Hiragino Sans"/>
+              </a:rPr>
+              <a:t>→</a:t>
+            </a:r>
+          </a:p>
+        </p:txBody>
+      </p:sp>
+      <p:sp>
+        <p:nvSpPr>
+          <p:cNvPr id="9" name="Rectangle 8"/>
+          <p:cNvSpPr/>
+          <p:nvPr/>
+        </p:nvSpPr>
+        <p:spPr>
+          <a:xfrm>
+            <a:off x="7955280" y="1737360"/>
+            <a:ext cx="3108960" cy="1371600"/>
+          </a:xfrm>
+          <a:prstGeom prst="rect">
+            <a:avLst/>
+          </a:prstGeom>
+          <a:solidFill>
+            <a:srgbClr val="F2F4F7"/>
+          </a:solidFill>
+          <a:ln>
+            <a:noFill/>
+          </a:ln>
+          <a:effectLst/>
+        </p:spPr>
+        <p:style>
+          <a:lnRef idx="1">
+            <a:schemeClr val="accent1"/>
+          </a:lnRef>
+          <a:fillRef idx="3">
+            <a:schemeClr val="accent1"/>
+          </a:fillRef>
+          <a:effectRef idx="2">
+            <a:schemeClr val="accent1"/>
+          </a:effectRef>
+          <a:fontRef idx="minor">
+            <a:schemeClr val="lt1"/>
+          </a:fontRef>
+        </p:style>
+        <p:txBody>
+          <a:bodyPr rtlCol="0" anchor="ctr"/>
+          <a:lstStyle/>
+          <a:p>
+            <a:pPr algn="ctr"/>
+          </a:p>
+        </p:txBody>
+      </p:sp>
+      <p:sp>
+        <p:nvSpPr>
+          <p:cNvPr id="10" name="TextBox 9"/>
+          <p:cNvSpPr txBox="1"/>
+          <p:nvPr/>
+        </p:nvSpPr>
+        <p:spPr>
+          <a:xfrm>
+            <a:off x="7955280" y="1965960"/>
+            <a:ext cx="3108960" cy="914400"/>
+          </a:xfrm>
+          <a:prstGeom prst="rect">
+            <a:avLst/>
+          </a:prstGeom>
+          <a:noFill/>
+        </p:spPr>
+        <p:txBody>
+          <a:bodyPr wrap="square" anchor="t">
+            <a:spAutoFit/>
+          </a:bodyPr>
+          <a:lstStyle/>
+          <a:p>
+            <a:pPr algn="ctr">
+              <a:lnSpc>
+                <a:spcPct val="120000"/>
+              </a:lnSpc>
+            </a:pPr>
+            <a:r>
+              <a:rPr sz="1800" b="1">
+                <a:solidFill>
+                  <a:srgbClr val="142842"/>
+                </a:solidFill>
+                <a:latin typeface="Hiragino Sans"/>
+                <a:ea typeface="Hiragino Sans"/>
+              </a:rPr>
+              <a:t>次の施策へ</a:t>
+            </a:r>
+          </a:p>
+        </p:txBody>
+      </p:sp>
+      <p:sp>
+        <p:nvSpPr>
+          <p:cNvPr id="11" name="TextBox 10"/>
+          <p:cNvSpPr txBox="1"/>
+          <p:nvPr/>
+        </p:nvSpPr>
+        <p:spPr>
+          <a:xfrm>
+            <a:off x="640080" y="3840480"/>
+            <a:ext cx="10515600" cy="914400"/>
+          </a:xfrm>
+          <a:prstGeom prst="rect">
+            <a:avLst/>
+          </a:prstGeom>
+          <a:noFill/>
+        </p:spPr>
+        <p:txBody>
+          <a:bodyPr wrap="square" anchor="t">
+            <a:spAutoFit/>
+          </a:bodyPr>
+          <a:lstStyle/>
+          <a:p>
+            <a:pPr algn="ctr">
+              <a:lnSpc>
+                <a:spcPct val="125000"/>
+              </a:lnSpc>
+            </a:pPr>
+            <a:r>
+              <a:rPr sz="3200" b="1">
+                <a:solidFill>
+                  <a:srgbClr val="1E3A5F"/>
+                </a:solidFill>
+                <a:latin typeface="Hiragino Sans"/>
+                <a:ea typeface="Hiragino Sans"/>
+              </a:rPr>
+              <a:t>知ったうえで、自分で決める</a:t>
+            </a:r>
+          </a:p>
+        </p:txBody>
+      </p:sp>
+      <p:sp>
+        <p:nvSpPr>
+          <p:cNvPr id="12" name="TextBox 11"/>
+          <p:cNvSpPr txBox="1"/>
+          <p:nvPr/>
+        </p:nvSpPr>
+        <p:spPr>
+          <a:xfrm>
+            <a:off x="640080" y="4937760"/>
+            <a:ext cx="10515600" cy="457200"/>
+          </a:xfrm>
+          <a:prstGeom prst="rect">
+            <a:avLst/>
+          </a:prstGeom>
+          <a:noFill/>
+        </p:spPr>
+        <p:txBody>
+          <a:bodyPr wrap="square" anchor="t">
+            <a:spAutoFit/>
+          </a:bodyPr>
+          <a:lstStyle/>
+          <a:p>
+            <a:pPr algn="ctr">
+              <a:lnSpc>
+                <a:spcPct val="125000"/>
+              </a:lnSpc>
+            </a:pPr>
+            <a:r>
+              <a:rPr sz="1600" b="1">
+                <a:solidFill>
+                  <a:srgbClr val="142842"/>
+                </a:solidFill>
+                <a:latin typeface="Hiragino Sans"/>
+                <a:ea typeface="Hiragino Sans"/>
+              </a:rPr>
+              <a:t>公開デモ: my-career-app-559fd.web.app</a:t>
+            </a:r>
+          </a:p>
+        </p:txBody>
+      </p:sp>
+      <p:sp>
+        <p:nvSpPr>
+          <p:cNvPr id="13" name="TextBox 12"/>
+          <p:cNvSpPr txBox="1"/>
+          <p:nvPr/>
+        </p:nvSpPr>
+        <p:spPr>
+          <a:xfrm>
+            <a:off x="548640" y="6355080"/>
+            <a:ext cx="11109960" cy="457200"/>
+          </a:xfrm>
+          <a:prstGeom prst="rect">
+            <a:avLst/>
+          </a:prstGeom>
+          <a:noFill/>
+        </p:spPr>
+        <p:txBody>
+          <a:bodyPr wrap="square" anchor="t">
+            <a:spAutoFit/>
+          </a:bodyPr>
+          <a:lstStyle/>
+          <a:p>
+            <a:pPr algn="l">
+              <a:lnSpc>
+                <a:spcPct val="115000"/>
+              </a:lnSpc>
+            </a:pPr>
+            <a:r>
+              <a:rPr sz="1000" b="0">
+                <a:solidFill>
+                  <a:srgbClr val="565B62"/>
+                </a:solidFill>
+                <a:latin typeface="Hiragino Sans"/>
+                <a:ea typeface="Hiragino Sans"/>
+              </a:rPr>
+              <a:t>制度情報の出典は各スライド記載のとおり。行政に力を入れてほしいこと1位「家事・育児や介護中の人への家庭と仕事の両立支援」64%（東京都「男女平等参画に関する世論調査」令和7年8月調査）</a:t>
+            </a:r>
+          </a:p>
+        </p:txBody>
+      </p:sp>
+      <p:sp>
+        <p:nvSpPr>
+          <p:cNvPr id="14" name="TextBox 13"/>
+          <p:cNvSpPr txBox="1"/>
+          <p:nvPr/>
+        </p:nvSpPr>
+        <p:spPr>
+          <a:xfrm>
+            <a:off x="11475720" y="228600"/>
+            <a:ext cx="548640" cy="365760"/>
+          </a:xfrm>
+          <a:prstGeom prst="rect">
+            <a:avLst/>
+          </a:prstGeom>
+          <a:noFill/>
+        </p:spPr>
+        <p:txBody>
+          <a:bodyPr wrap="square" anchor="t">
+            <a:spAutoFit/>
+          </a:bodyPr>
+          <a:lstStyle/>
+          <a:p>
+            <a:pPr algn="r">
+              <a:lnSpc>
+                <a:spcPct val="125000"/>
+              </a:lnSpc>
+            </a:pPr>
+            <a:r>
+              <a:rPr sz="1200" b="0">
+                <a:solidFill>
+                  <a:srgbClr val="565B62"/>
+                </a:solidFill>
+                <a:latin typeface="Hiragino Sans"/>
+                <a:ea typeface="Hiragino Sans"/>
+              </a:rPr>
+              <a:t>07</a:t>
+            </a:r>
+          </a:p>
+        </p:txBody>
+      </p:sp>
+    </p:spTree>
+  </p:cSld>
+  <p:clrMapOvr>
+    <a:masterClrMapping/>
+  </p:clrMapOvr>
+</p:sld>
+</file>
+
+<file path=ppt/slides/slide8.xml><?xml version="1.0" encoding="utf-8"?>
+<p:sld xmlns:a="http://schemas.openxmlformats.org/drawingml/2006/main" xmlns:p="http://schemas.openxmlformats.org/presentationml/2006/main" xmlns:r="http://schemas.openxmlformats.org/officeDocument/2006/relationships">
+  <p:cSld>
+    <p:bg>
+      <p:bgPr>
+        <a:solidFill>
+          <a:srgbClr val="FFFFFF"/>
+        </a:solidFill>
+        <a:effectLst/>
+      </p:bgPr>
+    </p:bg>
+    <p:spTree>
+      <p:nvGrpSpPr>
+        <p:cNvPr id="1" name=""/>
+        <p:cNvGrpSpPr/>
+        <p:nvPr/>
+      </p:nvGrpSpPr>
+      <p:grpSpPr/>
+      <p:sp>
+        <p:nvSpPr>
+          <p:cNvPr id="2" name="TextBox 1"/>
+          <p:cNvSpPr txBox="1"/>
+          <p:nvPr/>
+        </p:nvSpPr>
+        <p:spPr>
+          <a:xfrm>
+            <a:off x="640080" y="457200"/>
+            <a:ext cx="10515600" cy="822960"/>
           </a:xfrm>
           <a:prstGeom prst="rect">
             <a:avLst/>
@@ -6731,28 +7590,112 @@
               </a:lnSpc>
             </a:pPr>
             <a:r>
-              <a:rPr sz="1600" b="1">
-                <a:solidFill>
-                  <a:srgbClr val="1E3A5F"/>
+              <a:rPr sz="3000" b="1">
+                <a:solidFill>
+                  <a:srgbClr val="142842"/>
                 </a:solidFill>
                 <a:latin typeface="Hiragino Sans"/>
                 <a:ea typeface="Hiragino Sans"/>
               </a:rPr>
-              <a:t>(A) 課題の根拠として資料で引用するデータ（利用者の画面には出さない）</a:t>
-            </a:r>
-          </a:p>
-        </p:txBody>
-      </p:sp>
-      <p:sp>
-        <p:nvSpPr>
-          <p:cNvPr id="8" name="TextBox 7"/>
+              <a:t>参考｜利用データと使い方</a:t>
+            </a:r>
+          </a:p>
+        </p:txBody>
+      </p:sp>
+      <p:sp>
+        <p:nvSpPr>
+          <p:cNvPr id="3" name="Rectangle 2"/>
+          <p:cNvSpPr/>
+          <p:nvPr/>
+        </p:nvSpPr>
+        <p:spPr>
+          <a:xfrm>
+            <a:off x="640080" y="1371600"/>
+            <a:ext cx="10881360" cy="1874519"/>
+          </a:xfrm>
+          <a:prstGeom prst="rect">
+            <a:avLst/>
+          </a:prstGeom>
+          <a:solidFill>
+            <a:srgbClr val="F2F4F7"/>
+          </a:solidFill>
+          <a:ln>
+            <a:noFill/>
+          </a:ln>
+          <a:effectLst/>
+        </p:spPr>
+        <p:style>
+          <a:lnRef idx="1">
+            <a:schemeClr val="accent1"/>
+          </a:lnRef>
+          <a:fillRef idx="3">
+            <a:schemeClr val="accent1"/>
+          </a:fillRef>
+          <a:effectRef idx="2">
+            <a:schemeClr val="accent1"/>
+          </a:effectRef>
+          <a:fontRef idx="minor">
+            <a:schemeClr val="lt1"/>
+          </a:fontRef>
+        </p:style>
+        <p:txBody>
+          <a:bodyPr rtlCol="0" anchor="ctr"/>
+          <a:lstStyle/>
+          <a:p>
+            <a:pPr algn="ctr"/>
+          </a:p>
+        </p:txBody>
+      </p:sp>
+      <p:sp>
+        <p:nvSpPr>
+          <p:cNvPr id="4" name="TextBox 3"/>
           <p:cNvSpPr txBox="1"/>
           <p:nvPr/>
         </p:nvSpPr>
         <p:spPr>
           <a:xfrm>
-            <a:off x="868680" y="3977639"/>
-            <a:ext cx="10195560" cy="1691640"/>
+            <a:off x="868680" y="1508760"/>
+            <a:ext cx="10424160" cy="365760"/>
+          </a:xfrm>
+          <a:prstGeom prst="rect">
+            <a:avLst/>
+          </a:prstGeom>
+          <a:noFill/>
+        </p:spPr>
+        <p:txBody>
+          <a:bodyPr wrap="square" anchor="t">
+            <a:spAutoFit/>
+          </a:bodyPr>
+          <a:lstStyle/>
+          <a:p>
+            <a:pPr algn="l">
+              <a:lnSpc>
+                <a:spcPct val="125000"/>
+              </a:lnSpc>
+            </a:pPr>
+            <a:r>
+              <a:rPr sz="1600" b="1">
+                <a:solidFill>
+                  <a:srgbClr val="1E3A5F"/>
+                </a:solidFill>
+                <a:latin typeface="Hiragino Sans"/>
+                <a:ea typeface="Hiragino Sans"/>
+              </a:rPr>
+              <a:t>(B) アプリ内に出典付きで表示するデータ</a:t>
+            </a:r>
+          </a:p>
+        </p:txBody>
+      </p:sp>
+      <p:sp>
+        <p:nvSpPr>
+          <p:cNvPr id="5" name="TextBox 4"/>
+          <p:cNvSpPr txBox="1"/>
+          <p:nvPr/>
+        </p:nvSpPr>
+        <p:spPr>
+          <a:xfrm>
+            <a:off x="868680" y="1920240"/>
+            <a:ext cx="10195560" cy="1234440"/>
           </a:xfrm>
           <a:prstGeom prst="rect">
             <a:avLst/>
@@ -6778,7 +7721,7 @@
                 <a:latin typeface="Hiragino Sans"/>
                 <a:ea typeface="Hiragino Sans"/>
               </a:rPr>
-              <a:t>・男女雇用平等参画状況調査（令和7年度）／東京都産業労働局／CC BY 4.0</a:t>
+              <a:t>・東京都不妊検査等助成事業／東京都福祉局／公的な制度情報</a:t>
             </a:r>
           </a:p>
           <a:p>
@@ -6795,9 +7738,116 @@
                 <a:latin typeface="Hiragino Sans"/>
                 <a:ea typeface="Hiragino Sans"/>
               </a:rPr>
-              <a:t>・男女平等参画に関する世論調査（令和2年度）／東京都（政策企画局・生活文化局）</a:t>
-            </a:r>
-          </a:p>
+              <a:t>・育児・介護休業法、労働基準法、母子保健法／厚生労働省・こども家庭庁／公的な法令情報</a:t>
+            </a:r>
+          </a:p>
+        </p:txBody>
+      </p:sp>
+      <p:sp>
+        <p:nvSpPr>
+          <p:cNvPr id="6" name="Rectangle 5"/>
+          <p:cNvSpPr/>
+          <p:nvPr/>
+        </p:nvSpPr>
+        <p:spPr>
+          <a:xfrm>
+            <a:off x="640080" y="3429000"/>
+            <a:ext cx="10881360" cy="2331720"/>
+          </a:xfrm>
+          <a:prstGeom prst="rect">
+            <a:avLst/>
+          </a:prstGeom>
+          <a:noFill/>
+          <a:ln w="9525">
+            <a:solidFill>
+              <a:srgbClr val="D9D0BC"/>
+            </a:solidFill>
+          </a:ln>
+          <a:effectLst/>
+        </p:spPr>
+        <p:style>
+          <a:lnRef idx="1">
+            <a:schemeClr val="accent1"/>
+          </a:lnRef>
+          <a:fillRef idx="3">
+            <a:schemeClr val="accent1"/>
+          </a:fillRef>
+          <a:effectRef idx="2">
+            <a:schemeClr val="accent1"/>
+          </a:effectRef>
+          <a:fontRef idx="minor">
+            <a:schemeClr val="lt1"/>
+          </a:fontRef>
+        </p:style>
+        <p:txBody>
+          <a:bodyPr rtlCol="0" anchor="ctr"/>
+          <a:lstStyle/>
+          <a:p>
+            <a:pPr algn="ctr"/>
+          </a:p>
+        </p:txBody>
+      </p:sp>
+      <p:sp>
+        <p:nvSpPr>
+          <p:cNvPr id="7" name="TextBox 6"/>
+          <p:cNvSpPr txBox="1"/>
+          <p:nvPr/>
+        </p:nvSpPr>
+        <p:spPr>
+          <a:xfrm>
+            <a:off x="868680" y="3566160"/>
+            <a:ext cx="10424160" cy="365760"/>
+          </a:xfrm>
+          <a:prstGeom prst="rect">
+            <a:avLst/>
+          </a:prstGeom>
+          <a:noFill/>
+        </p:spPr>
+        <p:txBody>
+          <a:bodyPr wrap="square" anchor="t">
+            <a:spAutoFit/>
+          </a:bodyPr>
+          <a:lstStyle/>
+          <a:p>
+            <a:pPr algn="l">
+              <a:lnSpc>
+                <a:spcPct val="125000"/>
+              </a:lnSpc>
+            </a:pPr>
+            <a:r>
+              <a:rPr sz="1600" b="1">
+                <a:solidFill>
+                  <a:srgbClr val="1E3A5F"/>
+                </a:solidFill>
+                <a:latin typeface="Hiragino Sans"/>
+                <a:ea typeface="Hiragino Sans"/>
+              </a:rPr>
+              <a:t>(A) 課題の根拠として資料で引用するデータ（利用者の画面には出さない）</a:t>
+            </a:r>
+          </a:p>
+        </p:txBody>
+      </p:sp>
+      <p:sp>
+        <p:nvSpPr>
+          <p:cNvPr id="8" name="TextBox 7"/>
+          <p:cNvSpPr txBox="1"/>
+          <p:nvPr/>
+        </p:nvSpPr>
+        <p:spPr>
+          <a:xfrm>
+            <a:off x="868680" y="3977639"/>
+            <a:ext cx="10195560" cy="1691640"/>
+          </a:xfrm>
+          <a:prstGeom prst="rect">
+            <a:avLst/>
+          </a:prstGeom>
+          <a:noFill/>
+        </p:spPr>
+        <p:txBody>
+          <a:bodyPr wrap="square" anchor="t">
+            <a:spAutoFit/>
+          </a:bodyPr>
+          <a:lstStyle/>
           <a:p>
             <a:pPr algn="l">
               <a:lnSpc>
@@ -6812,7 +7862,7 @@
                 <a:latin typeface="Hiragino Sans"/>
                 <a:ea typeface="Hiragino Sans"/>
               </a:rPr>
-              <a:t>・子育て支援制度レジストリ（東京デジタル2030ビジョン こどもDX）／東京都デジタルサービス局／</a:t>
+              <a:t>・男女雇用平等参画状況調査（令和7年度）／東京都産業労働局／CC BY 4.0</a:t>
             </a:r>
           </a:p>
           <a:p>
@@ -6829,7 +7879,7 @@
                 <a:latin typeface="Hiragino Sans"/>
                 <a:ea typeface="Hiragino Sans"/>
               </a:rPr>
-              <a:t>  CC BY 4.0（7,812件の根拠として引用。更新終了のため制度上限の一次情報は東京都福祉局の</a:t>
+              <a:t>・男女平等参画に関する世論調査（令和7年8月調査）／東京都政策企画局</a:t>
             </a:r>
           </a:p>
           <a:p>
@@ -6846,6 +7896,40 @@
                 <a:latin typeface="Hiragino Sans"/>
                 <a:ea typeface="Hiragino Sans"/>
               </a:rPr>
+              <a:t>・子育て支援制度レジストリ（東京デジタル2030ビジョン こどもDX）／東京都デジタルサービス局／</a:t>
+            </a:r>
+          </a:p>
+          <a:p>
+            <a:pPr algn="l">
+              <a:lnSpc>
+                <a:spcPct val="140000"/>
+              </a:lnSpc>
+            </a:pPr>
+            <a:r>
+              <a:rPr sz="1400" b="0">
+                <a:solidFill>
+                  <a:srgbClr val="20242B"/>
+                </a:solidFill>
+                <a:latin typeface="Hiragino Sans"/>
+                <a:ea typeface="Hiragino Sans"/>
+              </a:rPr>
+              <a:t>  CC BY 4.0（7,812件の根拠として引用。更新終了のため制度上限の一次情報は東京都福祉局の</a:t>
+            </a:r>
+          </a:p>
+          <a:p>
+            <a:pPr algn="l">
+              <a:lnSpc>
+                <a:spcPct val="140000"/>
+              </a:lnSpc>
+            </a:pPr>
+            <a:r>
+              <a:rPr sz="1400" b="0">
+                <a:solidFill>
+                  <a:srgbClr val="20242B"/>
+                </a:solidFill>
+                <a:latin typeface="Hiragino Sans"/>
+                <a:ea typeface="Hiragino Sans"/>
+              </a:rPr>
               <a:t>  公式ページを採用）</a:t>
             </a:r>
           </a:p>
@@ -6966,7 +8050,7 @@
                 <a:latin typeface="Hiragino Sans"/>
                 <a:ea typeface="Hiragino Sans"/>
               </a:rPr>
-              <a:t>07</a:t>
+              <a:t>08</a:t>
             </a:r>
           </a:p>
         </p:txBody>

--- a/docs/hackathon/slides/lifecompass-slides.pptx
+++ b/docs/hackathon/slides/lifecompass-slides.pptx
@@ -589,7 +589,13 @@
           </a:p>
           <a:p>
             <a:r>
-              <a:t>家庭もキャリアもがんばりたい女性は、日々悩んでいます。ひとつは、周りからの見られ方。育児は女性が向いていると考える人が68パーセント、男性は7パーセント。企業は「管理職を望む女性が少ない」と言う。でも本人の悩みは「家庭責任が重いイメージ」。諦めているのではないでしょうか。</a:t>
+              <a:t>家庭もキャリアも、全力でがんばりたい。そういう女性が、身近にいます。でも、育児は女性が向いていると考える人が68パーセント、男性は7パーセント。企業は「女性が望んでいない」と見る。でも本人の悩みは「家庭責任が重いイメージ」。望んでいないのではなく、諦めているのではないでしょうか。</a:t>
+            </a:r>
+          </a:p>
+          <a:p/>
+          <a:p>
+            <a:r>
+              <a:t>※サブ見出しは読み上げない（スライドの読み上げにならないようにする）。</a:t>
             </a:r>
           </a:p>
         </p:txBody>
@@ -664,7 +670,7 @@
           </a:p>
           <a:p>
             <a:r>
-              <a:t>もうひとつは、使える制度を知らないこと。産前産後休暇を知らない人は6パーセント。でも出産障害休暇は、47パーセントが「職場にあるか分からない」。知らない制度は、選択肢に入りません。</a:t>
+              <a:t>そして、使える制度を知りません。産前産後休暇を知らない人は6パーセント。でも出産障害休暇は、47パーセントが「職場にあるか分からない」。知らない制度は、選択肢に入りません。</a:t>
             </a:r>
           </a:p>
         </p:txBody>
@@ -4508,8 +4514,8 @@
         </p:nvSpPr>
         <p:spPr>
           <a:xfrm>
-            <a:off x="640080" y="457200"/>
-            <a:ext cx="10515600" cy="822960"/>
+            <a:off x="640080" y="411480"/>
+            <a:ext cx="10515600" cy="731520"/>
           </a:xfrm>
           <a:prstGeom prst="rect">
             <a:avLst/>
@@ -4528,14 +4534,14 @@
               </a:lnSpc>
             </a:pPr>
             <a:r>
-              <a:rPr sz="3200" b="1">
+              <a:rPr sz="3400" b="1">
                 <a:solidFill>
                   <a:srgbClr val="142842"/>
                 </a:solidFill>
                 <a:latin typeface="Hiragino Sans"/>
                 <a:ea typeface="Hiragino Sans"/>
               </a:rPr>
-              <a:t>「女性は家庭の方が向いている」と言われる</a:t>
+              <a:t>家庭もキャリアも、全力でがんばりたい</a:t>
             </a:r>
           </a:p>
         </p:txBody>
@@ -4548,8 +4554,8 @@
         </p:nvSpPr>
         <p:spPr>
           <a:xfrm>
-            <a:off x="640080" y="1188720"/>
-            <a:ext cx="10515600" cy="365760"/>
+            <a:off x="640080" y="1097280"/>
+            <a:ext cx="10515600" cy="457200"/>
           </a:xfrm>
           <a:prstGeom prst="rect">
             <a:avLst/>
@@ -4568,7 +4574,47 @@
               </a:lnSpc>
             </a:pPr>
             <a:r>
-              <a:rPr sz="1600" b="0">
+              <a:rPr sz="2000" b="1">
+                <a:solidFill>
+                  <a:srgbClr val="C2708C"/>
+                </a:solidFill>
+                <a:latin typeface="Hiragino Sans"/>
+                <a:ea typeface="Hiragino Sans"/>
+              </a:rPr>
+              <a:t>——でも、周りは「女性は家庭の方が向いている」と言う</a:t>
+            </a:r>
+          </a:p>
+        </p:txBody>
+      </p:sp>
+      <p:sp>
+        <p:nvSpPr>
+          <p:cNvPr id="4" name="TextBox 3"/>
+          <p:cNvSpPr txBox="1"/>
+          <p:nvPr/>
+        </p:nvSpPr>
+        <p:spPr>
+          <a:xfrm>
+            <a:off x="640080" y="1691640"/>
+            <a:ext cx="10515600" cy="320040"/>
+          </a:xfrm>
+          <a:prstGeom prst="rect">
+            <a:avLst/>
+          </a:prstGeom>
+          <a:noFill/>
+        </p:spPr>
+        <p:txBody>
+          <a:bodyPr wrap="square" anchor="t">
+            <a:spAutoFit/>
+          </a:bodyPr>
+          <a:lstStyle/>
+          <a:p>
+            <a:pPr algn="l">
+              <a:lnSpc>
+                <a:spcPct val="125000"/>
+              </a:lnSpc>
+            </a:pPr>
+            <a:r>
+              <a:rPr sz="1400" b="0">
                 <a:solidFill>
                   <a:srgbClr val="565B62"/>
                 </a:solidFill>
@@ -4582,13 +4628,13 @@
       </p:sp>
       <p:sp>
         <p:nvSpPr>
-          <p:cNvPr id="4" name="TextBox 3"/>
+          <p:cNvPr id="5" name="TextBox 4"/>
           <p:cNvSpPr txBox="1"/>
           <p:nvPr/>
         </p:nvSpPr>
         <p:spPr>
           <a:xfrm>
-            <a:off x="822960" y="1737360"/>
+            <a:off x="822960" y="2103120"/>
             <a:ext cx="4937760" cy="457200"/>
           </a:xfrm>
           <a:prstGeom prst="rect">
@@ -4622,13 +4668,13 @@
       </p:sp>
       <p:sp>
         <p:nvSpPr>
-          <p:cNvPr id="5" name="TextBox 4"/>
+          <p:cNvPr id="6" name="TextBox 5"/>
           <p:cNvSpPr txBox="1"/>
           <p:nvPr/>
         </p:nvSpPr>
         <p:spPr>
           <a:xfrm>
-            <a:off x="822960" y="2240280"/>
+            <a:off x="822960" y="2606040"/>
             <a:ext cx="4937760" cy="1097280"/>
           </a:xfrm>
           <a:prstGeom prst="rect">
@@ -4648,7 +4694,7 @@
               </a:lnSpc>
             </a:pPr>
             <a:r>
-              <a:rPr sz="6000" b="1">
+              <a:rPr sz="5800" b="1">
                 <a:solidFill>
                   <a:srgbClr val="C2708C"/>
                 </a:solidFill>
@@ -4662,13 +4708,13 @@
       </p:sp>
       <p:sp>
         <p:nvSpPr>
-          <p:cNvPr id="6" name="TextBox 5"/>
+          <p:cNvPr id="7" name="TextBox 6"/>
           <p:cNvSpPr txBox="1"/>
           <p:nvPr/>
         </p:nvSpPr>
         <p:spPr>
           <a:xfrm>
-            <a:off x="5806440" y="2514600"/>
+            <a:off x="5806440" y="2880360"/>
             <a:ext cx="640080" cy="548640"/>
           </a:xfrm>
           <a:prstGeom prst="rect">
@@ -4702,13 +4748,13 @@
       </p:sp>
       <p:sp>
         <p:nvSpPr>
-          <p:cNvPr id="7" name="TextBox 6"/>
+          <p:cNvPr id="8" name="TextBox 7"/>
           <p:cNvSpPr txBox="1"/>
           <p:nvPr/>
         </p:nvSpPr>
         <p:spPr>
           <a:xfrm>
-            <a:off x="6446520" y="1737360"/>
+            <a:off x="6446520" y="2103120"/>
             <a:ext cx="4937760" cy="457200"/>
           </a:xfrm>
           <a:prstGeom prst="rect">
@@ -4742,13 +4788,13 @@
       </p:sp>
       <p:sp>
         <p:nvSpPr>
-          <p:cNvPr id="8" name="TextBox 7"/>
+          <p:cNvPr id="9" name="TextBox 8"/>
           <p:cNvSpPr txBox="1"/>
           <p:nvPr/>
         </p:nvSpPr>
         <p:spPr>
           <a:xfrm>
-            <a:off x="6446520" y="2240280"/>
+            <a:off x="6446520" y="2606040"/>
             <a:ext cx="4937760" cy="1097280"/>
           </a:xfrm>
           <a:prstGeom prst="rect">
@@ -4768,7 +4814,7 @@
               </a:lnSpc>
             </a:pPr>
             <a:r>
-              <a:rPr sz="6000" b="1">
+              <a:rPr sz="5800" b="1">
                 <a:solidFill>
                   <a:srgbClr val="1E3A5F"/>
                 </a:solidFill>
@@ -4782,13 +4828,13 @@
       </p:sp>
       <p:sp>
         <p:nvSpPr>
-          <p:cNvPr id="9" name="TextBox 8"/>
+          <p:cNvPr id="10" name="TextBox 9"/>
           <p:cNvSpPr txBox="1"/>
           <p:nvPr/>
         </p:nvSpPr>
         <p:spPr>
           <a:xfrm>
-            <a:off x="640080" y="3657600"/>
+            <a:off x="640080" y="3977639"/>
             <a:ext cx="10515600" cy="548640"/>
           </a:xfrm>
           <a:prstGeom prst="rect">
@@ -4822,14 +4868,14 @@
       </p:sp>
       <p:sp>
         <p:nvSpPr>
-          <p:cNvPr id="10" name="TextBox 9"/>
+          <p:cNvPr id="11" name="TextBox 10"/>
           <p:cNvSpPr txBox="1"/>
           <p:nvPr/>
         </p:nvSpPr>
         <p:spPr>
           <a:xfrm>
-            <a:off x="640080" y="4343400"/>
-            <a:ext cx="10515600" cy="1097280"/>
+            <a:off x="640080" y="4617720"/>
+            <a:ext cx="10515600" cy="1005840"/>
           </a:xfrm>
           <a:prstGeom prst="rect">
             <a:avLst/>
@@ -4879,7 +4925,7 @@
       </p:sp>
       <p:sp>
         <p:nvSpPr>
-          <p:cNvPr id="11" name="TextBox 10"/>
+          <p:cNvPr id="12" name="TextBox 11"/>
           <p:cNvSpPr txBox="1"/>
           <p:nvPr/>
         </p:nvSpPr>
@@ -4919,7 +4965,7 @@
       </p:sp>
       <p:sp>
         <p:nvSpPr>
-          <p:cNvPr id="12" name="TextBox 11"/>
+          <p:cNvPr id="13" name="TextBox 12"/>
           <p:cNvSpPr txBox="1"/>
           <p:nvPr/>
         </p:nvSpPr>
@@ -4991,8 +5037,8 @@
         </p:nvSpPr>
         <p:spPr>
           <a:xfrm>
-            <a:off x="640080" y="457200"/>
-            <a:ext cx="10515600" cy="822960"/>
+            <a:off x="640080" y="411480"/>
+            <a:ext cx="10515600" cy="731520"/>
           </a:xfrm>
           <a:prstGeom prst="rect">
             <a:avLst/>
@@ -5011,14 +5057,14 @@
               </a:lnSpc>
             </a:pPr>
             <a:r>
-              <a:rPr sz="3200" b="1">
+              <a:rPr sz="3400" b="1">
                 <a:solidFill>
                   <a:srgbClr val="142842"/>
                 </a:solidFill>
                 <a:latin typeface="Hiragino Sans"/>
                 <a:ea typeface="Hiragino Sans"/>
               </a:rPr>
-              <a:t>もうひとつの悩み。使える制度を、知らない</a:t>
+              <a:t>がんばりたくても、使える制度を知らない</a:t>
             </a:r>
           </a:p>
         </p:txBody>
@@ -5031,7 +5077,7 @@
         </p:nvSpPr>
         <p:spPr>
           <a:xfrm>
-            <a:off x="640080" y="1143000"/>
+            <a:off x="640080" y="1097280"/>
             <a:ext cx="10515600" cy="365760"/>
           </a:xfrm>
           <a:prstGeom prst="rect">

--- a/docs/hackathon/slides/lifecompass-slides.pptx
+++ b/docs/hackathon/slides/lifecompass-slides.pptx
@@ -4,17 +4,20 @@
   <p:sldMasterIdLst>
     <p:sldMasterId id="2147483648" r:id="rId1"/>
   </p:sldMasterIdLst>
+  <p:notesMasterIdLst>
+    <p:notesMasterId r:id="rId10"/>
+  </p:notesMasterIdLst>
   <p:sldIdLst>
-    <p:sldId id="256" r:id="rId7"/>
-    <p:sldId id="257" r:id="rId9"/>
-    <p:sldId id="258" r:id="rId10"/>
-    <p:sldId id="259" r:id="rId11"/>
-    <p:sldId id="260" r:id="rId12"/>
-    <p:sldId id="261" r:id="rId13"/>
-    <p:sldId id="262" r:id="rId14"/>
-    <p:sldId id="263" r:id="rId15"/>
+    <p:sldId id="256" r:id="rId2"/>
+    <p:sldId id="257" r:id="rId3"/>
+    <p:sldId id="258" r:id="rId4"/>
+    <p:sldId id="259" r:id="rId5"/>
+    <p:sldId id="260" r:id="rId6"/>
+    <p:sldId id="261" r:id="rId7"/>
+    <p:sldId id="262" r:id="rId8"/>
+    <p:sldId id="263" r:id="rId9"/>
   </p:sldIdLst>
-  <p:sldSz cx="12191695" cy="6858000" type="screen4x3"/>
+  <p:sldSz cx="12192000" cy="6858000"/>
   <p:notesSz cx="6858000" cy="9144000"/>
   <p:defaultTextStyle>
     <a:defPPr>
@@ -111,11 +114,27 @@
       </a:defRPr>
     </a:lvl9pPr>
   </p:defaultTextStyle>
+  <p:extLst>
+    <p:ext uri="{EFAFB233-063F-42B5-8137-9DF3F51BA10A}">
+      <p15:sldGuideLst xmlns:p15="http://schemas.microsoft.com/office/powerpoint/2012/main">
+        <p15:guide id="1" orient="horz" pos="2160">
+          <p15:clr>
+            <a:srgbClr val="A4A3A4"/>
+          </p15:clr>
+        </p15:guide>
+        <p15:guide id="2" pos="2880">
+          <p15:clr>
+            <a:srgbClr val="A4A3A4"/>
+          </p15:clr>
+        </p15:guide>
+      </p15:sldGuideLst>
+    </p:ext>
+  </p:extLst>
 </p:presentation>
 </file>
 
 <file path=ppt/notesMasters/notesMaster1.xml><?xml version="1.0" encoding="utf-8"?>
-<p:notesMaster xmlns:a="http://schemas.openxmlformats.org/drawingml/2006/main" xmlns:p="http://schemas.openxmlformats.org/presentationml/2006/main" xmlns:r="http://schemas.openxmlformats.org/officeDocument/2006/relationships">
+<p:notesMaster xmlns:a="http://schemas.openxmlformats.org/drawingml/2006/main" xmlns:r="http://schemas.openxmlformats.org/officeDocument/2006/relationships" xmlns:p="http://schemas.openxmlformats.org/presentationml/2006/main">
   <p:cSld>
     <p:bg>
       <p:bgRef idx="1001">
@@ -136,242 +155,17 @@
           <a:chExt cx="0" cy="0"/>
         </a:xfrm>
       </p:grpSpPr>
-      <p:sp>
-        <p:nvSpPr>
-          <p:cNvPr id="2" name="Header Placeholder 1"/>
-          <p:cNvSpPr>
-            <a:spLocks noGrp="1"/>
-          </p:cNvSpPr>
-          <p:nvPr>
-            <p:ph type="hdr" sz="quarter"/>
-          </p:nvPr>
-        </p:nvSpPr>
-        <p:spPr>
-          <a:xfrm>
-            <a:off x="0" y="0"/>
-            <a:ext cx="2971800" cy="457200"/>
-          </a:xfrm>
-          <a:prstGeom prst="rect">
-            <a:avLst/>
-          </a:prstGeom>
-        </p:spPr>
-        <p:txBody>
-          <a:bodyPr vert="horz" lIns="91440" tIns="45720" rIns="91440" bIns="45720" rtlCol="0"/>
-          <a:lstStyle>
-            <a:lvl1pPr algn="l">
-              <a:defRPr sz="1200"/>
-            </a:lvl1pPr>
-          </a:lstStyle>
-          <a:p>
-            <a:endParaRPr lang="en-US"/>
-          </a:p>
-        </p:txBody>
-      </p:sp>
-      <p:sp>
-        <p:nvSpPr>
-          <p:cNvPr id="3" name="Date Placeholder 2"/>
-          <p:cNvSpPr>
-            <a:spLocks noGrp="1"/>
-          </p:cNvSpPr>
-          <p:nvPr>
-            <p:ph type="dt" idx="1"/>
-          </p:nvPr>
-        </p:nvSpPr>
-        <p:spPr>
-          <a:xfrm>
-            <a:off x="3884613" y="0"/>
-            <a:ext cx="2971800" cy="457200"/>
-          </a:xfrm>
-          <a:prstGeom prst="rect">
-            <a:avLst/>
-          </a:prstGeom>
-        </p:spPr>
-        <p:txBody>
-          <a:bodyPr vert="horz" lIns="91440" tIns="45720" rIns="91440" bIns="45720" rtlCol="0"/>
-          <a:lstStyle>
-            <a:lvl1pPr algn="r">
-              <a:defRPr sz="1200"/>
-            </a:lvl1pPr>
-          </a:lstStyle>
-          <a:p>
-            <a:fld id="{0F89C1C7-3DCD-1040-A9CF-14679D8B5DDD}" type="datetimeFigureOut">
-              <a:rPr lang="en-US" smtClean="0"/>
-              <a:t>10/17/16</a:t>
-            </a:fld>
-            <a:endParaRPr lang="en-US"/>
-          </a:p>
-        </p:txBody>
-      </p:sp>
-      <p:sp>
-        <p:nvSpPr>
-          <p:cNvPr id="4" name="Slide Image Placeholder 3"/>
-          <p:cNvSpPr>
-            <a:spLocks noGrp="1" noRot="1" noChangeAspect="1"/>
-          </p:cNvSpPr>
-          <p:nvPr>
-            <p:ph type="sldImg" idx="2"/>
-          </p:nvPr>
-        </p:nvSpPr>
-        <p:spPr>
-          <a:xfrm>
-            <a:off x="1143000" y="685800"/>
-            <a:ext cx="4572000" cy="3429000"/>
-          </a:xfrm>
-          <a:prstGeom prst="rect">
-            <a:avLst/>
-          </a:prstGeom>
-          <a:noFill/>
-          <a:ln w="12700">
-            <a:solidFill>
-              <a:prstClr val="black"/>
-            </a:solidFill>
-          </a:ln>
-        </p:spPr>
-        <p:txBody>
-          <a:bodyPr vert="horz" lIns="91440" tIns="45720" rIns="91440" bIns="45720" rtlCol="0" anchor="ctr"/>
-          <a:lstStyle/>
-          <a:p>
-            <a:endParaRPr lang="en-US"/>
-          </a:p>
-        </p:txBody>
-      </p:sp>
-      <p:sp>
-        <p:nvSpPr>
-          <p:cNvPr id="5" name="Notes Placeholder 4"/>
-          <p:cNvSpPr>
-            <a:spLocks noGrp="1"/>
-          </p:cNvSpPr>
-          <p:nvPr>
-            <p:ph type="body" sz="quarter" idx="3"/>
-          </p:nvPr>
-        </p:nvSpPr>
-        <p:spPr>
-          <a:xfrm>
-            <a:off x="685800" y="4343400"/>
-            <a:ext cx="5486400" cy="4114800"/>
-          </a:xfrm>
-          <a:prstGeom prst="rect">
-            <a:avLst/>
-          </a:prstGeom>
-        </p:spPr>
-        <p:txBody>
-          <a:bodyPr vert="horz" lIns="91440" tIns="45720" rIns="91440" bIns="45720" rtlCol="0"/>
-          <a:lstStyle/>
-          <a:p>
-            <a:pPr lvl="0"/>
-            <a:r>
-              <a:rPr lang="en-US" smtClean="0"/>
-              <a:t>Click to edit Master text styles</a:t>
-            </a:r>
-          </a:p>
-          <a:p>
-            <a:pPr lvl="1"/>
-            <a:r>
-              <a:rPr lang="en-US" smtClean="0"/>
-              <a:t>Second level</a:t>
-            </a:r>
-          </a:p>
-          <a:p>
-            <a:pPr lvl="2"/>
-            <a:r>
-              <a:rPr lang="en-US" smtClean="0"/>
-              <a:t>Third level</a:t>
-            </a:r>
-          </a:p>
-          <a:p>
-            <a:pPr lvl="3"/>
-            <a:r>
-              <a:rPr lang="en-US" smtClean="0"/>
-              <a:t>Fourth level</a:t>
-            </a:r>
-          </a:p>
-          <a:p>
-            <a:pPr lvl="4"/>
-            <a:r>
-              <a:rPr lang="en-US" smtClean="0"/>
-              <a:t>Fifth level</a:t>
-            </a:r>
-            <a:endParaRPr lang="en-US"/>
-          </a:p>
-        </p:txBody>
-      </p:sp>
-      <p:sp>
-        <p:nvSpPr>
-          <p:cNvPr id="6" name="Footer Placeholder 5"/>
-          <p:cNvSpPr>
-            <a:spLocks noGrp="1"/>
-          </p:cNvSpPr>
-          <p:nvPr>
-            <p:ph type="ftr" sz="quarter" idx="4"/>
-          </p:nvPr>
-        </p:nvSpPr>
-        <p:spPr>
-          <a:xfrm>
-            <a:off x="0" y="8685213"/>
-            <a:ext cx="2971800" cy="457200"/>
-          </a:xfrm>
-          <a:prstGeom prst="rect">
-            <a:avLst/>
-          </a:prstGeom>
-        </p:spPr>
-        <p:txBody>
-          <a:bodyPr vert="horz" lIns="91440" tIns="45720" rIns="91440" bIns="45720" rtlCol="0" anchor="b"/>
-          <a:lstStyle>
-            <a:lvl1pPr algn="l">
-              <a:defRPr sz="1200"/>
-            </a:lvl1pPr>
-          </a:lstStyle>
-          <a:p>
-            <a:endParaRPr lang="en-US"/>
-          </a:p>
-        </p:txBody>
-      </p:sp>
-      <p:sp>
-        <p:nvSpPr>
-          <p:cNvPr id="7" name="Slide Number Placeholder 6"/>
-          <p:cNvSpPr>
-            <a:spLocks noGrp="1"/>
-          </p:cNvSpPr>
-          <p:nvPr>
-            <p:ph type="sldNum" sz="quarter" idx="5"/>
-          </p:nvPr>
-        </p:nvSpPr>
-        <p:spPr>
-          <a:xfrm>
-            <a:off x="3884613" y="8685213"/>
-            <a:ext cx="2971800" cy="457200"/>
-          </a:xfrm>
-          <a:prstGeom prst="rect">
-            <a:avLst/>
-          </a:prstGeom>
-        </p:spPr>
-        <p:txBody>
-          <a:bodyPr vert="horz" lIns="91440" tIns="45720" rIns="91440" bIns="45720" rtlCol="0" anchor="b"/>
-          <a:lstStyle>
-            <a:lvl1pPr algn="r">
-              <a:defRPr sz="1200"/>
-            </a:lvl1pPr>
-          </a:lstStyle>
-          <a:p>
-            <a:fld id="{BB5E49A5-4136-284D-997B-48E1D791AD67}" type="slidenum">
-              <a:rPr lang="en-US" smtClean="0"/>
-              <a:t>‹#›</a:t>
-            </a:fld>
-            <a:endParaRPr lang="en-US"/>
-          </a:p>
-        </p:txBody>
-      </p:sp>
     </p:spTree>
     <p:extLst>
       <p:ext uri="{BB962C8B-B14F-4D97-AF65-F5344CB8AC3E}">
-        <p14:creationId xmlns:p14="http://schemas.microsoft.com/office/powerpoint/2010/main" val="2623252185"/>
+        <p14:creationId xmlns:p14="http://schemas.microsoft.com/office/powerpoint/2010/main" val="1573604252"/>
       </p:ext>
     </p:extLst>
   </p:cSld>
   <p:clrMap bg1="lt1" tx1="dk1" bg2="lt2" tx2="dk2" accent1="accent1" accent2="accent2" accent3="accent3" accent4="accent4" accent5="accent5" accent6="accent6" hlink="hlink" folHlink="folHlink"/>
   <p:notesStyle>
-    <a:lvl1pPr marL="0" algn="l" defTabSz="457200" rtl="0" eaLnBrk="1" latinLnBrk="0" hangingPunct="1">
-      <a:defRPr sz="1200" kern="1200">
+    <a:lvl1pPr marL="0" algn="l" defTabSz="914400" rtl="0" eaLnBrk="1" latinLnBrk="0" hangingPunct="1">
+      <a:defRPr kumimoji="1" sz="1200" kern="1200">
         <a:solidFill>
           <a:schemeClr val="tx1"/>
         </a:solidFill>
@@ -380,8 +174,8 @@
         <a:cs typeface="+mn-cs"/>
       </a:defRPr>
     </a:lvl1pPr>
-    <a:lvl2pPr marL="457200" algn="l" defTabSz="457200" rtl="0" eaLnBrk="1" latinLnBrk="0" hangingPunct="1">
-      <a:defRPr sz="1200" kern="1200">
+    <a:lvl2pPr marL="457200" algn="l" defTabSz="914400" rtl="0" eaLnBrk="1" latinLnBrk="0" hangingPunct="1">
+      <a:defRPr kumimoji="1" sz="1200" kern="1200">
         <a:solidFill>
           <a:schemeClr val="tx1"/>
         </a:solidFill>
@@ -390,8 +184,8 @@
         <a:cs typeface="+mn-cs"/>
       </a:defRPr>
     </a:lvl2pPr>
-    <a:lvl3pPr marL="914400" algn="l" defTabSz="457200" rtl="0" eaLnBrk="1" latinLnBrk="0" hangingPunct="1">
-      <a:defRPr sz="1200" kern="1200">
+    <a:lvl3pPr marL="914400" algn="l" defTabSz="914400" rtl="0" eaLnBrk="1" latinLnBrk="0" hangingPunct="1">
+      <a:defRPr kumimoji="1" sz="1200" kern="1200">
         <a:solidFill>
           <a:schemeClr val="tx1"/>
         </a:solidFill>
@@ -400,8 +194,8 @@
         <a:cs typeface="+mn-cs"/>
       </a:defRPr>
     </a:lvl3pPr>
-    <a:lvl4pPr marL="1371600" algn="l" defTabSz="457200" rtl="0" eaLnBrk="1" latinLnBrk="0" hangingPunct="1">
-      <a:defRPr sz="1200" kern="1200">
+    <a:lvl4pPr marL="1371600" algn="l" defTabSz="914400" rtl="0" eaLnBrk="1" latinLnBrk="0" hangingPunct="1">
+      <a:defRPr kumimoji="1" sz="1200" kern="1200">
         <a:solidFill>
           <a:schemeClr val="tx1"/>
         </a:solidFill>
@@ -410,8 +204,8 @@
         <a:cs typeface="+mn-cs"/>
       </a:defRPr>
     </a:lvl4pPr>
-    <a:lvl5pPr marL="1828800" algn="l" defTabSz="457200" rtl="0" eaLnBrk="1" latinLnBrk="0" hangingPunct="1">
-      <a:defRPr sz="1200" kern="1200">
+    <a:lvl5pPr marL="1828800" algn="l" defTabSz="914400" rtl="0" eaLnBrk="1" latinLnBrk="0" hangingPunct="1">
+      <a:defRPr kumimoji="1" sz="1200" kern="1200">
         <a:solidFill>
           <a:schemeClr val="tx1"/>
         </a:solidFill>
@@ -420,8 +214,8 @@
         <a:cs typeface="+mn-cs"/>
       </a:defRPr>
     </a:lvl5pPr>
-    <a:lvl6pPr marL="2286000" algn="l" defTabSz="457200" rtl="0" eaLnBrk="1" latinLnBrk="0" hangingPunct="1">
-      <a:defRPr sz="1200" kern="1200">
+    <a:lvl6pPr marL="2286000" algn="l" defTabSz="914400" rtl="0" eaLnBrk="1" latinLnBrk="0" hangingPunct="1">
+      <a:defRPr kumimoji="1" sz="1200" kern="1200">
         <a:solidFill>
           <a:schemeClr val="tx1"/>
         </a:solidFill>
@@ -430,8 +224,8 @@
         <a:cs typeface="+mn-cs"/>
       </a:defRPr>
     </a:lvl6pPr>
-    <a:lvl7pPr marL="2743200" algn="l" defTabSz="457200" rtl="0" eaLnBrk="1" latinLnBrk="0" hangingPunct="1">
-      <a:defRPr sz="1200" kern="1200">
+    <a:lvl7pPr marL="2743200" algn="l" defTabSz="914400" rtl="0" eaLnBrk="1" latinLnBrk="0" hangingPunct="1">
+      <a:defRPr kumimoji="1" sz="1200" kern="1200">
         <a:solidFill>
           <a:schemeClr val="tx1"/>
         </a:solidFill>
@@ -440,8 +234,8 @@
         <a:cs typeface="+mn-cs"/>
       </a:defRPr>
     </a:lvl7pPr>
-    <a:lvl8pPr marL="3200400" algn="l" defTabSz="457200" rtl="0" eaLnBrk="1" latinLnBrk="0" hangingPunct="1">
-      <a:defRPr sz="1200" kern="1200">
+    <a:lvl8pPr marL="3200400" algn="l" defTabSz="914400" rtl="0" eaLnBrk="1" latinLnBrk="0" hangingPunct="1">
+      <a:defRPr kumimoji="1" sz="1200" kern="1200">
         <a:solidFill>
           <a:schemeClr val="tx1"/>
         </a:solidFill>
@@ -450,8 +244,8 @@
         <a:cs typeface="+mn-cs"/>
       </a:defRPr>
     </a:lvl8pPr>
-    <a:lvl9pPr marL="3657600" algn="l" defTabSz="457200" rtl="0" eaLnBrk="1" latinLnBrk="0" hangingPunct="1">
-      <a:defRPr sz="1200" kern="1200">
+    <a:lvl9pPr marL="3657600" algn="l" defTabSz="914400" rtl="0" eaLnBrk="1" latinLnBrk="0" hangingPunct="1">
+      <a:defRPr kumimoji="1" sz="1200" kern="1200">
         <a:solidFill>
           <a:schemeClr val="tx1"/>
         </a:solidFill>
@@ -465,7 +259,7 @@
 </file>
 
 <file path=ppt/notesSlides/notesSlide1.xml><?xml version="1.0" encoding="utf-8"?>
-<p:notes xmlns:a="http://schemas.openxmlformats.org/drawingml/2006/main" xmlns:p="http://schemas.openxmlformats.org/presentationml/2006/main" xmlns:r="http://schemas.openxmlformats.org/officeDocument/2006/relationships">
+<p:notes xmlns:a="http://schemas.openxmlformats.org/drawingml/2006/main" xmlns:r="http://schemas.openxmlformats.org/officeDocument/2006/relationships" xmlns:p="http://schemas.openxmlformats.org/presentationml/2006/main">
   <p:cSld>
     <p:spTree>
       <p:nvGrpSpPr>
@@ -485,48 +279,48 @@
         <p:nvSpPr>
           <p:cNvPr id="2" name="Slide Image Placeholder 1"/>
           <p:cNvSpPr>
+            <a:spLocks noGrp="1" noRot="1" noChangeAspect="1"/>
+          </p:cNvSpPr>
+          <p:nvPr>
+            <p:ph type="sldImg" idx="2"/>
+          </p:nvPr>
+        </p:nvSpPr>
+        <p:spPr/>
+      </p:sp>
+      <p:sp>
+        <p:nvSpPr>
+          <p:cNvPr id="3" name="Notes Placeholder 2"/>
+          <p:cNvSpPr>
             <a:spLocks noGrp="1"/>
           </p:cNvSpPr>
           <p:nvPr>
-            <p:ph type="sldImg" idx="2"/>
+            <p:ph type="body" sz="quarter" idx="3"/>
           </p:nvPr>
         </p:nvSpPr>
         <p:spPr/>
-      </p:sp>
-      <p:sp>
-        <p:nvSpPr>
-          <p:cNvPr id="3" name="Notes Placeholder 2"/>
+        <p:txBody>
+          <a:bodyPr/>
+          <a:lstStyle/>
+          <a:p>
+            <a:r>
+              <a:t>[話者: あかり / 0:00-0:13]</a:t>
+            </a:r>
+          </a:p>
+          <a:p>
+            <a:r>
+              <a:t>浦安ライフのあかりです。エンジニアの夫、りょうと作りました。女性がもっとイキイキできる社会に。その思いで作った、ライフコンパス東京です。</a:t>
+            </a:r>
+          </a:p>
+        </p:txBody>
+      </p:sp>
+      <p:sp>
+        <p:nvSpPr>
+          <p:cNvPr id="4" name="Slide Number Placeholder 3"/>
           <p:cNvSpPr>
             <a:spLocks noGrp="1"/>
           </p:cNvSpPr>
           <p:nvPr>
-            <p:ph type="body" idx="3" sz="quarter"/>
-          </p:nvPr>
-        </p:nvSpPr>
-        <p:spPr/>
-        <p:txBody>
-          <a:bodyPr/>
-          <a:lstStyle/>
-          <a:p>
-            <a:r>
-              <a:t>[話者: あかり / 0:00-0:13]</a:t>
-            </a:r>
-          </a:p>
-          <a:p>
-            <a:r>
-              <a:t>浦安ライフのあかりです。エンジニアの夫、りょうと作りました。女性がもっとイキイキできる社会に。その思いで作った、ライフコンパス東京です。</a:t>
-            </a:r>
-          </a:p>
-        </p:txBody>
-      </p:sp>
-      <p:sp>
-        <p:nvSpPr>
-          <p:cNvPr id="4" name="Slide Number Placeholder 3"/>
-          <p:cNvSpPr>
-            <a:spLocks noGrp="1"/>
-          </p:cNvSpPr>
-          <p:nvPr>
-            <p:ph type="sldNum" idx="5" sz="quarter"/>
+            <p:ph type="sldNum" sz="quarter" idx="5"/>
           </p:nvPr>
         </p:nvSpPr>
         <p:spPr/>
@@ -540,7 +334,7 @@
 </file>
 
 <file path=ppt/notesSlides/notesSlide2.xml><?xml version="1.0" encoding="utf-8"?>
-<p:notes xmlns:a="http://schemas.openxmlformats.org/drawingml/2006/main" xmlns:p="http://schemas.openxmlformats.org/presentationml/2006/main" xmlns:r="http://schemas.openxmlformats.org/officeDocument/2006/relationships">
+<p:notes xmlns:a="http://schemas.openxmlformats.org/drawingml/2006/main" xmlns:r="http://schemas.openxmlformats.org/officeDocument/2006/relationships" xmlns:p="http://schemas.openxmlformats.org/presentationml/2006/main">
   <p:cSld>
     <p:spTree>
       <p:nvGrpSpPr>
@@ -560,54 +354,56 @@
         <p:nvSpPr>
           <p:cNvPr id="2" name="Slide Image Placeholder 1"/>
           <p:cNvSpPr>
+            <a:spLocks noGrp="1" noRot="1" noChangeAspect="1"/>
+          </p:cNvSpPr>
+          <p:nvPr>
+            <p:ph type="sldImg" idx="2"/>
+          </p:nvPr>
+        </p:nvSpPr>
+        <p:spPr/>
+      </p:sp>
+      <p:sp>
+        <p:nvSpPr>
+          <p:cNvPr id="3" name="Notes Placeholder 2"/>
+          <p:cNvSpPr>
             <a:spLocks noGrp="1"/>
           </p:cNvSpPr>
           <p:nvPr>
-            <p:ph type="sldImg" idx="2"/>
+            <p:ph type="body" sz="quarter" idx="3"/>
           </p:nvPr>
         </p:nvSpPr>
         <p:spPr/>
-      </p:sp>
-      <p:sp>
-        <p:nvSpPr>
-          <p:cNvPr id="3" name="Notes Placeholder 2"/>
+        <p:txBody>
+          <a:bodyPr/>
+          <a:lstStyle/>
+          <a:p>
+            <a:r>
+              <a:t>[話者: あかり / 0:13-0:39]</a:t>
+            </a:r>
+          </a:p>
+          <a:p>
+            <a:r>
+              <a:t>家庭もキャリアも、全力でがんばりたい。そういう女性が、身近にいます。でも、育児は女性が向いていると考える人が68パーセント、男性は7パーセント。企業は「女性が望んでいない」と見る。でも本人の悩みは「家庭責任が重いイメージ」。望んでいないのではなく、諦めているのではないでしょうか。</a:t>
+            </a:r>
+          </a:p>
+          <a:p>
+            <a:endParaRPr/>
+          </a:p>
+          <a:p>
+            <a:r>
+              <a:t>※サブ見出しは読み上げない（スライドの読み上げにならないようにする）。</a:t>
+            </a:r>
+          </a:p>
+        </p:txBody>
+      </p:sp>
+      <p:sp>
+        <p:nvSpPr>
+          <p:cNvPr id="4" name="Slide Number Placeholder 3"/>
           <p:cNvSpPr>
             <a:spLocks noGrp="1"/>
           </p:cNvSpPr>
           <p:nvPr>
-            <p:ph type="body" idx="3" sz="quarter"/>
-          </p:nvPr>
-        </p:nvSpPr>
-        <p:spPr/>
-        <p:txBody>
-          <a:bodyPr/>
-          <a:lstStyle/>
-          <a:p>
-            <a:r>
-              <a:t>[話者: あかり / 0:13-0:39]</a:t>
-            </a:r>
-          </a:p>
-          <a:p>
-            <a:r>
-              <a:t>家庭もキャリアも、全力でがんばりたい。そういう女性が、身近にいます。でも、育児は女性が向いていると考える人が68パーセント、男性は7パーセント。企業は「女性が望んでいない」と見る。でも本人の悩みは「家庭責任が重いイメージ」。望んでいないのではなく、諦めているのではないでしょうか。</a:t>
-            </a:r>
-          </a:p>
-          <a:p/>
-          <a:p>
-            <a:r>
-              <a:t>※サブ見出しは読み上げない（スライドの読み上げにならないようにする）。</a:t>
-            </a:r>
-          </a:p>
-        </p:txBody>
-      </p:sp>
-      <p:sp>
-        <p:nvSpPr>
-          <p:cNvPr id="4" name="Slide Number Placeholder 3"/>
-          <p:cNvSpPr>
-            <a:spLocks noGrp="1"/>
-          </p:cNvSpPr>
-          <p:nvPr>
-            <p:ph type="sldNum" idx="5" sz="quarter"/>
+            <p:ph type="sldNum" sz="quarter" idx="5"/>
           </p:nvPr>
         </p:nvSpPr>
         <p:spPr/>
@@ -621,7 +417,7 @@
 </file>
 
 <file path=ppt/notesSlides/notesSlide3.xml><?xml version="1.0" encoding="utf-8"?>
-<p:notes xmlns:a="http://schemas.openxmlformats.org/drawingml/2006/main" xmlns:p="http://schemas.openxmlformats.org/presentationml/2006/main" xmlns:r="http://schemas.openxmlformats.org/officeDocument/2006/relationships">
+<p:notes xmlns:a="http://schemas.openxmlformats.org/drawingml/2006/main" xmlns:r="http://schemas.openxmlformats.org/officeDocument/2006/relationships" xmlns:p="http://schemas.openxmlformats.org/presentationml/2006/main">
   <p:cSld>
     <p:spTree>
       <p:nvGrpSpPr>
@@ -641,48 +437,48 @@
         <p:nvSpPr>
           <p:cNvPr id="2" name="Slide Image Placeholder 1"/>
           <p:cNvSpPr>
+            <a:spLocks noGrp="1" noRot="1" noChangeAspect="1"/>
+          </p:cNvSpPr>
+          <p:nvPr>
+            <p:ph type="sldImg" idx="2"/>
+          </p:nvPr>
+        </p:nvSpPr>
+        <p:spPr/>
+      </p:sp>
+      <p:sp>
+        <p:nvSpPr>
+          <p:cNvPr id="3" name="Notes Placeholder 2"/>
+          <p:cNvSpPr>
             <a:spLocks noGrp="1"/>
           </p:cNvSpPr>
           <p:nvPr>
-            <p:ph type="sldImg" idx="2"/>
+            <p:ph type="body" sz="quarter" idx="3"/>
           </p:nvPr>
         </p:nvSpPr>
         <p:spPr/>
-      </p:sp>
-      <p:sp>
-        <p:nvSpPr>
-          <p:cNvPr id="3" name="Notes Placeholder 2"/>
+        <p:txBody>
+          <a:bodyPr/>
+          <a:lstStyle/>
+          <a:p>
+            <a:r>
+              <a:t>[話者: あかり / 0:39-0:56]</a:t>
+            </a:r>
+          </a:p>
+          <a:p>
+            <a:r>
+              <a:t>そして、使える制度を知りません。産前産後休暇を知らない人は6パーセント。でも出産障害休暇は、47パーセントが「職場にあるか分からない」。知らない制度は、選択肢に入りません。</a:t>
+            </a:r>
+          </a:p>
+        </p:txBody>
+      </p:sp>
+      <p:sp>
+        <p:nvSpPr>
+          <p:cNvPr id="4" name="Slide Number Placeholder 3"/>
           <p:cNvSpPr>
             <a:spLocks noGrp="1"/>
           </p:cNvSpPr>
           <p:nvPr>
-            <p:ph type="body" idx="3" sz="quarter"/>
-          </p:nvPr>
-        </p:nvSpPr>
-        <p:spPr/>
-        <p:txBody>
-          <a:bodyPr/>
-          <a:lstStyle/>
-          <a:p>
-            <a:r>
-              <a:t>[話者: あかり / 0:39-0:56]</a:t>
-            </a:r>
-          </a:p>
-          <a:p>
-            <a:r>
-              <a:t>そして、使える制度を知りません。産前産後休暇を知らない人は6パーセント。でも出産障害休暇は、47パーセントが「職場にあるか分からない」。知らない制度は、選択肢に入りません。</a:t>
-            </a:r>
-          </a:p>
-        </p:txBody>
-      </p:sp>
-      <p:sp>
-        <p:nvSpPr>
-          <p:cNvPr id="4" name="Slide Number Placeholder 3"/>
-          <p:cNvSpPr>
-            <a:spLocks noGrp="1"/>
-          </p:cNvSpPr>
-          <p:nvPr>
-            <p:ph type="sldNum" idx="5" sz="quarter"/>
+            <p:ph type="sldNum" sz="quarter" idx="5"/>
           </p:nvPr>
         </p:nvSpPr>
         <p:spPr/>
@@ -696,7 +492,7 @@
 </file>
 
 <file path=ppt/notesSlides/notesSlide4.xml><?xml version="1.0" encoding="utf-8"?>
-<p:notes xmlns:a="http://schemas.openxmlformats.org/drawingml/2006/main" xmlns:p="http://schemas.openxmlformats.org/presentationml/2006/main" xmlns:r="http://schemas.openxmlformats.org/officeDocument/2006/relationships">
+<p:notes xmlns:a="http://schemas.openxmlformats.org/drawingml/2006/main" xmlns:r="http://schemas.openxmlformats.org/officeDocument/2006/relationships" xmlns:p="http://schemas.openxmlformats.org/presentationml/2006/main">
   <p:cSld>
     <p:spTree>
       <p:nvGrpSpPr>
@@ -716,48 +512,48 @@
         <p:nvSpPr>
           <p:cNvPr id="2" name="Slide Image Placeholder 1"/>
           <p:cNvSpPr>
+            <a:spLocks noGrp="1" noRot="1" noChangeAspect="1"/>
+          </p:cNvSpPr>
+          <p:nvPr>
+            <p:ph type="sldImg" idx="2"/>
+          </p:nvPr>
+        </p:nvSpPr>
+        <p:spPr/>
+      </p:sp>
+      <p:sp>
+        <p:nvSpPr>
+          <p:cNvPr id="3" name="Notes Placeholder 2"/>
+          <p:cNvSpPr>
             <a:spLocks noGrp="1"/>
           </p:cNvSpPr>
           <p:nvPr>
-            <p:ph type="sldImg" idx="2"/>
+            <p:ph type="body" sz="quarter" idx="3"/>
           </p:nvPr>
         </p:nvSpPr>
         <p:spPr/>
-      </p:sp>
-      <p:sp>
-        <p:nvSpPr>
-          <p:cNvPr id="3" name="Notes Placeholder 2"/>
+        <p:txBody>
+          <a:bodyPr/>
+          <a:lstStyle/>
+          <a:p>
+            <a:r>
+              <a:t>[話者: りょう / 0:56-1:14 ※ここから交代]</a:t>
+            </a:r>
+          </a:p>
+          <a:p>
+            <a:r>
+              <a:t>ここからは実装です。都の子育て支援制度は7,812件。読み切れる量ではありません。そこで、育休は子が2歳まで、といった国と都の制度上の上限だけを、実施主体と出典リンク付きで表示しました。</a:t>
+            </a:r>
+          </a:p>
+        </p:txBody>
+      </p:sp>
+      <p:sp>
+        <p:nvSpPr>
+          <p:cNvPr id="4" name="Slide Number Placeholder 3"/>
           <p:cNvSpPr>
             <a:spLocks noGrp="1"/>
           </p:cNvSpPr>
           <p:nvPr>
-            <p:ph type="body" idx="3" sz="quarter"/>
-          </p:nvPr>
-        </p:nvSpPr>
-        <p:spPr/>
-        <p:txBody>
-          <a:bodyPr/>
-          <a:lstStyle/>
-          <a:p>
-            <a:r>
-              <a:t>[話者: りょう / 0:56-1:14 ※ここから交代]</a:t>
-            </a:r>
-          </a:p>
-          <a:p>
-            <a:r>
-              <a:t>ここからは実装です。都の子育て支援制度は7,812件。読み切れる量ではありません。そこで、育休は子が2歳まで、といった国と都の制度上の上限だけを、実施主体と出典リンク付きで表示しました。</a:t>
-            </a:r>
-          </a:p>
-        </p:txBody>
-      </p:sp>
-      <p:sp>
-        <p:nvSpPr>
-          <p:cNvPr id="4" name="Slide Number Placeholder 3"/>
-          <p:cNvSpPr>
-            <a:spLocks noGrp="1"/>
-          </p:cNvSpPr>
-          <p:nvPr>
-            <p:ph type="sldNum" idx="5" sz="quarter"/>
+            <p:ph type="sldNum" sz="quarter" idx="5"/>
           </p:nvPr>
         </p:nvSpPr>
         <p:spPr/>
@@ -771,7 +567,7 @@
 </file>
 
 <file path=ppt/notesSlides/notesSlide5.xml><?xml version="1.0" encoding="utf-8"?>
-<p:notes xmlns:a="http://schemas.openxmlformats.org/drawingml/2006/main" xmlns:p="http://schemas.openxmlformats.org/presentationml/2006/main" xmlns:r="http://schemas.openxmlformats.org/officeDocument/2006/relationships">
+<p:notes xmlns:a="http://schemas.openxmlformats.org/drawingml/2006/main" xmlns:r="http://schemas.openxmlformats.org/officeDocument/2006/relationships" xmlns:p="http://schemas.openxmlformats.org/presentationml/2006/main">
   <p:cSld>
     <p:spTree>
       <p:nvGrpSpPr>
@@ -791,54 +587,56 @@
         <p:nvSpPr>
           <p:cNvPr id="2" name="Slide Image Placeholder 1"/>
           <p:cNvSpPr>
+            <a:spLocks noGrp="1" noRot="1" noChangeAspect="1"/>
+          </p:cNvSpPr>
+          <p:nvPr>
+            <p:ph type="sldImg" idx="2"/>
+          </p:nvPr>
+        </p:nvSpPr>
+        <p:spPr/>
+      </p:sp>
+      <p:sp>
+        <p:nvSpPr>
+          <p:cNvPr id="3" name="Notes Placeholder 2"/>
+          <p:cNvSpPr>
             <a:spLocks noGrp="1"/>
           </p:cNvSpPr>
           <p:nvPr>
-            <p:ph type="sldImg" idx="2"/>
+            <p:ph type="body" sz="quarter" idx="3"/>
           </p:nvPr>
         </p:nvSpPr>
         <p:spPr/>
-      </p:sp>
-      <p:sp>
-        <p:nvSpPr>
-          <p:cNvPr id="3" name="Notes Placeholder 2"/>
+        <p:txBody>
+          <a:bodyPr/>
+          <a:lstStyle/>
+          <a:p>
+            <a:r>
+              <a:t>[話者: りょう / 1:14-1:31]</a:t>
+            </a:r>
+          </a:p>
+          <a:p>
+            <a:r>
+              <a:t>結婚、出産、転職の予定を、同じ時間軸に自由に置けます。ひとつ動かすと、つながるイベントも一緒に動く。AIも、確認済みの制度情報だけを根拠に答えます。何度でも描き直せます。</a:t>
+            </a:r>
+          </a:p>
+          <a:p>
+            <a:endParaRPr/>
+          </a:p>
+          <a:p>
+            <a:r>
+              <a:t>[登壇メモ] 収録ではライブデモ（アプリ画面のリアルタイム操作）は一切できない（事務局「提出資料について」）。動く様子を見せる場合は、事前に収録した無音動画をこのスライドに埋め込み、画面共有オプションの2項目にチェックを入れて共有する。対話型AI（Gemini Function Calling）の応答画面は未サインインでは取得できないため（送信にGoogleサインインが必要）、サインイン状態で録画したものを使う。</a:t>
+            </a:r>
+          </a:p>
+        </p:txBody>
+      </p:sp>
+      <p:sp>
+        <p:nvSpPr>
+          <p:cNvPr id="4" name="Slide Number Placeholder 3"/>
           <p:cNvSpPr>
             <a:spLocks noGrp="1"/>
           </p:cNvSpPr>
           <p:nvPr>
-            <p:ph type="body" idx="3" sz="quarter"/>
-          </p:nvPr>
-        </p:nvSpPr>
-        <p:spPr/>
-        <p:txBody>
-          <a:bodyPr/>
-          <a:lstStyle/>
-          <a:p>
-            <a:r>
-              <a:t>[話者: りょう / 1:14-1:31]</a:t>
-            </a:r>
-          </a:p>
-          <a:p>
-            <a:r>
-              <a:t>結婚、出産、転職の予定を、同じ時間軸に自由に置けます。ひとつ動かすと、つながるイベントも一緒に動く。AIも、確認済みの制度情報だけを根拠に答えます。何度でも描き直せます。</a:t>
-            </a:r>
-          </a:p>
-          <a:p/>
-          <a:p>
-            <a:r>
-              <a:t>[登壇メモ] 収録ではライブデモ（アプリ画面のリアルタイム操作）は一切できない（事務局「提出資料について」）。動く様子を見せる場合は、事前に収録した無音動画をこのスライドに埋め込み、画面共有オプションの2項目にチェックを入れて共有する。対話型AI（Gemini Function Calling）の応答画面は未サインインでは取得できないため（送信にGoogleサインインが必要）、サインイン状態で録画したものを使う。</a:t>
-            </a:r>
-          </a:p>
-        </p:txBody>
-      </p:sp>
-      <p:sp>
-        <p:nvSpPr>
-          <p:cNvPr id="4" name="Slide Number Placeholder 3"/>
-          <p:cNvSpPr>
-            <a:spLocks noGrp="1"/>
-          </p:cNvSpPr>
-          <p:nvPr>
-            <p:ph type="sldNum" idx="5" sz="quarter"/>
+            <p:ph type="sldNum" sz="quarter" idx="5"/>
           </p:nvPr>
         </p:nvSpPr>
         <p:spPr/>
@@ -852,7 +650,7 @@
 </file>
 
 <file path=ppt/notesSlides/notesSlide6.xml><?xml version="1.0" encoding="utf-8"?>
-<p:notes xmlns:a="http://schemas.openxmlformats.org/drawingml/2006/main" xmlns:p="http://schemas.openxmlformats.org/presentationml/2006/main" xmlns:r="http://schemas.openxmlformats.org/officeDocument/2006/relationships">
+<p:notes xmlns:a="http://schemas.openxmlformats.org/drawingml/2006/main" xmlns:r="http://schemas.openxmlformats.org/officeDocument/2006/relationships" xmlns:p="http://schemas.openxmlformats.org/presentationml/2006/main">
   <p:cSld>
     <p:spTree>
       <p:nvGrpSpPr>
@@ -872,54 +670,56 @@
         <p:nvSpPr>
           <p:cNvPr id="2" name="Slide Image Placeholder 1"/>
           <p:cNvSpPr>
+            <a:spLocks noGrp="1" noRot="1" noChangeAspect="1"/>
+          </p:cNvSpPr>
+          <p:nvPr>
+            <p:ph type="sldImg" idx="2"/>
+          </p:nvPr>
+        </p:nvSpPr>
+        <p:spPr/>
+      </p:sp>
+      <p:sp>
+        <p:nvSpPr>
+          <p:cNvPr id="3" name="Notes Placeholder 2"/>
+          <p:cNvSpPr>
             <a:spLocks noGrp="1"/>
           </p:cNvSpPr>
           <p:nvPr>
-            <p:ph type="sldImg" idx="2"/>
+            <p:ph type="body" sz="quarter" idx="3"/>
           </p:nvPr>
         </p:nvSpPr>
         <p:spPr/>
-      </p:sp>
-      <p:sp>
-        <p:nvSpPr>
-          <p:cNvPr id="3" name="Notes Placeholder 2"/>
+        <p:txBody>
+          <a:bodyPr/>
+          <a:lstStyle/>
+          <a:p>
+            <a:r>
+              <a:t>[話者: りょう / 1:31-1:46]</a:t>
+            </a:r>
+          </a:p>
+          <a:p>
+            <a:r>
+              <a:t>この画面はログイン不要で、家庭で一緒に見られます。制度を「分からない」と答えた割合は、8項目すべてで男性の方が高い。男性が体験する場にも広げたいと考えています。</a:t>
+            </a:r>
+          </a:p>
+          <a:p>
+            <a:endParaRPr/>
+          </a:p>
+          <a:p>
+            <a:r>
+              <a:t>[質疑用] 男性の育休取得率は61.2%まで上がったが、取得期間は「1か月〜3か月未満」38.6%が最多で、女性の「6か月〜1年未満」30.2%とは差がある。</a:t>
+            </a:r>
+          </a:p>
+        </p:txBody>
+      </p:sp>
+      <p:sp>
+        <p:nvSpPr>
+          <p:cNvPr id="4" name="Slide Number Placeholder 3"/>
           <p:cNvSpPr>
             <a:spLocks noGrp="1"/>
           </p:cNvSpPr>
           <p:nvPr>
-            <p:ph type="body" idx="3" sz="quarter"/>
-          </p:nvPr>
-        </p:nvSpPr>
-        <p:spPr/>
-        <p:txBody>
-          <a:bodyPr/>
-          <a:lstStyle/>
-          <a:p>
-            <a:r>
-              <a:t>[話者: りょう / 1:31-1:46]</a:t>
-            </a:r>
-          </a:p>
-          <a:p>
-            <a:r>
-              <a:t>この画面はログイン不要で、家庭で一緒に見られます。制度を「分からない」と答えた割合は、8項目すべてで男性の方が高い。男性が体験する場にも広げたいと考えています。</a:t>
-            </a:r>
-          </a:p>
-          <a:p/>
-          <a:p>
-            <a:r>
-              <a:t>[質疑用] 男性の育休取得率は61.2%まで上がったが、取得期間は「1か月〜3か月未満」38.6%が最多で、女性の「6か月〜1年未満」30.2%とは差がある。</a:t>
-            </a:r>
-          </a:p>
-        </p:txBody>
-      </p:sp>
-      <p:sp>
-        <p:nvSpPr>
-          <p:cNvPr id="4" name="Slide Number Placeholder 3"/>
-          <p:cNvSpPr>
-            <a:spLocks noGrp="1"/>
-          </p:cNvSpPr>
-          <p:nvPr>
-            <p:ph type="sldNum" idx="5" sz="quarter"/>
+            <p:ph type="sldNum" sz="quarter" idx="5"/>
           </p:nvPr>
         </p:nvSpPr>
         <p:spPr/>
@@ -933,7 +733,7 @@
 </file>
 
 <file path=ppt/notesSlides/notesSlide7.xml><?xml version="1.0" encoding="utf-8"?>
-<p:notes xmlns:a="http://schemas.openxmlformats.org/drawingml/2006/main" xmlns:p="http://schemas.openxmlformats.org/presentationml/2006/main" xmlns:r="http://schemas.openxmlformats.org/officeDocument/2006/relationships">
+<p:notes xmlns:a="http://schemas.openxmlformats.org/drawingml/2006/main" xmlns:r="http://schemas.openxmlformats.org/officeDocument/2006/relationships" xmlns:p="http://schemas.openxmlformats.org/presentationml/2006/main">
   <p:cSld>
     <p:spTree>
       <p:nvGrpSpPr>
@@ -953,48 +753,48 @@
         <p:nvSpPr>
           <p:cNvPr id="2" name="Slide Image Placeholder 1"/>
           <p:cNvSpPr>
+            <a:spLocks noGrp="1" noRot="1" noChangeAspect="1"/>
+          </p:cNvSpPr>
+          <p:nvPr>
+            <p:ph type="sldImg" idx="2"/>
+          </p:nvPr>
+        </p:nvSpPr>
+        <p:spPr/>
+      </p:sp>
+      <p:sp>
+        <p:nvSpPr>
+          <p:cNvPr id="3" name="Notes Placeholder 2"/>
+          <p:cNvSpPr>
             <a:spLocks noGrp="1"/>
           </p:cNvSpPr>
           <p:nvPr>
-            <p:ph type="sldImg" idx="2"/>
+            <p:ph type="body" sz="quarter" idx="3"/>
           </p:nvPr>
         </p:nvSpPr>
         <p:spPr/>
-      </p:sp>
-      <p:sp>
-        <p:nvSpPr>
-          <p:cNvPr id="3" name="Notes Placeholder 2"/>
+        <p:txBody>
+          <a:bodyPr/>
+          <a:lstStyle/>
+          <a:p>
+            <a:r>
+              <a:t>[話者: あかり / 1:46-2:00 ※ここで交代して締める]</a:t>
+            </a:r>
+          </a:p>
+          <a:p>
+            <a:r>
+              <a:t>誰がどこで諦めたかのデータは、都にも国にもありません。ここで積み重なるプランが、次の施策につながることを願っています。決めるのは、いつも本人です。</a:t>
+            </a:r>
+          </a:p>
+        </p:txBody>
+      </p:sp>
+      <p:sp>
+        <p:nvSpPr>
+          <p:cNvPr id="4" name="Slide Number Placeholder 3"/>
           <p:cNvSpPr>
             <a:spLocks noGrp="1"/>
           </p:cNvSpPr>
           <p:nvPr>
-            <p:ph type="body" idx="3" sz="quarter"/>
-          </p:nvPr>
-        </p:nvSpPr>
-        <p:spPr/>
-        <p:txBody>
-          <a:bodyPr/>
-          <a:lstStyle/>
-          <a:p>
-            <a:r>
-              <a:t>[話者: あかり / 1:46-2:00 ※ここで交代して締める]</a:t>
-            </a:r>
-          </a:p>
-          <a:p>
-            <a:r>
-              <a:t>誰がどこで諦めたかのデータは、都にも国にもありません。ここで積み重なるプランが、次の施策につながることを願っています。決めるのは、いつも本人です。</a:t>
-            </a:r>
-          </a:p>
-        </p:txBody>
-      </p:sp>
-      <p:sp>
-        <p:nvSpPr>
-          <p:cNvPr id="4" name="Slide Number Placeholder 3"/>
-          <p:cNvSpPr>
-            <a:spLocks noGrp="1"/>
-          </p:cNvSpPr>
-          <p:nvPr>
-            <p:ph type="sldNum" idx="5" sz="quarter"/>
+            <p:ph type="sldNum" sz="quarter" idx="5"/>
           </p:nvPr>
         </p:nvSpPr>
         <p:spPr/>
@@ -1008,7 +808,7 @@
 </file>
 
 <file path=ppt/notesSlides/notesSlide8.xml><?xml version="1.0" encoding="utf-8"?>
-<p:notes xmlns:a="http://schemas.openxmlformats.org/drawingml/2006/main" xmlns:p="http://schemas.openxmlformats.org/presentationml/2006/main" xmlns:r="http://schemas.openxmlformats.org/officeDocument/2006/relationships">
+<p:notes xmlns:a="http://schemas.openxmlformats.org/drawingml/2006/main" xmlns:r="http://schemas.openxmlformats.org/officeDocument/2006/relationships" xmlns:p="http://schemas.openxmlformats.org/presentationml/2006/main">
   <p:cSld>
     <p:spTree>
       <p:nvGrpSpPr>
@@ -1028,43 +828,43 @@
         <p:nvSpPr>
           <p:cNvPr id="2" name="Slide Image Placeholder 1"/>
           <p:cNvSpPr>
+            <a:spLocks noGrp="1" noRot="1" noChangeAspect="1"/>
+          </p:cNvSpPr>
+          <p:nvPr>
+            <p:ph type="sldImg" idx="2"/>
+          </p:nvPr>
+        </p:nvSpPr>
+        <p:spPr/>
+      </p:sp>
+      <p:sp>
+        <p:nvSpPr>
+          <p:cNvPr id="3" name="Notes Placeholder 2"/>
+          <p:cNvSpPr>
             <a:spLocks noGrp="1"/>
           </p:cNvSpPr>
           <p:nvPr>
-            <p:ph type="sldImg" idx="2"/>
+            <p:ph type="body" sz="quarter" idx="3"/>
           </p:nvPr>
         </p:nvSpPr>
         <p:spPr/>
-      </p:sp>
-      <p:sp>
-        <p:nvSpPr>
-          <p:cNvPr id="3" name="Notes Placeholder 2"/>
+        <p:txBody>
+          <a:bodyPr/>
+          <a:lstStyle/>
+          <a:p>
+            <a:r>
+              <a:t>[付録：本編2分では話さない。質疑で聞かれたときのための補足]アプリ画面に表示する制度上限は、東京都福祉局の不妊検査等助成事業と、育児・介護休業法など国の法令から出典付きで取り込んでいます。課題の根拠として資料・プレゼンで引用した東京都の調査データは、利用者の画面には表示していません。</a:t>
+            </a:r>
+          </a:p>
+        </p:txBody>
+      </p:sp>
+      <p:sp>
+        <p:nvSpPr>
+          <p:cNvPr id="4" name="Slide Number Placeholder 3"/>
           <p:cNvSpPr>
             <a:spLocks noGrp="1"/>
           </p:cNvSpPr>
           <p:nvPr>
-            <p:ph type="body" idx="3" sz="quarter"/>
-          </p:nvPr>
-        </p:nvSpPr>
-        <p:spPr/>
-        <p:txBody>
-          <a:bodyPr/>
-          <a:lstStyle/>
-          <a:p>
-            <a:r>
-              <a:t>[付録：本編2分では話さない。質疑で聞かれたときのための補足]アプリ画面に表示する制度上限は、東京都福祉局の不妊検査等助成事業と、育児・介護休業法など国の法令から出典付きで取り込んでいます。課題の根拠として資料・プレゼンで引用した東京都の調査データは、利用者の画面には表示していません。</a:t>
-            </a:r>
-          </a:p>
-        </p:txBody>
-      </p:sp>
-      <p:sp>
-        <p:nvSpPr>
-          <p:cNvPr id="4" name="Slide Number Placeholder 3"/>
-          <p:cNvSpPr>
-            <a:spLocks noGrp="1"/>
-          </p:cNvSpPr>
-          <p:nvPr>
-            <p:ph type="sldNum" idx="5" sz="quarter"/>
+            <p:ph type="sldNum" sz="quarter" idx="5"/>
           </p:nvPr>
         </p:nvSpPr>
         <p:spPr/>
@@ -1115,10 +915,9 @@
           <a:lstStyle/>
           <a:p>
             <a:r>
-              <a:rPr lang="en-US" smtClean="0"/>
+              <a:rPr lang="en-US"/>
               <a:t>Click to edit Master title style</a:t>
             </a:r>
-            <a:endParaRPr lang="en-US"/>
           </a:p>
         </p:txBody>
       </p:sp>
@@ -1234,10 +1033,9 @@
           </a:lstStyle>
           <a:p>
             <a:r>
-              <a:rPr lang="en-US" smtClean="0"/>
+              <a:rPr lang="en-US"/>
               <a:t>Click to edit Master subtitle style</a:t>
             </a:r>
-            <a:endParaRPr lang="en-US"/>
           </a:p>
         </p:txBody>
       </p:sp>
@@ -1258,7 +1056,7 @@
           <a:p>
             <a:fld id="{5BCAD085-E8A6-8845-BD4E-CB4CCA059FC4}" type="datetimeFigureOut">
               <a:rPr lang="en-US" smtClean="0"/>
-              <a:t>1/27/13</a:t>
+              <a:t>8/30/26</a:t>
             </a:fld>
             <a:endParaRPr lang="en-US"/>
           </a:p>
@@ -1352,10 +1150,9 @@
           <a:lstStyle/>
           <a:p>
             <a:r>
-              <a:rPr lang="en-US" smtClean="0"/>
+              <a:rPr lang="en-US"/>
               <a:t>Click to edit Master title style</a:t>
             </a:r>
-            <a:endParaRPr lang="en-US"/>
           </a:p>
         </p:txBody>
       </p:sp>
@@ -1376,38 +1173,37 @@
           <a:p>
             <a:pPr lvl="0"/>
             <a:r>
-              <a:rPr lang="en-US" smtClean="0"/>
+              <a:rPr lang="en-US"/>
               <a:t>Click to edit Master text styles</a:t>
             </a:r>
           </a:p>
           <a:p>
             <a:pPr lvl="1"/>
             <a:r>
-              <a:rPr lang="en-US" smtClean="0"/>
+              <a:rPr lang="en-US"/>
               <a:t>Second level</a:t>
             </a:r>
           </a:p>
           <a:p>
             <a:pPr lvl="2"/>
             <a:r>
-              <a:rPr lang="en-US" smtClean="0"/>
+              <a:rPr lang="en-US"/>
               <a:t>Third level</a:t>
             </a:r>
           </a:p>
           <a:p>
             <a:pPr lvl="3"/>
             <a:r>
-              <a:rPr lang="en-US" smtClean="0"/>
+              <a:rPr lang="en-US"/>
               <a:t>Fourth level</a:t>
             </a:r>
           </a:p>
           <a:p>
             <a:pPr lvl="4"/>
             <a:r>
-              <a:rPr lang="en-US" smtClean="0"/>
+              <a:rPr lang="en-US"/>
               <a:t>Fifth level</a:t>
             </a:r>
-            <a:endParaRPr lang="en-US"/>
           </a:p>
         </p:txBody>
       </p:sp>
@@ -1428,7 +1224,7 @@
           <a:p>
             <a:fld id="{5BCAD085-E8A6-8845-BD4E-CB4CCA059FC4}" type="datetimeFigureOut">
               <a:rPr lang="en-US" smtClean="0"/>
-              <a:t>1/27/13</a:t>
+              <a:t>8/30/26</a:t>
             </a:fld>
             <a:endParaRPr lang="en-US"/>
           </a:p>
@@ -1527,10 +1323,9 @@
           <a:lstStyle/>
           <a:p>
             <a:r>
-              <a:rPr lang="en-US" smtClean="0"/>
+              <a:rPr lang="en-US"/>
               <a:t>Click to edit Master title style</a:t>
             </a:r>
-            <a:endParaRPr lang="en-US"/>
           </a:p>
         </p:txBody>
       </p:sp>
@@ -1556,38 +1351,37 @@
           <a:p>
             <a:pPr lvl="0"/>
             <a:r>
-              <a:rPr lang="en-US" smtClean="0"/>
+              <a:rPr lang="en-US"/>
               <a:t>Click to edit Master text styles</a:t>
             </a:r>
           </a:p>
           <a:p>
             <a:pPr lvl="1"/>
             <a:r>
-              <a:rPr lang="en-US" smtClean="0"/>
+              <a:rPr lang="en-US"/>
               <a:t>Second level</a:t>
             </a:r>
           </a:p>
           <a:p>
             <a:pPr lvl="2"/>
             <a:r>
-              <a:rPr lang="en-US" smtClean="0"/>
+              <a:rPr lang="en-US"/>
               <a:t>Third level</a:t>
             </a:r>
           </a:p>
           <a:p>
             <a:pPr lvl="3"/>
             <a:r>
-              <a:rPr lang="en-US" smtClean="0"/>
+              <a:rPr lang="en-US"/>
               <a:t>Fourth level</a:t>
             </a:r>
           </a:p>
           <a:p>
             <a:pPr lvl="4"/>
             <a:r>
-              <a:rPr lang="en-US" smtClean="0"/>
+              <a:rPr lang="en-US"/>
               <a:t>Fifth level</a:t>
             </a:r>
-            <a:endParaRPr lang="en-US"/>
           </a:p>
         </p:txBody>
       </p:sp>
@@ -1608,7 +1402,7 @@
           <a:p>
             <a:fld id="{5BCAD085-E8A6-8845-BD4E-CB4CCA059FC4}" type="datetimeFigureOut">
               <a:rPr lang="en-US" smtClean="0"/>
-              <a:t>1/27/13</a:t>
+              <a:t>8/30/26</a:t>
             </a:fld>
             <a:endParaRPr lang="en-US"/>
           </a:p>
@@ -1702,10 +1496,9 @@
           <a:lstStyle/>
           <a:p>
             <a:r>
-              <a:rPr lang="en-US" smtClean="0"/>
+              <a:rPr lang="en-US"/>
               <a:t>Click to edit Master title style</a:t>
             </a:r>
-            <a:endParaRPr lang="en-US"/>
           </a:p>
         </p:txBody>
       </p:sp>
@@ -1726,38 +1519,37 @@
           <a:p>
             <a:pPr lvl="0"/>
             <a:r>
-              <a:rPr lang="en-US" smtClean="0"/>
+              <a:rPr lang="en-US"/>
               <a:t>Click to edit Master text styles</a:t>
             </a:r>
           </a:p>
           <a:p>
             <a:pPr lvl="1"/>
             <a:r>
-              <a:rPr lang="en-US" smtClean="0"/>
+              <a:rPr lang="en-US"/>
               <a:t>Second level</a:t>
             </a:r>
           </a:p>
           <a:p>
             <a:pPr lvl="2"/>
             <a:r>
-              <a:rPr lang="en-US" smtClean="0"/>
+              <a:rPr lang="en-US"/>
               <a:t>Third level</a:t>
             </a:r>
           </a:p>
           <a:p>
             <a:pPr lvl="3"/>
             <a:r>
-              <a:rPr lang="en-US" smtClean="0"/>
+              <a:rPr lang="en-US"/>
               <a:t>Fourth level</a:t>
             </a:r>
           </a:p>
           <a:p>
             <a:pPr lvl="4"/>
             <a:r>
-              <a:rPr lang="en-US" smtClean="0"/>
+              <a:rPr lang="en-US"/>
               <a:t>Fifth level</a:t>
             </a:r>
-            <a:endParaRPr lang="en-US"/>
           </a:p>
         </p:txBody>
       </p:sp>
@@ -1778,7 +1570,7 @@
           <a:p>
             <a:fld id="{5BCAD085-E8A6-8845-BD4E-CB4CCA059FC4}" type="datetimeFigureOut">
               <a:rPr lang="en-US" smtClean="0"/>
-              <a:t>1/27/13</a:t>
+              <a:t>8/30/26</a:t>
             </a:fld>
             <a:endParaRPr lang="en-US"/>
           </a:p>
@@ -1881,10 +1673,9 @@
           </a:lstStyle>
           <a:p>
             <a:r>
-              <a:rPr lang="en-US" smtClean="0"/>
+              <a:rPr lang="en-US"/>
               <a:t>Click to edit Master title style</a:t>
             </a:r>
-            <a:endParaRPr lang="en-US"/>
           </a:p>
         </p:txBody>
       </p:sp>
@@ -2001,7 +1792,7 @@
           <a:p>
             <a:pPr lvl="0"/>
             <a:r>
-              <a:rPr lang="en-US" smtClean="0"/>
+              <a:rPr lang="en-US"/>
               <a:t>Click to edit Master text styles</a:t>
             </a:r>
           </a:p>
@@ -2024,7 +1815,7 @@
           <a:p>
             <a:fld id="{5BCAD085-E8A6-8845-BD4E-CB4CCA059FC4}" type="datetimeFigureOut">
               <a:rPr lang="en-US" smtClean="0"/>
-              <a:t>1/27/13</a:t>
+              <a:t>8/30/26</a:t>
             </a:fld>
             <a:endParaRPr lang="en-US"/>
           </a:p>
@@ -2118,10 +1909,9 @@
           <a:lstStyle/>
           <a:p>
             <a:r>
-              <a:rPr lang="en-US" smtClean="0"/>
+              <a:rPr lang="en-US"/>
               <a:t>Click to edit Master title style</a:t>
             </a:r>
-            <a:endParaRPr lang="en-US"/>
           </a:p>
         </p:txBody>
       </p:sp>
@@ -2175,38 +1965,37 @@
           <a:p>
             <a:pPr lvl="0"/>
             <a:r>
-              <a:rPr lang="en-US" smtClean="0"/>
+              <a:rPr lang="en-US"/>
               <a:t>Click to edit Master text styles</a:t>
             </a:r>
           </a:p>
           <a:p>
             <a:pPr lvl="1"/>
             <a:r>
-              <a:rPr lang="en-US" smtClean="0"/>
+              <a:rPr lang="en-US"/>
               <a:t>Second level</a:t>
             </a:r>
           </a:p>
           <a:p>
             <a:pPr lvl="2"/>
             <a:r>
-              <a:rPr lang="en-US" smtClean="0"/>
+              <a:rPr lang="en-US"/>
               <a:t>Third level</a:t>
             </a:r>
           </a:p>
           <a:p>
             <a:pPr lvl="3"/>
             <a:r>
-              <a:rPr lang="en-US" smtClean="0"/>
+              <a:rPr lang="en-US"/>
               <a:t>Fourth level</a:t>
             </a:r>
           </a:p>
           <a:p>
             <a:pPr lvl="4"/>
             <a:r>
-              <a:rPr lang="en-US" smtClean="0"/>
+              <a:rPr lang="en-US"/>
               <a:t>Fifth level</a:t>
             </a:r>
-            <a:endParaRPr lang="en-US"/>
           </a:p>
         </p:txBody>
       </p:sp>
@@ -2260,38 +2049,37 @@
           <a:p>
             <a:pPr lvl="0"/>
             <a:r>
-              <a:rPr lang="en-US" smtClean="0"/>
+              <a:rPr lang="en-US"/>
               <a:t>Click to edit Master text styles</a:t>
             </a:r>
           </a:p>
           <a:p>
             <a:pPr lvl="1"/>
             <a:r>
-              <a:rPr lang="en-US" smtClean="0"/>
+              <a:rPr lang="en-US"/>
               <a:t>Second level</a:t>
             </a:r>
           </a:p>
           <a:p>
             <a:pPr lvl="2"/>
             <a:r>
-              <a:rPr lang="en-US" smtClean="0"/>
+              <a:rPr lang="en-US"/>
               <a:t>Third level</a:t>
             </a:r>
           </a:p>
           <a:p>
             <a:pPr lvl="3"/>
             <a:r>
-              <a:rPr lang="en-US" smtClean="0"/>
+              <a:rPr lang="en-US"/>
               <a:t>Fourth level</a:t>
             </a:r>
           </a:p>
           <a:p>
             <a:pPr lvl="4"/>
             <a:r>
-              <a:rPr lang="en-US" smtClean="0"/>
+              <a:rPr lang="en-US"/>
               <a:t>Fifth level</a:t>
             </a:r>
-            <a:endParaRPr lang="en-US"/>
           </a:p>
         </p:txBody>
       </p:sp>
@@ -2312,7 +2100,7 @@
           <a:p>
             <a:fld id="{5BCAD085-E8A6-8845-BD4E-CB4CCA059FC4}" type="datetimeFigureOut">
               <a:rPr lang="en-US" smtClean="0"/>
-              <a:t>1/27/13</a:t>
+              <a:t>8/30/26</a:t>
             </a:fld>
             <a:endParaRPr lang="en-US"/>
           </a:p>
@@ -2410,10 +2198,9 @@
           </a:lstStyle>
           <a:p>
             <a:r>
-              <a:rPr lang="en-US" smtClean="0"/>
+              <a:rPr lang="en-US"/>
               <a:t>Click to edit Master title style</a:t>
             </a:r>
-            <a:endParaRPr lang="en-US"/>
           </a:p>
         </p:txBody>
       </p:sp>
@@ -2476,7 +2263,7 @@
           <a:p>
             <a:pPr lvl="0"/>
             <a:r>
-              <a:rPr lang="en-US" smtClean="0"/>
+              <a:rPr lang="en-US"/>
               <a:t>Click to edit Master text styles</a:t>
             </a:r>
           </a:p>
@@ -2532,38 +2319,37 @@
           <a:p>
             <a:pPr lvl="0"/>
             <a:r>
-              <a:rPr lang="en-US" smtClean="0"/>
+              <a:rPr lang="en-US"/>
               <a:t>Click to edit Master text styles</a:t>
             </a:r>
           </a:p>
           <a:p>
             <a:pPr lvl="1"/>
             <a:r>
-              <a:rPr lang="en-US" smtClean="0"/>
+              <a:rPr lang="en-US"/>
               <a:t>Second level</a:t>
             </a:r>
           </a:p>
           <a:p>
             <a:pPr lvl="2"/>
             <a:r>
-              <a:rPr lang="en-US" smtClean="0"/>
+              <a:rPr lang="en-US"/>
               <a:t>Third level</a:t>
             </a:r>
           </a:p>
           <a:p>
             <a:pPr lvl="3"/>
             <a:r>
-              <a:rPr lang="en-US" smtClean="0"/>
+              <a:rPr lang="en-US"/>
               <a:t>Fourth level</a:t>
             </a:r>
           </a:p>
           <a:p>
             <a:pPr lvl="4"/>
             <a:r>
-              <a:rPr lang="en-US" smtClean="0"/>
+              <a:rPr lang="en-US"/>
               <a:t>Fifth level</a:t>
             </a:r>
-            <a:endParaRPr lang="en-US"/>
           </a:p>
         </p:txBody>
       </p:sp>
@@ -2626,7 +2412,7 @@
           <a:p>
             <a:pPr lvl="0"/>
             <a:r>
-              <a:rPr lang="en-US" smtClean="0"/>
+              <a:rPr lang="en-US"/>
               <a:t>Click to edit Master text styles</a:t>
             </a:r>
           </a:p>
@@ -2682,38 +2468,37 @@
           <a:p>
             <a:pPr lvl="0"/>
             <a:r>
-              <a:rPr lang="en-US" smtClean="0"/>
+              <a:rPr lang="en-US"/>
               <a:t>Click to edit Master text styles</a:t>
             </a:r>
           </a:p>
           <a:p>
             <a:pPr lvl="1"/>
             <a:r>
-              <a:rPr lang="en-US" smtClean="0"/>
+              <a:rPr lang="en-US"/>
               <a:t>Second level</a:t>
             </a:r>
           </a:p>
           <a:p>
             <a:pPr lvl="2"/>
             <a:r>
-              <a:rPr lang="en-US" smtClean="0"/>
+              <a:rPr lang="en-US"/>
               <a:t>Third level</a:t>
             </a:r>
           </a:p>
           <a:p>
             <a:pPr lvl="3"/>
             <a:r>
-              <a:rPr lang="en-US" smtClean="0"/>
+              <a:rPr lang="en-US"/>
               <a:t>Fourth level</a:t>
             </a:r>
           </a:p>
           <a:p>
             <a:pPr lvl="4"/>
             <a:r>
-              <a:rPr lang="en-US" smtClean="0"/>
+              <a:rPr lang="en-US"/>
               <a:t>Fifth level</a:t>
             </a:r>
-            <a:endParaRPr lang="en-US"/>
           </a:p>
         </p:txBody>
       </p:sp>
@@ -2734,7 +2519,7 @@
           <a:p>
             <a:fld id="{5BCAD085-E8A6-8845-BD4E-CB4CCA059FC4}" type="datetimeFigureOut">
               <a:rPr lang="en-US" smtClean="0"/>
-              <a:t>1/27/13</a:t>
+              <a:t>8/30/26</a:t>
             </a:fld>
             <a:endParaRPr lang="en-US"/>
           </a:p>
@@ -2828,10 +2613,9 @@
           <a:lstStyle/>
           <a:p>
             <a:r>
-              <a:rPr lang="en-US" smtClean="0"/>
+              <a:rPr lang="en-US"/>
               <a:t>Click to edit Master title style</a:t>
             </a:r>
-            <a:endParaRPr lang="en-US"/>
           </a:p>
         </p:txBody>
       </p:sp>
@@ -2852,7 +2636,7 @@
           <a:p>
             <a:fld id="{5BCAD085-E8A6-8845-BD4E-CB4CCA059FC4}" type="datetimeFigureOut">
               <a:rPr lang="en-US" smtClean="0"/>
-              <a:t>1/27/13</a:t>
+              <a:t>8/30/26</a:t>
             </a:fld>
             <a:endParaRPr lang="en-US"/>
           </a:p>
@@ -2947,7 +2731,7 @@
           <a:p>
             <a:fld id="{5BCAD085-E8A6-8845-BD4E-CB4CCA059FC4}" type="datetimeFigureOut">
               <a:rPr lang="en-US" smtClean="0"/>
-              <a:t>1/27/13</a:t>
+              <a:t>8/30/26</a:t>
             </a:fld>
             <a:endParaRPr lang="en-US"/>
           </a:p>
@@ -3050,10 +2834,9 @@
           </a:lstStyle>
           <a:p>
             <a:r>
-              <a:rPr lang="en-US" smtClean="0"/>
+              <a:rPr lang="en-US"/>
               <a:t>Click to edit Master title style</a:t>
             </a:r>
-            <a:endParaRPr lang="en-US"/>
           </a:p>
         </p:txBody>
       </p:sp>
@@ -3107,38 +2890,37 @@
           <a:p>
             <a:pPr lvl="0"/>
             <a:r>
-              <a:rPr lang="en-US" smtClean="0"/>
+              <a:rPr lang="en-US"/>
               <a:t>Click to edit Master text styles</a:t>
             </a:r>
           </a:p>
           <a:p>
             <a:pPr lvl="1"/>
             <a:r>
-              <a:rPr lang="en-US" smtClean="0"/>
+              <a:rPr lang="en-US"/>
               <a:t>Second level</a:t>
             </a:r>
           </a:p>
           <a:p>
             <a:pPr lvl="2"/>
             <a:r>
-              <a:rPr lang="en-US" smtClean="0"/>
+              <a:rPr lang="en-US"/>
               <a:t>Third level</a:t>
             </a:r>
           </a:p>
           <a:p>
             <a:pPr lvl="3"/>
             <a:r>
-              <a:rPr lang="en-US" smtClean="0"/>
+              <a:rPr lang="en-US"/>
               <a:t>Fourth level</a:t>
             </a:r>
           </a:p>
           <a:p>
             <a:pPr lvl="4"/>
             <a:r>
-              <a:rPr lang="en-US" smtClean="0"/>
+              <a:rPr lang="en-US"/>
               <a:t>Fifth level</a:t>
             </a:r>
-            <a:endParaRPr lang="en-US"/>
           </a:p>
         </p:txBody>
       </p:sp>
@@ -3201,7 +2983,7 @@
           <a:p>
             <a:pPr lvl="0"/>
             <a:r>
-              <a:rPr lang="en-US" smtClean="0"/>
+              <a:rPr lang="en-US"/>
               <a:t>Click to edit Master text styles</a:t>
             </a:r>
           </a:p>
@@ -3224,7 +3006,7 @@
           <a:p>
             <a:fld id="{5BCAD085-E8A6-8845-BD4E-CB4CCA059FC4}" type="datetimeFigureOut">
               <a:rPr lang="en-US" smtClean="0"/>
-              <a:t>1/27/13</a:t>
+              <a:t>8/30/26</a:t>
             </a:fld>
             <a:endParaRPr lang="en-US"/>
           </a:p>
@@ -3327,10 +3109,9 @@
           </a:lstStyle>
           <a:p>
             <a:r>
-              <a:rPr lang="en-US" smtClean="0"/>
+              <a:rPr lang="en-US"/>
               <a:t>Click to edit Master title style</a:t>
             </a:r>
-            <a:endParaRPr lang="en-US"/>
           </a:p>
         </p:txBody>
       </p:sp>
@@ -3454,7 +3235,7 @@
           <a:p>
             <a:pPr lvl="0"/>
             <a:r>
-              <a:rPr lang="en-US" smtClean="0"/>
+              <a:rPr lang="en-US"/>
               <a:t>Click to edit Master text styles</a:t>
             </a:r>
           </a:p>
@@ -3477,7 +3258,7 @@
           <a:p>
             <a:fld id="{5BCAD085-E8A6-8845-BD4E-CB4CCA059FC4}" type="datetimeFigureOut">
               <a:rPr lang="en-US" smtClean="0"/>
-              <a:t>1/27/13</a:t>
+              <a:t>8/30/26</a:t>
             </a:fld>
             <a:endParaRPr lang="en-US"/>
           </a:p>
@@ -3586,10 +3367,9 @@
           <a:lstStyle/>
           <a:p>
             <a:r>
-              <a:rPr lang="en-US" smtClean="0"/>
+              <a:rPr lang="en-US"/>
               <a:t>Click to edit Master title style</a:t>
             </a:r>
-            <a:endParaRPr lang="en-US"/>
           </a:p>
         </p:txBody>
       </p:sp>
@@ -3620,38 +3400,37 @@
           <a:p>
             <a:pPr lvl="0"/>
             <a:r>
-              <a:rPr lang="en-US" smtClean="0"/>
+              <a:rPr lang="en-US"/>
               <a:t>Click to edit Master text styles</a:t>
             </a:r>
           </a:p>
           <a:p>
             <a:pPr lvl="1"/>
             <a:r>
-              <a:rPr lang="en-US" smtClean="0"/>
+              <a:rPr lang="en-US"/>
               <a:t>Second level</a:t>
             </a:r>
           </a:p>
           <a:p>
             <a:pPr lvl="2"/>
             <a:r>
-              <a:rPr lang="en-US" smtClean="0"/>
+              <a:rPr lang="en-US"/>
               <a:t>Third level</a:t>
             </a:r>
           </a:p>
           <a:p>
             <a:pPr lvl="3"/>
             <a:r>
-              <a:rPr lang="en-US" smtClean="0"/>
+              <a:rPr lang="en-US"/>
               <a:t>Fourth level</a:t>
             </a:r>
           </a:p>
           <a:p>
             <a:pPr lvl="4"/>
             <a:r>
-              <a:rPr lang="en-US" smtClean="0"/>
+              <a:rPr lang="en-US"/>
               <a:t>Fifth level</a:t>
             </a:r>
-            <a:endParaRPr lang="en-US"/>
           </a:p>
         </p:txBody>
       </p:sp>
@@ -3690,7 +3469,7 @@
           <a:p>
             <a:fld id="{5BCAD085-E8A6-8845-BD4E-CB4CCA059FC4}" type="datetimeFigureOut">
               <a:rPr lang="en-US" smtClean="0"/>
-              <a:t>1/27/13</a:t>
+              <a:t>8/30/26</a:t>
             </a:fld>
             <a:endParaRPr lang="en-US"/>
           </a:p>
@@ -4049,7 +3828,7 @@
 </file>
 
 <file path=ppt/slides/slide1.xml><?xml version="1.0" encoding="utf-8"?>
-<p:sld xmlns:a="http://schemas.openxmlformats.org/drawingml/2006/main" xmlns:p="http://schemas.openxmlformats.org/presentationml/2006/main" xmlns:r="http://schemas.openxmlformats.org/officeDocument/2006/relationships">
+<p:sld xmlns:a="http://schemas.openxmlformats.org/drawingml/2006/main" xmlns:r="http://schemas.openxmlformats.org/officeDocument/2006/relationships" xmlns:p="http://schemas.openxmlformats.org/presentationml/2006/main">
   <p:cSld>
     <p:bg>
       <p:bgPr>
@@ -4065,7 +3844,14 @@
         <p:cNvGrpSpPr/>
         <p:nvPr/>
       </p:nvGrpSpPr>
-      <p:grpSpPr/>
+      <p:grpSpPr>
+        <a:xfrm>
+          <a:off x="0" y="0"/>
+          <a:ext cx="0" cy="0"/>
+          <a:chOff x="0" y="0"/>
+          <a:chExt cx="0" cy="0"/>
+        </a:xfrm>
+      </p:grpSpPr>
       <p:sp>
         <p:nvSpPr>
           <p:cNvPr id="2" name="Rectangle 1"/>
@@ -4107,6 +3893,7 @@
           <a:lstStyle/>
           <a:p>
             <a:pPr algn="ctr"/>
+            <a:endParaRPr/>
           </a:p>
         </p:txBody>
       </p:sp>
@@ -4239,7 +4026,7 @@
           <p:nvPr/>
         </p:nvPicPr>
         <p:blipFill>
-          <a:blip r:embed="rId2"/>
+          <a:blip r:embed="rId3"/>
           <a:stretch>
             <a:fillRect/>
           </a:stretch>
@@ -4300,6 +4087,7 @@
           <a:lstStyle/>
           <a:p>
             <a:pPr algn="ctr"/>
+            <a:endParaRPr/>
           </a:p>
         </p:txBody>
       </p:sp>
@@ -4489,7 +4277,7 @@
 </file>
 
 <file path=ppt/slides/slide2.xml><?xml version="1.0" encoding="utf-8"?>
-<p:sld xmlns:a="http://schemas.openxmlformats.org/drawingml/2006/main" xmlns:p="http://schemas.openxmlformats.org/presentationml/2006/main" xmlns:r="http://schemas.openxmlformats.org/officeDocument/2006/relationships">
+<p:sld xmlns:a="http://schemas.openxmlformats.org/drawingml/2006/main" xmlns:r="http://schemas.openxmlformats.org/officeDocument/2006/relationships" xmlns:p="http://schemas.openxmlformats.org/presentationml/2006/main">
   <p:cSld>
     <p:bg>
       <p:bgPr>
@@ -4505,7 +4293,14 @@
         <p:cNvGrpSpPr/>
         <p:nvPr/>
       </p:nvGrpSpPr>
-      <p:grpSpPr/>
+      <p:grpSpPr>
+        <a:xfrm>
+          <a:off x="0" y="0"/>
+          <a:ext cx="0" cy="0"/>
+          <a:chOff x="0" y="0"/>
+          <a:chExt cx="0" cy="0"/>
+        </a:xfrm>
+      </p:grpSpPr>
       <p:sp>
         <p:nvSpPr>
           <p:cNvPr id="2" name="TextBox 1"/>
@@ -5012,7 +4807,7 @@
 </file>
 
 <file path=ppt/slides/slide3.xml><?xml version="1.0" encoding="utf-8"?>
-<p:sld xmlns:a="http://schemas.openxmlformats.org/drawingml/2006/main" xmlns:p="http://schemas.openxmlformats.org/presentationml/2006/main" xmlns:r="http://schemas.openxmlformats.org/officeDocument/2006/relationships">
+<p:sld xmlns:a="http://schemas.openxmlformats.org/drawingml/2006/main" xmlns:r="http://schemas.openxmlformats.org/officeDocument/2006/relationships" xmlns:p="http://schemas.openxmlformats.org/presentationml/2006/main">
   <p:cSld>
     <p:bg>
       <p:bgPr>
@@ -5028,7 +4823,14 @@
         <p:cNvGrpSpPr/>
         <p:nvPr/>
       </p:nvGrpSpPr>
-      <p:grpSpPr/>
+      <p:grpSpPr>
+        <a:xfrm>
+          <a:off x="0" y="0"/>
+          <a:ext cx="0" cy="0"/>
+          <a:chOff x="0" y="0"/>
+          <a:chExt cx="0" cy="0"/>
+        </a:xfrm>
+      </p:grpSpPr>
       <p:sp>
         <p:nvSpPr>
           <p:cNvPr id="2" name="TextBox 1"/>
@@ -5190,6 +4992,7 @@
           <a:lstStyle/>
           <a:p>
             <a:pPr algn="ctr"/>
+            <a:endParaRPr/>
           </a:p>
         </p:txBody>
       </p:sp>
@@ -5314,6 +5117,7 @@
           <a:lstStyle/>
           <a:p>
             <a:pPr algn="ctr"/>
+            <a:endParaRPr/>
           </a:p>
         </p:txBody>
       </p:sp>
@@ -5438,6 +5242,7 @@
           <a:lstStyle/>
           <a:p>
             <a:pPr algn="ctr"/>
+            <a:endParaRPr/>
           </a:p>
         </p:txBody>
       </p:sp>
@@ -5562,6 +5367,7 @@
           <a:lstStyle/>
           <a:p>
             <a:pPr algn="ctr"/>
+            <a:endParaRPr/>
           </a:p>
         </p:txBody>
       </p:sp>
@@ -5734,7 +5540,7 @@
 </file>
 
 <file path=ppt/slides/slide4.xml><?xml version="1.0" encoding="utf-8"?>
-<p:sld xmlns:a="http://schemas.openxmlformats.org/drawingml/2006/main" xmlns:p="http://schemas.openxmlformats.org/presentationml/2006/main" xmlns:r="http://schemas.openxmlformats.org/officeDocument/2006/relationships">
+<p:sld xmlns:a="http://schemas.openxmlformats.org/drawingml/2006/main" xmlns:r="http://schemas.openxmlformats.org/officeDocument/2006/relationships" xmlns:p="http://schemas.openxmlformats.org/presentationml/2006/main">
   <p:cSld>
     <p:bg>
       <p:bgPr>
@@ -5750,7 +5556,14 @@
         <p:cNvGrpSpPr/>
         <p:nvPr/>
       </p:nvGrpSpPr>
-      <p:grpSpPr/>
+      <p:grpSpPr>
+        <a:xfrm>
+          <a:off x="0" y="0"/>
+          <a:ext cx="0" cy="0"/>
+          <a:chOff x="0" y="0"/>
+          <a:chExt cx="0" cy="0"/>
+        </a:xfrm>
+      </p:grpSpPr>
       <p:sp>
         <p:nvSpPr>
           <p:cNvPr id="2" name="TextBox 1"/>
@@ -5800,7 +5613,7 @@
           <p:nvPr/>
         </p:nvPicPr>
         <p:blipFill>
-          <a:blip r:embed="rId2"/>
+          <a:blip r:embed="rId3"/>
           <a:stretch>
             <a:fillRect/>
           </a:stretch>
@@ -5861,6 +5674,7 @@
           <a:lstStyle/>
           <a:p>
             <a:pPr algn="ctr"/>
+            <a:endParaRPr/>
           </a:p>
         </p:txBody>
       </p:sp>
@@ -5945,6 +5759,7 @@
           <a:lstStyle/>
           <a:p>
             <a:pPr algn="ctr"/>
+            <a:endParaRPr/>
           </a:p>
         </p:txBody>
       </p:sp>
@@ -6029,6 +5844,7 @@
           <a:lstStyle/>
           <a:p>
             <a:pPr algn="ctr"/>
+            <a:endParaRPr/>
           </a:p>
         </p:txBody>
       </p:sp>
@@ -6218,7 +6034,7 @@
 </file>
 
 <file path=ppt/slides/slide5.xml><?xml version="1.0" encoding="utf-8"?>
-<p:sld xmlns:a="http://schemas.openxmlformats.org/drawingml/2006/main" xmlns:p="http://schemas.openxmlformats.org/presentationml/2006/main" xmlns:r="http://schemas.openxmlformats.org/officeDocument/2006/relationships">
+<p:sld xmlns:a="http://schemas.openxmlformats.org/drawingml/2006/main" xmlns:r="http://schemas.openxmlformats.org/officeDocument/2006/relationships" xmlns:p="http://schemas.openxmlformats.org/presentationml/2006/main">
   <p:cSld>
     <p:bg>
       <p:bgPr>
@@ -6234,7 +6050,14 @@
         <p:cNvGrpSpPr/>
         <p:nvPr/>
       </p:nvGrpSpPr>
-      <p:grpSpPr/>
+      <p:grpSpPr>
+        <a:xfrm>
+          <a:off x="0" y="0"/>
+          <a:ext cx="0" cy="0"/>
+          <a:chOff x="0" y="0"/>
+          <a:chExt cx="0" cy="0"/>
+        </a:xfrm>
+      </p:grpSpPr>
       <p:sp>
         <p:nvSpPr>
           <p:cNvPr id="2" name="TextBox 1"/>
@@ -6284,7 +6107,7 @@
           <p:nvPr/>
         </p:nvPicPr>
         <p:blipFill>
-          <a:blip r:embed="rId2"/>
+          <a:blip r:embed="rId3"/>
           <a:stretch>
             <a:fillRect/>
           </a:stretch>
@@ -6313,7 +6136,7 @@
           <p:nvPr/>
         </p:nvPicPr>
         <p:blipFill>
-          <a:blip r:embed="rId3"/>
+          <a:blip r:embed="rId4"/>
           <a:stretch>
             <a:fillRect/>
           </a:stretch>
@@ -6333,35 +6156,6 @@
           </a:ln>
         </p:spPr>
       </p:pic>
-      <p:pic>
-        <p:nvPicPr>
-          <p:cNvPr id="5" name="Picture 4" descr="event-detail-childbirth.jpg"/>
-          <p:cNvPicPr>
-            <a:picLocks noChangeAspect="1"/>
-          </p:cNvPicPr>
-          <p:nvPr/>
-        </p:nvPicPr>
-        <p:blipFill>
-          <a:blip r:embed="rId4"/>
-          <a:stretch>
-            <a:fillRect/>
-          </a:stretch>
-        </p:blipFill>
-        <p:spPr>
-          <a:xfrm>
-            <a:off x="6400800" y="1371600"/>
-            <a:ext cx="4846320" cy="2971800"/>
-          </a:xfrm>
-          <a:prstGeom prst="rect">
-            <a:avLst/>
-          </a:prstGeom>
-          <a:ln w="12700">
-            <a:solidFill>
-              <a:srgbClr val="D9D0BC"/>
-            </a:solidFill>
-          </a:ln>
-        </p:spPr>
-      </p:pic>
       <p:sp>
         <p:nvSpPr>
           <p:cNvPr id="6" name="TextBox 5"/>
@@ -6539,6 +6333,37 @@
           </a:p>
         </p:txBody>
       </p:sp>
+      <p:pic>
+        <p:nvPicPr>
+          <p:cNvPr id="10" name="図 9">
+            <a:extLst>
+              <a:ext uri="{FF2B5EF4-FFF2-40B4-BE49-F238E27FC236}">
+                <a16:creationId xmlns:a16="http://schemas.microsoft.com/office/drawing/2014/main" id="{D2A5932C-F464-C6E8-D60E-016A70A87F0B}"/>
+              </a:ext>
+            </a:extLst>
+          </p:cNvPr>
+          <p:cNvPicPr>
+            <a:picLocks noChangeAspect="1"/>
+          </p:cNvPicPr>
+          <p:nvPr/>
+        </p:nvPicPr>
+        <p:blipFill>
+          <a:blip r:embed="rId5"/>
+          <a:srcRect b="19452"/>
+          <a:stretch>
+            <a:fillRect/>
+          </a:stretch>
+        </p:blipFill>
+        <p:spPr>
+          <a:xfrm>
+            <a:off x="6400800" y="274236"/>
+            <a:ext cx="5486400" cy="4114884"/>
+          </a:xfrm>
+          <a:prstGeom prst="rect">
+            <a:avLst/>
+          </a:prstGeom>
+        </p:spPr>
+      </p:pic>
     </p:spTree>
   </p:cSld>
   <p:clrMapOvr>
@@ -6548,7 +6373,7 @@
 </file>
 
 <file path=ppt/slides/slide6.xml><?xml version="1.0" encoding="utf-8"?>
-<p:sld xmlns:a="http://schemas.openxmlformats.org/drawingml/2006/main" xmlns:p="http://schemas.openxmlformats.org/presentationml/2006/main" xmlns:r="http://schemas.openxmlformats.org/officeDocument/2006/relationships">
+<p:sld xmlns:a="http://schemas.openxmlformats.org/drawingml/2006/main" xmlns:r="http://schemas.openxmlformats.org/officeDocument/2006/relationships" xmlns:p="http://schemas.openxmlformats.org/presentationml/2006/main">
   <p:cSld>
     <p:bg>
       <p:bgPr>
@@ -6564,7 +6389,14 @@
         <p:cNvGrpSpPr/>
         <p:nvPr/>
       </p:nvGrpSpPr>
-      <p:grpSpPr/>
+      <p:grpSpPr>
+        <a:xfrm>
+          <a:off x="0" y="0"/>
+          <a:ext cx="0" cy="0"/>
+          <a:chOff x="0" y="0"/>
+          <a:chExt cx="0" cy="0"/>
+        </a:xfrm>
+      </p:grpSpPr>
       <p:sp>
         <p:nvSpPr>
           <p:cNvPr id="2" name="TextBox 1"/>
@@ -6686,6 +6518,7 @@
           <a:lstStyle/>
           <a:p>
             <a:pPr algn="ctr"/>
+            <a:endParaRPr/>
           </a:p>
         </p:txBody>
       </p:sp>
@@ -6810,6 +6643,7 @@
           <a:lstStyle/>
           <a:p>
             <a:pPr algn="ctr"/>
+            <a:endParaRPr/>
           </a:p>
         </p:txBody>
       </p:sp>
@@ -6999,7 +6833,7 @@
 </file>
 
 <file path=ppt/slides/slide7.xml><?xml version="1.0" encoding="utf-8"?>
-<p:sld xmlns:a="http://schemas.openxmlformats.org/drawingml/2006/main" xmlns:p="http://schemas.openxmlformats.org/presentationml/2006/main" xmlns:r="http://schemas.openxmlformats.org/officeDocument/2006/relationships">
+<p:sld xmlns:a="http://schemas.openxmlformats.org/drawingml/2006/main" xmlns:r="http://schemas.openxmlformats.org/officeDocument/2006/relationships" xmlns:p="http://schemas.openxmlformats.org/presentationml/2006/main">
   <p:cSld>
     <p:bg>
       <p:bgPr>
@@ -7015,7 +6849,14 @@
         <p:cNvGrpSpPr/>
         <p:nvPr/>
       </p:nvGrpSpPr>
-      <p:grpSpPr/>
+      <p:grpSpPr>
+        <a:xfrm>
+          <a:off x="0" y="0"/>
+          <a:ext cx="0" cy="0"/>
+          <a:chOff x="0" y="0"/>
+          <a:chExt cx="0" cy="0"/>
+        </a:xfrm>
+      </p:grpSpPr>
       <p:sp>
         <p:nvSpPr>
           <p:cNvPr id="2" name="TextBox 1"/>
@@ -7097,6 +6938,7 @@
           <a:lstStyle/>
           <a:p>
             <a:pPr algn="ctr"/>
+            <a:endParaRPr/>
           </a:p>
         </p:txBody>
       </p:sp>
@@ -7238,6 +7080,7 @@
           <a:lstStyle/>
           <a:p>
             <a:pPr algn="ctr"/>
+            <a:endParaRPr/>
           </a:p>
         </p:txBody>
       </p:sp>
@@ -7379,6 +7222,7 @@
           <a:lstStyle/>
           <a:p>
             <a:pPr algn="ctr"/>
+            <a:endParaRPr/>
           </a:p>
         </p:txBody>
       </p:sp>
@@ -7591,7 +7435,7 @@
 </file>
 
 <file path=ppt/slides/slide8.xml><?xml version="1.0" encoding="utf-8"?>
-<p:sld xmlns:a="http://schemas.openxmlformats.org/drawingml/2006/main" xmlns:p="http://schemas.openxmlformats.org/presentationml/2006/main" xmlns:r="http://schemas.openxmlformats.org/officeDocument/2006/relationships">
+<p:sld xmlns:a="http://schemas.openxmlformats.org/drawingml/2006/main" xmlns:r="http://schemas.openxmlformats.org/officeDocument/2006/relationships" xmlns:p="http://schemas.openxmlformats.org/presentationml/2006/main">
   <p:cSld>
     <p:bg>
       <p:bgPr>
@@ -7607,7 +7451,14 @@
         <p:cNvGrpSpPr/>
         <p:nvPr/>
       </p:nvGrpSpPr>
-      <p:grpSpPr/>
+      <p:grpSpPr>
+        <a:xfrm>
+          <a:off x="0" y="0"/>
+          <a:ext cx="0" cy="0"/>
+          <a:chOff x="0" y="0"/>
+          <a:chExt cx="0" cy="0"/>
+        </a:xfrm>
+      </p:grpSpPr>
       <p:sp>
         <p:nvSpPr>
           <p:cNvPr id="2" name="TextBox 1"/>
@@ -7689,6 +7540,7 @@
           <a:lstStyle/>
           <a:p>
             <a:pPr algn="ctr"/>
+            <a:endParaRPr/>
           </a:p>
         </p:txBody>
       </p:sp>
@@ -7830,6 +7682,7 @@
           <a:lstStyle/>
           <a:p>
             <a:pPr algn="ctr"/>
+            <a:endParaRPr/>
           </a:p>
         </p:txBody>
       </p:sp>
@@ -8430,7 +8283,7 @@
 </file>
 
 <file path=ppt/theme/theme2.xml><?xml version="1.0" encoding="utf-8"?>
-<a:theme xmlns:a="http://schemas.openxmlformats.org/drawingml/2006/main" name="Office Theme">
+<a:theme xmlns:a="http://schemas.openxmlformats.org/drawingml/2006/main" name="Office テーマ">
   <a:themeElements>
     <a:clrScheme name="Office">
       <a:dk1>
@@ -8440,44 +8293,44 @@
         <a:sysClr val="window" lastClr="FFFFFF"/>
       </a:lt1>
       <a:dk2>
-        <a:srgbClr val="1F497D"/>
+        <a:srgbClr val="0E2841"/>
       </a:dk2>
       <a:lt2>
-        <a:srgbClr val="EEECE1"/>
+        <a:srgbClr val="E8E8E8"/>
       </a:lt2>
       <a:accent1>
-        <a:srgbClr val="4F81BD"/>
+        <a:srgbClr val="156082"/>
       </a:accent1>
       <a:accent2>
-        <a:srgbClr val="C0504D"/>
+        <a:srgbClr val="E97132"/>
       </a:accent2>
       <a:accent3>
-        <a:srgbClr val="9BBB59"/>
+        <a:srgbClr val="196B24"/>
       </a:accent3>
       <a:accent4>
-        <a:srgbClr val="8064A2"/>
+        <a:srgbClr val="0F9ED5"/>
       </a:accent4>
       <a:accent5>
-        <a:srgbClr val="4BACC6"/>
+        <a:srgbClr val="A02B93"/>
       </a:accent5>
       <a:accent6>
-        <a:srgbClr val="F79646"/>
+        <a:srgbClr val="4EA72E"/>
       </a:accent6>
       <a:hlink>
-        <a:srgbClr val="0000FF"/>
+        <a:srgbClr val="467886"/>
       </a:hlink>
       <a:folHlink>
-        <a:srgbClr val="800080"/>
+        <a:srgbClr val="96607D"/>
       </a:folHlink>
     </a:clrScheme>
     <a:fontScheme name="Office">
       <a:majorFont>
-        <a:latin typeface="Calibri"/>
+        <a:latin typeface="游ゴシック Light" panose="02110004020202020204"/>
         <a:ea typeface=""/>
         <a:cs typeface=""/>
-        <a:font script="Jpan" typeface="ＭＳ Ｐゴシック"/>
+        <a:font script="Jpan" typeface="游ゴシック Light"/>
         <a:font script="Hang" typeface="맑은 고딕"/>
-        <a:font script="Hans" typeface="宋体"/>
+        <a:font script="Hans" typeface="等线 Light"/>
         <a:font script="Hant" typeface="新細明體"/>
         <a:font script="Arab" typeface="Times New Roman"/>
         <a:font script="Hebr" typeface="Times New Roman"/>
@@ -8505,14 +8358,31 @@
         <a:font script="Viet" typeface="Times New Roman"/>
         <a:font script="Uigh" typeface="Microsoft Uighur"/>
         <a:font script="Geor" typeface="Sylfaen"/>
+        <a:font script="Armn" typeface="Arial"/>
+        <a:font script="Bugi" typeface="Leelawadee UI"/>
+        <a:font script="Bopo" typeface="Microsoft JhengHei"/>
+        <a:font script="Java" typeface="Javanese Text"/>
+        <a:font script="Lisu" typeface="Segoe UI"/>
+        <a:font script="Mymr" typeface="Myanmar Text"/>
+        <a:font script="Nkoo" typeface="Ebrima"/>
+        <a:font script="Olck" typeface="Nirmala UI"/>
+        <a:font script="Osma" typeface="Ebrima"/>
+        <a:font script="Phag" typeface="Phagspa"/>
+        <a:font script="Syrn" typeface="Estrangelo Edessa"/>
+        <a:font script="Syrj" typeface="Estrangelo Edessa"/>
+        <a:font script="Syre" typeface="Estrangelo Edessa"/>
+        <a:font script="Sora" typeface="Nirmala UI"/>
+        <a:font script="Tale" typeface="Microsoft Tai Le"/>
+        <a:font script="Talu" typeface="Microsoft New Tai Lue"/>
+        <a:font script="Tfng" typeface="Ebrima"/>
       </a:majorFont>
       <a:minorFont>
-        <a:latin typeface="Calibri"/>
+        <a:latin typeface="游ゴシック" panose="02110004020202020204"/>
         <a:ea typeface=""/>
         <a:cs typeface=""/>
-        <a:font script="Jpan" typeface="ＭＳ Ｐゴシック"/>
+        <a:font script="Jpan" typeface="游ゴシック"/>
         <a:font script="Hang" typeface="맑은 고딕"/>
-        <a:font script="Hans" typeface="宋体"/>
+        <a:font script="Hans" typeface="等线"/>
         <a:font script="Hant" typeface="新細明體"/>
         <a:font script="Arab" typeface="Arial"/>
         <a:font script="Hebr" typeface="Arial"/>
@@ -8540,6 +8410,23 @@
         <a:font script="Viet" typeface="Arial"/>
         <a:font script="Uigh" typeface="Microsoft Uighur"/>
         <a:font script="Geor" typeface="Sylfaen"/>
+        <a:font script="Armn" typeface="Arial"/>
+        <a:font script="Bugi" typeface="Leelawadee UI"/>
+        <a:font script="Bopo" typeface="Microsoft JhengHei"/>
+        <a:font script="Java" typeface="Javanese Text"/>
+        <a:font script="Lisu" typeface="Segoe UI"/>
+        <a:font script="Mymr" typeface="Myanmar Text"/>
+        <a:font script="Nkoo" typeface="Ebrima"/>
+        <a:font script="Olck" typeface="Nirmala UI"/>
+        <a:font script="Osma" typeface="Ebrima"/>
+        <a:font script="Phag" typeface="Phagspa"/>
+        <a:font script="Syrn" typeface="Estrangelo Edessa"/>
+        <a:font script="Syrj" typeface="Estrangelo Edessa"/>
+        <a:font script="Syre" typeface="Estrangelo Edessa"/>
+        <a:font script="Sora" typeface="Nirmala UI"/>
+        <a:font script="Tale" typeface="Microsoft Tai Le"/>
+        <a:font script="Talu" typeface="Microsoft New Tai Lue"/>
+        <a:font script="Tfng" typeface="Ebrima"/>
       </a:minorFont>
     </a:fontScheme>
     <a:fmtScheme name="Office">
@@ -8551,180 +8438,136 @@
           <a:gsLst>
             <a:gs pos="0">
               <a:schemeClr val="phClr">
-                <a:tint val="50000"/>
-                <a:satMod val="300000"/>
+                <a:lumMod val="110000"/>
+                <a:satMod val="105000"/>
+                <a:tint val="67000"/>
               </a:schemeClr>
             </a:gs>
-            <a:gs pos="35000">
+            <a:gs pos="50000">
               <a:schemeClr val="phClr">
-                <a:tint val="37000"/>
-                <a:satMod val="300000"/>
+                <a:lumMod val="105000"/>
+                <a:satMod val="103000"/>
+                <a:tint val="73000"/>
               </a:schemeClr>
             </a:gs>
             <a:gs pos="100000">
               <a:schemeClr val="phClr">
-                <a:tint val="15000"/>
-                <a:satMod val="350000"/>
+                <a:lumMod val="105000"/>
+                <a:satMod val="109000"/>
+                <a:tint val="81000"/>
               </a:schemeClr>
             </a:gs>
           </a:gsLst>
-          <a:lin ang="16200000" scaled="1"/>
+          <a:lin ang="5400000" scaled="0"/>
         </a:gradFill>
         <a:gradFill rotWithShape="1">
           <a:gsLst>
             <a:gs pos="0">
               <a:schemeClr val="phClr">
-                <a:tint val="100000"/>
+                <a:satMod val="103000"/>
+                <a:lumMod val="102000"/>
+                <a:tint val="94000"/>
+              </a:schemeClr>
+            </a:gs>
+            <a:gs pos="50000">
+              <a:schemeClr val="phClr">
+                <a:satMod val="110000"/>
+                <a:lumMod val="100000"/>
                 <a:shade val="100000"/>
-                <a:satMod val="130000"/>
               </a:schemeClr>
             </a:gs>
             <a:gs pos="100000">
               <a:schemeClr val="phClr">
-                <a:tint val="50000"/>
-                <a:shade val="100000"/>
-                <a:satMod val="350000"/>
+                <a:lumMod val="99000"/>
+                <a:satMod val="120000"/>
+                <a:shade val="78000"/>
               </a:schemeClr>
             </a:gs>
           </a:gsLst>
-          <a:lin ang="16200000" scaled="0"/>
+          <a:lin ang="5400000" scaled="0"/>
         </a:gradFill>
       </a:fillStyleLst>
       <a:lnStyleLst>
-        <a:ln w="9525" cap="flat" cmpd="sng" algn="ctr">
+        <a:ln w="12700" cap="flat" cmpd="sng" algn="ctr">
           <a:solidFill>
-            <a:schemeClr val="phClr">
-              <a:shade val="95000"/>
-              <a:satMod val="105000"/>
-            </a:schemeClr>
+            <a:schemeClr val="phClr"/>
           </a:solidFill>
           <a:prstDash val="solid"/>
+          <a:miter lim="800000"/>
+        </a:ln>
+        <a:ln w="19050" cap="flat" cmpd="sng" algn="ctr">
+          <a:solidFill>
+            <a:schemeClr val="phClr"/>
+          </a:solidFill>
+          <a:prstDash val="solid"/>
+          <a:miter lim="800000"/>
         </a:ln>
         <a:ln w="25400" cap="flat" cmpd="sng" algn="ctr">
           <a:solidFill>
             <a:schemeClr val="phClr"/>
           </a:solidFill>
           <a:prstDash val="solid"/>
-        </a:ln>
-        <a:ln w="38100" cap="flat" cmpd="sng" algn="ctr">
-          <a:solidFill>
-            <a:schemeClr val="phClr"/>
-          </a:solidFill>
-          <a:prstDash val="solid"/>
+          <a:miter lim="800000"/>
         </a:ln>
       </a:lnStyleLst>
       <a:effectStyleLst>
         <a:effectStyle>
+          <a:effectLst/>
+        </a:effectStyle>
+        <a:effectStyle>
+          <a:effectLst/>
+        </a:effectStyle>
+        <a:effectStyle>
           <a:effectLst>
-            <a:outerShdw blurRad="40000" dist="20000" dir="5400000" rotWithShape="0">
+            <a:outerShdw blurRad="57150" dist="19050" dir="5400000" algn="ctr" rotWithShape="0">
               <a:srgbClr val="000000">
-                <a:alpha val="38000"/>
+                <a:alpha val="63000"/>
               </a:srgbClr>
             </a:outerShdw>
           </a:effectLst>
-        </a:effectStyle>
-        <a:effectStyle>
-          <a:effectLst>
-            <a:outerShdw blurRad="40000" dist="23000" dir="5400000" rotWithShape="0">
-              <a:srgbClr val="000000">
-                <a:alpha val="35000"/>
-              </a:srgbClr>
-            </a:outerShdw>
-          </a:effectLst>
-        </a:effectStyle>
-        <a:effectStyle>
-          <a:effectLst>
-            <a:outerShdw blurRad="40000" dist="23000" dir="5400000" rotWithShape="0">
-              <a:srgbClr val="000000">
-                <a:alpha val="35000"/>
-              </a:srgbClr>
-            </a:outerShdw>
-          </a:effectLst>
-          <a:scene3d>
-            <a:camera prst="orthographicFront">
-              <a:rot lat="0" lon="0" rev="0"/>
-            </a:camera>
-            <a:lightRig rig="threePt" dir="t">
-              <a:rot lat="0" lon="0" rev="1200000"/>
-            </a:lightRig>
-          </a:scene3d>
-          <a:sp3d>
-            <a:bevelT w="63500" h="25400"/>
-          </a:sp3d>
         </a:effectStyle>
       </a:effectStyleLst>
       <a:bgFillStyleLst>
         <a:solidFill>
           <a:schemeClr val="phClr"/>
         </a:solidFill>
+        <a:solidFill>
+          <a:schemeClr val="phClr">
+            <a:tint val="95000"/>
+            <a:satMod val="170000"/>
+          </a:schemeClr>
+        </a:solidFill>
         <a:gradFill rotWithShape="1">
           <a:gsLst>
             <a:gs pos="0">
               <a:schemeClr val="phClr">
-                <a:tint val="40000"/>
-                <a:satMod val="350000"/>
+                <a:tint val="93000"/>
+                <a:satMod val="150000"/>
+                <a:shade val="98000"/>
+                <a:lumMod val="102000"/>
               </a:schemeClr>
             </a:gs>
-            <a:gs pos="40000">
+            <a:gs pos="50000">
               <a:schemeClr val="phClr">
-                <a:tint val="45000"/>
-                <a:shade val="99000"/>
-                <a:satMod val="350000"/>
+                <a:tint val="98000"/>
+                <a:satMod val="130000"/>
+                <a:shade val="90000"/>
+                <a:lumMod val="103000"/>
               </a:schemeClr>
             </a:gs>
             <a:gs pos="100000">
               <a:schemeClr val="phClr">
-                <a:shade val="20000"/>
-                <a:satMod val="255000"/>
+                <a:shade val="63000"/>
+                <a:satMod val="120000"/>
               </a:schemeClr>
             </a:gs>
           </a:gsLst>
-          <a:path path="circle">
-            <a:fillToRect l="50000" t="-80000" r="50000" b="180000"/>
-          </a:path>
-        </a:gradFill>
-        <a:gradFill rotWithShape="1">
-          <a:gsLst>
-            <a:gs pos="0">
-              <a:schemeClr val="phClr">
-                <a:tint val="80000"/>
-                <a:satMod val="300000"/>
-              </a:schemeClr>
-            </a:gs>
-            <a:gs pos="100000">
-              <a:schemeClr val="phClr">
-                <a:shade val="30000"/>
-                <a:satMod val="200000"/>
-              </a:schemeClr>
-            </a:gs>
-          </a:gsLst>
-          <a:path path="circle">
-            <a:fillToRect l="50000" t="50000" r="50000" b="50000"/>
-          </a:path>
+          <a:lin ang="5400000" scaled="0"/>
         </a:gradFill>
       </a:bgFillStyleLst>
     </a:fmtScheme>
   </a:themeElements>
   <a:objectDefaults>
-    <a:spDef>
-      <a:spPr/>
-      <a:bodyPr/>
-      <a:lstStyle/>
-      <a:style>
-        <a:lnRef idx="1">
-          <a:schemeClr val="accent1"/>
-        </a:lnRef>
-        <a:fillRef idx="3">
-          <a:schemeClr val="accent1"/>
-        </a:fillRef>
-        <a:effectRef idx="2">
-          <a:schemeClr val="accent1"/>
-        </a:effectRef>
-        <a:fontRef idx="minor">
-          <a:schemeClr val="lt1"/>
-        </a:fontRef>
-      </a:style>
-    </a:spDef>
     <a:lnDef>
       <a:spPr/>
       <a:bodyPr/>
@@ -8746,5 +8589,10 @@
     </a:lnDef>
   </a:objectDefaults>
   <a:extraClrSchemeLst/>
+  <a:extLst>
+    <a:ext uri="{05A4C25C-085E-4340-85A3-A5531E510DB2}">
+      <thm15:themeFamily xmlns:thm15="http://schemas.microsoft.com/office/thememl/2012/main" name="Office Theme" id="{2E142A2C-CD16-42D6-873A-C26D2A0506FA}" vid="{1BDDFF52-6CD6-40A5-AB3C-68EB2F1E4D0A}"/>
+    </a:ext>
+  </a:extLst>
 </a:theme>
 </file>
--- a/docs/hackathon/slides/lifecompass-slides.pptx
+++ b/docs/hackathon/slides/lifecompass-slides.pptx
@@ -4,16 +4,20 @@
   <p:sldMasterIdLst>
     <p:sldMasterId id="2147483648" r:id="rId1"/>
   </p:sldMasterIdLst>
+  <p:notesMasterIdLst>
+    <p:notesMasterId r:id="rId10"/>
+  </p:notesMasterIdLst>
   <p:sldIdLst>
-    <p:sldId id="256" r:id="rId7"/>
-    <p:sldId id="257" r:id="rId9"/>
-    <p:sldId id="258" r:id="rId10"/>
-    <p:sldId id="259" r:id="rId11"/>
-    <p:sldId id="260" r:id="rId12"/>
-    <p:sldId id="261" r:id="rId13"/>
-    <p:sldId id="262" r:id="rId14"/>
+    <p:sldId id="256" r:id="rId2"/>
+    <p:sldId id="257" r:id="rId3"/>
+    <p:sldId id="258" r:id="rId4"/>
+    <p:sldId id="259" r:id="rId5"/>
+    <p:sldId id="260" r:id="rId6"/>
+    <p:sldId id="261" r:id="rId7"/>
+    <p:sldId id="262" r:id="rId8"/>
+    <p:sldId id="263" r:id="rId9"/>
   </p:sldIdLst>
-  <p:sldSz cx="12191695" cy="6858000" type="screen4x3"/>
+  <p:sldSz cx="12192000" cy="6858000"/>
   <p:notesSz cx="6858000" cy="9144000"/>
   <p:defaultTextStyle>
     <a:defPPr>
@@ -110,11 +114,27 @@
       </a:defRPr>
     </a:lvl9pPr>
   </p:defaultTextStyle>
+  <p:extLst>
+    <p:ext uri="{EFAFB233-063F-42B5-8137-9DF3F51BA10A}">
+      <p15:sldGuideLst xmlns:p15="http://schemas.microsoft.com/office/powerpoint/2012/main">
+        <p15:guide id="1" orient="horz" pos="2160">
+          <p15:clr>
+            <a:srgbClr val="A4A3A4"/>
+          </p15:clr>
+        </p15:guide>
+        <p15:guide id="2" pos="2880">
+          <p15:clr>
+            <a:srgbClr val="A4A3A4"/>
+          </p15:clr>
+        </p15:guide>
+      </p15:sldGuideLst>
+    </p:ext>
+  </p:extLst>
 </p:presentation>
 </file>
 
 <file path=ppt/notesMasters/notesMaster1.xml><?xml version="1.0" encoding="utf-8"?>
-<p:notesMaster xmlns:a="http://schemas.openxmlformats.org/drawingml/2006/main" xmlns:p="http://schemas.openxmlformats.org/presentationml/2006/main" xmlns:r="http://schemas.openxmlformats.org/officeDocument/2006/relationships">
+<p:notesMaster xmlns:a="http://schemas.openxmlformats.org/drawingml/2006/main" xmlns:r="http://schemas.openxmlformats.org/officeDocument/2006/relationships" xmlns:p="http://schemas.openxmlformats.org/presentationml/2006/main">
   <p:cSld>
     <p:bg>
       <p:bgRef idx="1001">
@@ -135,242 +155,17 @@
           <a:chExt cx="0" cy="0"/>
         </a:xfrm>
       </p:grpSpPr>
-      <p:sp>
-        <p:nvSpPr>
-          <p:cNvPr id="2" name="Header Placeholder 1"/>
-          <p:cNvSpPr>
-            <a:spLocks noGrp="1"/>
-          </p:cNvSpPr>
-          <p:nvPr>
-            <p:ph type="hdr" sz="quarter"/>
-          </p:nvPr>
-        </p:nvSpPr>
-        <p:spPr>
-          <a:xfrm>
-            <a:off x="0" y="0"/>
-            <a:ext cx="2971800" cy="457200"/>
-          </a:xfrm>
-          <a:prstGeom prst="rect">
-            <a:avLst/>
-          </a:prstGeom>
-        </p:spPr>
-        <p:txBody>
-          <a:bodyPr vert="horz" lIns="91440" tIns="45720" rIns="91440" bIns="45720" rtlCol="0"/>
-          <a:lstStyle>
-            <a:lvl1pPr algn="l">
-              <a:defRPr sz="1200"/>
-            </a:lvl1pPr>
-          </a:lstStyle>
-          <a:p>
-            <a:endParaRPr lang="en-US"/>
-          </a:p>
-        </p:txBody>
-      </p:sp>
-      <p:sp>
-        <p:nvSpPr>
-          <p:cNvPr id="3" name="Date Placeholder 2"/>
-          <p:cNvSpPr>
-            <a:spLocks noGrp="1"/>
-          </p:cNvSpPr>
-          <p:nvPr>
-            <p:ph type="dt" idx="1"/>
-          </p:nvPr>
-        </p:nvSpPr>
-        <p:spPr>
-          <a:xfrm>
-            <a:off x="3884613" y="0"/>
-            <a:ext cx="2971800" cy="457200"/>
-          </a:xfrm>
-          <a:prstGeom prst="rect">
-            <a:avLst/>
-          </a:prstGeom>
-        </p:spPr>
-        <p:txBody>
-          <a:bodyPr vert="horz" lIns="91440" tIns="45720" rIns="91440" bIns="45720" rtlCol="0"/>
-          <a:lstStyle>
-            <a:lvl1pPr algn="r">
-              <a:defRPr sz="1200"/>
-            </a:lvl1pPr>
-          </a:lstStyle>
-          <a:p>
-            <a:fld id="{0F89C1C7-3DCD-1040-A9CF-14679D8B5DDD}" type="datetimeFigureOut">
-              <a:rPr lang="en-US" smtClean="0"/>
-              <a:t>10/17/16</a:t>
-            </a:fld>
-            <a:endParaRPr lang="en-US"/>
-          </a:p>
-        </p:txBody>
-      </p:sp>
-      <p:sp>
-        <p:nvSpPr>
-          <p:cNvPr id="4" name="Slide Image Placeholder 3"/>
-          <p:cNvSpPr>
-            <a:spLocks noGrp="1" noRot="1" noChangeAspect="1"/>
-          </p:cNvSpPr>
-          <p:nvPr>
-            <p:ph type="sldImg" idx="2"/>
-          </p:nvPr>
-        </p:nvSpPr>
-        <p:spPr>
-          <a:xfrm>
-            <a:off x="1143000" y="685800"/>
-            <a:ext cx="4572000" cy="3429000"/>
-          </a:xfrm>
-          <a:prstGeom prst="rect">
-            <a:avLst/>
-          </a:prstGeom>
-          <a:noFill/>
-          <a:ln w="12700">
-            <a:solidFill>
-              <a:prstClr val="black"/>
-            </a:solidFill>
-          </a:ln>
-        </p:spPr>
-        <p:txBody>
-          <a:bodyPr vert="horz" lIns="91440" tIns="45720" rIns="91440" bIns="45720" rtlCol="0" anchor="ctr"/>
-          <a:lstStyle/>
-          <a:p>
-            <a:endParaRPr lang="en-US"/>
-          </a:p>
-        </p:txBody>
-      </p:sp>
-      <p:sp>
-        <p:nvSpPr>
-          <p:cNvPr id="5" name="Notes Placeholder 4"/>
-          <p:cNvSpPr>
-            <a:spLocks noGrp="1"/>
-          </p:cNvSpPr>
-          <p:nvPr>
-            <p:ph type="body" sz="quarter" idx="3"/>
-          </p:nvPr>
-        </p:nvSpPr>
-        <p:spPr>
-          <a:xfrm>
-            <a:off x="685800" y="4343400"/>
-            <a:ext cx="5486400" cy="4114800"/>
-          </a:xfrm>
-          <a:prstGeom prst="rect">
-            <a:avLst/>
-          </a:prstGeom>
-        </p:spPr>
-        <p:txBody>
-          <a:bodyPr vert="horz" lIns="91440" tIns="45720" rIns="91440" bIns="45720" rtlCol="0"/>
-          <a:lstStyle/>
-          <a:p>
-            <a:pPr lvl="0"/>
-            <a:r>
-              <a:rPr lang="en-US" smtClean="0"/>
-              <a:t>Click to edit Master text styles</a:t>
-            </a:r>
-          </a:p>
-          <a:p>
-            <a:pPr lvl="1"/>
-            <a:r>
-              <a:rPr lang="en-US" smtClean="0"/>
-              <a:t>Second level</a:t>
-            </a:r>
-          </a:p>
-          <a:p>
-            <a:pPr lvl="2"/>
-            <a:r>
-              <a:rPr lang="en-US" smtClean="0"/>
-              <a:t>Third level</a:t>
-            </a:r>
-          </a:p>
-          <a:p>
-            <a:pPr lvl="3"/>
-            <a:r>
-              <a:rPr lang="en-US" smtClean="0"/>
-              <a:t>Fourth level</a:t>
-            </a:r>
-          </a:p>
-          <a:p>
-            <a:pPr lvl="4"/>
-            <a:r>
-              <a:rPr lang="en-US" smtClean="0"/>
-              <a:t>Fifth level</a:t>
-            </a:r>
-            <a:endParaRPr lang="en-US"/>
-          </a:p>
-        </p:txBody>
-      </p:sp>
-      <p:sp>
-        <p:nvSpPr>
-          <p:cNvPr id="6" name="Footer Placeholder 5"/>
-          <p:cNvSpPr>
-            <a:spLocks noGrp="1"/>
-          </p:cNvSpPr>
-          <p:nvPr>
-            <p:ph type="ftr" sz="quarter" idx="4"/>
-          </p:nvPr>
-        </p:nvSpPr>
-        <p:spPr>
-          <a:xfrm>
-            <a:off x="0" y="8685213"/>
-            <a:ext cx="2971800" cy="457200"/>
-          </a:xfrm>
-          <a:prstGeom prst="rect">
-            <a:avLst/>
-          </a:prstGeom>
-        </p:spPr>
-        <p:txBody>
-          <a:bodyPr vert="horz" lIns="91440" tIns="45720" rIns="91440" bIns="45720" rtlCol="0" anchor="b"/>
-          <a:lstStyle>
-            <a:lvl1pPr algn="l">
-              <a:defRPr sz="1200"/>
-            </a:lvl1pPr>
-          </a:lstStyle>
-          <a:p>
-            <a:endParaRPr lang="en-US"/>
-          </a:p>
-        </p:txBody>
-      </p:sp>
-      <p:sp>
-        <p:nvSpPr>
-          <p:cNvPr id="7" name="Slide Number Placeholder 6"/>
-          <p:cNvSpPr>
-            <a:spLocks noGrp="1"/>
-          </p:cNvSpPr>
-          <p:nvPr>
-            <p:ph type="sldNum" sz="quarter" idx="5"/>
-          </p:nvPr>
-        </p:nvSpPr>
-        <p:spPr>
-          <a:xfrm>
-            <a:off x="3884613" y="8685213"/>
-            <a:ext cx="2971800" cy="457200"/>
-          </a:xfrm>
-          <a:prstGeom prst="rect">
-            <a:avLst/>
-          </a:prstGeom>
-        </p:spPr>
-        <p:txBody>
-          <a:bodyPr vert="horz" lIns="91440" tIns="45720" rIns="91440" bIns="45720" rtlCol="0" anchor="b"/>
-          <a:lstStyle>
-            <a:lvl1pPr algn="r">
-              <a:defRPr sz="1200"/>
-            </a:lvl1pPr>
-          </a:lstStyle>
-          <a:p>
-            <a:fld id="{BB5E49A5-4136-284D-997B-48E1D791AD67}" type="slidenum">
-              <a:rPr lang="en-US" smtClean="0"/>
-              <a:t>‹#›</a:t>
-            </a:fld>
-            <a:endParaRPr lang="en-US"/>
-          </a:p>
-        </p:txBody>
-      </p:sp>
     </p:spTree>
     <p:extLst>
       <p:ext uri="{BB962C8B-B14F-4D97-AF65-F5344CB8AC3E}">
-        <p14:creationId xmlns:p14="http://schemas.microsoft.com/office/powerpoint/2010/main" val="2623252185"/>
+        <p14:creationId xmlns:p14="http://schemas.microsoft.com/office/powerpoint/2010/main" val="1573604252"/>
       </p:ext>
     </p:extLst>
   </p:cSld>
   <p:clrMap bg1="lt1" tx1="dk1" bg2="lt2" tx2="dk2" accent1="accent1" accent2="accent2" accent3="accent3" accent4="accent4" accent5="accent5" accent6="accent6" hlink="hlink" folHlink="folHlink"/>
   <p:notesStyle>
-    <a:lvl1pPr marL="0" algn="l" defTabSz="457200" rtl="0" eaLnBrk="1" latinLnBrk="0" hangingPunct="1">
-      <a:defRPr sz="1200" kern="1200">
+    <a:lvl1pPr marL="0" algn="l" defTabSz="914400" rtl="0" eaLnBrk="1" latinLnBrk="0" hangingPunct="1">
+      <a:defRPr kumimoji="1" sz="1200" kern="1200">
         <a:solidFill>
           <a:schemeClr val="tx1"/>
         </a:solidFill>
@@ -379,8 +174,8 @@
         <a:cs typeface="+mn-cs"/>
       </a:defRPr>
     </a:lvl1pPr>
-    <a:lvl2pPr marL="457200" algn="l" defTabSz="457200" rtl="0" eaLnBrk="1" latinLnBrk="0" hangingPunct="1">
-      <a:defRPr sz="1200" kern="1200">
+    <a:lvl2pPr marL="457200" algn="l" defTabSz="914400" rtl="0" eaLnBrk="1" latinLnBrk="0" hangingPunct="1">
+      <a:defRPr kumimoji="1" sz="1200" kern="1200">
         <a:solidFill>
           <a:schemeClr val="tx1"/>
         </a:solidFill>
@@ -389,8 +184,8 @@
         <a:cs typeface="+mn-cs"/>
       </a:defRPr>
     </a:lvl2pPr>
-    <a:lvl3pPr marL="914400" algn="l" defTabSz="457200" rtl="0" eaLnBrk="1" latinLnBrk="0" hangingPunct="1">
-      <a:defRPr sz="1200" kern="1200">
+    <a:lvl3pPr marL="914400" algn="l" defTabSz="914400" rtl="0" eaLnBrk="1" latinLnBrk="0" hangingPunct="1">
+      <a:defRPr kumimoji="1" sz="1200" kern="1200">
         <a:solidFill>
           <a:schemeClr val="tx1"/>
         </a:solidFill>
@@ -399,8 +194,8 @@
         <a:cs typeface="+mn-cs"/>
       </a:defRPr>
     </a:lvl3pPr>
-    <a:lvl4pPr marL="1371600" algn="l" defTabSz="457200" rtl="0" eaLnBrk="1" latinLnBrk="0" hangingPunct="1">
-      <a:defRPr sz="1200" kern="1200">
+    <a:lvl4pPr marL="1371600" algn="l" defTabSz="914400" rtl="0" eaLnBrk="1" latinLnBrk="0" hangingPunct="1">
+      <a:defRPr kumimoji="1" sz="1200" kern="1200">
         <a:solidFill>
           <a:schemeClr val="tx1"/>
         </a:solidFill>
@@ -409,8 +204,8 @@
         <a:cs typeface="+mn-cs"/>
       </a:defRPr>
     </a:lvl4pPr>
-    <a:lvl5pPr marL="1828800" algn="l" defTabSz="457200" rtl="0" eaLnBrk="1" latinLnBrk="0" hangingPunct="1">
-      <a:defRPr sz="1200" kern="1200">
+    <a:lvl5pPr marL="1828800" algn="l" defTabSz="914400" rtl="0" eaLnBrk="1" latinLnBrk="0" hangingPunct="1">
+      <a:defRPr kumimoji="1" sz="1200" kern="1200">
         <a:solidFill>
           <a:schemeClr val="tx1"/>
         </a:solidFill>
@@ -419,8 +214,8 @@
         <a:cs typeface="+mn-cs"/>
       </a:defRPr>
     </a:lvl5pPr>
-    <a:lvl6pPr marL="2286000" algn="l" defTabSz="457200" rtl="0" eaLnBrk="1" latinLnBrk="0" hangingPunct="1">
-      <a:defRPr sz="1200" kern="1200">
+    <a:lvl6pPr marL="2286000" algn="l" defTabSz="914400" rtl="0" eaLnBrk="1" latinLnBrk="0" hangingPunct="1">
+      <a:defRPr kumimoji="1" sz="1200" kern="1200">
         <a:solidFill>
           <a:schemeClr val="tx1"/>
         </a:solidFill>
@@ -429,8 +224,8 @@
         <a:cs typeface="+mn-cs"/>
       </a:defRPr>
     </a:lvl6pPr>
-    <a:lvl7pPr marL="2743200" algn="l" defTabSz="457200" rtl="0" eaLnBrk="1" latinLnBrk="0" hangingPunct="1">
-      <a:defRPr sz="1200" kern="1200">
+    <a:lvl7pPr marL="2743200" algn="l" defTabSz="914400" rtl="0" eaLnBrk="1" latinLnBrk="0" hangingPunct="1">
+      <a:defRPr kumimoji="1" sz="1200" kern="1200">
         <a:solidFill>
           <a:schemeClr val="tx1"/>
         </a:solidFill>
@@ -439,8 +234,8 @@
         <a:cs typeface="+mn-cs"/>
       </a:defRPr>
     </a:lvl7pPr>
-    <a:lvl8pPr marL="3200400" algn="l" defTabSz="457200" rtl="0" eaLnBrk="1" latinLnBrk="0" hangingPunct="1">
-      <a:defRPr sz="1200" kern="1200">
+    <a:lvl8pPr marL="3200400" algn="l" defTabSz="914400" rtl="0" eaLnBrk="1" latinLnBrk="0" hangingPunct="1">
+      <a:defRPr kumimoji="1" sz="1200" kern="1200">
         <a:solidFill>
           <a:schemeClr val="tx1"/>
         </a:solidFill>
@@ -449,8 +244,8 @@
         <a:cs typeface="+mn-cs"/>
       </a:defRPr>
     </a:lvl8pPr>
-    <a:lvl9pPr marL="3657600" algn="l" defTabSz="457200" rtl="0" eaLnBrk="1" latinLnBrk="0" hangingPunct="1">
-      <a:defRPr sz="1200" kern="1200">
+    <a:lvl9pPr marL="3657600" algn="l" defTabSz="914400" rtl="0" eaLnBrk="1" latinLnBrk="0" hangingPunct="1">
+      <a:defRPr kumimoji="1" sz="1200" kern="1200">
         <a:solidFill>
           <a:schemeClr val="tx1"/>
         </a:solidFill>
@@ -464,7 +259,7 @@
 </file>
 
 <file path=ppt/notesSlides/notesSlide1.xml><?xml version="1.0" encoding="utf-8"?>
-<p:notes xmlns:a="http://schemas.openxmlformats.org/drawingml/2006/main" xmlns:p="http://schemas.openxmlformats.org/presentationml/2006/main" xmlns:r="http://schemas.openxmlformats.org/officeDocument/2006/relationships">
+<p:notes xmlns:a="http://schemas.openxmlformats.org/drawingml/2006/main" xmlns:r="http://schemas.openxmlformats.org/officeDocument/2006/relationships" xmlns:p="http://schemas.openxmlformats.org/presentationml/2006/main">
   <p:cSld>
     <p:spTree>
       <p:nvGrpSpPr>
@@ -484,43 +279,48 @@
         <p:nvSpPr>
           <p:cNvPr id="2" name="Slide Image Placeholder 1"/>
           <p:cNvSpPr>
+            <a:spLocks noGrp="1" noRot="1" noChangeAspect="1"/>
+          </p:cNvSpPr>
+          <p:nvPr>
+            <p:ph type="sldImg" idx="2"/>
+          </p:nvPr>
+        </p:nvSpPr>
+        <p:spPr/>
+      </p:sp>
+      <p:sp>
+        <p:nvSpPr>
+          <p:cNvPr id="3" name="Notes Placeholder 2"/>
+          <p:cNvSpPr>
             <a:spLocks noGrp="1"/>
           </p:cNvSpPr>
           <p:nvPr>
-            <p:ph type="sldImg" idx="2"/>
+            <p:ph type="body" sz="quarter" idx="3"/>
           </p:nvPr>
         </p:nvSpPr>
         <p:spPr/>
-      </p:sp>
-      <p:sp>
-        <p:nvSpPr>
-          <p:cNvPr id="3" name="Notes Placeholder 2"/>
+        <p:txBody>
+          <a:bodyPr/>
+          <a:lstStyle/>
+          <a:p>
+            <a:r>
+              <a:t>[話者: あかり / 0:00-0:13]</a:t>
+            </a:r>
+          </a:p>
+          <a:p>
+            <a:r>
+              <a:t>浦安ライフのあかりです。エンジニアの夫、りょうと作りました。女性がもっとイキイキできる社会に。その思いで作った、ライフコンパス東京です。</a:t>
+            </a:r>
+          </a:p>
+        </p:txBody>
+      </p:sp>
+      <p:sp>
+        <p:nvSpPr>
+          <p:cNvPr id="4" name="Slide Number Placeholder 3"/>
           <p:cNvSpPr>
             <a:spLocks noGrp="1"/>
           </p:cNvSpPr>
           <p:nvPr>
-            <p:ph type="body" idx="3" sz="quarter"/>
-          </p:nvPr>
-        </p:nvSpPr>
-        <p:spPr/>
-        <p:txBody>
-          <a:bodyPr/>
-          <a:lstStyle/>
-          <a:p>
-            <a:r>
-              <a:t>ライフコンパス東京は、結婚・妊娠・出産・子育てといったライフイベントとキャリアを、一つの時間軸の上で考え直せるWebアプリです。</a:t>
-            </a:r>
-          </a:p>
-        </p:txBody>
-      </p:sp>
-      <p:sp>
-        <p:nvSpPr>
-          <p:cNvPr id="4" name="Slide Number Placeholder 3"/>
-          <p:cNvSpPr>
-            <a:spLocks noGrp="1"/>
-          </p:cNvSpPr>
-          <p:nvPr>
-            <p:ph type="sldNum" idx="5" sz="quarter"/>
+            <p:ph type="sldNum" sz="quarter" idx="5"/>
           </p:nvPr>
         </p:nvSpPr>
         <p:spPr/>
@@ -534,7 +334,7 @@
 </file>
 
 <file path=ppt/notesSlides/notesSlide2.xml><?xml version="1.0" encoding="utf-8"?>
-<p:notes xmlns:a="http://schemas.openxmlformats.org/drawingml/2006/main" xmlns:p="http://schemas.openxmlformats.org/presentationml/2006/main" xmlns:r="http://schemas.openxmlformats.org/officeDocument/2006/relationships">
+<p:notes xmlns:a="http://schemas.openxmlformats.org/drawingml/2006/main" xmlns:r="http://schemas.openxmlformats.org/officeDocument/2006/relationships" xmlns:p="http://schemas.openxmlformats.org/presentationml/2006/main">
   <p:cSld>
     <p:spTree>
       <p:nvGrpSpPr>
@@ -554,43 +354,56 @@
         <p:nvSpPr>
           <p:cNvPr id="2" name="Slide Image Placeholder 1"/>
           <p:cNvSpPr>
+            <a:spLocks noGrp="1" noRot="1" noChangeAspect="1"/>
+          </p:cNvSpPr>
+          <p:nvPr>
+            <p:ph type="sldImg" idx="2"/>
+          </p:nvPr>
+        </p:nvSpPr>
+        <p:spPr/>
+      </p:sp>
+      <p:sp>
+        <p:nvSpPr>
+          <p:cNvPr id="3" name="Notes Placeholder 2"/>
+          <p:cNvSpPr>
             <a:spLocks noGrp="1"/>
           </p:cNvSpPr>
           <p:nvPr>
-            <p:ph type="sldImg" idx="2"/>
+            <p:ph type="body" sz="quarter" idx="3"/>
           </p:nvPr>
         </p:nvSpPr>
         <p:spPr/>
-      </p:sp>
-      <p:sp>
-        <p:nvSpPr>
-          <p:cNvPr id="3" name="Notes Placeholder 2"/>
+        <p:txBody>
+          <a:bodyPr/>
+          <a:lstStyle/>
+          <a:p>
+            <a:r>
+              <a:t>[話者: あかり / 0:13-0:39]</a:t>
+            </a:r>
+          </a:p>
+          <a:p>
+            <a:r>
+              <a:t>家庭もキャリアも、全力でがんばりたい。そういう女性が、身近にいます。でも、育児は女性が向いていると考える人が68パーセント、男性は7パーセント。企業は「女性が望んでいない」と見る。でも本人の悩みは「家庭責任が重いイメージ」。望んでいないのではなく、諦めているのではないでしょうか。</a:t>
+            </a:r>
+          </a:p>
+          <a:p>
+            <a:endParaRPr/>
+          </a:p>
+          <a:p>
+            <a:r>
+              <a:t>※サブ見出しは読み上げない（スライドの読み上げにならないようにする）。</a:t>
+            </a:r>
+          </a:p>
+        </p:txBody>
+      </p:sp>
+      <p:sp>
+        <p:nvSpPr>
+          <p:cNvPr id="4" name="Slide Number Placeholder 3"/>
           <p:cNvSpPr>
             <a:spLocks noGrp="1"/>
           </p:cNvSpPr>
           <p:nvPr>
-            <p:ph type="body" idx="3" sz="quarter"/>
-          </p:nvPr>
-        </p:nvSpPr>
-        <p:spPr/>
-        <p:txBody>
-          <a:bodyPr/>
-          <a:lstStyle/>
-          <a:p>
-            <a:r>
-              <a:t>家庭もキャリアも全力でがんばりたい女性にとって、世の中には様々な制約があります。東京都の世論調査でも、家庭も仕事も大切にしたいという希望は34%ある一方、現実に叶うのは32%でした。この制約自体は無くせませんが、何が選べるかを知らないまま選択肢を狭めてしまう状況は変えられると考えました。</a:t>
-            </a:r>
-          </a:p>
-        </p:txBody>
-      </p:sp>
-      <p:sp>
-        <p:nvSpPr>
-          <p:cNvPr id="4" name="Slide Number Placeholder 3"/>
-          <p:cNvSpPr>
-            <a:spLocks noGrp="1"/>
-          </p:cNvSpPr>
-          <p:nvPr>
-            <p:ph type="sldNum" idx="5" sz="quarter"/>
+            <p:ph type="sldNum" sz="quarter" idx="5"/>
           </p:nvPr>
         </p:nvSpPr>
         <p:spPr/>
@@ -604,7 +417,7 @@
 </file>
 
 <file path=ppt/notesSlides/notesSlide3.xml><?xml version="1.0" encoding="utf-8"?>
-<p:notes xmlns:a="http://schemas.openxmlformats.org/drawingml/2006/main" xmlns:p="http://schemas.openxmlformats.org/presentationml/2006/main" xmlns:r="http://schemas.openxmlformats.org/officeDocument/2006/relationships">
+<p:notes xmlns:a="http://schemas.openxmlformats.org/drawingml/2006/main" xmlns:r="http://schemas.openxmlformats.org/officeDocument/2006/relationships" xmlns:p="http://schemas.openxmlformats.org/presentationml/2006/main">
   <p:cSld>
     <p:spTree>
       <p:nvGrpSpPr>
@@ -624,43 +437,48 @@
         <p:nvSpPr>
           <p:cNvPr id="2" name="Slide Image Placeholder 1"/>
           <p:cNvSpPr>
+            <a:spLocks noGrp="1" noRot="1" noChangeAspect="1"/>
+          </p:cNvSpPr>
+          <p:nvPr>
+            <p:ph type="sldImg" idx="2"/>
+          </p:nvPr>
+        </p:nvSpPr>
+        <p:spPr/>
+      </p:sp>
+      <p:sp>
+        <p:nvSpPr>
+          <p:cNvPr id="3" name="Notes Placeholder 2"/>
+          <p:cNvSpPr>
             <a:spLocks noGrp="1"/>
           </p:cNvSpPr>
           <p:nvPr>
-            <p:ph type="sldImg" idx="2"/>
+            <p:ph type="body" sz="quarter" idx="3"/>
           </p:nvPr>
         </p:nvSpPr>
         <p:spPr/>
-      </p:sp>
-      <p:sp>
-        <p:nvSpPr>
-          <p:cNvPr id="3" name="Notes Placeholder 2"/>
+        <p:txBody>
+          <a:bodyPr/>
+          <a:lstStyle/>
+          <a:p>
+            <a:r>
+              <a:t>[話者: あかり / 0:39-0:56]</a:t>
+            </a:r>
+          </a:p>
+          <a:p>
+            <a:r>
+              <a:t>そして、使える制度を知りません。産前産後休暇を知らない人は6パーセント。でも出産障害休暇は、47パーセントが「職場にあるか分からない」。知らない制度は、選択肢に入りません。</a:t>
+            </a:r>
+          </a:p>
+        </p:txBody>
+      </p:sp>
+      <p:sp>
+        <p:nvSpPr>
+          <p:cNvPr id="4" name="Slide Number Placeholder 3"/>
           <p:cNvSpPr>
             <a:spLocks noGrp="1"/>
           </p:cNvSpPr>
           <p:nvPr>
-            <p:ph type="body" idx="3" sz="quarter"/>
-          </p:nvPr>
-        </p:nvSpPr>
-        <p:spPr/>
-        <p:txBody>
-          <a:bodyPr/>
-          <a:lstStyle/>
-          <a:p>
-            <a:r>
-              <a:t>東京都の子育て支援制度は7,812件もあり、自分で読み切れる量ではありません。育休は子が2歳になるまで延長できる、産後パパ育休は8週間以内に4週間まで取れるなど、日本・東京都の制度上の上限を、実施主体と出典付きでタイムラインに表示します。平均値や他人と比べた遅れは表示しません。見せるのは『あなたが使える権利はどこまでか』という選べる余地だけです。</a:t>
-            </a:r>
-          </a:p>
-        </p:txBody>
-      </p:sp>
-      <p:sp>
-        <p:nvSpPr>
-          <p:cNvPr id="4" name="Slide Number Placeholder 3"/>
-          <p:cNvSpPr>
-            <a:spLocks noGrp="1"/>
-          </p:cNvSpPr>
-          <p:nvPr>
-            <p:ph type="sldNum" idx="5" sz="quarter"/>
+            <p:ph type="sldNum" sz="quarter" idx="5"/>
           </p:nvPr>
         </p:nvSpPr>
         <p:spPr/>
@@ -674,7 +492,7 @@
 </file>
 
 <file path=ppt/notesSlides/notesSlide4.xml><?xml version="1.0" encoding="utf-8"?>
-<p:notes xmlns:a="http://schemas.openxmlformats.org/drawingml/2006/main" xmlns:p="http://schemas.openxmlformats.org/presentationml/2006/main" xmlns:r="http://schemas.openxmlformats.org/officeDocument/2006/relationships">
+<p:notes xmlns:a="http://schemas.openxmlformats.org/drawingml/2006/main" xmlns:r="http://schemas.openxmlformats.org/officeDocument/2006/relationships" xmlns:p="http://schemas.openxmlformats.org/presentationml/2006/main">
   <p:cSld>
     <p:spTree>
       <p:nvGrpSpPr>
@@ -694,49 +512,48 @@
         <p:nvSpPr>
           <p:cNvPr id="2" name="Slide Image Placeholder 1"/>
           <p:cNvSpPr>
+            <a:spLocks noGrp="1" noRot="1" noChangeAspect="1"/>
+          </p:cNvSpPr>
+          <p:nvPr>
+            <p:ph type="sldImg" idx="2"/>
+          </p:nvPr>
+        </p:nvSpPr>
+        <p:spPr/>
+      </p:sp>
+      <p:sp>
+        <p:nvSpPr>
+          <p:cNvPr id="3" name="Notes Placeholder 2"/>
+          <p:cNvSpPr>
             <a:spLocks noGrp="1"/>
           </p:cNvSpPr>
           <p:nvPr>
-            <p:ph type="sldImg" idx="2"/>
+            <p:ph type="body" sz="quarter" idx="3"/>
           </p:nvPr>
         </p:nvSpPr>
         <p:spPr/>
-      </p:sp>
-      <p:sp>
-        <p:nvSpPr>
-          <p:cNvPr id="3" name="Notes Placeholder 2"/>
+        <p:txBody>
+          <a:bodyPr/>
+          <a:lstStyle/>
+          <a:p>
+            <a:r>
+              <a:t>[話者: りょう / 0:56-1:14 ※ここから交代]</a:t>
+            </a:r>
+          </a:p>
+          <a:p>
+            <a:r>
+              <a:t>ここからは実装です。都の子育て支援制度は7,812件。読み切れる量ではありません。そこで、育休は子が2歳まで、といった国と都の制度上の上限だけを、実施主体と出典リンク付きで表示しました。</a:t>
+            </a:r>
+          </a:p>
+        </p:txBody>
+      </p:sp>
+      <p:sp>
+        <p:nvSpPr>
+          <p:cNvPr id="4" name="Slide Number Placeholder 3"/>
           <p:cNvSpPr>
             <a:spLocks noGrp="1"/>
           </p:cNvSpPr>
           <p:nvPr>
-            <p:ph type="body" idx="3" sz="quarter"/>
-          </p:nvPr>
-        </p:nvSpPr>
-        <p:spPr/>
-        <p:txBody>
-          <a:bodyPr/>
-          <a:lstStyle/>
-          <a:p>
-            <a:r>
-              <a:t>こちらが公開デモです。予定を動かすと、つながりのあるイベントも一緒に動きます。対話型AIに話しかけると、確認済みの制度情報だけを根拠に答えます。一度決めて終わりではなく、状況が変わるたびに何度でも軽やかに描き直せることを大切にしています。</a:t>
-            </a:r>
-          </a:p>
-          <a:p/>
-          <a:p>
-            <a:r>
-              <a:t>[登壇メモ] 対話型AI（Gemini Function Calling）の実際の応答画面は、未サインイン状態では取得できなかった（送信にGoogleサインインが必要なため）。登壇時は実機でサインインして見せるか、口頭説明にとどめる。</a:t>
-            </a:r>
-          </a:p>
-        </p:txBody>
-      </p:sp>
-      <p:sp>
-        <p:nvSpPr>
-          <p:cNvPr id="4" name="Slide Number Placeholder 3"/>
-          <p:cNvSpPr>
-            <a:spLocks noGrp="1"/>
-          </p:cNvSpPr>
-          <p:nvPr>
-            <p:ph type="sldNum" idx="5" sz="quarter"/>
+            <p:ph type="sldNum" sz="quarter" idx="5"/>
           </p:nvPr>
         </p:nvSpPr>
         <p:spPr/>
@@ -750,7 +567,7 @@
 </file>
 
 <file path=ppt/notesSlides/notesSlide5.xml><?xml version="1.0" encoding="utf-8"?>
-<p:notes xmlns:a="http://schemas.openxmlformats.org/drawingml/2006/main" xmlns:p="http://schemas.openxmlformats.org/presentationml/2006/main" xmlns:r="http://schemas.openxmlformats.org/officeDocument/2006/relationships">
+<p:notes xmlns:a="http://schemas.openxmlformats.org/drawingml/2006/main" xmlns:r="http://schemas.openxmlformats.org/officeDocument/2006/relationships" xmlns:p="http://schemas.openxmlformats.org/presentationml/2006/main">
   <p:cSld>
     <p:spTree>
       <p:nvGrpSpPr>
@@ -770,43 +587,56 @@
         <p:nvSpPr>
           <p:cNvPr id="2" name="Slide Image Placeholder 1"/>
           <p:cNvSpPr>
+            <a:spLocks noGrp="1" noRot="1" noChangeAspect="1"/>
+          </p:cNvSpPr>
+          <p:nvPr>
+            <p:ph type="sldImg" idx="2"/>
+          </p:nvPr>
+        </p:nvSpPr>
+        <p:spPr/>
+      </p:sp>
+      <p:sp>
+        <p:nvSpPr>
+          <p:cNvPr id="3" name="Notes Placeholder 2"/>
+          <p:cNvSpPr>
             <a:spLocks noGrp="1"/>
           </p:cNvSpPr>
           <p:nvPr>
-            <p:ph type="sldImg" idx="2"/>
+            <p:ph type="body" sz="quarter" idx="3"/>
           </p:nvPr>
         </p:nvSpPr>
         <p:spPr/>
-      </p:sp>
-      <p:sp>
-        <p:nvSpPr>
-          <p:cNvPr id="3" name="Notes Placeholder 2"/>
+        <p:txBody>
+          <a:bodyPr/>
+          <a:lstStyle/>
+          <a:p>
+            <a:r>
+              <a:t>[話者: りょう / 1:14-1:31]</a:t>
+            </a:r>
+          </a:p>
+          <a:p>
+            <a:r>
+              <a:t>結婚、出産、転職の予定を、同じ時間軸に自由に置けます。ひとつ動かすと、つながるイベントも一緒に動く。AIも、確認済みの制度情報だけを根拠に答えます。何度でも描き直せます。</a:t>
+            </a:r>
+          </a:p>
+          <a:p>
+            <a:endParaRPr/>
+          </a:p>
+          <a:p>
+            <a:r>
+              <a:t>[登壇メモ] 収録ではライブデモ（アプリ画面のリアルタイム操作）は一切できない（事務局「提出資料について」）。動く様子を見せる場合は、事前に収録した無音動画をこのスライドに埋め込み、画面共有オプションの2項目にチェックを入れて共有する。対話型AI（Gemini Function Calling）の応答画面は未サインインでは取得できないため（送信にGoogleサインインが必要）、サインイン状態で録画したものを使う。</a:t>
+            </a:r>
+          </a:p>
+        </p:txBody>
+      </p:sp>
+      <p:sp>
+        <p:nvSpPr>
+          <p:cNvPr id="4" name="Slide Number Placeholder 3"/>
           <p:cNvSpPr>
             <a:spLocks noGrp="1"/>
           </p:cNvSpPr>
           <p:nvPr>
-            <p:ph type="body" idx="3" sz="quarter"/>
-          </p:nvPr>
-        </p:nvSpPr>
-        <p:spPr/>
-        <p:txBody>
-          <a:bodyPr/>
-          <a:lstStyle/>
-          <a:p>
-            <a:r>
-              <a:t>今のところ、この画面はログインせずに誰でも触れます。まずは自分のプランを一緒に見て話すきっかけとして使ってほしいと考えています。将来は、これを男性自身が体験するプログラムにも発展させ、女性が抱える制約の多さを、当事者として実感してもらう場にしたいと考えています。</a:t>
-            </a:r>
-          </a:p>
-        </p:txBody>
-      </p:sp>
-      <p:sp>
-        <p:nvSpPr>
-          <p:cNvPr id="4" name="Slide Number Placeholder 3"/>
-          <p:cNvSpPr>
-            <a:spLocks noGrp="1"/>
-          </p:cNvSpPr>
-          <p:nvPr>
-            <p:ph type="sldNum" idx="5" sz="quarter"/>
+            <p:ph type="sldNum" sz="quarter" idx="5"/>
           </p:nvPr>
         </p:nvSpPr>
         <p:spPr/>
@@ -820,7 +650,7 @@
 </file>
 
 <file path=ppt/notesSlides/notesSlide6.xml><?xml version="1.0" encoding="utf-8"?>
-<p:notes xmlns:a="http://schemas.openxmlformats.org/drawingml/2006/main" xmlns:p="http://schemas.openxmlformats.org/presentationml/2006/main" xmlns:r="http://schemas.openxmlformats.org/officeDocument/2006/relationships">
+<p:notes xmlns:a="http://schemas.openxmlformats.org/drawingml/2006/main" xmlns:r="http://schemas.openxmlformats.org/officeDocument/2006/relationships" xmlns:p="http://schemas.openxmlformats.org/presentationml/2006/main">
   <p:cSld>
     <p:spTree>
       <p:nvGrpSpPr>
@@ -840,43 +670,56 @@
         <p:nvSpPr>
           <p:cNvPr id="2" name="Slide Image Placeholder 1"/>
           <p:cNvSpPr>
+            <a:spLocks noGrp="1" noRot="1" noChangeAspect="1"/>
+          </p:cNvSpPr>
+          <p:nvPr>
+            <p:ph type="sldImg" idx="2"/>
+          </p:nvPr>
+        </p:nvSpPr>
+        <p:spPr/>
+      </p:sp>
+      <p:sp>
+        <p:nvSpPr>
+          <p:cNvPr id="3" name="Notes Placeholder 2"/>
+          <p:cNvSpPr>
             <a:spLocks noGrp="1"/>
           </p:cNvSpPr>
           <p:nvPr>
-            <p:ph type="sldImg" idx="2"/>
+            <p:ph type="body" sz="quarter" idx="3"/>
           </p:nvPr>
         </p:nvSpPr>
         <p:spPr/>
-      </p:sp>
-      <p:sp>
-        <p:nvSpPr>
-          <p:cNvPr id="3" name="Notes Placeholder 2"/>
+        <p:txBody>
+          <a:bodyPr/>
+          <a:lstStyle/>
+          <a:p>
+            <a:r>
+              <a:t>[話者: りょう / 1:31-1:46]</a:t>
+            </a:r>
+          </a:p>
+          <a:p>
+            <a:r>
+              <a:t>この画面はログイン不要で、家庭で一緒に見られます。制度を「分からない」と答えた割合は、8項目すべてで男性の方が高い。男性が体験する場にも広げたいと考えています。</a:t>
+            </a:r>
+          </a:p>
+          <a:p>
+            <a:endParaRPr/>
+          </a:p>
+          <a:p>
+            <a:r>
+              <a:t>[質疑用] 男性の育休取得率は61.2%まで上がったが、取得期間は「1か月〜3か月未満」38.6%が最多で、女性の「6か月〜1年未満」30.2%とは差がある。</a:t>
+            </a:r>
+          </a:p>
+        </p:txBody>
+      </p:sp>
+      <p:sp>
+        <p:nvSpPr>
+          <p:cNvPr id="4" name="Slide Number Placeholder 3"/>
           <p:cNvSpPr>
             <a:spLocks noGrp="1"/>
           </p:cNvSpPr>
           <p:nvPr>
-            <p:ph type="body" idx="3" sz="quarter"/>
-          </p:nvPr>
-        </p:nvSpPr>
-        <p:spPr/>
-        <p:txBody>
-          <a:bodyPr/>
-          <a:lstStyle/>
-          <a:p>
-            <a:r>
-              <a:t>制度情報はオープンデータと法令から出典付きで取り込んでいます。一人ひとりが実際にどんなライフプランを描き、どこで諦めたかのデータは、都にも国にもまだありません。ここで積み重なるプランが、いずれ東京都や国が女性を支援する施策を増やすきっかけになることを願っています。決めるのはいつも本人です。ライフコンパス東京で、自分らしい人生を描き直せる選択肢を届けます。</a:t>
-            </a:r>
-          </a:p>
-        </p:txBody>
-      </p:sp>
-      <p:sp>
-        <p:nvSpPr>
-          <p:cNvPr id="4" name="Slide Number Placeholder 3"/>
-          <p:cNvSpPr>
-            <a:spLocks noGrp="1"/>
-          </p:cNvSpPr>
-          <p:nvPr>
-            <p:ph type="sldNum" idx="5" sz="quarter"/>
+            <p:ph type="sldNum" sz="quarter" idx="5"/>
           </p:nvPr>
         </p:nvSpPr>
         <p:spPr/>
@@ -890,7 +733,7 @@
 </file>
 
 <file path=ppt/notesSlides/notesSlide7.xml><?xml version="1.0" encoding="utf-8"?>
-<p:notes xmlns:a="http://schemas.openxmlformats.org/drawingml/2006/main" xmlns:p="http://schemas.openxmlformats.org/presentationml/2006/main" xmlns:r="http://schemas.openxmlformats.org/officeDocument/2006/relationships">
+<p:notes xmlns:a="http://schemas.openxmlformats.org/drawingml/2006/main" xmlns:r="http://schemas.openxmlformats.org/officeDocument/2006/relationships" xmlns:p="http://schemas.openxmlformats.org/presentationml/2006/main">
   <p:cSld>
     <p:spTree>
       <p:nvGrpSpPr>
@@ -910,9 +753,84 @@
         <p:nvSpPr>
           <p:cNvPr id="2" name="Slide Image Placeholder 1"/>
           <p:cNvSpPr>
+            <a:spLocks noGrp="1" noRot="1" noChangeAspect="1"/>
+          </p:cNvSpPr>
+          <p:nvPr>
+            <p:ph type="sldImg" idx="2"/>
+          </p:nvPr>
+        </p:nvSpPr>
+        <p:spPr/>
+      </p:sp>
+      <p:sp>
+        <p:nvSpPr>
+          <p:cNvPr id="3" name="Notes Placeholder 2"/>
+          <p:cNvSpPr>
             <a:spLocks noGrp="1"/>
           </p:cNvSpPr>
           <p:nvPr>
+            <p:ph type="body" sz="quarter" idx="3"/>
+          </p:nvPr>
+        </p:nvSpPr>
+        <p:spPr/>
+        <p:txBody>
+          <a:bodyPr/>
+          <a:lstStyle/>
+          <a:p>
+            <a:r>
+              <a:t>[話者: あかり / 1:46-2:00 ※ここで交代して締める]</a:t>
+            </a:r>
+          </a:p>
+          <a:p>
+            <a:r>
+              <a:t>誰がどこで諦めたかのデータは、都にも国にもありません。ここで積み重なるプランが、次の施策につながることを願っています。決めるのは、いつも本人です。</a:t>
+            </a:r>
+          </a:p>
+        </p:txBody>
+      </p:sp>
+      <p:sp>
+        <p:nvSpPr>
+          <p:cNvPr id="4" name="Slide Number Placeholder 3"/>
+          <p:cNvSpPr>
+            <a:spLocks noGrp="1"/>
+          </p:cNvSpPr>
+          <p:nvPr>
+            <p:ph type="sldNum" sz="quarter" idx="5"/>
+          </p:nvPr>
+        </p:nvSpPr>
+        <p:spPr/>
+      </p:sp>
+    </p:spTree>
+  </p:cSld>
+  <p:clrMapOvr>
+    <a:masterClrMapping/>
+  </p:clrMapOvr>
+</p:notes>
+</file>
+
+<file path=ppt/notesSlides/notesSlide8.xml><?xml version="1.0" encoding="utf-8"?>
+<p:notes xmlns:a="http://schemas.openxmlformats.org/drawingml/2006/main" xmlns:r="http://schemas.openxmlformats.org/officeDocument/2006/relationships" xmlns:p="http://schemas.openxmlformats.org/presentationml/2006/main">
+  <p:cSld>
+    <p:spTree>
+      <p:nvGrpSpPr>
+        <p:cNvPr id="1" name=""/>
+        <p:cNvGrpSpPr/>
+        <p:nvPr/>
+      </p:nvGrpSpPr>
+      <p:grpSpPr>
+        <a:xfrm>
+          <a:off x="0" y="0"/>
+          <a:ext cx="0" cy="0"/>
+          <a:chOff x="0" y="0"/>
+          <a:chExt cx="0" cy="0"/>
+        </a:xfrm>
+      </p:grpSpPr>
+      <p:sp>
+        <p:nvSpPr>
+          <p:cNvPr id="2" name="Slide Image Placeholder 1"/>
+          <p:cNvSpPr>
+            <a:spLocks noGrp="1" noRot="1" noChangeAspect="1"/>
+          </p:cNvSpPr>
+          <p:nvPr>
             <p:ph type="sldImg" idx="2"/>
           </p:nvPr>
         </p:nvSpPr>
@@ -925,7 +843,7 @@
             <a:spLocks noGrp="1"/>
           </p:cNvSpPr>
           <p:nvPr>
-            <p:ph type="body" idx="3" sz="quarter"/>
+            <p:ph type="body" sz="quarter" idx="3"/>
           </p:nvPr>
         </p:nvSpPr>
         <p:spPr/>
@@ -946,7 +864,7 @@
             <a:spLocks noGrp="1"/>
           </p:cNvSpPr>
           <p:nvPr>
-            <p:ph type="sldNum" idx="5" sz="quarter"/>
+            <p:ph type="sldNum" sz="quarter" idx="5"/>
           </p:nvPr>
         </p:nvSpPr>
         <p:spPr/>
@@ -997,10 +915,9 @@
           <a:lstStyle/>
           <a:p>
             <a:r>
-              <a:rPr lang="en-US" smtClean="0"/>
+              <a:rPr lang="en-US"/>
               <a:t>Click to edit Master title style</a:t>
             </a:r>
-            <a:endParaRPr lang="en-US"/>
           </a:p>
         </p:txBody>
       </p:sp>
@@ -1116,10 +1033,9 @@
           </a:lstStyle>
           <a:p>
             <a:r>
-              <a:rPr lang="en-US" smtClean="0"/>
+              <a:rPr lang="en-US"/>
               <a:t>Click to edit Master subtitle style</a:t>
             </a:r>
-            <a:endParaRPr lang="en-US"/>
           </a:p>
         </p:txBody>
       </p:sp>
@@ -1140,7 +1056,7 @@
           <a:p>
             <a:fld id="{5BCAD085-E8A6-8845-BD4E-CB4CCA059FC4}" type="datetimeFigureOut">
               <a:rPr lang="en-US" smtClean="0"/>
-              <a:t>1/27/13</a:t>
+              <a:t>8/30/26</a:t>
             </a:fld>
             <a:endParaRPr lang="en-US"/>
           </a:p>
@@ -1234,10 +1150,9 @@
           <a:lstStyle/>
           <a:p>
             <a:r>
-              <a:rPr lang="en-US" smtClean="0"/>
+              <a:rPr lang="en-US"/>
               <a:t>Click to edit Master title style</a:t>
             </a:r>
-            <a:endParaRPr lang="en-US"/>
           </a:p>
         </p:txBody>
       </p:sp>
@@ -1258,38 +1173,37 @@
           <a:p>
             <a:pPr lvl="0"/>
             <a:r>
-              <a:rPr lang="en-US" smtClean="0"/>
+              <a:rPr lang="en-US"/>
               <a:t>Click to edit Master text styles</a:t>
             </a:r>
           </a:p>
           <a:p>
             <a:pPr lvl="1"/>
             <a:r>
-              <a:rPr lang="en-US" smtClean="0"/>
+              <a:rPr lang="en-US"/>
               <a:t>Second level</a:t>
             </a:r>
           </a:p>
           <a:p>
             <a:pPr lvl="2"/>
             <a:r>
-              <a:rPr lang="en-US" smtClean="0"/>
+              <a:rPr lang="en-US"/>
               <a:t>Third level</a:t>
             </a:r>
           </a:p>
           <a:p>
             <a:pPr lvl="3"/>
             <a:r>
-              <a:rPr lang="en-US" smtClean="0"/>
+              <a:rPr lang="en-US"/>
               <a:t>Fourth level</a:t>
             </a:r>
           </a:p>
           <a:p>
             <a:pPr lvl="4"/>
             <a:r>
-              <a:rPr lang="en-US" smtClean="0"/>
+              <a:rPr lang="en-US"/>
               <a:t>Fifth level</a:t>
             </a:r>
-            <a:endParaRPr lang="en-US"/>
           </a:p>
         </p:txBody>
       </p:sp>
@@ -1310,7 +1224,7 @@
           <a:p>
             <a:fld id="{5BCAD085-E8A6-8845-BD4E-CB4CCA059FC4}" type="datetimeFigureOut">
               <a:rPr lang="en-US" smtClean="0"/>
-              <a:t>1/27/13</a:t>
+              <a:t>8/30/26</a:t>
             </a:fld>
             <a:endParaRPr lang="en-US"/>
           </a:p>
@@ -1409,10 +1323,9 @@
           <a:lstStyle/>
           <a:p>
             <a:r>
-              <a:rPr lang="en-US" smtClean="0"/>
+              <a:rPr lang="en-US"/>
               <a:t>Click to edit Master title style</a:t>
             </a:r>
-            <a:endParaRPr lang="en-US"/>
           </a:p>
         </p:txBody>
       </p:sp>
@@ -1438,38 +1351,37 @@
           <a:p>
             <a:pPr lvl="0"/>
             <a:r>
-              <a:rPr lang="en-US" smtClean="0"/>
+              <a:rPr lang="en-US"/>
               <a:t>Click to edit Master text styles</a:t>
             </a:r>
           </a:p>
           <a:p>
             <a:pPr lvl="1"/>
             <a:r>
-              <a:rPr lang="en-US" smtClean="0"/>
+              <a:rPr lang="en-US"/>
               <a:t>Second level</a:t>
             </a:r>
           </a:p>
           <a:p>
             <a:pPr lvl="2"/>
             <a:r>
-              <a:rPr lang="en-US" smtClean="0"/>
+              <a:rPr lang="en-US"/>
               <a:t>Third level</a:t>
             </a:r>
           </a:p>
           <a:p>
             <a:pPr lvl="3"/>
             <a:r>
-              <a:rPr lang="en-US" smtClean="0"/>
+              <a:rPr lang="en-US"/>
               <a:t>Fourth level</a:t>
             </a:r>
           </a:p>
           <a:p>
             <a:pPr lvl="4"/>
             <a:r>
-              <a:rPr lang="en-US" smtClean="0"/>
+              <a:rPr lang="en-US"/>
               <a:t>Fifth level</a:t>
             </a:r>
-            <a:endParaRPr lang="en-US"/>
           </a:p>
         </p:txBody>
       </p:sp>
@@ -1490,7 +1402,7 @@
           <a:p>
             <a:fld id="{5BCAD085-E8A6-8845-BD4E-CB4CCA059FC4}" type="datetimeFigureOut">
               <a:rPr lang="en-US" smtClean="0"/>
-              <a:t>1/27/13</a:t>
+              <a:t>8/30/26</a:t>
             </a:fld>
             <a:endParaRPr lang="en-US"/>
           </a:p>
@@ -1584,10 +1496,9 @@
           <a:lstStyle/>
           <a:p>
             <a:r>
-              <a:rPr lang="en-US" smtClean="0"/>
+              <a:rPr lang="en-US"/>
               <a:t>Click to edit Master title style</a:t>
             </a:r>
-            <a:endParaRPr lang="en-US"/>
           </a:p>
         </p:txBody>
       </p:sp>
@@ -1608,38 +1519,37 @@
           <a:p>
             <a:pPr lvl="0"/>
             <a:r>
-              <a:rPr lang="en-US" smtClean="0"/>
+              <a:rPr lang="en-US"/>
               <a:t>Click to edit Master text styles</a:t>
             </a:r>
           </a:p>
           <a:p>
             <a:pPr lvl="1"/>
             <a:r>
-              <a:rPr lang="en-US" smtClean="0"/>
+              <a:rPr lang="en-US"/>
               <a:t>Second level</a:t>
             </a:r>
           </a:p>
           <a:p>
             <a:pPr lvl="2"/>
             <a:r>
-              <a:rPr lang="en-US" smtClean="0"/>
+              <a:rPr lang="en-US"/>
               <a:t>Third level</a:t>
             </a:r>
           </a:p>
           <a:p>
             <a:pPr lvl="3"/>
             <a:r>
-              <a:rPr lang="en-US" smtClean="0"/>
+              <a:rPr lang="en-US"/>
               <a:t>Fourth level</a:t>
             </a:r>
           </a:p>
           <a:p>
             <a:pPr lvl="4"/>
             <a:r>
-              <a:rPr lang="en-US" smtClean="0"/>
+              <a:rPr lang="en-US"/>
               <a:t>Fifth level</a:t>
             </a:r>
-            <a:endParaRPr lang="en-US"/>
           </a:p>
         </p:txBody>
       </p:sp>
@@ -1660,7 +1570,7 @@
           <a:p>
             <a:fld id="{5BCAD085-E8A6-8845-BD4E-CB4CCA059FC4}" type="datetimeFigureOut">
               <a:rPr lang="en-US" smtClean="0"/>
-              <a:t>1/27/13</a:t>
+              <a:t>8/30/26</a:t>
             </a:fld>
             <a:endParaRPr lang="en-US"/>
           </a:p>
@@ -1763,10 +1673,9 @@
           </a:lstStyle>
           <a:p>
             <a:r>
-              <a:rPr lang="en-US" smtClean="0"/>
+              <a:rPr lang="en-US"/>
               <a:t>Click to edit Master title style</a:t>
             </a:r>
-            <a:endParaRPr lang="en-US"/>
           </a:p>
         </p:txBody>
       </p:sp>
@@ -1883,7 +1792,7 @@
           <a:p>
             <a:pPr lvl="0"/>
             <a:r>
-              <a:rPr lang="en-US" smtClean="0"/>
+              <a:rPr lang="en-US"/>
               <a:t>Click to edit Master text styles</a:t>
             </a:r>
           </a:p>
@@ -1906,7 +1815,7 @@
           <a:p>
             <a:fld id="{5BCAD085-E8A6-8845-BD4E-CB4CCA059FC4}" type="datetimeFigureOut">
               <a:rPr lang="en-US" smtClean="0"/>
-              <a:t>1/27/13</a:t>
+              <a:t>8/30/26</a:t>
             </a:fld>
             <a:endParaRPr lang="en-US"/>
           </a:p>
@@ -2000,10 +1909,9 @@
           <a:lstStyle/>
           <a:p>
             <a:r>
-              <a:rPr lang="en-US" smtClean="0"/>
+              <a:rPr lang="en-US"/>
               <a:t>Click to edit Master title style</a:t>
             </a:r>
-            <a:endParaRPr lang="en-US"/>
           </a:p>
         </p:txBody>
       </p:sp>
@@ -2057,38 +1965,37 @@
           <a:p>
             <a:pPr lvl="0"/>
             <a:r>
-              <a:rPr lang="en-US" smtClean="0"/>
+              <a:rPr lang="en-US"/>
               <a:t>Click to edit Master text styles</a:t>
             </a:r>
           </a:p>
           <a:p>
             <a:pPr lvl="1"/>
             <a:r>
-              <a:rPr lang="en-US" smtClean="0"/>
+              <a:rPr lang="en-US"/>
               <a:t>Second level</a:t>
             </a:r>
           </a:p>
           <a:p>
             <a:pPr lvl="2"/>
             <a:r>
-              <a:rPr lang="en-US" smtClean="0"/>
+              <a:rPr lang="en-US"/>
               <a:t>Third level</a:t>
             </a:r>
           </a:p>
           <a:p>
             <a:pPr lvl="3"/>
             <a:r>
-              <a:rPr lang="en-US" smtClean="0"/>
+              <a:rPr lang="en-US"/>
               <a:t>Fourth level</a:t>
             </a:r>
           </a:p>
           <a:p>
             <a:pPr lvl="4"/>
             <a:r>
-              <a:rPr lang="en-US" smtClean="0"/>
+              <a:rPr lang="en-US"/>
               <a:t>Fifth level</a:t>
             </a:r>
-            <a:endParaRPr lang="en-US"/>
           </a:p>
         </p:txBody>
       </p:sp>
@@ -2142,38 +2049,37 @@
           <a:p>
             <a:pPr lvl="0"/>
             <a:r>
-              <a:rPr lang="en-US" smtClean="0"/>
+              <a:rPr lang="en-US"/>
               <a:t>Click to edit Master text styles</a:t>
             </a:r>
           </a:p>
           <a:p>
             <a:pPr lvl="1"/>
             <a:r>
-              <a:rPr lang="en-US" smtClean="0"/>
+              <a:rPr lang="en-US"/>
               <a:t>Second level</a:t>
             </a:r>
           </a:p>
           <a:p>
             <a:pPr lvl="2"/>
             <a:r>
-              <a:rPr lang="en-US" smtClean="0"/>
+              <a:rPr lang="en-US"/>
               <a:t>Third level</a:t>
             </a:r>
           </a:p>
           <a:p>
             <a:pPr lvl="3"/>
             <a:r>
-              <a:rPr lang="en-US" smtClean="0"/>
+              <a:rPr lang="en-US"/>
               <a:t>Fourth level</a:t>
             </a:r>
           </a:p>
           <a:p>
             <a:pPr lvl="4"/>
             <a:r>
-              <a:rPr lang="en-US" smtClean="0"/>
+              <a:rPr lang="en-US"/>
               <a:t>Fifth level</a:t>
             </a:r>
-            <a:endParaRPr lang="en-US"/>
           </a:p>
         </p:txBody>
       </p:sp>
@@ -2194,7 +2100,7 @@
           <a:p>
             <a:fld id="{5BCAD085-E8A6-8845-BD4E-CB4CCA059FC4}" type="datetimeFigureOut">
               <a:rPr lang="en-US" smtClean="0"/>
-              <a:t>1/27/13</a:t>
+              <a:t>8/30/26</a:t>
             </a:fld>
             <a:endParaRPr lang="en-US"/>
           </a:p>
@@ -2292,10 +2198,9 @@
           </a:lstStyle>
           <a:p>
             <a:r>
-              <a:rPr lang="en-US" smtClean="0"/>
+              <a:rPr lang="en-US"/>
               <a:t>Click to edit Master title style</a:t>
             </a:r>
-            <a:endParaRPr lang="en-US"/>
           </a:p>
         </p:txBody>
       </p:sp>
@@ -2358,7 +2263,7 @@
           <a:p>
             <a:pPr lvl="0"/>
             <a:r>
-              <a:rPr lang="en-US" smtClean="0"/>
+              <a:rPr lang="en-US"/>
               <a:t>Click to edit Master text styles</a:t>
             </a:r>
           </a:p>
@@ -2414,38 +2319,37 @@
           <a:p>
             <a:pPr lvl="0"/>
             <a:r>
-              <a:rPr lang="en-US" smtClean="0"/>
+              <a:rPr lang="en-US"/>
               <a:t>Click to edit Master text styles</a:t>
             </a:r>
           </a:p>
           <a:p>
             <a:pPr lvl="1"/>
             <a:r>
-              <a:rPr lang="en-US" smtClean="0"/>
+              <a:rPr lang="en-US"/>
               <a:t>Second level</a:t>
             </a:r>
           </a:p>
           <a:p>
             <a:pPr lvl="2"/>
             <a:r>
-              <a:rPr lang="en-US" smtClean="0"/>
+              <a:rPr lang="en-US"/>
               <a:t>Third level</a:t>
             </a:r>
           </a:p>
           <a:p>
             <a:pPr lvl="3"/>
             <a:r>
-              <a:rPr lang="en-US" smtClean="0"/>
+              <a:rPr lang="en-US"/>
               <a:t>Fourth level</a:t>
             </a:r>
           </a:p>
           <a:p>
             <a:pPr lvl="4"/>
             <a:r>
-              <a:rPr lang="en-US" smtClean="0"/>
+              <a:rPr lang="en-US"/>
               <a:t>Fifth level</a:t>
             </a:r>
-            <a:endParaRPr lang="en-US"/>
           </a:p>
         </p:txBody>
       </p:sp>
@@ -2508,7 +2412,7 @@
           <a:p>
             <a:pPr lvl="0"/>
             <a:r>
-              <a:rPr lang="en-US" smtClean="0"/>
+              <a:rPr lang="en-US"/>
               <a:t>Click to edit Master text styles</a:t>
             </a:r>
           </a:p>
@@ -2564,38 +2468,37 @@
           <a:p>
             <a:pPr lvl="0"/>
             <a:r>
-              <a:rPr lang="en-US" smtClean="0"/>
+              <a:rPr lang="en-US"/>
               <a:t>Click to edit Master text styles</a:t>
             </a:r>
           </a:p>
           <a:p>
             <a:pPr lvl="1"/>
             <a:r>
-              <a:rPr lang="en-US" smtClean="0"/>
+              <a:rPr lang="en-US"/>
               <a:t>Second level</a:t>
             </a:r>
           </a:p>
           <a:p>
             <a:pPr lvl="2"/>
             <a:r>
-              <a:rPr lang="en-US" smtClean="0"/>
+              <a:rPr lang="en-US"/>
               <a:t>Third level</a:t>
             </a:r>
           </a:p>
           <a:p>
             <a:pPr lvl="3"/>
             <a:r>
-              <a:rPr lang="en-US" smtClean="0"/>
+              <a:rPr lang="en-US"/>
               <a:t>Fourth level</a:t>
             </a:r>
           </a:p>
           <a:p>
             <a:pPr lvl="4"/>
             <a:r>
-              <a:rPr lang="en-US" smtClean="0"/>
+              <a:rPr lang="en-US"/>
               <a:t>Fifth level</a:t>
             </a:r>
-            <a:endParaRPr lang="en-US"/>
           </a:p>
         </p:txBody>
       </p:sp>
@@ -2616,7 +2519,7 @@
           <a:p>
             <a:fld id="{5BCAD085-E8A6-8845-BD4E-CB4CCA059FC4}" type="datetimeFigureOut">
               <a:rPr lang="en-US" smtClean="0"/>
-              <a:t>1/27/13</a:t>
+              <a:t>8/30/26</a:t>
             </a:fld>
             <a:endParaRPr lang="en-US"/>
           </a:p>
@@ -2710,10 +2613,9 @@
           <a:lstStyle/>
           <a:p>
             <a:r>
-              <a:rPr lang="en-US" smtClean="0"/>
+              <a:rPr lang="en-US"/>
               <a:t>Click to edit Master title style</a:t>
             </a:r>
-            <a:endParaRPr lang="en-US"/>
           </a:p>
         </p:txBody>
       </p:sp>
@@ -2734,7 +2636,7 @@
           <a:p>
             <a:fld id="{5BCAD085-E8A6-8845-BD4E-CB4CCA059FC4}" type="datetimeFigureOut">
               <a:rPr lang="en-US" smtClean="0"/>
-              <a:t>1/27/13</a:t>
+              <a:t>8/30/26</a:t>
             </a:fld>
             <a:endParaRPr lang="en-US"/>
           </a:p>
@@ -2829,7 +2731,7 @@
           <a:p>
             <a:fld id="{5BCAD085-E8A6-8845-BD4E-CB4CCA059FC4}" type="datetimeFigureOut">
               <a:rPr lang="en-US" smtClean="0"/>
-              <a:t>1/27/13</a:t>
+              <a:t>8/30/26</a:t>
             </a:fld>
             <a:endParaRPr lang="en-US"/>
           </a:p>
@@ -2932,10 +2834,9 @@
           </a:lstStyle>
           <a:p>
             <a:r>
-              <a:rPr lang="en-US" smtClean="0"/>
+              <a:rPr lang="en-US"/>
               <a:t>Click to edit Master title style</a:t>
             </a:r>
-            <a:endParaRPr lang="en-US"/>
           </a:p>
         </p:txBody>
       </p:sp>
@@ -2989,38 +2890,37 @@
           <a:p>
             <a:pPr lvl="0"/>
             <a:r>
-              <a:rPr lang="en-US" smtClean="0"/>
+              <a:rPr lang="en-US"/>
               <a:t>Click to edit Master text styles</a:t>
             </a:r>
           </a:p>
           <a:p>
             <a:pPr lvl="1"/>
             <a:r>
-              <a:rPr lang="en-US" smtClean="0"/>
+              <a:rPr lang="en-US"/>
               <a:t>Second level</a:t>
             </a:r>
           </a:p>
           <a:p>
             <a:pPr lvl="2"/>
             <a:r>
-              <a:rPr lang="en-US" smtClean="0"/>
+              <a:rPr lang="en-US"/>
               <a:t>Third level</a:t>
             </a:r>
           </a:p>
           <a:p>
             <a:pPr lvl="3"/>
             <a:r>
-              <a:rPr lang="en-US" smtClean="0"/>
+              <a:rPr lang="en-US"/>
               <a:t>Fourth level</a:t>
             </a:r>
           </a:p>
           <a:p>
             <a:pPr lvl="4"/>
             <a:r>
-              <a:rPr lang="en-US" smtClean="0"/>
+              <a:rPr lang="en-US"/>
               <a:t>Fifth level</a:t>
             </a:r>
-            <a:endParaRPr lang="en-US"/>
           </a:p>
         </p:txBody>
       </p:sp>
@@ -3083,7 +2983,7 @@
           <a:p>
             <a:pPr lvl="0"/>
             <a:r>
-              <a:rPr lang="en-US" smtClean="0"/>
+              <a:rPr lang="en-US"/>
               <a:t>Click to edit Master text styles</a:t>
             </a:r>
           </a:p>
@@ -3106,7 +3006,7 @@
           <a:p>
             <a:fld id="{5BCAD085-E8A6-8845-BD4E-CB4CCA059FC4}" type="datetimeFigureOut">
               <a:rPr lang="en-US" smtClean="0"/>
-              <a:t>1/27/13</a:t>
+              <a:t>8/30/26</a:t>
             </a:fld>
             <a:endParaRPr lang="en-US"/>
           </a:p>
@@ -3209,10 +3109,9 @@
           </a:lstStyle>
           <a:p>
             <a:r>
-              <a:rPr lang="en-US" smtClean="0"/>
+              <a:rPr lang="en-US"/>
               <a:t>Click to edit Master title style</a:t>
             </a:r>
-            <a:endParaRPr lang="en-US"/>
           </a:p>
         </p:txBody>
       </p:sp>
@@ -3336,7 +3235,7 @@
           <a:p>
             <a:pPr lvl="0"/>
             <a:r>
-              <a:rPr lang="en-US" smtClean="0"/>
+              <a:rPr lang="en-US"/>
               <a:t>Click to edit Master text styles</a:t>
             </a:r>
           </a:p>
@@ -3359,7 +3258,7 @@
           <a:p>
             <a:fld id="{5BCAD085-E8A6-8845-BD4E-CB4CCA059FC4}" type="datetimeFigureOut">
               <a:rPr lang="en-US" smtClean="0"/>
-              <a:t>1/27/13</a:t>
+              <a:t>8/30/26</a:t>
             </a:fld>
             <a:endParaRPr lang="en-US"/>
           </a:p>
@@ -3468,10 +3367,9 @@
           <a:lstStyle/>
           <a:p>
             <a:r>
-              <a:rPr lang="en-US" smtClean="0"/>
+              <a:rPr lang="en-US"/>
               <a:t>Click to edit Master title style</a:t>
             </a:r>
-            <a:endParaRPr lang="en-US"/>
           </a:p>
         </p:txBody>
       </p:sp>
@@ -3502,38 +3400,37 @@
           <a:p>
             <a:pPr lvl="0"/>
             <a:r>
-              <a:rPr lang="en-US" smtClean="0"/>
+              <a:rPr lang="en-US"/>
               <a:t>Click to edit Master text styles</a:t>
             </a:r>
           </a:p>
           <a:p>
             <a:pPr lvl="1"/>
             <a:r>
-              <a:rPr lang="en-US" smtClean="0"/>
+              <a:rPr lang="en-US"/>
               <a:t>Second level</a:t>
             </a:r>
           </a:p>
           <a:p>
             <a:pPr lvl="2"/>
             <a:r>
-              <a:rPr lang="en-US" smtClean="0"/>
+              <a:rPr lang="en-US"/>
               <a:t>Third level</a:t>
             </a:r>
           </a:p>
           <a:p>
             <a:pPr lvl="3"/>
             <a:r>
-              <a:rPr lang="en-US" smtClean="0"/>
+              <a:rPr lang="en-US"/>
               <a:t>Fourth level</a:t>
             </a:r>
           </a:p>
           <a:p>
             <a:pPr lvl="4"/>
             <a:r>
-              <a:rPr lang="en-US" smtClean="0"/>
+              <a:rPr lang="en-US"/>
               <a:t>Fifth level</a:t>
             </a:r>
-            <a:endParaRPr lang="en-US"/>
           </a:p>
         </p:txBody>
       </p:sp>
@@ -3572,7 +3469,7 @@
           <a:p>
             <a:fld id="{5BCAD085-E8A6-8845-BD4E-CB4CCA059FC4}" type="datetimeFigureOut">
               <a:rPr lang="en-US" smtClean="0"/>
-              <a:t>1/27/13</a:t>
+              <a:t>8/30/26</a:t>
             </a:fld>
             <a:endParaRPr lang="en-US"/>
           </a:p>
@@ -3931,7 +3828,7 @@
 </file>
 
 <file path=ppt/slides/slide1.xml><?xml version="1.0" encoding="utf-8"?>
-<p:sld xmlns:a="http://schemas.openxmlformats.org/drawingml/2006/main" xmlns:p="http://schemas.openxmlformats.org/presentationml/2006/main" xmlns:r="http://schemas.openxmlformats.org/officeDocument/2006/relationships">
+<p:sld xmlns:a="http://schemas.openxmlformats.org/drawingml/2006/main" xmlns:r="http://schemas.openxmlformats.org/officeDocument/2006/relationships" xmlns:p="http://schemas.openxmlformats.org/presentationml/2006/main">
   <p:cSld>
     <p:bg>
       <p:bgPr>
@@ -3947,7 +3844,14 @@
         <p:cNvGrpSpPr/>
         <p:nvPr/>
       </p:nvGrpSpPr>
-      <p:grpSpPr/>
+      <p:grpSpPr>
+        <a:xfrm>
+          <a:off x="0" y="0"/>
+          <a:ext cx="0" cy="0"/>
+          <a:chOff x="0" y="0"/>
+          <a:chExt cx="0" cy="0"/>
+        </a:xfrm>
+      </p:grpSpPr>
       <p:sp>
         <p:nvSpPr>
           <p:cNvPr id="2" name="Rectangle 1"/>
@@ -3989,6 +3893,7 @@
           <a:lstStyle/>
           <a:p>
             <a:pPr algn="ctr"/>
+            <a:endParaRPr/>
           </a:p>
         </p:txBody>
       </p:sp>
@@ -4067,7 +3972,7 @@
                 <a:latin typeface="Hiragino Sans"/>
                 <a:ea typeface="Hiragino Sans"/>
               </a:rPr>
-              <a:t>制度を知って、自分の人生を自分で描く</a:t>
+              <a:t>自分の人生を、自分で描き直す</a:t>
             </a:r>
           </a:p>
         </p:txBody>
@@ -4121,7 +4026,7 @@
           <p:nvPr/>
         </p:nvPicPr>
         <p:blipFill>
-          <a:blip r:embed="rId2"/>
+          <a:blip r:embed="rId3"/>
           <a:stretch>
             <a:fillRect/>
           </a:stretch>
@@ -4143,7 +4048,149 @@
       </p:pic>
       <p:sp>
         <p:nvSpPr>
-          <p:cNvPr id="7" name="TextBox 6"/>
+          <p:cNvPr id="7" name="Rectangle 6"/>
+          <p:cNvSpPr/>
+          <p:nvPr/>
+        </p:nvSpPr>
+        <p:spPr>
+          <a:xfrm>
+            <a:off x="640080" y="3246120"/>
+            <a:ext cx="5394960" cy="1508760"/>
+          </a:xfrm>
+          <a:prstGeom prst="rect">
+            <a:avLst/>
+          </a:prstGeom>
+          <a:solidFill>
+            <a:srgbClr val="F2F4F7"/>
+          </a:solidFill>
+          <a:ln>
+            <a:noFill/>
+          </a:ln>
+          <a:effectLst/>
+        </p:spPr>
+        <p:style>
+          <a:lnRef idx="1">
+            <a:schemeClr val="accent1"/>
+          </a:lnRef>
+          <a:fillRef idx="3">
+            <a:schemeClr val="accent1"/>
+          </a:fillRef>
+          <a:effectRef idx="2">
+            <a:schemeClr val="accent1"/>
+          </a:effectRef>
+          <a:fontRef idx="minor">
+            <a:schemeClr val="lt1"/>
+          </a:fontRef>
+        </p:style>
+        <p:txBody>
+          <a:bodyPr rtlCol="0" anchor="ctr"/>
+          <a:lstStyle/>
+          <a:p>
+            <a:pPr algn="ctr"/>
+            <a:endParaRPr/>
+          </a:p>
+        </p:txBody>
+      </p:sp>
+      <p:sp>
+        <p:nvSpPr>
+          <p:cNvPr id="8" name="TextBox 7"/>
+          <p:cNvSpPr txBox="1"/>
+          <p:nvPr/>
+        </p:nvSpPr>
+        <p:spPr>
+          <a:xfrm>
+            <a:off x="868680" y="3383280"/>
+            <a:ext cx="4937760" cy="365760"/>
+          </a:xfrm>
+          <a:prstGeom prst="rect">
+            <a:avLst/>
+          </a:prstGeom>
+          <a:noFill/>
+        </p:spPr>
+        <p:txBody>
+          <a:bodyPr wrap="square" anchor="t">
+            <a:spAutoFit/>
+          </a:bodyPr>
+          <a:lstStyle/>
+          <a:p>
+            <a:pPr algn="l">
+              <a:lnSpc>
+                <a:spcPct val="125000"/>
+              </a:lnSpc>
+            </a:pPr>
+            <a:r>
+              <a:rPr sz="1400" b="1">
+                <a:solidFill>
+                  <a:srgbClr val="1E3A5F"/>
+                </a:solidFill>
+                <a:latin typeface="Hiragino Sans"/>
+                <a:ea typeface="Hiragino Sans"/>
+              </a:rPr>
+              <a:t>チーム 浦安ライフ（2名）</a:t>
+            </a:r>
+          </a:p>
+        </p:txBody>
+      </p:sp>
+      <p:sp>
+        <p:nvSpPr>
+          <p:cNvPr id="9" name="TextBox 8"/>
+          <p:cNvSpPr txBox="1"/>
+          <p:nvPr/>
+        </p:nvSpPr>
+        <p:spPr>
+          <a:xfrm>
+            <a:off x="868680" y="3749039"/>
+            <a:ext cx="4937760" cy="914400"/>
+          </a:xfrm>
+          <a:prstGeom prst="rect">
+            <a:avLst/>
+          </a:prstGeom>
+          <a:noFill/>
+        </p:spPr>
+        <p:txBody>
+          <a:bodyPr wrap="square" anchor="t">
+            <a:spAutoFit/>
+          </a:bodyPr>
+          <a:lstStyle/>
+          <a:p>
+            <a:pPr algn="l">
+              <a:lnSpc>
+                <a:spcPct val="135000"/>
+              </a:lnSpc>
+            </a:pPr>
+            <a:r>
+              <a:rPr sz="1200" b="0">
+                <a:solidFill>
+                  <a:srgbClr val="20242B"/>
+                </a:solidFill>
+                <a:latin typeface="Hiragino Sans"/>
+                <a:ea typeface="Hiragino Sans"/>
+              </a:rPr>
+              <a:t>あかり（プロダクトオーナー・マーケター）／りょう（エンジニア）</a:t>
+            </a:r>
+          </a:p>
+          <a:p>
+            <a:pPr algn="l">
+              <a:lnSpc>
+                <a:spcPct val="135000"/>
+              </a:lnSpc>
+            </a:pPr>
+            <a:r>
+              <a:rPr sz="1200" b="0">
+                <a:solidFill>
+                  <a:srgbClr val="20242B"/>
+                </a:solidFill>
+                <a:latin typeface="Hiragino Sans"/>
+                <a:ea typeface="Hiragino Sans"/>
+              </a:rPr>
+              <a:t>浦安在住・東京で働く夫婦。「女性がもっとイキイキできる社会に」という思いから作りました。</a:t>
+            </a:r>
+          </a:p>
+        </p:txBody>
+      </p:sp>
+      <p:sp>
+        <p:nvSpPr>
+          <p:cNvPr id="10" name="TextBox 9"/>
           <p:cNvSpPr txBox="1"/>
           <p:nvPr/>
         </p:nvSpPr>
@@ -4183,7 +4230,7 @@
       </p:sp>
       <p:sp>
         <p:nvSpPr>
-          <p:cNvPr id="8" name="TextBox 7"/>
+          <p:cNvPr id="11" name="TextBox 10"/>
           <p:cNvSpPr txBox="1"/>
           <p:nvPr/>
         </p:nvSpPr>
@@ -4230,7 +4277,7 @@
 </file>
 
 <file path=ppt/slides/slide2.xml><?xml version="1.0" encoding="utf-8"?>
-<p:sld xmlns:a="http://schemas.openxmlformats.org/drawingml/2006/main" xmlns:p="http://schemas.openxmlformats.org/presentationml/2006/main" xmlns:r="http://schemas.openxmlformats.org/officeDocument/2006/relationships">
+<p:sld xmlns:a="http://schemas.openxmlformats.org/drawingml/2006/main" xmlns:r="http://schemas.openxmlformats.org/officeDocument/2006/relationships" xmlns:p="http://schemas.openxmlformats.org/presentationml/2006/main">
   <p:cSld>
     <p:bg>
       <p:bgPr>
@@ -4246,7 +4293,14 @@
         <p:cNvGrpSpPr/>
         <p:nvPr/>
       </p:nvGrpSpPr>
-      <p:grpSpPr/>
+      <p:grpSpPr>
+        <a:xfrm>
+          <a:off x="0" y="0"/>
+          <a:ext cx="0" cy="0"/>
+          <a:chOff x="0" y="0"/>
+          <a:chExt cx="0" cy="0"/>
+        </a:xfrm>
+      </p:grpSpPr>
       <p:sp>
         <p:nvSpPr>
           <p:cNvPr id="2" name="TextBox 1"/>
@@ -4255,8 +4309,8 @@
         </p:nvSpPr>
         <p:spPr>
           <a:xfrm>
-            <a:off x="640080" y="457200"/>
-            <a:ext cx="10515600" cy="822960"/>
+            <a:off x="640080" y="411480"/>
+            <a:ext cx="10515600" cy="731520"/>
           </a:xfrm>
           <a:prstGeom prst="rect">
             <a:avLst/>
@@ -4275,7 +4329,7 @@
               </a:lnSpc>
             </a:pPr>
             <a:r>
-              <a:rPr sz="3600" b="1">
+              <a:rPr sz="3400" b="1">
                 <a:solidFill>
                   <a:srgbClr val="142842"/>
                 </a:solidFill>
@@ -4295,8 +4349,88 @@
         </p:nvSpPr>
         <p:spPr>
           <a:xfrm>
-            <a:off x="1645920" y="2011680"/>
-            <a:ext cx="3291840" cy="1463040"/>
+            <a:off x="640080" y="1097280"/>
+            <a:ext cx="10515600" cy="457200"/>
+          </a:xfrm>
+          <a:prstGeom prst="rect">
+            <a:avLst/>
+          </a:prstGeom>
+          <a:noFill/>
+        </p:spPr>
+        <p:txBody>
+          <a:bodyPr wrap="square" anchor="t">
+            <a:spAutoFit/>
+          </a:bodyPr>
+          <a:lstStyle/>
+          <a:p>
+            <a:pPr algn="l">
+              <a:lnSpc>
+                <a:spcPct val="125000"/>
+              </a:lnSpc>
+            </a:pPr>
+            <a:r>
+              <a:rPr sz="2000" b="1">
+                <a:solidFill>
+                  <a:srgbClr val="C2708C"/>
+                </a:solidFill>
+                <a:latin typeface="Hiragino Sans"/>
+                <a:ea typeface="Hiragino Sans"/>
+              </a:rPr>
+              <a:t>——でも、周りは「女性は家庭の方が向いている」と言う</a:t>
+            </a:r>
+          </a:p>
+        </p:txBody>
+      </p:sp>
+      <p:sp>
+        <p:nvSpPr>
+          <p:cNvPr id="4" name="TextBox 3"/>
+          <p:cNvSpPr txBox="1"/>
+          <p:nvPr/>
+        </p:nvSpPr>
+        <p:spPr>
+          <a:xfrm>
+            <a:off x="640080" y="1691640"/>
+            <a:ext cx="10515600" cy="320040"/>
+          </a:xfrm>
+          <a:prstGeom prst="rect">
+            <a:avLst/>
+          </a:prstGeom>
+          <a:noFill/>
+        </p:spPr>
+        <p:txBody>
+          <a:bodyPr wrap="square" anchor="t">
+            <a:spAutoFit/>
+          </a:bodyPr>
+          <a:lstStyle/>
+          <a:p>
+            <a:pPr algn="l">
+              <a:lnSpc>
+                <a:spcPct val="125000"/>
+              </a:lnSpc>
+            </a:pPr>
+            <a:r>
+              <a:rPr sz="1400" b="0">
+                <a:solidFill>
+                  <a:srgbClr val="565B62"/>
+                </a:solidFill>
+                <a:latin typeface="Hiragino Sans"/>
+                <a:ea typeface="Hiragino Sans"/>
+              </a:rPr>
+              <a:t>「育児は◯◯の方が向いている」と思う人の割合</a:t>
+            </a:r>
+          </a:p>
+        </p:txBody>
+      </p:sp>
+      <p:sp>
+        <p:nvSpPr>
+          <p:cNvPr id="5" name="TextBox 4"/>
+          <p:cNvSpPr txBox="1"/>
+          <p:nvPr/>
+        </p:nvSpPr>
+        <p:spPr>
+          <a:xfrm>
+            <a:off x="822960" y="2103120"/>
+            <a:ext cx="4937760" cy="457200"/>
           </a:xfrm>
           <a:prstGeom prst="rect">
             <a:avLst/>
@@ -4315,16 +4449,39 @@
               </a:lnSpc>
             </a:pPr>
             <a:r>
-              <a:rPr sz="4800" b="1">
-                <a:solidFill>
-                  <a:srgbClr val="1E3A5F"/>
+              <a:rPr sz="2000" b="1">
+                <a:solidFill>
+                  <a:srgbClr val="C2708C"/>
                 </a:solidFill>
                 <a:latin typeface="Hiragino Sans"/>
                 <a:ea typeface="Hiragino Sans"/>
               </a:rPr>
-              <a:t>希望</a:t>
-            </a:r>
-          </a:p>
+              <a:t>育児は女性の方が向いている</a:t>
+            </a:r>
+          </a:p>
+        </p:txBody>
+      </p:sp>
+      <p:sp>
+        <p:nvSpPr>
+          <p:cNvPr id="6" name="TextBox 5"/>
+          <p:cNvSpPr txBox="1"/>
+          <p:nvPr/>
+        </p:nvSpPr>
+        <p:spPr>
+          <a:xfrm>
+            <a:off x="822960" y="2606040"/>
+            <a:ext cx="4937760" cy="1097280"/>
+          </a:xfrm>
+          <a:prstGeom prst="rect">
+            <a:avLst/>
+          </a:prstGeom>
+          <a:noFill/>
+        </p:spPr>
+        <p:txBody>
+          <a:bodyPr wrap="square" anchor="t">
+            <a:spAutoFit/>
+          </a:bodyPr>
+          <a:lstStyle/>
           <a:p>
             <a:pPr algn="ctr">
               <a:lnSpc>
@@ -4332,28 +4489,28 @@
               </a:lnSpc>
             </a:pPr>
             <a:r>
-              <a:rPr sz="4800" b="1">
-                <a:solidFill>
-                  <a:srgbClr val="1E3A5F"/>
+              <a:rPr sz="5800" b="1">
+                <a:solidFill>
+                  <a:srgbClr val="C2708C"/>
                 </a:solidFill>
                 <a:latin typeface="Hiragino Sans"/>
                 <a:ea typeface="Hiragino Sans"/>
               </a:rPr>
-              <a:t>34%</a:t>
-            </a:r>
-          </a:p>
-        </p:txBody>
-      </p:sp>
-      <p:sp>
-        <p:nvSpPr>
-          <p:cNvPr id="4" name="TextBox 3"/>
+              <a:t>68%</a:t>
+            </a:r>
+          </a:p>
+        </p:txBody>
+      </p:sp>
+      <p:sp>
+        <p:nvSpPr>
+          <p:cNvPr id="7" name="TextBox 6"/>
           <p:cNvSpPr txBox="1"/>
           <p:nvPr/>
         </p:nvSpPr>
         <p:spPr>
           <a:xfrm>
-            <a:off x="4937760" y="2514600"/>
-            <a:ext cx="2286000" cy="548640"/>
+            <a:off x="5806440" y="2880360"/>
+            <a:ext cx="640080" cy="548640"/>
           </a:xfrm>
           <a:prstGeom prst="rect">
             <a:avLst/>
@@ -4372,7 +4529,7 @@
               </a:lnSpc>
             </a:pPr>
             <a:r>
-              <a:rPr sz="3600" b="0">
+              <a:rPr sz="3200" b="0">
                 <a:solidFill>
                   <a:srgbClr val="565B62"/>
                 </a:solidFill>
@@ -4386,14 +4543,14 @@
       </p:sp>
       <p:sp>
         <p:nvSpPr>
-          <p:cNvPr id="5" name="TextBox 4"/>
+          <p:cNvPr id="8" name="TextBox 7"/>
           <p:cNvSpPr txBox="1"/>
           <p:nvPr/>
         </p:nvSpPr>
         <p:spPr>
           <a:xfrm>
-            <a:off x="7223760" y="2011680"/>
-            <a:ext cx="3291840" cy="1463040"/>
+            <a:off x="6446520" y="2103120"/>
+            <a:ext cx="4937760" cy="457200"/>
           </a:xfrm>
           <a:prstGeom prst="rect">
             <a:avLst/>
@@ -4412,16 +4569,39 @@
               </a:lnSpc>
             </a:pPr>
             <a:r>
-              <a:rPr sz="4800" b="1">
-                <a:solidFill>
-                  <a:srgbClr val="C2708C"/>
+              <a:rPr sz="2000" b="1">
+                <a:solidFill>
+                  <a:srgbClr val="1E3A5F"/>
                 </a:solidFill>
                 <a:latin typeface="Hiragino Sans"/>
                 <a:ea typeface="Hiragino Sans"/>
               </a:rPr>
-              <a:t>現実</a:t>
-            </a:r>
-          </a:p>
+              <a:t>育児は男性の方が向いている</a:t>
+            </a:r>
+          </a:p>
+        </p:txBody>
+      </p:sp>
+      <p:sp>
+        <p:nvSpPr>
+          <p:cNvPr id="9" name="TextBox 8"/>
+          <p:cNvSpPr txBox="1"/>
+          <p:nvPr/>
+        </p:nvSpPr>
+        <p:spPr>
+          <a:xfrm>
+            <a:off x="6446520" y="2606040"/>
+            <a:ext cx="4937760" cy="1097280"/>
+          </a:xfrm>
+          <a:prstGeom prst="rect">
+            <a:avLst/>
+          </a:prstGeom>
+          <a:noFill/>
+        </p:spPr>
+        <p:txBody>
+          <a:bodyPr wrap="square" anchor="t">
+            <a:spAutoFit/>
+          </a:bodyPr>
+          <a:lstStyle/>
           <a:p>
             <a:pPr algn="ctr">
               <a:lnSpc>
@@ -4429,28 +4609,28 @@
               </a:lnSpc>
             </a:pPr>
             <a:r>
-              <a:rPr sz="4800" b="1">
-                <a:solidFill>
-                  <a:srgbClr val="C2708C"/>
+              <a:rPr sz="5800" b="1">
+                <a:solidFill>
+                  <a:srgbClr val="1E3A5F"/>
                 </a:solidFill>
                 <a:latin typeface="Hiragino Sans"/>
                 <a:ea typeface="Hiragino Sans"/>
               </a:rPr>
-              <a:t>32%</a:t>
-            </a:r>
-          </a:p>
-        </p:txBody>
-      </p:sp>
-      <p:sp>
-        <p:nvSpPr>
-          <p:cNvPr id="6" name="TextBox 5"/>
+              <a:t>7%</a:t>
+            </a:r>
+          </a:p>
+        </p:txBody>
+      </p:sp>
+      <p:sp>
+        <p:nvSpPr>
+          <p:cNvPr id="10" name="TextBox 9"/>
           <p:cNvSpPr txBox="1"/>
           <p:nvPr/>
         </p:nvSpPr>
         <p:spPr>
           <a:xfrm>
-            <a:off x="640080" y="3749039"/>
-            <a:ext cx="10515600" cy="1188720"/>
+            <a:off x="640080" y="3977639"/>
+            <a:ext cx="10515600" cy="548640"/>
           </a:xfrm>
           <a:prstGeom prst="rect">
             <a:avLst/>
@@ -4463,61 +4643,84 @@
           </a:bodyPr>
           <a:lstStyle/>
           <a:p>
-            <a:pPr algn="l">
+            <a:pPr algn="ctr">
+              <a:lnSpc>
+                <a:spcPct val="125000"/>
+              </a:lnSpc>
+            </a:pPr>
+            <a:r>
+              <a:rPr sz="2400" b="1">
+                <a:solidFill>
+                  <a:srgbClr val="142842"/>
+                </a:solidFill>
+                <a:latin typeface="Hiragino Sans"/>
+                <a:ea typeface="Hiragino Sans"/>
+              </a:rPr>
+              <a:t>望んでいないのではなく、諦めざるを得ないのではないか。</a:t>
+            </a:r>
+          </a:p>
+        </p:txBody>
+      </p:sp>
+      <p:sp>
+        <p:nvSpPr>
+          <p:cNvPr id="11" name="TextBox 10"/>
+          <p:cNvSpPr txBox="1"/>
+          <p:nvPr/>
+        </p:nvSpPr>
+        <p:spPr>
+          <a:xfrm>
+            <a:off x="640080" y="4617720"/>
+            <a:ext cx="10515600" cy="1005840"/>
+          </a:xfrm>
+          <a:prstGeom prst="rect">
+            <a:avLst/>
+          </a:prstGeom>
+          <a:noFill/>
+        </p:spPr>
+        <p:txBody>
+          <a:bodyPr wrap="square" anchor="t">
+            <a:spAutoFit/>
+          </a:bodyPr>
+          <a:lstStyle/>
+          <a:p>
+            <a:pPr algn="ctr">
               <a:lnSpc>
                 <a:spcPct val="140000"/>
               </a:lnSpc>
             </a:pPr>
             <a:r>
-              <a:rPr sz="2000" b="0">
+              <a:rPr sz="1700" b="0">
                 <a:solidFill>
                   <a:srgbClr val="20242B"/>
                 </a:solidFill>
                 <a:latin typeface="Hiragino Sans"/>
                 <a:ea typeface="Hiragino Sans"/>
               </a:rPr>
-              <a:t>仕事・家庭生活・個人の生活すべてを大切にしたいという希望は34%ある一方、</a:t>
-            </a:r>
-          </a:p>
-          <a:p>
-            <a:pPr algn="l">
+              <a:t>企業が挙げる課題1位は「管理職を希望する女性が少ない」46.4%。</a:t>
+            </a:r>
+          </a:p>
+          <a:p>
+            <a:pPr algn="ctr">
               <a:lnSpc>
                 <a:spcPct val="140000"/>
               </a:lnSpc>
             </a:pPr>
             <a:r>
-              <a:rPr sz="2000" b="0">
+              <a:rPr sz="1700" b="0">
                 <a:solidFill>
                   <a:srgbClr val="20242B"/>
                 </a:solidFill>
                 <a:latin typeface="Hiragino Sans"/>
                 <a:ea typeface="Hiragino Sans"/>
               </a:rPr>
-              <a:t>現実には仕事を優先している人が32%。制約自体は無くなりません。</a:t>
-            </a:r>
-          </a:p>
-          <a:p>
-            <a:pPr algn="l">
-              <a:lnSpc>
-                <a:spcPct val="140000"/>
-              </a:lnSpc>
-            </a:pPr>
-            <a:r>
-              <a:rPr sz="2000" b="0">
-                <a:solidFill>
-                  <a:srgbClr val="20242B"/>
-                </a:solidFill>
-                <a:latin typeface="Hiragino Sans"/>
-                <a:ea typeface="Hiragino Sans"/>
-              </a:rPr>
-              <a:t>知らずに選択肢を狭めてしまう状況だけは、変えられると考えました。</a:t>
-            </a:r>
-          </a:p>
-        </p:txBody>
-      </p:sp>
-      <p:sp>
-        <p:nvSpPr>
-          <p:cNvPr id="7" name="TextBox 6"/>
+              <a:t>でも本人が挙げる1位は「家庭責任が重いイメージ」69.4%。</a:t>
+            </a:r>
+          </a:p>
+        </p:txBody>
+      </p:sp>
+      <p:sp>
+        <p:nvSpPr>
+          <p:cNvPr id="12" name="TextBox 11"/>
           <p:cNvSpPr txBox="1"/>
           <p:nvPr/>
         </p:nvSpPr>
@@ -4550,14 +4753,14 @@
                 <a:latin typeface="Hiragino Sans"/>
                 <a:ea typeface="Hiragino Sans"/>
               </a:rPr>
-              <a:t>出典: 東京都「男女平等参画に関する世論調査」（令和2年度）／東京都「男女雇用平等参画状況調査」（令和7年度、女性が挙げる課題1位「家庭責任が重いイメージ」69.4%）</a:t>
-            </a:r>
-          </a:p>
-        </p:txBody>
-      </p:sp>
-      <p:sp>
-        <p:nvSpPr>
-          <p:cNvPr id="8" name="TextBox 7"/>
+              <a:t>出典: 東京都「男女平等参画に関する世論調査」（令和7年8月調査, n=1,615。「性別で向いている仕事・向いていない仕事がある」は83%）／東京都「男女雇用平等参画状況調査」（令和7年度、事業所 n=347・従業員女性 n=556）</a:t>
+            </a:r>
+          </a:p>
+        </p:txBody>
+      </p:sp>
+      <p:sp>
+        <p:nvSpPr>
+          <p:cNvPr id="13" name="TextBox 12"/>
           <p:cNvSpPr txBox="1"/>
           <p:nvPr/>
         </p:nvSpPr>
@@ -4604,7 +4807,7 @@
 </file>
 
 <file path=ppt/slides/slide3.xml><?xml version="1.0" encoding="utf-8"?>
-<p:sld xmlns:a="http://schemas.openxmlformats.org/drawingml/2006/main" xmlns:p="http://schemas.openxmlformats.org/presentationml/2006/main" xmlns:r="http://schemas.openxmlformats.org/officeDocument/2006/relationships">
+<p:sld xmlns:a="http://schemas.openxmlformats.org/drawingml/2006/main" xmlns:r="http://schemas.openxmlformats.org/officeDocument/2006/relationships" xmlns:p="http://schemas.openxmlformats.org/presentationml/2006/main">
   <p:cSld>
     <p:bg>
       <p:bgPr>
@@ -4620,7 +4823,14 @@
         <p:cNvGrpSpPr/>
         <p:nvPr/>
       </p:nvGrpSpPr>
-      <p:grpSpPr/>
+      <p:grpSpPr>
+        <a:xfrm>
+          <a:off x="0" y="0"/>
+          <a:ext cx="0" cy="0"/>
+          <a:chOff x="0" y="0"/>
+          <a:chExt cx="0" cy="0"/>
+        </a:xfrm>
+      </p:grpSpPr>
       <p:sp>
         <p:nvSpPr>
           <p:cNvPr id="2" name="TextBox 1"/>
@@ -4629,8 +4839,8 @@
         </p:nvSpPr>
         <p:spPr>
           <a:xfrm>
-            <a:off x="640080" y="457200"/>
-            <a:ext cx="10515600" cy="822960"/>
+            <a:off x="640080" y="411480"/>
+            <a:ext cx="10515600" cy="731520"/>
           </a:xfrm>
           <a:prstGeom prst="rect">
             <a:avLst/>
@@ -4656,56 +4866,107 @@
                 <a:latin typeface="Hiragino Sans"/>
                 <a:ea typeface="Hiragino Sans"/>
               </a:rPr>
-              <a:t>使える制度を、出典付きで手渡す</a:t>
-            </a:r>
-          </a:p>
-        </p:txBody>
-      </p:sp>
-      <p:pic>
-        <p:nvPicPr>
-          <p:cNvPr id="3" name="Picture 2" descr="event-detail-childbirth.jpg"/>
-          <p:cNvPicPr>
-            <a:picLocks noChangeAspect="1"/>
-          </p:cNvPicPr>
-          <p:nvPr/>
-        </p:nvPicPr>
-        <p:blipFill>
-          <a:blip r:embed="rId2"/>
-          <a:stretch>
-            <a:fillRect/>
-          </a:stretch>
-        </p:blipFill>
-        <p:spPr>
-          <a:xfrm>
-            <a:off x="640080" y="1371600"/>
-            <a:ext cx="6766560" cy="3867912"/>
-          </a:xfrm>
-          <a:prstGeom prst="rect">
-            <a:avLst/>
-          </a:prstGeom>
-          <a:ln w="12700">
-            <a:solidFill>
-              <a:srgbClr val="D9D0BC"/>
-            </a:solidFill>
-          </a:ln>
-        </p:spPr>
-      </p:pic>
-      <p:sp>
-        <p:nvSpPr>
-          <p:cNvPr id="4" name="Rectangle 3"/>
+              <a:t>がんばりたくても、使える制度を知らない</a:t>
+            </a:r>
+          </a:p>
+        </p:txBody>
+      </p:sp>
+      <p:sp>
+        <p:nvSpPr>
+          <p:cNvPr id="3" name="TextBox 2"/>
+          <p:cNvSpPr txBox="1"/>
+          <p:nvPr/>
+        </p:nvSpPr>
+        <p:spPr>
+          <a:xfrm>
+            <a:off x="640080" y="1097280"/>
+            <a:ext cx="10515600" cy="365760"/>
+          </a:xfrm>
+          <a:prstGeom prst="rect">
+            <a:avLst/>
+          </a:prstGeom>
+          <a:noFill/>
+        </p:spPr>
+        <p:txBody>
+          <a:bodyPr wrap="square" anchor="t">
+            <a:spAutoFit/>
+          </a:bodyPr>
+          <a:lstStyle/>
+          <a:p>
+            <a:pPr algn="l">
+              <a:lnSpc>
+                <a:spcPct val="125000"/>
+              </a:lnSpc>
+            </a:pPr>
+            <a:r>
+              <a:rPr sz="1600" b="0">
+                <a:solidFill>
+                  <a:srgbClr val="565B62"/>
+                </a:solidFill>
+                <a:latin typeface="Hiragino Sans"/>
+                <a:ea typeface="Hiragino Sans"/>
+              </a:rPr>
+              <a:t>自分の職場に制度があるか「わからない」</a:t>
+            </a:r>
+          </a:p>
+        </p:txBody>
+      </p:sp>
+      <p:sp>
+        <p:nvSpPr>
+          <p:cNvPr id="4" name="TextBox 3"/>
+          <p:cNvSpPr txBox="1"/>
+          <p:nvPr/>
+        </p:nvSpPr>
+        <p:spPr>
+          <a:xfrm>
+            <a:off x="640080" y="1764792"/>
+            <a:ext cx="2011680" cy="457200"/>
+          </a:xfrm>
+          <a:prstGeom prst="rect">
+            <a:avLst/>
+          </a:prstGeom>
+          <a:noFill/>
+        </p:spPr>
+        <p:txBody>
+          <a:bodyPr wrap="square" anchor="t">
+            <a:spAutoFit/>
+          </a:bodyPr>
+          <a:lstStyle/>
+          <a:p>
+            <a:pPr algn="l">
+              <a:lnSpc>
+                <a:spcPct val="125000"/>
+              </a:lnSpc>
+            </a:pPr>
+            <a:r>
+              <a:rPr sz="1600" b="0">
+                <a:solidFill>
+                  <a:srgbClr val="20242B"/>
+                </a:solidFill>
+                <a:latin typeface="Hiragino Sans"/>
+                <a:ea typeface="Hiragino Sans"/>
+              </a:rPr>
+              <a:t>産前産後休暇</a:t>
+            </a:r>
+          </a:p>
+        </p:txBody>
+      </p:sp>
+      <p:sp>
+        <p:nvSpPr>
+          <p:cNvPr id="5" name="Rectangle 4"/>
           <p:cNvSpPr/>
           <p:nvPr/>
         </p:nvSpPr>
         <p:spPr>
           <a:xfrm>
-            <a:off x="7772400" y="1463040"/>
-            <a:ext cx="3657600" cy="777240"/>
+            <a:off x="2834640" y="1691640"/>
+            <a:ext cx="680313" cy="457200"/>
           </a:xfrm>
           <a:prstGeom prst="rect">
             <a:avLst/>
           </a:prstGeom>
           <a:solidFill>
-            <a:srgbClr val="F2F4F7"/>
+            <a:srgbClr val="1E3A5F"/>
           </a:solidFill>
           <a:ln>
             <a:noFill/>
@@ -4731,19 +4992,20 @@
           <a:lstStyle/>
           <a:p>
             <a:pPr algn="ctr"/>
-          </a:p>
-        </p:txBody>
-      </p:sp>
-      <p:sp>
-        <p:nvSpPr>
-          <p:cNvPr id="5" name="TextBox 4"/>
+            <a:endParaRPr/>
+          </a:p>
+        </p:txBody>
+      </p:sp>
+      <p:sp>
+        <p:nvSpPr>
+          <p:cNvPr id="6" name="TextBox 5"/>
           <p:cNvSpPr txBox="1"/>
           <p:nvPr/>
         </p:nvSpPr>
         <p:spPr>
           <a:xfrm>
-            <a:off x="7955279" y="1627632"/>
-            <a:ext cx="3291840" cy="457200"/>
+            <a:off x="3652113" y="1719072"/>
+            <a:ext cx="1371600" cy="457200"/>
           </a:xfrm>
           <a:prstGeom prst="rect">
             <a:avLst/>
@@ -4769,27 +5031,67 @@
                 <a:latin typeface="Hiragino Sans"/>
                 <a:ea typeface="Hiragino Sans"/>
               </a:rPr>
-              <a:t>01  同じ時間軸</a:t>
-            </a:r>
-          </a:p>
-        </p:txBody>
-      </p:sp>
-      <p:sp>
-        <p:nvSpPr>
-          <p:cNvPr id="6" name="Rectangle 5"/>
+              <a:t>6.0%</a:t>
+            </a:r>
+          </a:p>
+        </p:txBody>
+      </p:sp>
+      <p:sp>
+        <p:nvSpPr>
+          <p:cNvPr id="7" name="TextBox 6"/>
+          <p:cNvSpPr txBox="1"/>
+          <p:nvPr/>
+        </p:nvSpPr>
+        <p:spPr>
+          <a:xfrm>
+            <a:off x="640080" y="2542032"/>
+            <a:ext cx="2011680" cy="457200"/>
+          </a:xfrm>
+          <a:prstGeom prst="rect">
+            <a:avLst/>
+          </a:prstGeom>
+          <a:noFill/>
+        </p:spPr>
+        <p:txBody>
+          <a:bodyPr wrap="square" anchor="t">
+            <a:spAutoFit/>
+          </a:bodyPr>
+          <a:lstStyle/>
+          <a:p>
+            <a:pPr algn="l">
+              <a:lnSpc>
+                <a:spcPct val="125000"/>
+              </a:lnSpc>
+            </a:pPr>
+            <a:r>
+              <a:rPr sz="1600" b="0">
+                <a:solidFill>
+                  <a:srgbClr val="20242B"/>
+                </a:solidFill>
+                <a:latin typeface="Hiragino Sans"/>
+                <a:ea typeface="Hiragino Sans"/>
+              </a:rPr>
+              <a:t>通院休暇制度</a:t>
+            </a:r>
+          </a:p>
+        </p:txBody>
+      </p:sp>
+      <p:sp>
+        <p:nvSpPr>
+          <p:cNvPr id="8" name="Rectangle 7"/>
           <p:cNvSpPr/>
           <p:nvPr/>
         </p:nvSpPr>
         <p:spPr>
           <a:xfrm>
-            <a:off x="7772400" y="2514600"/>
-            <a:ext cx="3657600" cy="777240"/>
+            <a:off x="2834640" y="2468880"/>
+            <a:ext cx="3843771" cy="457200"/>
           </a:xfrm>
           <a:prstGeom prst="rect">
             <a:avLst/>
           </a:prstGeom>
           <a:solidFill>
-            <a:srgbClr val="F2F4F7"/>
+            <a:srgbClr val="1E3A5F"/>
           </a:solidFill>
           <a:ln>
             <a:noFill/>
@@ -4815,19 +5117,20 @@
           <a:lstStyle/>
           <a:p>
             <a:pPr algn="ctr"/>
-          </a:p>
-        </p:txBody>
-      </p:sp>
-      <p:sp>
-        <p:nvSpPr>
-          <p:cNvPr id="7" name="TextBox 6"/>
+            <a:endParaRPr/>
+          </a:p>
+        </p:txBody>
+      </p:sp>
+      <p:sp>
+        <p:nvSpPr>
+          <p:cNvPr id="9" name="TextBox 8"/>
           <p:cNvSpPr txBox="1"/>
           <p:nvPr/>
         </p:nvSpPr>
         <p:spPr>
           <a:xfrm>
-            <a:off x="7955279" y="2679192"/>
-            <a:ext cx="3291840" cy="457200"/>
+            <a:off x="6815571" y="2496312"/>
+            <a:ext cx="1371600" cy="457200"/>
           </a:xfrm>
           <a:prstGeom prst="rect">
             <a:avLst/>
@@ -4853,27 +5156,67 @@
                 <a:latin typeface="Hiragino Sans"/>
                 <a:ea typeface="Hiragino Sans"/>
               </a:rPr>
-              <a:t>02  出典付きの事実</a:t>
-            </a:r>
-          </a:p>
-        </p:txBody>
-      </p:sp>
-      <p:sp>
-        <p:nvSpPr>
-          <p:cNvPr id="8" name="Rectangle 7"/>
+              <a:t>33.9%</a:t>
+            </a:r>
+          </a:p>
+        </p:txBody>
+      </p:sp>
+      <p:sp>
+        <p:nvSpPr>
+          <p:cNvPr id="10" name="TextBox 9"/>
+          <p:cNvSpPr txBox="1"/>
+          <p:nvPr/>
+        </p:nvSpPr>
+        <p:spPr>
+          <a:xfrm>
+            <a:off x="640080" y="3319272"/>
+            <a:ext cx="2011680" cy="457200"/>
+          </a:xfrm>
+          <a:prstGeom prst="rect">
+            <a:avLst/>
+          </a:prstGeom>
+          <a:noFill/>
+        </p:spPr>
+        <p:txBody>
+          <a:bodyPr wrap="square" anchor="t">
+            <a:spAutoFit/>
+          </a:bodyPr>
+          <a:lstStyle/>
+          <a:p>
+            <a:pPr algn="l">
+              <a:lnSpc>
+                <a:spcPct val="125000"/>
+              </a:lnSpc>
+            </a:pPr>
+            <a:r>
+              <a:rPr sz="1600" b="0">
+                <a:solidFill>
+                  <a:srgbClr val="20242B"/>
+                </a:solidFill>
+                <a:latin typeface="Hiragino Sans"/>
+                <a:ea typeface="Hiragino Sans"/>
+              </a:rPr>
+              <a:t>妊娠障害休暇</a:t>
+            </a:r>
+          </a:p>
+        </p:txBody>
+      </p:sp>
+      <p:sp>
+        <p:nvSpPr>
+          <p:cNvPr id="11" name="Rectangle 10"/>
           <p:cNvSpPr/>
           <p:nvPr/>
         </p:nvSpPr>
         <p:spPr>
           <a:xfrm>
-            <a:off x="7772400" y="3566160"/>
-            <a:ext cx="3657600" cy="777240"/>
+            <a:off x="2834640" y="3246120"/>
+            <a:ext cx="4852903" cy="457200"/>
           </a:xfrm>
           <a:prstGeom prst="rect">
             <a:avLst/>
           </a:prstGeom>
           <a:solidFill>
-            <a:srgbClr val="F2F4F7"/>
+            <a:srgbClr val="1E3A5F"/>
           </a:solidFill>
           <a:ln>
             <a:noFill/>
@@ -4899,19 +5242,20 @@
           <a:lstStyle/>
           <a:p>
             <a:pPr algn="ctr"/>
-          </a:p>
-        </p:txBody>
-      </p:sp>
-      <p:sp>
-        <p:nvSpPr>
-          <p:cNvPr id="9" name="TextBox 8"/>
+            <a:endParaRPr/>
+          </a:p>
+        </p:txBody>
+      </p:sp>
+      <p:sp>
+        <p:nvSpPr>
+          <p:cNvPr id="12" name="TextBox 11"/>
           <p:cNvSpPr txBox="1"/>
           <p:nvPr/>
         </p:nvSpPr>
         <p:spPr>
           <a:xfrm>
-            <a:off x="7955279" y="3730752"/>
-            <a:ext cx="3291840" cy="457200"/>
+            <a:off x="7824703" y="3273552"/>
+            <a:ext cx="1371600" cy="457200"/>
           </a:xfrm>
           <a:prstGeom prst="rect">
             <a:avLst/>
@@ -4937,21 +5281,21 @@
                 <a:latin typeface="Hiragino Sans"/>
                 <a:ea typeface="Hiragino Sans"/>
               </a:rPr>
-              <a:t>03  決めるのは自分</a:t>
-            </a:r>
-          </a:p>
-        </p:txBody>
-      </p:sp>
-      <p:sp>
-        <p:nvSpPr>
-          <p:cNvPr id="10" name="TextBox 9"/>
+              <a:t>42.8%</a:t>
+            </a:r>
+          </a:p>
+        </p:txBody>
+      </p:sp>
+      <p:sp>
+        <p:nvSpPr>
+          <p:cNvPr id="13" name="TextBox 12"/>
           <p:cNvSpPr txBox="1"/>
           <p:nvPr/>
         </p:nvSpPr>
         <p:spPr>
           <a:xfrm>
-            <a:off x="7772400" y="4846320"/>
-            <a:ext cx="3657600" cy="1371600"/>
+            <a:off x="640080" y="4096512"/>
+            <a:ext cx="2011680" cy="457200"/>
           </a:xfrm>
           <a:prstGeom prst="rect">
             <a:avLst/>
@@ -4966,42 +5310,150 @@
           <a:p>
             <a:pPr algn="l">
               <a:lnSpc>
-                <a:spcPct val="130000"/>
+                <a:spcPct val="125000"/>
               </a:lnSpc>
             </a:pPr>
             <a:r>
-              <a:rPr sz="1400" b="0">
-                <a:solidFill>
-                  <a:srgbClr val="565B62"/>
+              <a:rPr sz="1600" b="1">
+                <a:solidFill>
+                  <a:srgbClr val="20242B"/>
                 </a:solidFill>
                 <a:latin typeface="Hiragino Sans"/>
                 <a:ea typeface="Hiragino Sans"/>
               </a:rPr>
-              <a:t>「国の制度」「東京都の制度」を実施主体ごとに明示し、</a:t>
-            </a:r>
-          </a:p>
+              <a:t>出産障害休暇</a:t>
+            </a:r>
+          </a:p>
+        </p:txBody>
+      </p:sp>
+      <p:sp>
+        <p:nvSpPr>
+          <p:cNvPr id="14" name="Rectangle 13"/>
+          <p:cNvSpPr/>
+          <p:nvPr/>
+        </p:nvSpPr>
+        <p:spPr>
+          <a:xfrm>
+            <a:off x="2834640" y="4023360"/>
+            <a:ext cx="5363138" cy="457200"/>
+          </a:xfrm>
+          <a:prstGeom prst="rect">
+            <a:avLst/>
+          </a:prstGeom>
+          <a:solidFill>
+            <a:srgbClr val="C2708C"/>
+          </a:solidFill>
+          <a:ln>
+            <a:noFill/>
+          </a:ln>
+          <a:effectLst/>
+        </p:spPr>
+        <p:style>
+          <a:lnRef idx="1">
+            <a:schemeClr val="accent1"/>
+          </a:lnRef>
+          <a:fillRef idx="3">
+            <a:schemeClr val="accent1"/>
+          </a:fillRef>
+          <a:effectRef idx="2">
+            <a:schemeClr val="accent1"/>
+          </a:effectRef>
+          <a:fontRef idx="minor">
+            <a:schemeClr val="lt1"/>
+          </a:fontRef>
+        </p:style>
+        <p:txBody>
+          <a:bodyPr rtlCol="0" anchor="ctr"/>
+          <a:lstStyle/>
+          <a:p>
+            <a:pPr algn="ctr"/>
+            <a:endParaRPr/>
+          </a:p>
+        </p:txBody>
+      </p:sp>
+      <p:sp>
+        <p:nvSpPr>
+          <p:cNvPr id="15" name="TextBox 14"/>
+          <p:cNvSpPr txBox="1"/>
+          <p:nvPr/>
+        </p:nvSpPr>
+        <p:spPr>
+          <a:xfrm>
+            <a:off x="8334938" y="4050792"/>
+            <a:ext cx="1371600" cy="457200"/>
+          </a:xfrm>
+          <a:prstGeom prst="rect">
+            <a:avLst/>
+          </a:prstGeom>
+          <a:noFill/>
+        </p:spPr>
+        <p:txBody>
+          <a:bodyPr wrap="square" anchor="t">
+            <a:spAutoFit/>
+          </a:bodyPr>
+          <a:lstStyle/>
           <a:p>
             <a:pPr algn="l">
               <a:lnSpc>
-                <a:spcPct val="130000"/>
+                <a:spcPct val="125000"/>
               </a:lnSpc>
             </a:pPr>
             <a:r>
-              <a:rPr sz="1400" b="0">
-                <a:solidFill>
-                  <a:srgbClr val="565B62"/>
+              <a:rPr sz="1800" b="1">
+                <a:solidFill>
+                  <a:srgbClr val="C2708C"/>
                 </a:solidFill>
                 <a:latin typeface="Hiragino Sans"/>
                 <a:ea typeface="Hiragino Sans"/>
               </a:rPr>
-              <a:t>公式ページへのリンクを常に添える。</a:t>
-            </a:r>
-          </a:p>
-        </p:txBody>
-      </p:sp>
-      <p:sp>
-        <p:nvSpPr>
-          <p:cNvPr id="11" name="TextBox 10"/>
+              <a:t>47.3%</a:t>
+            </a:r>
+          </a:p>
+        </p:txBody>
+      </p:sp>
+      <p:sp>
+        <p:nvSpPr>
+          <p:cNvPr id="16" name="TextBox 15"/>
+          <p:cNvSpPr txBox="1"/>
+          <p:nvPr/>
+        </p:nvSpPr>
+        <p:spPr>
+          <a:xfrm>
+            <a:off x="640080" y="5074920"/>
+            <a:ext cx="10515600" cy="548640"/>
+          </a:xfrm>
+          <a:prstGeom prst="rect">
+            <a:avLst/>
+          </a:prstGeom>
+          <a:noFill/>
+        </p:spPr>
+        <p:txBody>
+          <a:bodyPr wrap="square" anchor="t">
+            <a:spAutoFit/>
+          </a:bodyPr>
+          <a:lstStyle/>
+          <a:p>
+            <a:pPr algn="ctr">
+              <a:lnSpc>
+                <a:spcPct val="125000"/>
+              </a:lnSpc>
+            </a:pPr>
+            <a:r>
+              <a:rPr sz="2400" b="1">
+                <a:solidFill>
+                  <a:srgbClr val="142842"/>
+                </a:solidFill>
+                <a:latin typeface="Hiragino Sans"/>
+                <a:ea typeface="Hiragino Sans"/>
+              </a:rPr>
+              <a:t>知らない制度は、選択肢に入らない。</a:t>
+            </a:r>
+          </a:p>
+        </p:txBody>
+      </p:sp>
+      <p:sp>
+        <p:nvSpPr>
+          <p:cNvPr id="17" name="TextBox 16"/>
           <p:cNvSpPr txBox="1"/>
           <p:nvPr/>
         </p:nvSpPr>
@@ -5034,14 +5486,14 @@
                 <a:latin typeface="Hiragino Sans"/>
                 <a:ea typeface="Hiragino Sans"/>
               </a:rPr>
-              <a:t>出典: 育児・介護休業法／労働基準法／母子保健法（厚生労働省・こども家庭庁）、東京都不妊検査等助成事業（東京都福祉局）。平均値・他人との比較は表示しない。</a:t>
-            </a:r>
-          </a:p>
-        </p:txBody>
-      </p:sp>
-      <p:sp>
-        <p:nvSpPr>
-          <p:cNvPr id="12" name="TextBox 11"/>
+              <a:t>出典: 東京都「男女雇用平等参画状況調査」（令和7年度）従業員調査（n=1,076）。母性保護に関する制度ごとの「わからない」の割合</a:t>
+            </a:r>
+          </a:p>
+        </p:txBody>
+      </p:sp>
+      <p:sp>
+        <p:nvSpPr>
+          <p:cNvPr id="18" name="TextBox 17"/>
           <p:cNvSpPr txBox="1"/>
           <p:nvPr/>
         </p:nvSpPr>
@@ -5088,7 +5540,7 @@
 </file>
 
 <file path=ppt/slides/slide4.xml><?xml version="1.0" encoding="utf-8"?>
-<p:sld xmlns:a="http://schemas.openxmlformats.org/drawingml/2006/main" xmlns:p="http://schemas.openxmlformats.org/presentationml/2006/main" xmlns:r="http://schemas.openxmlformats.org/officeDocument/2006/relationships">
+<p:sld xmlns:a="http://schemas.openxmlformats.org/drawingml/2006/main" xmlns:r="http://schemas.openxmlformats.org/officeDocument/2006/relationships" xmlns:p="http://schemas.openxmlformats.org/presentationml/2006/main">
   <p:cSld>
     <p:bg>
       <p:bgPr>
@@ -5104,7 +5556,14 @@
         <p:cNvGrpSpPr/>
         <p:nvPr/>
       </p:nvGrpSpPr>
-      <p:grpSpPr/>
+      <p:grpSpPr>
+        <a:xfrm>
+          <a:off x="0" y="0"/>
+          <a:ext cx="0" cy="0"/>
+          <a:chOff x="0" y="0"/>
+          <a:chExt cx="0" cy="0"/>
+        </a:xfrm>
+      </p:grpSpPr>
       <p:sp>
         <p:nvSpPr>
           <p:cNvPr id="2" name="TextBox 1"/>
@@ -5133,50 +5592,21 @@
               </a:lnSpc>
             </a:pPr>
             <a:r>
-              <a:rPr sz="3600" b="1">
+              <a:rPr sz="3400" b="1">
                 <a:solidFill>
                   <a:srgbClr val="142842"/>
                 </a:solidFill>
                 <a:latin typeface="Hiragino Sans"/>
                 <a:ea typeface="Hiragino Sans"/>
               </a:rPr>
-              <a:t>何度でも立て直せる</a:t>
+              <a:t>何が選べるかを知って、自分で決める</a:t>
             </a:r>
           </a:p>
         </p:txBody>
       </p:sp>
       <p:pic>
         <p:nvPicPr>
-          <p:cNvPr id="3" name="Picture 2" descr="timeline-overview.jpg"/>
-          <p:cNvPicPr>
-            <a:picLocks noChangeAspect="1"/>
-          </p:cNvPicPr>
-          <p:nvPr/>
-        </p:nvPicPr>
-        <p:blipFill>
-          <a:blip r:embed="rId2"/>
-          <a:stretch>
-            <a:fillRect/>
-          </a:stretch>
-        </p:blipFill>
-        <p:spPr>
-          <a:xfrm>
-            <a:off x="640080" y="1371600"/>
-            <a:ext cx="4023360" cy="2971800"/>
-          </a:xfrm>
-          <a:prstGeom prst="rect">
-            <a:avLst/>
-          </a:prstGeom>
-          <a:ln w="12700">
-            <a:solidFill>
-              <a:srgbClr val="D9D0BC"/>
-            </a:solidFill>
-          </a:ln>
-        </p:spPr>
-      </p:pic>
-      <p:pic>
-        <p:nvPicPr>
-          <p:cNvPr id="4" name="Picture 3" descr="timeline-mobile.jpg"/>
+          <p:cNvPr id="3" name="Picture 2" descr="event-detail-childbirth.jpg"/>
           <p:cNvPicPr>
             <a:picLocks noChangeAspect="1"/>
           </p:cNvPicPr>
@@ -5190,8 +5620,8 @@
         </p:blipFill>
         <p:spPr>
           <a:xfrm>
-            <a:off x="4846320" y="1371600"/>
-            <a:ext cx="1371600" cy="2971800"/>
+            <a:off x="640080" y="1371600"/>
+            <a:ext cx="6766560" cy="3867912"/>
           </a:xfrm>
           <a:prstGeom prst="rect">
             <a:avLst/>
@@ -5203,102 +5633,61 @@
           </a:ln>
         </p:spPr>
       </p:pic>
-      <p:pic>
-        <p:nvPicPr>
-          <p:cNvPr id="5" name="Picture 4" descr="event-detail-childbirth.jpg"/>
-          <p:cNvPicPr>
-            <a:picLocks noChangeAspect="1"/>
-          </p:cNvPicPr>
-          <p:nvPr/>
-        </p:nvPicPr>
-        <p:blipFill>
-          <a:blip r:embed="rId4"/>
-          <a:stretch>
-            <a:fillRect/>
-          </a:stretch>
-        </p:blipFill>
-        <p:spPr>
-          <a:xfrm>
-            <a:off x="6400800" y="1371600"/>
-            <a:ext cx="4846320" cy="2971800"/>
-          </a:xfrm>
-          <a:prstGeom prst="rect">
-            <a:avLst/>
-          </a:prstGeom>
-          <a:ln w="12700">
-            <a:solidFill>
-              <a:srgbClr val="D9D0BC"/>
-            </a:solidFill>
+      <p:sp>
+        <p:nvSpPr>
+          <p:cNvPr id="4" name="Rectangle 3"/>
+          <p:cNvSpPr/>
+          <p:nvPr/>
+        </p:nvSpPr>
+        <p:spPr>
+          <a:xfrm>
+            <a:off x="7772400" y="1463040"/>
+            <a:ext cx="3657600" cy="777240"/>
+          </a:xfrm>
+          <a:prstGeom prst="rect">
+            <a:avLst/>
+          </a:prstGeom>
+          <a:solidFill>
+            <a:srgbClr val="F2F4F7"/>
+          </a:solidFill>
+          <a:ln>
+            <a:noFill/>
           </a:ln>
-        </p:spPr>
-      </p:pic>
-      <p:sp>
-        <p:nvSpPr>
-          <p:cNvPr id="6" name="TextBox 5"/>
+          <a:effectLst/>
+        </p:spPr>
+        <p:style>
+          <a:lnRef idx="1">
+            <a:schemeClr val="accent1"/>
+          </a:lnRef>
+          <a:fillRef idx="3">
+            <a:schemeClr val="accent1"/>
+          </a:fillRef>
+          <a:effectRef idx="2">
+            <a:schemeClr val="accent1"/>
+          </a:effectRef>
+          <a:fontRef idx="minor">
+            <a:schemeClr val="lt1"/>
+          </a:fontRef>
+        </p:style>
+        <p:txBody>
+          <a:bodyPr rtlCol="0" anchor="ctr"/>
+          <a:lstStyle/>
+          <a:p>
+            <a:pPr algn="ctr"/>
+            <a:endParaRPr/>
+          </a:p>
+        </p:txBody>
+      </p:sp>
+      <p:sp>
+        <p:nvSpPr>
+          <p:cNvPr id="5" name="TextBox 4"/>
           <p:cNvSpPr txBox="1"/>
           <p:nvPr/>
         </p:nvSpPr>
         <p:spPr>
           <a:xfrm>
-            <a:off x="640080" y="4572000"/>
-            <a:ext cx="10515600" cy="1188720"/>
-          </a:xfrm>
-          <a:prstGeom prst="rect">
-            <a:avLst/>
-          </a:prstGeom>
-          <a:noFill/>
-        </p:spPr>
-        <p:txBody>
-          <a:bodyPr wrap="square" anchor="t">
-            <a:spAutoFit/>
-          </a:bodyPr>
-          <a:lstStyle/>
-          <a:p>
-            <a:pPr algn="l">
-              <a:lnSpc>
-                <a:spcPct val="140000"/>
-              </a:lnSpc>
-            </a:pPr>
-            <a:r>
-              <a:rPr sz="2000" b="0">
-                <a:solidFill>
-                  <a:srgbClr val="20242B"/>
-                </a:solidFill>
-                <a:latin typeface="Hiragino Sans"/>
-                <a:ea typeface="Hiragino Sans"/>
-              </a:rPr>
-              <a:t>結婚・出産・転職などの予定を自由に置き、必要な制度情報をすぐに確認できます。</a:t>
-            </a:r>
-          </a:p>
-          <a:p>
-            <a:pPr algn="l">
-              <a:lnSpc>
-                <a:spcPct val="140000"/>
-              </a:lnSpc>
-            </a:pPr>
-            <a:r>
-              <a:rPr sz="2000" b="0">
-                <a:solidFill>
-                  <a:srgbClr val="20242B"/>
-                </a:solidFill>
-                <a:latin typeface="Hiragino Sans"/>
-                <a:ea typeface="Hiragino Sans"/>
-              </a:rPr>
-              <a:t>一度決めて終わりではなく、状況が変わるたびに何度でも軽やかに描き直せます。</a:t>
-            </a:r>
-          </a:p>
-        </p:txBody>
-      </p:sp>
-      <p:sp>
-        <p:nvSpPr>
-          <p:cNvPr id="7" name="TextBox 6"/>
-          <p:cNvSpPr txBox="1"/>
-          <p:nvPr/>
-        </p:nvSpPr>
-        <p:spPr>
-          <a:xfrm>
-            <a:off x="640080" y="5989320"/>
-            <a:ext cx="5486400" cy="365760"/>
+            <a:off x="7955279" y="1627632"/>
+            <a:ext cx="3291840" cy="457200"/>
           </a:xfrm>
           <a:prstGeom prst="rect">
             <a:avLst/>
@@ -5317,21 +5706,248 @@
               </a:lnSpc>
             </a:pPr>
             <a:r>
-              <a:rPr sz="1400" b="1">
+              <a:rPr sz="1800" b="1">
                 <a:solidFill>
                   <a:srgbClr val="1E3A5F"/>
                 </a:solidFill>
                 <a:latin typeface="Hiragino Sans"/>
                 <a:ea typeface="Hiragino Sans"/>
               </a:rPr>
-              <a:t>公開デモ: my-career-app-559fd.web.app</a:t>
-            </a:r>
-          </a:p>
-        </p:txBody>
-      </p:sp>
-      <p:sp>
-        <p:nvSpPr>
-          <p:cNvPr id="8" name="TextBox 7"/>
+              <a:t>01  決めるのは自分</a:t>
+            </a:r>
+          </a:p>
+        </p:txBody>
+      </p:sp>
+      <p:sp>
+        <p:nvSpPr>
+          <p:cNvPr id="6" name="Rectangle 5"/>
+          <p:cNvSpPr/>
+          <p:nvPr/>
+        </p:nvSpPr>
+        <p:spPr>
+          <a:xfrm>
+            <a:off x="7772400" y="2514600"/>
+            <a:ext cx="3657600" cy="777240"/>
+          </a:xfrm>
+          <a:prstGeom prst="rect">
+            <a:avLst/>
+          </a:prstGeom>
+          <a:solidFill>
+            <a:srgbClr val="F2F4F7"/>
+          </a:solidFill>
+          <a:ln>
+            <a:noFill/>
+          </a:ln>
+          <a:effectLst/>
+        </p:spPr>
+        <p:style>
+          <a:lnRef idx="1">
+            <a:schemeClr val="accent1"/>
+          </a:lnRef>
+          <a:fillRef idx="3">
+            <a:schemeClr val="accent1"/>
+          </a:fillRef>
+          <a:effectRef idx="2">
+            <a:schemeClr val="accent1"/>
+          </a:effectRef>
+          <a:fontRef idx="minor">
+            <a:schemeClr val="lt1"/>
+          </a:fontRef>
+        </p:style>
+        <p:txBody>
+          <a:bodyPr rtlCol="0" anchor="ctr"/>
+          <a:lstStyle/>
+          <a:p>
+            <a:pPr algn="ctr"/>
+            <a:endParaRPr/>
+          </a:p>
+        </p:txBody>
+      </p:sp>
+      <p:sp>
+        <p:nvSpPr>
+          <p:cNvPr id="7" name="TextBox 6"/>
+          <p:cNvSpPr txBox="1"/>
+          <p:nvPr/>
+        </p:nvSpPr>
+        <p:spPr>
+          <a:xfrm>
+            <a:off x="7955279" y="2679192"/>
+            <a:ext cx="3291840" cy="457200"/>
+          </a:xfrm>
+          <a:prstGeom prst="rect">
+            <a:avLst/>
+          </a:prstGeom>
+          <a:noFill/>
+        </p:spPr>
+        <p:txBody>
+          <a:bodyPr wrap="square" anchor="t">
+            <a:spAutoFit/>
+          </a:bodyPr>
+          <a:lstStyle/>
+          <a:p>
+            <a:pPr algn="l">
+              <a:lnSpc>
+                <a:spcPct val="125000"/>
+              </a:lnSpc>
+            </a:pPr>
+            <a:r>
+              <a:rPr sz="1800" b="1">
+                <a:solidFill>
+                  <a:srgbClr val="1E3A5F"/>
+                </a:solidFill>
+                <a:latin typeface="Hiragino Sans"/>
+                <a:ea typeface="Hiragino Sans"/>
+              </a:rPr>
+              <a:t>02  同じ時間軸</a:t>
+            </a:r>
+          </a:p>
+        </p:txBody>
+      </p:sp>
+      <p:sp>
+        <p:nvSpPr>
+          <p:cNvPr id="8" name="Rectangle 7"/>
+          <p:cNvSpPr/>
+          <p:nvPr/>
+        </p:nvSpPr>
+        <p:spPr>
+          <a:xfrm>
+            <a:off x="7772400" y="3566160"/>
+            <a:ext cx="3657600" cy="777240"/>
+          </a:xfrm>
+          <a:prstGeom prst="rect">
+            <a:avLst/>
+          </a:prstGeom>
+          <a:solidFill>
+            <a:srgbClr val="F2F4F7"/>
+          </a:solidFill>
+          <a:ln>
+            <a:noFill/>
+          </a:ln>
+          <a:effectLst/>
+        </p:spPr>
+        <p:style>
+          <a:lnRef idx="1">
+            <a:schemeClr val="accent1"/>
+          </a:lnRef>
+          <a:fillRef idx="3">
+            <a:schemeClr val="accent1"/>
+          </a:fillRef>
+          <a:effectRef idx="2">
+            <a:schemeClr val="accent1"/>
+          </a:effectRef>
+          <a:fontRef idx="minor">
+            <a:schemeClr val="lt1"/>
+          </a:fontRef>
+        </p:style>
+        <p:txBody>
+          <a:bodyPr rtlCol="0" anchor="ctr"/>
+          <a:lstStyle/>
+          <a:p>
+            <a:pPr algn="ctr"/>
+            <a:endParaRPr/>
+          </a:p>
+        </p:txBody>
+      </p:sp>
+      <p:sp>
+        <p:nvSpPr>
+          <p:cNvPr id="9" name="TextBox 8"/>
+          <p:cNvSpPr txBox="1"/>
+          <p:nvPr/>
+        </p:nvSpPr>
+        <p:spPr>
+          <a:xfrm>
+            <a:off x="7955279" y="3730752"/>
+            <a:ext cx="3291840" cy="457200"/>
+          </a:xfrm>
+          <a:prstGeom prst="rect">
+            <a:avLst/>
+          </a:prstGeom>
+          <a:noFill/>
+        </p:spPr>
+        <p:txBody>
+          <a:bodyPr wrap="square" anchor="t">
+            <a:spAutoFit/>
+          </a:bodyPr>
+          <a:lstStyle/>
+          <a:p>
+            <a:pPr algn="l">
+              <a:lnSpc>
+                <a:spcPct val="125000"/>
+              </a:lnSpc>
+            </a:pPr>
+            <a:r>
+              <a:rPr sz="1800" b="1">
+                <a:solidFill>
+                  <a:srgbClr val="1E3A5F"/>
+                </a:solidFill>
+                <a:latin typeface="Hiragino Sans"/>
+                <a:ea typeface="Hiragino Sans"/>
+              </a:rPr>
+              <a:t>03  出典付きの事実</a:t>
+            </a:r>
+          </a:p>
+        </p:txBody>
+      </p:sp>
+      <p:sp>
+        <p:nvSpPr>
+          <p:cNvPr id="10" name="TextBox 9"/>
+          <p:cNvSpPr txBox="1"/>
+          <p:nvPr/>
+        </p:nvSpPr>
+        <p:spPr>
+          <a:xfrm>
+            <a:off x="7772400" y="4846320"/>
+            <a:ext cx="3657600" cy="1371600"/>
+          </a:xfrm>
+          <a:prstGeom prst="rect">
+            <a:avLst/>
+          </a:prstGeom>
+          <a:noFill/>
+        </p:spPr>
+        <p:txBody>
+          <a:bodyPr wrap="square" anchor="t">
+            <a:spAutoFit/>
+          </a:bodyPr>
+          <a:lstStyle/>
+          <a:p>
+            <a:pPr algn="l">
+              <a:lnSpc>
+                <a:spcPct val="130000"/>
+              </a:lnSpc>
+            </a:pPr>
+            <a:r>
+              <a:rPr sz="1400" b="0">
+                <a:solidFill>
+                  <a:srgbClr val="565B62"/>
+                </a:solidFill>
+                <a:latin typeface="Hiragino Sans"/>
+                <a:ea typeface="Hiragino Sans"/>
+              </a:rPr>
+              <a:t>「国の制度」「東京都の制度」を実施主体ごとに明示し、</a:t>
+            </a:r>
+          </a:p>
+          <a:p>
+            <a:pPr algn="l">
+              <a:lnSpc>
+                <a:spcPct val="130000"/>
+              </a:lnSpc>
+            </a:pPr>
+            <a:r>
+              <a:rPr sz="1400" b="0">
+                <a:solidFill>
+                  <a:srgbClr val="565B62"/>
+                </a:solidFill>
+                <a:latin typeface="Hiragino Sans"/>
+                <a:ea typeface="Hiragino Sans"/>
+              </a:rPr>
+              <a:t>公式ページへのリンクを常に添える。</a:t>
+            </a:r>
+          </a:p>
+        </p:txBody>
+      </p:sp>
+      <p:sp>
+        <p:nvSpPr>
+          <p:cNvPr id="11" name="TextBox 10"/>
           <p:cNvSpPr txBox="1"/>
           <p:nvPr/>
         </p:nvSpPr>
@@ -5364,14 +5980,14 @@
                 <a:latin typeface="Hiragino Sans"/>
                 <a:ea typeface="Hiragino Sans"/>
               </a:rPr>
-              <a:t>希望される支援も「新しい休業」より「時間の組み替え」（有給53.7%・フレックス49.4%、東京都「男女雇用平等参画状況調査」令和7年度）</a:t>
-            </a:r>
-          </a:p>
-        </p:txBody>
-      </p:sp>
-      <p:sp>
-        <p:nvSpPr>
-          <p:cNvPr id="9" name="TextBox 8"/>
+              <a:t>出典: 育児・介護休業法／労働基準法／母子保健法（厚生労働省・こども家庭庁）、東京都不妊検査等助成事業（東京都福祉局）。平均値・他人との比較は表示しない。</a:t>
+            </a:r>
+          </a:p>
+        </p:txBody>
+      </p:sp>
+      <p:sp>
+        <p:nvSpPr>
+          <p:cNvPr id="12" name="TextBox 11"/>
           <p:cNvSpPr txBox="1"/>
           <p:nvPr/>
         </p:nvSpPr>
@@ -5418,7 +6034,7 @@
 </file>
 
 <file path=ppt/slides/slide5.xml><?xml version="1.0" encoding="utf-8"?>
-<p:sld xmlns:a="http://schemas.openxmlformats.org/drawingml/2006/main" xmlns:p="http://schemas.openxmlformats.org/presentationml/2006/main" xmlns:r="http://schemas.openxmlformats.org/officeDocument/2006/relationships">
+<p:sld xmlns:a="http://schemas.openxmlformats.org/drawingml/2006/main" xmlns:r="http://schemas.openxmlformats.org/officeDocument/2006/relationships" xmlns:p="http://schemas.openxmlformats.org/presentationml/2006/main">
   <p:cSld>
     <p:bg>
       <p:bgPr>
@@ -5434,7 +6050,14 @@
         <p:cNvGrpSpPr/>
         <p:nvPr/>
       </p:nvGrpSpPr>
-      <p:grpSpPr/>
+      <p:grpSpPr>
+        <a:xfrm>
+          <a:off x="0" y="0"/>
+          <a:ext cx="0" cy="0"/>
+          <a:chOff x="0" y="0"/>
+          <a:chExt cx="0" cy="0"/>
+        </a:xfrm>
+      </p:grpSpPr>
       <p:sp>
         <p:nvSpPr>
           <p:cNvPr id="2" name="TextBox 1"/>
@@ -5463,28 +6086,86 @@
               </a:lnSpc>
             </a:pPr>
             <a:r>
-              <a:rPr sz="3200" b="1">
+              <a:rPr sz="3600" b="1">
                 <a:solidFill>
                   <a:srgbClr val="142842"/>
                 </a:solidFill>
                 <a:latin typeface="Hiragino Sans"/>
                 <a:ea typeface="Hiragino Sans"/>
               </a:rPr>
-              <a:t>一つの画面を、家庭で。男性が体験する</a:t>
-            </a:r>
-          </a:p>
-        </p:txBody>
-      </p:sp>
-      <p:sp>
-        <p:nvSpPr>
-          <p:cNvPr id="3" name="TextBox 2"/>
+              <a:t>何度でも立て直せる</a:t>
+            </a:r>
+          </a:p>
+        </p:txBody>
+      </p:sp>
+      <p:pic>
+        <p:nvPicPr>
+          <p:cNvPr id="3" name="Picture 2" descr="timeline-overview.jpg"/>
+          <p:cNvPicPr>
+            <a:picLocks noChangeAspect="1"/>
+          </p:cNvPicPr>
+          <p:nvPr/>
+        </p:nvPicPr>
+        <p:blipFill>
+          <a:blip r:embed="rId3"/>
+          <a:stretch>
+            <a:fillRect/>
+          </a:stretch>
+        </p:blipFill>
+        <p:spPr>
+          <a:xfrm>
+            <a:off x="640080" y="1371600"/>
+            <a:ext cx="4023360" cy="2971800"/>
+          </a:xfrm>
+          <a:prstGeom prst="rect">
+            <a:avLst/>
+          </a:prstGeom>
+          <a:ln w="12700">
+            <a:solidFill>
+              <a:srgbClr val="D9D0BC"/>
+            </a:solidFill>
+          </a:ln>
+        </p:spPr>
+      </p:pic>
+      <p:pic>
+        <p:nvPicPr>
+          <p:cNvPr id="4" name="Picture 3" descr="timeline-mobile.jpg"/>
+          <p:cNvPicPr>
+            <a:picLocks noChangeAspect="1"/>
+          </p:cNvPicPr>
+          <p:nvPr/>
+        </p:nvPicPr>
+        <p:blipFill>
+          <a:blip r:embed="rId4"/>
+          <a:stretch>
+            <a:fillRect/>
+          </a:stretch>
+        </p:blipFill>
+        <p:spPr>
+          <a:xfrm>
+            <a:off x="4846320" y="1371600"/>
+            <a:ext cx="1371600" cy="2971800"/>
+          </a:xfrm>
+          <a:prstGeom prst="rect">
+            <a:avLst/>
+          </a:prstGeom>
+          <a:ln w="12700">
+            <a:solidFill>
+              <a:srgbClr val="D9D0BC"/>
+            </a:solidFill>
+          </a:ln>
+        </p:spPr>
+      </p:pic>
+      <p:sp>
+        <p:nvSpPr>
+          <p:cNvPr id="6" name="TextBox 5"/>
           <p:cNvSpPr txBox="1"/>
           <p:nvPr/>
         </p:nvSpPr>
         <p:spPr>
           <a:xfrm>
-            <a:off x="640080" y="1463040"/>
-            <a:ext cx="10515600" cy="548640"/>
+            <a:off x="640080" y="4572000"/>
+            <a:ext cx="10515600" cy="1188720"/>
           </a:xfrm>
           <a:prstGeom prst="rect">
             <a:avLst/>
@@ -5497,78 +6178,51 @@
           </a:bodyPr>
           <a:lstStyle/>
           <a:p>
-            <a:pPr algn="ctr">
+            <a:pPr algn="l">
               <a:lnSpc>
-                <a:spcPct val="125000"/>
+                <a:spcPct val="140000"/>
               </a:lnSpc>
             </a:pPr>
             <a:r>
-              <a:rPr sz="2200" b="1">
+              <a:rPr sz="2000" b="0">
                 <a:solidFill>
                   <a:srgbClr val="20242B"/>
                 </a:solidFill>
                 <a:latin typeface="Hiragino Sans"/>
                 <a:ea typeface="Hiragino Sans"/>
               </a:rPr>
-              <a:t>同じ画面を、二人で見る</a:t>
-            </a:r>
-          </a:p>
-        </p:txBody>
-      </p:sp>
-      <p:sp>
-        <p:nvSpPr>
-          <p:cNvPr id="4" name="Rectangle 3"/>
-          <p:cNvSpPr/>
-          <p:nvPr/>
-        </p:nvSpPr>
-        <p:spPr>
-          <a:xfrm>
-            <a:off x="1097280" y="2377440"/>
-            <a:ext cx="4572000" cy="2103120"/>
-          </a:xfrm>
-          <a:prstGeom prst="rect">
-            <a:avLst/>
-          </a:prstGeom>
-          <a:solidFill>
-            <a:srgbClr val="F2F4F7"/>
-          </a:solidFill>
-          <a:ln>
-            <a:noFill/>
-          </a:ln>
-          <a:effectLst/>
-        </p:spPr>
-        <p:style>
-          <a:lnRef idx="1">
-            <a:schemeClr val="accent1"/>
-          </a:lnRef>
-          <a:fillRef idx="3">
-            <a:schemeClr val="accent1"/>
-          </a:fillRef>
-          <a:effectRef idx="2">
-            <a:schemeClr val="accent1"/>
-          </a:effectRef>
-          <a:fontRef idx="minor">
-            <a:schemeClr val="lt1"/>
-          </a:fontRef>
-        </p:style>
-        <p:txBody>
-          <a:bodyPr rtlCol="0" anchor="ctr"/>
-          <a:lstStyle/>
-          <a:p>
-            <a:pPr algn="ctr"/>
-          </a:p>
-        </p:txBody>
-      </p:sp>
-      <p:sp>
-        <p:nvSpPr>
-          <p:cNvPr id="5" name="TextBox 4"/>
+              <a:t>結婚・出産・転職などの予定を自由に置き、必要な制度情報をすぐに確認できます。</a:t>
+            </a:r>
+          </a:p>
+          <a:p>
+            <a:pPr algn="l">
+              <a:lnSpc>
+                <a:spcPct val="140000"/>
+              </a:lnSpc>
+            </a:pPr>
+            <a:r>
+              <a:rPr sz="2000" b="0">
+                <a:solidFill>
+                  <a:srgbClr val="20242B"/>
+                </a:solidFill>
+                <a:latin typeface="Hiragino Sans"/>
+                <a:ea typeface="Hiragino Sans"/>
+              </a:rPr>
+              <a:t>一度決めて終わりではなく、状況が変わるたびに何度でも軽やかに描き直せます。</a:t>
+            </a:r>
+          </a:p>
+        </p:txBody>
+      </p:sp>
+      <p:sp>
+        <p:nvSpPr>
+          <p:cNvPr id="7" name="TextBox 6"/>
           <p:cNvSpPr txBox="1"/>
           <p:nvPr/>
         </p:nvSpPr>
         <p:spPr>
           <a:xfrm>
-            <a:off x="1371600" y="2606040"/>
-            <a:ext cx="4023360" cy="457200"/>
+            <a:off x="640080" y="5989320"/>
+            <a:ext cx="5486400" cy="365760"/>
           </a:xfrm>
           <a:prstGeom prst="rect">
             <a:avLst/>
@@ -5594,195 +6248,14 @@
                 <a:latin typeface="Hiragino Sans"/>
                 <a:ea typeface="Hiragino Sans"/>
               </a:rPr>
-              <a:t>実装済み・ログイン不要</a:t>
-            </a:r>
-          </a:p>
-        </p:txBody>
-      </p:sp>
-      <p:sp>
-        <p:nvSpPr>
-          <p:cNvPr id="6" name="TextBox 5"/>
-          <p:cNvSpPr txBox="1"/>
-          <p:nvPr/>
-        </p:nvSpPr>
-        <p:spPr>
-          <a:xfrm>
-            <a:off x="1371600" y="3063240"/>
-            <a:ext cx="4023360" cy="1188720"/>
-          </a:xfrm>
-          <a:prstGeom prst="rect">
-            <a:avLst/>
-          </a:prstGeom>
-          <a:noFill/>
-        </p:spPr>
-        <p:txBody>
-          <a:bodyPr wrap="square" anchor="t">
-            <a:spAutoFit/>
-          </a:bodyPr>
-          <a:lstStyle/>
-          <a:p>
-            <a:pPr algn="l">
-              <a:lnSpc>
-                <a:spcPct val="125000"/>
-              </a:lnSpc>
-            </a:pPr>
-            <a:r>
-              <a:rPr sz="2600" b="1">
-                <a:solidFill>
-                  <a:srgbClr val="142842"/>
-                </a:solidFill>
-                <a:latin typeface="Hiragino Sans"/>
-                <a:ea typeface="Hiragino Sans"/>
-              </a:rPr>
-              <a:t>自分のプランを描く</a:t>
-            </a:r>
-          </a:p>
-        </p:txBody>
-      </p:sp>
-      <p:sp>
-        <p:nvSpPr>
-          <p:cNvPr id="7" name="Rectangle 6"/>
-          <p:cNvSpPr/>
-          <p:nvPr/>
-        </p:nvSpPr>
-        <p:spPr>
-          <a:xfrm>
-            <a:off x="6492240" y="2377440"/>
-            <a:ext cx="4572000" cy="2103120"/>
-          </a:xfrm>
-          <a:prstGeom prst="rect">
-            <a:avLst/>
-          </a:prstGeom>
-          <a:noFill/>
-          <a:ln w="9525">
-            <a:solidFill>
-              <a:srgbClr val="1E3A5F"/>
-            </a:solidFill>
-          </a:ln>
-          <a:effectLst/>
-        </p:spPr>
-        <p:style>
-          <a:lnRef idx="1">
-            <a:schemeClr val="accent1"/>
-          </a:lnRef>
-          <a:fillRef idx="3">
-            <a:schemeClr val="accent1"/>
-          </a:fillRef>
-          <a:effectRef idx="2">
-            <a:schemeClr val="accent1"/>
-          </a:effectRef>
-          <a:fontRef idx="minor">
-            <a:schemeClr val="lt1"/>
-          </a:fontRef>
-        </p:style>
-        <p:txBody>
-          <a:bodyPr rtlCol="0" anchor="ctr"/>
-          <a:lstStyle/>
-          <a:p>
-            <a:pPr algn="ctr"/>
+              <a:t>公開デモ: my-career-app-559fd.web.app</a:t>
+            </a:r>
           </a:p>
         </p:txBody>
       </p:sp>
       <p:sp>
         <p:nvSpPr>
           <p:cNvPr id="8" name="TextBox 7"/>
-          <p:cNvSpPr txBox="1"/>
-          <p:nvPr/>
-        </p:nvSpPr>
-        <p:spPr>
-          <a:xfrm>
-            <a:off x="6766560" y="2606040"/>
-            <a:ext cx="4023360" cy="457200"/>
-          </a:xfrm>
-          <a:prstGeom prst="rect">
-            <a:avLst/>
-          </a:prstGeom>
-          <a:noFill/>
-        </p:spPr>
-        <p:txBody>
-          <a:bodyPr wrap="square" anchor="t">
-            <a:spAutoFit/>
-          </a:bodyPr>
-          <a:lstStyle/>
-          <a:p>
-            <a:pPr algn="l">
-              <a:lnSpc>
-                <a:spcPct val="125000"/>
-              </a:lnSpc>
-            </a:pPr>
-            <a:r>
-              <a:rPr sz="1400" b="1">
-                <a:solidFill>
-                  <a:srgbClr val="C2708C"/>
-                </a:solidFill>
-                <a:latin typeface="Hiragino Sans"/>
-                <a:ea typeface="Hiragino Sans"/>
-              </a:rPr>
-              <a:t>構想中</a:t>
-            </a:r>
-          </a:p>
-        </p:txBody>
-      </p:sp>
-      <p:sp>
-        <p:nvSpPr>
-          <p:cNvPr id="9" name="TextBox 8"/>
-          <p:cNvSpPr txBox="1"/>
-          <p:nvPr/>
-        </p:nvSpPr>
-        <p:spPr>
-          <a:xfrm>
-            <a:off x="6766560" y="2971800"/>
-            <a:ext cx="4023360" cy="1371600"/>
-          </a:xfrm>
-          <a:prstGeom prst="rect">
-            <a:avLst/>
-          </a:prstGeom>
-          <a:noFill/>
-        </p:spPr>
-        <p:txBody>
-          <a:bodyPr wrap="square" anchor="t">
-            <a:spAutoFit/>
-          </a:bodyPr>
-          <a:lstStyle/>
-          <a:p>
-            <a:pPr algn="l">
-              <a:lnSpc>
-                <a:spcPct val="130000"/>
-              </a:lnSpc>
-            </a:pPr>
-            <a:r>
-              <a:rPr sz="2000" b="1">
-                <a:solidFill>
-                  <a:srgbClr val="142842"/>
-                </a:solidFill>
-                <a:latin typeface="Hiragino Sans"/>
-                <a:ea typeface="Hiragino Sans"/>
-              </a:rPr>
-              <a:t>パートナーと一緒に見る</a:t>
-            </a:r>
-          </a:p>
-          <a:p>
-            <a:pPr algn="l">
-              <a:lnSpc>
-                <a:spcPct val="130000"/>
-              </a:lnSpc>
-            </a:pPr>
-            <a:r>
-              <a:rPr sz="2000" b="1">
-                <a:solidFill>
-                  <a:srgbClr val="142842"/>
-                </a:solidFill>
-                <a:latin typeface="Hiragino Sans"/>
-                <a:ea typeface="Hiragino Sans"/>
-              </a:rPr>
-              <a:t>男性が自分ごととして体験する</a:t>
-            </a:r>
-          </a:p>
-        </p:txBody>
-      </p:sp>
-      <p:sp>
-        <p:nvSpPr>
-          <p:cNvPr id="10" name="TextBox 9"/>
           <p:cNvSpPr txBox="1"/>
           <p:nvPr/>
         </p:nvSpPr>
@@ -5815,14 +6288,14 @@
                 <a:latin typeface="Hiragino Sans"/>
                 <a:ea typeface="Hiragino Sans"/>
               </a:rPr>
-              <a:t>出典: 東京都「男女雇用平等参画状況調査」（令和7年度）。男性の育休取得率61.2%。</a:t>
-            </a:r>
-          </a:p>
-        </p:txBody>
-      </p:sp>
-      <p:sp>
-        <p:nvSpPr>
-          <p:cNvPr id="11" name="TextBox 10"/>
+              <a:t>希望される支援も「新しい休業」より「時間の組み替え」（有給53.7%・フレックス49.4%、東京都「男女雇用平等参画状況調査」令和7年度）</a:t>
+            </a:r>
+          </a:p>
+        </p:txBody>
+      </p:sp>
+      <p:sp>
+        <p:nvSpPr>
+          <p:cNvPr id="9" name="TextBox 8"/>
           <p:cNvSpPr txBox="1"/>
           <p:nvPr/>
         </p:nvSpPr>
@@ -5860,6 +6333,37 @@
           </a:p>
         </p:txBody>
       </p:sp>
+      <p:pic>
+        <p:nvPicPr>
+          <p:cNvPr id="10" name="図 9">
+            <a:extLst>
+              <a:ext uri="{FF2B5EF4-FFF2-40B4-BE49-F238E27FC236}">
+                <a16:creationId xmlns:a16="http://schemas.microsoft.com/office/drawing/2014/main" id="{D2A5932C-F464-C6E8-D60E-016A70A87F0B}"/>
+              </a:ext>
+            </a:extLst>
+          </p:cNvPr>
+          <p:cNvPicPr>
+            <a:picLocks noChangeAspect="1"/>
+          </p:cNvPicPr>
+          <p:nvPr/>
+        </p:nvPicPr>
+        <p:blipFill>
+          <a:blip r:embed="rId5"/>
+          <a:srcRect b="19452"/>
+          <a:stretch>
+            <a:fillRect/>
+          </a:stretch>
+        </p:blipFill>
+        <p:spPr>
+          <a:xfrm>
+            <a:off x="6400800" y="274236"/>
+            <a:ext cx="5486400" cy="4114884"/>
+          </a:xfrm>
+          <a:prstGeom prst="rect">
+            <a:avLst/>
+          </a:prstGeom>
+        </p:spPr>
+      </p:pic>
     </p:spTree>
   </p:cSld>
   <p:clrMapOvr>
@@ -5869,7 +6373,7 @@
 </file>
 
 <file path=ppt/slides/slide6.xml><?xml version="1.0" encoding="utf-8"?>
-<p:sld xmlns:a="http://schemas.openxmlformats.org/drawingml/2006/main" xmlns:p="http://schemas.openxmlformats.org/presentationml/2006/main" xmlns:r="http://schemas.openxmlformats.org/officeDocument/2006/relationships">
+<p:sld xmlns:a="http://schemas.openxmlformats.org/drawingml/2006/main" xmlns:r="http://schemas.openxmlformats.org/officeDocument/2006/relationships" xmlns:p="http://schemas.openxmlformats.org/presentationml/2006/main">
   <p:cSld>
     <p:bg>
       <p:bgPr>
@@ -5885,7 +6389,14 @@
         <p:cNvGrpSpPr/>
         <p:nvPr/>
       </p:nvGrpSpPr>
-      <p:grpSpPr/>
+      <p:grpSpPr>
+        <a:xfrm>
+          <a:off x="0" y="0"/>
+          <a:ext cx="0" cy="0"/>
+          <a:chOff x="0" y="0"/>
+          <a:chExt cx="0" cy="0"/>
+        </a:xfrm>
+      </p:grpSpPr>
       <p:sp>
         <p:nvSpPr>
           <p:cNvPr id="2" name="TextBox 1"/>
@@ -5914,28 +6425,68 @@
               </a:lnSpc>
             </a:pPr>
             <a:r>
-              <a:rPr sz="3400" b="1">
+              <a:rPr sz="3200" b="1">
                 <a:solidFill>
                   <a:srgbClr val="142842"/>
                 </a:solidFill>
                 <a:latin typeface="Hiragino Sans"/>
                 <a:ea typeface="Hiragino Sans"/>
               </a:rPr>
-              <a:t>このデータが、次の施策を動かす</a:t>
-            </a:r>
-          </a:p>
-        </p:txBody>
-      </p:sp>
-      <p:sp>
-        <p:nvSpPr>
-          <p:cNvPr id="3" name="Rectangle 2"/>
+              <a:t>一つの画面を、家庭で。男性が体験する</a:t>
+            </a:r>
+          </a:p>
+        </p:txBody>
+      </p:sp>
+      <p:sp>
+        <p:nvSpPr>
+          <p:cNvPr id="3" name="TextBox 2"/>
+          <p:cNvSpPr txBox="1"/>
+          <p:nvPr/>
+        </p:nvSpPr>
+        <p:spPr>
+          <a:xfrm>
+            <a:off x="640080" y="1463040"/>
+            <a:ext cx="10515600" cy="548640"/>
+          </a:xfrm>
+          <a:prstGeom prst="rect">
+            <a:avLst/>
+          </a:prstGeom>
+          <a:noFill/>
+        </p:spPr>
+        <p:txBody>
+          <a:bodyPr wrap="square" anchor="t">
+            <a:spAutoFit/>
+          </a:bodyPr>
+          <a:lstStyle/>
+          <a:p>
+            <a:pPr algn="ctr">
+              <a:lnSpc>
+                <a:spcPct val="125000"/>
+              </a:lnSpc>
+            </a:pPr>
+            <a:r>
+              <a:rPr sz="2200" b="1">
+                <a:solidFill>
+                  <a:srgbClr val="20242B"/>
+                </a:solidFill>
+                <a:latin typeface="Hiragino Sans"/>
+                <a:ea typeface="Hiragino Sans"/>
+              </a:rPr>
+              <a:t>同じ画面を、二人で見る</a:t>
+            </a:r>
+          </a:p>
+        </p:txBody>
+      </p:sp>
+      <p:sp>
+        <p:nvSpPr>
+          <p:cNvPr id="4" name="Rectangle 3"/>
           <p:cNvSpPr/>
           <p:nvPr/>
         </p:nvSpPr>
         <p:spPr>
           <a:xfrm>
-            <a:off x="822960" y="1737360"/>
-            <a:ext cx="3108960" cy="1371600"/>
+            <a:off x="1097280" y="2377440"/>
+            <a:ext cx="4572000" cy="2103120"/>
           </a:xfrm>
           <a:prstGeom prst="rect">
             <a:avLst/>
@@ -5967,19 +6518,20 @@
           <a:lstStyle/>
           <a:p>
             <a:pPr algn="ctr"/>
-          </a:p>
-        </p:txBody>
-      </p:sp>
-      <p:sp>
-        <p:nvSpPr>
-          <p:cNvPr id="4" name="TextBox 3"/>
+            <a:endParaRPr/>
+          </a:p>
+        </p:txBody>
+      </p:sp>
+      <p:sp>
+        <p:nvSpPr>
+          <p:cNvPr id="5" name="TextBox 4"/>
           <p:cNvSpPr txBox="1"/>
           <p:nvPr/>
         </p:nvSpPr>
         <p:spPr>
           <a:xfrm>
-            <a:off x="822960" y="1965960"/>
-            <a:ext cx="3108960" cy="914400"/>
+            <a:off x="1371600" y="2606040"/>
+            <a:ext cx="4023360" cy="457200"/>
           </a:xfrm>
           <a:prstGeom prst="rect">
             <a:avLst/>
@@ -5992,100 +6544,83 @@
           </a:bodyPr>
           <a:lstStyle/>
           <a:p>
-            <a:pPr algn="ctr">
-              <a:lnSpc>
-                <a:spcPct val="120000"/>
-              </a:lnSpc>
-            </a:pPr>
-            <a:r>
-              <a:rPr sz="1800" b="1">
-                <a:solidFill>
-                  <a:srgbClr val="142842"/>
-                </a:solidFill>
-                <a:latin typeface="Hiragino Sans"/>
-                <a:ea typeface="Hiragino Sans"/>
-              </a:rPr>
-              <a:t>東京都・国の</a:t>
-            </a:r>
-          </a:p>
-          <a:p>
-            <a:pPr algn="ctr">
-              <a:lnSpc>
-                <a:spcPct val="120000"/>
-              </a:lnSpc>
-            </a:pPr>
-            <a:r>
-              <a:rPr sz="1800" b="1">
-                <a:solidFill>
-                  <a:srgbClr val="142842"/>
-                </a:solidFill>
-                <a:latin typeface="Hiragino Sans"/>
-                <a:ea typeface="Hiragino Sans"/>
-              </a:rPr>
-              <a:t>オープンデータ</a:t>
-            </a:r>
-          </a:p>
-        </p:txBody>
-      </p:sp>
-      <p:sp>
-        <p:nvSpPr>
-          <p:cNvPr id="5" name="TextBox 4"/>
-          <p:cNvSpPr txBox="1"/>
-          <p:nvPr/>
-        </p:nvSpPr>
-        <p:spPr>
-          <a:xfrm>
-            <a:off x="3931920" y="2148840"/>
-            <a:ext cx="457200" cy="548640"/>
-          </a:xfrm>
-          <a:prstGeom prst="rect">
-            <a:avLst/>
-          </a:prstGeom>
-          <a:noFill/>
-        </p:spPr>
-        <p:txBody>
-          <a:bodyPr wrap="square" anchor="t">
-            <a:spAutoFit/>
-          </a:bodyPr>
-          <a:lstStyle/>
-          <a:p>
-            <a:pPr algn="ctr">
+            <a:pPr algn="l">
               <a:lnSpc>
                 <a:spcPct val="125000"/>
               </a:lnSpc>
             </a:pPr>
             <a:r>
-              <a:rPr sz="2400" b="0">
-                <a:solidFill>
-                  <a:srgbClr val="565B62"/>
+              <a:rPr sz="1400" b="1">
+                <a:solidFill>
+                  <a:srgbClr val="1E3A5F"/>
                 </a:solidFill>
                 <a:latin typeface="Hiragino Sans"/>
                 <a:ea typeface="Hiragino Sans"/>
               </a:rPr>
-              <a:t>→</a:t>
-            </a:r>
-          </a:p>
-        </p:txBody>
-      </p:sp>
-      <p:sp>
-        <p:nvSpPr>
-          <p:cNvPr id="6" name="Rectangle 5"/>
+              <a:t>実装済み・ログイン不要</a:t>
+            </a:r>
+          </a:p>
+        </p:txBody>
+      </p:sp>
+      <p:sp>
+        <p:nvSpPr>
+          <p:cNvPr id="6" name="TextBox 5"/>
+          <p:cNvSpPr txBox="1"/>
+          <p:nvPr/>
+        </p:nvSpPr>
+        <p:spPr>
+          <a:xfrm>
+            <a:off x="1371600" y="3063240"/>
+            <a:ext cx="4023360" cy="1188720"/>
+          </a:xfrm>
+          <a:prstGeom prst="rect">
+            <a:avLst/>
+          </a:prstGeom>
+          <a:noFill/>
+        </p:spPr>
+        <p:txBody>
+          <a:bodyPr wrap="square" anchor="t">
+            <a:spAutoFit/>
+          </a:bodyPr>
+          <a:lstStyle/>
+          <a:p>
+            <a:pPr algn="l">
+              <a:lnSpc>
+                <a:spcPct val="125000"/>
+              </a:lnSpc>
+            </a:pPr>
+            <a:r>
+              <a:rPr sz="2600" b="1">
+                <a:solidFill>
+                  <a:srgbClr val="142842"/>
+                </a:solidFill>
+                <a:latin typeface="Hiragino Sans"/>
+                <a:ea typeface="Hiragino Sans"/>
+              </a:rPr>
+              <a:t>自分のプランを描く</a:t>
+            </a:r>
+          </a:p>
+        </p:txBody>
+      </p:sp>
+      <p:sp>
+        <p:nvSpPr>
+          <p:cNvPr id="7" name="Rectangle 6"/>
           <p:cNvSpPr/>
           <p:nvPr/>
         </p:nvSpPr>
         <p:spPr>
           <a:xfrm>
-            <a:off x="4389120" y="1737360"/>
-            <a:ext cx="3108960" cy="1371600"/>
-          </a:xfrm>
-          <a:prstGeom prst="rect">
-            <a:avLst/>
-          </a:prstGeom>
-          <a:solidFill>
-            <a:srgbClr val="F2F4F7"/>
-          </a:solidFill>
-          <a:ln>
-            <a:noFill/>
+            <a:off x="6492240" y="2377440"/>
+            <a:ext cx="4572000" cy="2103120"/>
+          </a:xfrm>
+          <a:prstGeom prst="rect">
+            <a:avLst/>
+          </a:prstGeom>
+          <a:noFill/>
+          <a:ln w="9525">
+            <a:solidFill>
+              <a:srgbClr val="1E3A5F"/>
+            </a:solidFill>
           </a:ln>
           <a:effectLst/>
         </p:spPr>
@@ -6108,19 +6643,20 @@
           <a:lstStyle/>
           <a:p>
             <a:pPr algn="ctr"/>
-          </a:p>
-        </p:txBody>
-      </p:sp>
-      <p:sp>
-        <p:nvSpPr>
-          <p:cNvPr id="7" name="TextBox 6"/>
+            <a:endParaRPr/>
+          </a:p>
+        </p:txBody>
+      </p:sp>
+      <p:sp>
+        <p:nvSpPr>
+          <p:cNvPr id="8" name="TextBox 7"/>
           <p:cNvSpPr txBox="1"/>
           <p:nvPr/>
         </p:nvSpPr>
         <p:spPr>
           <a:xfrm>
-            <a:off x="4389120" y="1965960"/>
-            <a:ext cx="3108960" cy="914400"/>
+            <a:off x="6766560" y="2606040"/>
+            <a:ext cx="4023360" cy="457200"/>
           </a:xfrm>
           <a:prstGeom prst="rect">
             <a:avLst/>
@@ -6133,135 +6669,34 @@
           </a:bodyPr>
           <a:lstStyle/>
           <a:p>
-            <a:pPr algn="ctr">
-              <a:lnSpc>
-                <a:spcPct val="120000"/>
-              </a:lnSpc>
-            </a:pPr>
-            <a:r>
-              <a:rPr sz="1800" b="1">
-                <a:solidFill>
-                  <a:srgbClr val="142842"/>
-                </a:solidFill>
-                <a:latin typeface="Hiragino Sans"/>
-                <a:ea typeface="Hiragino Sans"/>
-              </a:rPr>
-              <a:t>一人ひとりの</a:t>
-            </a:r>
-          </a:p>
-          <a:p>
-            <a:pPr algn="ctr">
-              <a:lnSpc>
-                <a:spcPct val="120000"/>
-              </a:lnSpc>
-            </a:pPr>
-            <a:r>
-              <a:rPr sz="1800" b="1">
-                <a:solidFill>
-                  <a:srgbClr val="142842"/>
-                </a:solidFill>
-                <a:latin typeface="Hiragino Sans"/>
-                <a:ea typeface="Hiragino Sans"/>
-              </a:rPr>
-              <a:t>ライフプラン</a:t>
-            </a:r>
-          </a:p>
-        </p:txBody>
-      </p:sp>
-      <p:sp>
-        <p:nvSpPr>
-          <p:cNvPr id="8" name="TextBox 7"/>
-          <p:cNvSpPr txBox="1"/>
-          <p:nvPr/>
-        </p:nvSpPr>
-        <p:spPr>
-          <a:xfrm>
-            <a:off x="7498080" y="2148840"/>
-            <a:ext cx="457200" cy="548640"/>
-          </a:xfrm>
-          <a:prstGeom prst="rect">
-            <a:avLst/>
-          </a:prstGeom>
-          <a:noFill/>
-        </p:spPr>
-        <p:txBody>
-          <a:bodyPr wrap="square" anchor="t">
-            <a:spAutoFit/>
-          </a:bodyPr>
-          <a:lstStyle/>
-          <a:p>
-            <a:pPr algn="ctr">
+            <a:pPr algn="l">
               <a:lnSpc>
                 <a:spcPct val="125000"/>
               </a:lnSpc>
             </a:pPr>
             <a:r>
-              <a:rPr sz="2400" b="0">
-                <a:solidFill>
-                  <a:srgbClr val="565B62"/>
+              <a:rPr sz="1400" b="1">
+                <a:solidFill>
+                  <a:srgbClr val="C2708C"/>
                 </a:solidFill>
                 <a:latin typeface="Hiragino Sans"/>
                 <a:ea typeface="Hiragino Sans"/>
               </a:rPr>
-              <a:t>→</a:t>
-            </a:r>
-          </a:p>
-        </p:txBody>
-      </p:sp>
-      <p:sp>
-        <p:nvSpPr>
-          <p:cNvPr id="9" name="Rectangle 8"/>
-          <p:cNvSpPr/>
-          <p:nvPr/>
-        </p:nvSpPr>
-        <p:spPr>
-          <a:xfrm>
-            <a:off x="7955280" y="1737360"/>
-            <a:ext cx="3108960" cy="1371600"/>
-          </a:xfrm>
-          <a:prstGeom prst="rect">
-            <a:avLst/>
-          </a:prstGeom>
-          <a:solidFill>
-            <a:srgbClr val="F2F4F7"/>
-          </a:solidFill>
-          <a:ln>
-            <a:noFill/>
-          </a:ln>
-          <a:effectLst/>
-        </p:spPr>
-        <p:style>
-          <a:lnRef idx="1">
-            <a:schemeClr val="accent1"/>
-          </a:lnRef>
-          <a:fillRef idx="3">
-            <a:schemeClr val="accent1"/>
-          </a:fillRef>
-          <a:effectRef idx="2">
-            <a:schemeClr val="accent1"/>
-          </a:effectRef>
-          <a:fontRef idx="minor">
-            <a:schemeClr val="lt1"/>
-          </a:fontRef>
-        </p:style>
-        <p:txBody>
-          <a:bodyPr rtlCol="0" anchor="ctr"/>
-          <a:lstStyle/>
-          <a:p>
-            <a:pPr algn="ctr"/>
-          </a:p>
-        </p:txBody>
-      </p:sp>
-      <p:sp>
-        <p:nvSpPr>
-          <p:cNvPr id="10" name="TextBox 9"/>
+              <a:t>構想中</a:t>
+            </a:r>
+          </a:p>
+        </p:txBody>
+      </p:sp>
+      <p:sp>
+        <p:nvSpPr>
+          <p:cNvPr id="9" name="TextBox 8"/>
           <p:cNvSpPr txBox="1"/>
           <p:nvPr/>
         </p:nvSpPr>
         <p:spPr>
           <a:xfrm>
-            <a:off x="7955280" y="1965960"/>
-            <a:ext cx="3108960" cy="914400"/>
+            <a:off x="6766560" y="2971800"/>
+            <a:ext cx="4023360" cy="1371600"/>
           </a:xfrm>
           <a:prstGeom prst="rect">
             <a:avLst/>
@@ -6274,107 +6709,44 @@
           </a:bodyPr>
           <a:lstStyle/>
           <a:p>
-            <a:pPr algn="ctr">
+            <a:pPr algn="l">
               <a:lnSpc>
-                <a:spcPct val="120000"/>
+                <a:spcPct val="130000"/>
               </a:lnSpc>
             </a:pPr>
             <a:r>
-              <a:rPr sz="1800" b="1">
+              <a:rPr sz="2000" b="1">
                 <a:solidFill>
                   <a:srgbClr val="142842"/>
                 </a:solidFill>
                 <a:latin typeface="Hiragino Sans"/>
                 <a:ea typeface="Hiragino Sans"/>
               </a:rPr>
-              <a:t>次の施策へ</a:t>
-            </a:r>
-          </a:p>
-        </p:txBody>
-      </p:sp>
-      <p:sp>
-        <p:nvSpPr>
-          <p:cNvPr id="11" name="TextBox 10"/>
-          <p:cNvSpPr txBox="1"/>
-          <p:nvPr/>
-        </p:nvSpPr>
-        <p:spPr>
-          <a:xfrm>
-            <a:off x="640080" y="3840480"/>
-            <a:ext cx="10515600" cy="914400"/>
-          </a:xfrm>
-          <a:prstGeom prst="rect">
-            <a:avLst/>
-          </a:prstGeom>
-          <a:noFill/>
-        </p:spPr>
-        <p:txBody>
-          <a:bodyPr wrap="square" anchor="t">
-            <a:spAutoFit/>
-          </a:bodyPr>
-          <a:lstStyle/>
-          <a:p>
-            <a:pPr algn="ctr">
+              <a:t>パートナーと一緒に見る</a:t>
+            </a:r>
+          </a:p>
+          <a:p>
+            <a:pPr algn="l">
               <a:lnSpc>
-                <a:spcPct val="125000"/>
+                <a:spcPct val="130000"/>
               </a:lnSpc>
             </a:pPr>
             <a:r>
-              <a:rPr sz="3200" b="1">
-                <a:solidFill>
-                  <a:srgbClr val="1E3A5F"/>
+              <a:rPr sz="2000" b="1">
+                <a:solidFill>
+                  <a:srgbClr val="142842"/>
                 </a:solidFill>
                 <a:latin typeface="Hiragino Sans"/>
                 <a:ea typeface="Hiragino Sans"/>
               </a:rPr>
-              <a:t>知ったうえで、自分で決める</a:t>
-            </a:r>
-          </a:p>
-        </p:txBody>
-      </p:sp>
-      <p:sp>
-        <p:nvSpPr>
-          <p:cNvPr id="12" name="TextBox 11"/>
-          <p:cNvSpPr txBox="1"/>
-          <p:nvPr/>
-        </p:nvSpPr>
-        <p:spPr>
-          <a:xfrm>
-            <a:off x="640080" y="4937760"/>
-            <a:ext cx="10515600" cy="457200"/>
-          </a:xfrm>
-          <a:prstGeom prst="rect">
-            <a:avLst/>
-          </a:prstGeom>
-          <a:noFill/>
-        </p:spPr>
-        <p:txBody>
-          <a:bodyPr wrap="square" anchor="t">
-            <a:spAutoFit/>
-          </a:bodyPr>
-          <a:lstStyle/>
-          <a:p>
-            <a:pPr algn="ctr">
-              <a:lnSpc>
-                <a:spcPct val="125000"/>
-              </a:lnSpc>
-            </a:pPr>
-            <a:r>
-              <a:rPr sz="1600" b="1">
-                <a:solidFill>
-                  <a:srgbClr val="142842"/>
-                </a:solidFill>
-                <a:latin typeface="Hiragino Sans"/>
-                <a:ea typeface="Hiragino Sans"/>
-              </a:rPr>
-              <a:t>公開デモ: my-career-app-559fd.web.app</a:t>
-            </a:r>
-          </a:p>
-        </p:txBody>
-      </p:sp>
-      <p:sp>
-        <p:nvSpPr>
-          <p:cNvPr id="13" name="TextBox 12"/>
+              <a:t>男性が自分ごととして体験する</a:t>
+            </a:r>
+          </a:p>
+        </p:txBody>
+      </p:sp>
+      <p:sp>
+        <p:nvSpPr>
+          <p:cNvPr id="10" name="TextBox 9"/>
           <p:cNvSpPr txBox="1"/>
           <p:nvPr/>
         </p:nvSpPr>
@@ -6407,14 +6779,14 @@
                 <a:latin typeface="Hiragino Sans"/>
                 <a:ea typeface="Hiragino Sans"/>
               </a:rPr>
-              <a:t>制度情報の出典は各スライド記載のとおり。データはオープンデータと法令から出典付きで取り込む。</a:t>
-            </a:r>
-          </a:p>
-        </p:txBody>
-      </p:sp>
-      <p:sp>
-        <p:nvSpPr>
-          <p:cNvPr id="14" name="TextBox 13"/>
+              <a:t>出典: 東京都「男女雇用平等参画状況調査」（令和7年度）。母性保護に関する制度8項目すべてで、男性の「わからない」が女性より高い（出産障害休暇: 男性52.6%／女性42.4%）。</a:t>
+            </a:r>
+          </a:p>
+        </p:txBody>
+      </p:sp>
+      <p:sp>
+        <p:nvSpPr>
+          <p:cNvPr id="11" name="TextBox 10"/>
           <p:cNvSpPr txBox="1"/>
           <p:nvPr/>
         </p:nvSpPr>
@@ -6461,7 +6833,7 @@
 </file>
 
 <file path=ppt/slides/slide7.xml><?xml version="1.0" encoding="utf-8"?>
-<p:sld xmlns:a="http://schemas.openxmlformats.org/drawingml/2006/main" xmlns:p="http://schemas.openxmlformats.org/presentationml/2006/main" xmlns:r="http://schemas.openxmlformats.org/officeDocument/2006/relationships">
+<p:sld xmlns:a="http://schemas.openxmlformats.org/drawingml/2006/main" xmlns:r="http://schemas.openxmlformats.org/officeDocument/2006/relationships" xmlns:p="http://schemas.openxmlformats.org/presentationml/2006/main">
   <p:cSld>
     <p:bg>
       <p:bgPr>
@@ -6477,7 +6849,14 @@
         <p:cNvGrpSpPr/>
         <p:nvPr/>
       </p:nvGrpSpPr>
-      <p:grpSpPr/>
+      <p:grpSpPr>
+        <a:xfrm>
+          <a:off x="0" y="0"/>
+          <a:ext cx="0" cy="0"/>
+          <a:chOff x="0" y="0"/>
+          <a:chExt cx="0" cy="0"/>
+        </a:xfrm>
+      </p:grpSpPr>
       <p:sp>
         <p:nvSpPr>
           <p:cNvPr id="2" name="TextBox 1"/>
@@ -6506,14 +6885,14 @@
               </a:lnSpc>
             </a:pPr>
             <a:r>
-              <a:rPr sz="3000" b="1">
+              <a:rPr sz="3400" b="1">
                 <a:solidFill>
                   <a:srgbClr val="142842"/>
                 </a:solidFill>
                 <a:latin typeface="Hiragino Sans"/>
                 <a:ea typeface="Hiragino Sans"/>
               </a:rPr>
-              <a:t>参考｜利用データと使い方</a:t>
+              <a:t>このデータが、次の施策を動かす</a:t>
             </a:r>
           </a:p>
         </p:txBody>
@@ -6526,8 +6905,8 @@
         </p:nvSpPr>
         <p:spPr>
           <a:xfrm>
-            <a:off x="640080" y="1371600"/>
-            <a:ext cx="10881360" cy="1874519"/>
+            <a:off x="822960" y="1737360"/>
+            <a:ext cx="3108960" cy="1371600"/>
           </a:xfrm>
           <a:prstGeom prst="rect">
             <a:avLst/>
@@ -6559,6 +6938,7 @@
           <a:lstStyle/>
           <a:p>
             <a:pPr algn="ctr"/>
+            <a:endParaRPr/>
           </a:p>
         </p:txBody>
       </p:sp>
@@ -6570,8 +6950,8 @@
         </p:nvSpPr>
         <p:spPr>
           <a:xfrm>
-            <a:off x="868680" y="1508760"/>
-            <a:ext cx="10424160" cy="365760"/>
+            <a:off x="822960" y="1965960"/>
+            <a:ext cx="3108960" cy="914400"/>
           </a:xfrm>
           <a:prstGeom prst="rect">
             <a:avLst/>
@@ -6584,77 +6964,77 @@
           </a:bodyPr>
           <a:lstStyle/>
           <a:p>
-            <a:pPr algn="l">
+            <a:pPr algn="ctr">
+              <a:lnSpc>
+                <a:spcPct val="120000"/>
+              </a:lnSpc>
+            </a:pPr>
+            <a:r>
+              <a:rPr sz="1800" b="1">
+                <a:solidFill>
+                  <a:srgbClr val="142842"/>
+                </a:solidFill>
+                <a:latin typeface="Hiragino Sans"/>
+                <a:ea typeface="Hiragino Sans"/>
+              </a:rPr>
+              <a:t>東京都・国の</a:t>
+            </a:r>
+          </a:p>
+          <a:p>
+            <a:pPr algn="ctr">
+              <a:lnSpc>
+                <a:spcPct val="120000"/>
+              </a:lnSpc>
+            </a:pPr>
+            <a:r>
+              <a:rPr sz="1800" b="1">
+                <a:solidFill>
+                  <a:srgbClr val="142842"/>
+                </a:solidFill>
+                <a:latin typeface="Hiragino Sans"/>
+                <a:ea typeface="Hiragino Sans"/>
+              </a:rPr>
+              <a:t>オープンデータ</a:t>
+            </a:r>
+          </a:p>
+        </p:txBody>
+      </p:sp>
+      <p:sp>
+        <p:nvSpPr>
+          <p:cNvPr id="5" name="TextBox 4"/>
+          <p:cNvSpPr txBox="1"/>
+          <p:nvPr/>
+        </p:nvSpPr>
+        <p:spPr>
+          <a:xfrm>
+            <a:off x="3931920" y="2148840"/>
+            <a:ext cx="457200" cy="548640"/>
+          </a:xfrm>
+          <a:prstGeom prst="rect">
+            <a:avLst/>
+          </a:prstGeom>
+          <a:noFill/>
+        </p:spPr>
+        <p:txBody>
+          <a:bodyPr wrap="square" anchor="t">
+            <a:spAutoFit/>
+          </a:bodyPr>
+          <a:lstStyle/>
+          <a:p>
+            <a:pPr algn="ctr">
               <a:lnSpc>
                 <a:spcPct val="125000"/>
               </a:lnSpc>
             </a:pPr>
             <a:r>
-              <a:rPr sz="1600" b="1">
-                <a:solidFill>
-                  <a:srgbClr val="1E3A5F"/>
+              <a:rPr sz="2400" b="0">
+                <a:solidFill>
+                  <a:srgbClr val="565B62"/>
                 </a:solidFill>
                 <a:latin typeface="Hiragino Sans"/>
                 <a:ea typeface="Hiragino Sans"/>
               </a:rPr>
-              <a:t>(B) アプリ内に出典付きで表示するデータ</a:t>
-            </a:r>
-          </a:p>
-        </p:txBody>
-      </p:sp>
-      <p:sp>
-        <p:nvSpPr>
-          <p:cNvPr id="5" name="TextBox 4"/>
-          <p:cNvSpPr txBox="1"/>
-          <p:nvPr/>
-        </p:nvSpPr>
-        <p:spPr>
-          <a:xfrm>
-            <a:off x="868680" y="1920240"/>
-            <a:ext cx="10195560" cy="1234440"/>
-          </a:xfrm>
-          <a:prstGeom prst="rect">
-            <a:avLst/>
-          </a:prstGeom>
-          <a:noFill/>
-        </p:spPr>
-        <p:txBody>
-          <a:bodyPr wrap="square" anchor="t">
-            <a:spAutoFit/>
-          </a:bodyPr>
-          <a:lstStyle/>
-          <a:p>
-            <a:pPr algn="l">
-              <a:lnSpc>
-                <a:spcPct val="140000"/>
-              </a:lnSpc>
-            </a:pPr>
-            <a:r>
-              <a:rPr sz="1400" b="0">
-                <a:solidFill>
-                  <a:srgbClr val="20242B"/>
-                </a:solidFill>
-                <a:latin typeface="Hiragino Sans"/>
-                <a:ea typeface="Hiragino Sans"/>
-              </a:rPr>
-              <a:t>・東京都不妊検査等助成事業／東京都福祉局／公的な制度情報</a:t>
-            </a:r>
-          </a:p>
-          <a:p>
-            <a:pPr algn="l">
-              <a:lnSpc>
-                <a:spcPct val="140000"/>
-              </a:lnSpc>
-            </a:pPr>
-            <a:r>
-              <a:rPr sz="1400" b="0">
-                <a:solidFill>
-                  <a:srgbClr val="20242B"/>
-                </a:solidFill>
-                <a:latin typeface="Hiragino Sans"/>
-                <a:ea typeface="Hiragino Sans"/>
-              </a:rPr>
-              <a:t>・育児・介護休業法、労働基準法、母子保健法／厚生労働省・こども家庭庁／公的な法令情報</a:t>
+              <a:t>→</a:t>
             </a:r>
           </a:p>
         </p:txBody>
@@ -6667,17 +7047,17 @@
         </p:nvSpPr>
         <p:spPr>
           <a:xfrm>
-            <a:off x="640080" y="3429000"/>
-            <a:ext cx="10881360" cy="2331720"/>
-          </a:xfrm>
-          <a:prstGeom prst="rect">
-            <a:avLst/>
-          </a:prstGeom>
-          <a:noFill/>
-          <a:ln w="9525">
-            <a:solidFill>
-              <a:srgbClr val="D9D0BC"/>
-            </a:solidFill>
+            <a:off x="4389120" y="1737360"/>
+            <a:ext cx="3108960" cy="1371600"/>
+          </a:xfrm>
+          <a:prstGeom prst="rect">
+            <a:avLst/>
+          </a:prstGeom>
+          <a:solidFill>
+            <a:srgbClr val="F2F4F7"/>
+          </a:solidFill>
+          <a:ln>
+            <a:noFill/>
           </a:ln>
           <a:effectLst/>
         </p:spPr>
@@ -6700,6 +7080,7 @@
           <a:lstStyle/>
           <a:p>
             <a:pPr algn="ctr"/>
+            <a:endParaRPr/>
           </a:p>
         </p:txBody>
       </p:sp>
@@ -6711,8 +7092,383 @@
         </p:nvSpPr>
         <p:spPr>
           <a:xfrm>
-            <a:off x="868680" y="3566160"/>
-            <a:ext cx="10424160" cy="365760"/>
+            <a:off x="4389120" y="1965960"/>
+            <a:ext cx="3108960" cy="914400"/>
+          </a:xfrm>
+          <a:prstGeom prst="rect">
+            <a:avLst/>
+          </a:prstGeom>
+          <a:noFill/>
+        </p:spPr>
+        <p:txBody>
+          <a:bodyPr wrap="square" anchor="t">
+            <a:spAutoFit/>
+          </a:bodyPr>
+          <a:lstStyle/>
+          <a:p>
+            <a:pPr algn="ctr">
+              <a:lnSpc>
+                <a:spcPct val="120000"/>
+              </a:lnSpc>
+            </a:pPr>
+            <a:r>
+              <a:rPr sz="1800" b="1">
+                <a:solidFill>
+                  <a:srgbClr val="142842"/>
+                </a:solidFill>
+                <a:latin typeface="Hiragino Sans"/>
+                <a:ea typeface="Hiragino Sans"/>
+              </a:rPr>
+              <a:t>一人ひとりの</a:t>
+            </a:r>
+          </a:p>
+          <a:p>
+            <a:pPr algn="ctr">
+              <a:lnSpc>
+                <a:spcPct val="120000"/>
+              </a:lnSpc>
+            </a:pPr>
+            <a:r>
+              <a:rPr sz="1800" b="1">
+                <a:solidFill>
+                  <a:srgbClr val="142842"/>
+                </a:solidFill>
+                <a:latin typeface="Hiragino Sans"/>
+                <a:ea typeface="Hiragino Sans"/>
+              </a:rPr>
+              <a:t>ライフプラン</a:t>
+            </a:r>
+          </a:p>
+        </p:txBody>
+      </p:sp>
+      <p:sp>
+        <p:nvSpPr>
+          <p:cNvPr id="8" name="TextBox 7"/>
+          <p:cNvSpPr txBox="1"/>
+          <p:nvPr/>
+        </p:nvSpPr>
+        <p:spPr>
+          <a:xfrm>
+            <a:off x="7498080" y="2148840"/>
+            <a:ext cx="457200" cy="548640"/>
+          </a:xfrm>
+          <a:prstGeom prst="rect">
+            <a:avLst/>
+          </a:prstGeom>
+          <a:noFill/>
+        </p:spPr>
+        <p:txBody>
+          <a:bodyPr wrap="square" anchor="t">
+            <a:spAutoFit/>
+          </a:bodyPr>
+          <a:lstStyle/>
+          <a:p>
+            <a:pPr algn="ctr">
+              <a:lnSpc>
+                <a:spcPct val="125000"/>
+              </a:lnSpc>
+            </a:pPr>
+            <a:r>
+              <a:rPr sz="2400" b="0">
+                <a:solidFill>
+                  <a:srgbClr val="565B62"/>
+                </a:solidFill>
+                <a:latin typeface="Hiragino Sans"/>
+                <a:ea typeface="Hiragino Sans"/>
+              </a:rPr>
+              <a:t>→</a:t>
+            </a:r>
+          </a:p>
+        </p:txBody>
+      </p:sp>
+      <p:sp>
+        <p:nvSpPr>
+          <p:cNvPr id="9" name="Rectangle 8"/>
+          <p:cNvSpPr/>
+          <p:nvPr/>
+        </p:nvSpPr>
+        <p:spPr>
+          <a:xfrm>
+            <a:off x="7955280" y="1737360"/>
+            <a:ext cx="3108960" cy="1371600"/>
+          </a:xfrm>
+          <a:prstGeom prst="rect">
+            <a:avLst/>
+          </a:prstGeom>
+          <a:solidFill>
+            <a:srgbClr val="F2F4F7"/>
+          </a:solidFill>
+          <a:ln>
+            <a:noFill/>
+          </a:ln>
+          <a:effectLst/>
+        </p:spPr>
+        <p:style>
+          <a:lnRef idx="1">
+            <a:schemeClr val="accent1"/>
+          </a:lnRef>
+          <a:fillRef idx="3">
+            <a:schemeClr val="accent1"/>
+          </a:fillRef>
+          <a:effectRef idx="2">
+            <a:schemeClr val="accent1"/>
+          </a:effectRef>
+          <a:fontRef idx="minor">
+            <a:schemeClr val="lt1"/>
+          </a:fontRef>
+        </p:style>
+        <p:txBody>
+          <a:bodyPr rtlCol="0" anchor="ctr"/>
+          <a:lstStyle/>
+          <a:p>
+            <a:pPr algn="ctr"/>
+            <a:endParaRPr/>
+          </a:p>
+        </p:txBody>
+      </p:sp>
+      <p:sp>
+        <p:nvSpPr>
+          <p:cNvPr id="10" name="TextBox 9"/>
+          <p:cNvSpPr txBox="1"/>
+          <p:nvPr/>
+        </p:nvSpPr>
+        <p:spPr>
+          <a:xfrm>
+            <a:off x="7955280" y="1965960"/>
+            <a:ext cx="3108960" cy="914400"/>
+          </a:xfrm>
+          <a:prstGeom prst="rect">
+            <a:avLst/>
+          </a:prstGeom>
+          <a:noFill/>
+        </p:spPr>
+        <p:txBody>
+          <a:bodyPr wrap="square" anchor="t">
+            <a:spAutoFit/>
+          </a:bodyPr>
+          <a:lstStyle/>
+          <a:p>
+            <a:pPr algn="ctr">
+              <a:lnSpc>
+                <a:spcPct val="120000"/>
+              </a:lnSpc>
+            </a:pPr>
+            <a:r>
+              <a:rPr sz="1800" b="1">
+                <a:solidFill>
+                  <a:srgbClr val="142842"/>
+                </a:solidFill>
+                <a:latin typeface="Hiragino Sans"/>
+                <a:ea typeface="Hiragino Sans"/>
+              </a:rPr>
+              <a:t>次の施策へ</a:t>
+            </a:r>
+          </a:p>
+        </p:txBody>
+      </p:sp>
+      <p:sp>
+        <p:nvSpPr>
+          <p:cNvPr id="11" name="TextBox 10"/>
+          <p:cNvSpPr txBox="1"/>
+          <p:nvPr/>
+        </p:nvSpPr>
+        <p:spPr>
+          <a:xfrm>
+            <a:off x="640080" y="3840480"/>
+            <a:ext cx="10515600" cy="914400"/>
+          </a:xfrm>
+          <a:prstGeom prst="rect">
+            <a:avLst/>
+          </a:prstGeom>
+          <a:noFill/>
+        </p:spPr>
+        <p:txBody>
+          <a:bodyPr wrap="square" anchor="t">
+            <a:spAutoFit/>
+          </a:bodyPr>
+          <a:lstStyle/>
+          <a:p>
+            <a:pPr algn="ctr">
+              <a:lnSpc>
+                <a:spcPct val="125000"/>
+              </a:lnSpc>
+            </a:pPr>
+            <a:r>
+              <a:rPr sz="3200" b="1">
+                <a:solidFill>
+                  <a:srgbClr val="1E3A5F"/>
+                </a:solidFill>
+                <a:latin typeface="Hiragino Sans"/>
+                <a:ea typeface="Hiragino Sans"/>
+              </a:rPr>
+              <a:t>知ったうえで、自分で決める</a:t>
+            </a:r>
+          </a:p>
+        </p:txBody>
+      </p:sp>
+      <p:sp>
+        <p:nvSpPr>
+          <p:cNvPr id="12" name="TextBox 11"/>
+          <p:cNvSpPr txBox="1"/>
+          <p:nvPr/>
+        </p:nvSpPr>
+        <p:spPr>
+          <a:xfrm>
+            <a:off x="640080" y="4937760"/>
+            <a:ext cx="10515600" cy="457200"/>
+          </a:xfrm>
+          <a:prstGeom prst="rect">
+            <a:avLst/>
+          </a:prstGeom>
+          <a:noFill/>
+        </p:spPr>
+        <p:txBody>
+          <a:bodyPr wrap="square" anchor="t">
+            <a:spAutoFit/>
+          </a:bodyPr>
+          <a:lstStyle/>
+          <a:p>
+            <a:pPr algn="ctr">
+              <a:lnSpc>
+                <a:spcPct val="125000"/>
+              </a:lnSpc>
+            </a:pPr>
+            <a:r>
+              <a:rPr sz="1600" b="1">
+                <a:solidFill>
+                  <a:srgbClr val="142842"/>
+                </a:solidFill>
+                <a:latin typeface="Hiragino Sans"/>
+                <a:ea typeface="Hiragino Sans"/>
+              </a:rPr>
+              <a:t>公開デモ: my-career-app-559fd.web.app</a:t>
+            </a:r>
+          </a:p>
+        </p:txBody>
+      </p:sp>
+      <p:sp>
+        <p:nvSpPr>
+          <p:cNvPr id="13" name="TextBox 12"/>
+          <p:cNvSpPr txBox="1"/>
+          <p:nvPr/>
+        </p:nvSpPr>
+        <p:spPr>
+          <a:xfrm>
+            <a:off x="548640" y="6355080"/>
+            <a:ext cx="11109960" cy="457200"/>
+          </a:xfrm>
+          <a:prstGeom prst="rect">
+            <a:avLst/>
+          </a:prstGeom>
+          <a:noFill/>
+        </p:spPr>
+        <p:txBody>
+          <a:bodyPr wrap="square" anchor="t">
+            <a:spAutoFit/>
+          </a:bodyPr>
+          <a:lstStyle/>
+          <a:p>
+            <a:pPr algn="l">
+              <a:lnSpc>
+                <a:spcPct val="115000"/>
+              </a:lnSpc>
+            </a:pPr>
+            <a:r>
+              <a:rPr sz="1000" b="0">
+                <a:solidFill>
+                  <a:srgbClr val="565B62"/>
+                </a:solidFill>
+                <a:latin typeface="Hiragino Sans"/>
+                <a:ea typeface="Hiragino Sans"/>
+              </a:rPr>
+              <a:t>制度情報の出典は各スライド記載のとおり。行政に力を入れてほしいこと1位「家事・育児や介護中の人への家庭と仕事の両立支援」64%（東京都「男女平等参画に関する世論調査」令和7年8月調査）</a:t>
+            </a:r>
+          </a:p>
+        </p:txBody>
+      </p:sp>
+      <p:sp>
+        <p:nvSpPr>
+          <p:cNvPr id="14" name="TextBox 13"/>
+          <p:cNvSpPr txBox="1"/>
+          <p:nvPr/>
+        </p:nvSpPr>
+        <p:spPr>
+          <a:xfrm>
+            <a:off x="11475720" y="228600"/>
+            <a:ext cx="548640" cy="365760"/>
+          </a:xfrm>
+          <a:prstGeom prst="rect">
+            <a:avLst/>
+          </a:prstGeom>
+          <a:noFill/>
+        </p:spPr>
+        <p:txBody>
+          <a:bodyPr wrap="square" anchor="t">
+            <a:spAutoFit/>
+          </a:bodyPr>
+          <a:lstStyle/>
+          <a:p>
+            <a:pPr algn="r">
+              <a:lnSpc>
+                <a:spcPct val="125000"/>
+              </a:lnSpc>
+            </a:pPr>
+            <a:r>
+              <a:rPr sz="1200" b="0">
+                <a:solidFill>
+                  <a:srgbClr val="565B62"/>
+                </a:solidFill>
+                <a:latin typeface="Hiragino Sans"/>
+                <a:ea typeface="Hiragino Sans"/>
+              </a:rPr>
+              <a:t>07</a:t>
+            </a:r>
+          </a:p>
+        </p:txBody>
+      </p:sp>
+    </p:spTree>
+  </p:cSld>
+  <p:clrMapOvr>
+    <a:masterClrMapping/>
+  </p:clrMapOvr>
+</p:sld>
+</file>
+
+<file path=ppt/slides/slide8.xml><?xml version="1.0" encoding="utf-8"?>
+<p:sld xmlns:a="http://schemas.openxmlformats.org/drawingml/2006/main" xmlns:r="http://schemas.openxmlformats.org/officeDocument/2006/relationships" xmlns:p="http://schemas.openxmlformats.org/presentationml/2006/main">
+  <p:cSld>
+    <p:bg>
+      <p:bgPr>
+        <a:solidFill>
+          <a:srgbClr val="FFFFFF"/>
+        </a:solidFill>
+        <a:effectLst/>
+      </p:bgPr>
+    </p:bg>
+    <p:spTree>
+      <p:nvGrpSpPr>
+        <p:cNvPr id="1" name=""/>
+        <p:cNvGrpSpPr/>
+        <p:nvPr/>
+      </p:nvGrpSpPr>
+      <p:grpSpPr>
+        <a:xfrm>
+          <a:off x="0" y="0"/>
+          <a:ext cx="0" cy="0"/>
+          <a:chOff x="0" y="0"/>
+          <a:chExt cx="0" cy="0"/>
+        </a:xfrm>
+      </p:grpSpPr>
+      <p:sp>
+        <p:nvSpPr>
+          <p:cNvPr id="2" name="TextBox 1"/>
+          <p:cNvSpPr txBox="1"/>
+          <p:nvPr/>
+        </p:nvSpPr>
+        <p:spPr>
+          <a:xfrm>
+            <a:off x="640080" y="457200"/>
+            <a:ext cx="10515600" cy="822960"/>
           </a:xfrm>
           <a:prstGeom prst="rect">
             <a:avLst/>
@@ -6731,28 +7487,113 @@
               </a:lnSpc>
             </a:pPr>
             <a:r>
-              <a:rPr sz="1600" b="1">
-                <a:solidFill>
-                  <a:srgbClr val="1E3A5F"/>
+              <a:rPr sz="3000" b="1">
+                <a:solidFill>
+                  <a:srgbClr val="142842"/>
                 </a:solidFill>
                 <a:latin typeface="Hiragino Sans"/>
                 <a:ea typeface="Hiragino Sans"/>
               </a:rPr>
-              <a:t>(A) 課題の根拠として資料で引用するデータ（利用者の画面には出さない）</a:t>
-            </a:r>
-          </a:p>
-        </p:txBody>
-      </p:sp>
-      <p:sp>
-        <p:nvSpPr>
-          <p:cNvPr id="8" name="TextBox 7"/>
+              <a:t>参考｜利用データと使い方</a:t>
+            </a:r>
+          </a:p>
+        </p:txBody>
+      </p:sp>
+      <p:sp>
+        <p:nvSpPr>
+          <p:cNvPr id="3" name="Rectangle 2"/>
+          <p:cNvSpPr/>
+          <p:nvPr/>
+        </p:nvSpPr>
+        <p:spPr>
+          <a:xfrm>
+            <a:off x="640080" y="1371600"/>
+            <a:ext cx="10881360" cy="1874519"/>
+          </a:xfrm>
+          <a:prstGeom prst="rect">
+            <a:avLst/>
+          </a:prstGeom>
+          <a:solidFill>
+            <a:srgbClr val="F2F4F7"/>
+          </a:solidFill>
+          <a:ln>
+            <a:noFill/>
+          </a:ln>
+          <a:effectLst/>
+        </p:spPr>
+        <p:style>
+          <a:lnRef idx="1">
+            <a:schemeClr val="accent1"/>
+          </a:lnRef>
+          <a:fillRef idx="3">
+            <a:schemeClr val="accent1"/>
+          </a:fillRef>
+          <a:effectRef idx="2">
+            <a:schemeClr val="accent1"/>
+          </a:effectRef>
+          <a:fontRef idx="minor">
+            <a:schemeClr val="lt1"/>
+          </a:fontRef>
+        </p:style>
+        <p:txBody>
+          <a:bodyPr rtlCol="0" anchor="ctr"/>
+          <a:lstStyle/>
+          <a:p>
+            <a:pPr algn="ctr"/>
+            <a:endParaRPr/>
+          </a:p>
+        </p:txBody>
+      </p:sp>
+      <p:sp>
+        <p:nvSpPr>
+          <p:cNvPr id="4" name="TextBox 3"/>
           <p:cNvSpPr txBox="1"/>
           <p:nvPr/>
         </p:nvSpPr>
         <p:spPr>
           <a:xfrm>
-            <a:off x="868680" y="3977639"/>
-            <a:ext cx="10195560" cy="1691640"/>
+            <a:off x="868680" y="1508760"/>
+            <a:ext cx="10424160" cy="365760"/>
+          </a:xfrm>
+          <a:prstGeom prst="rect">
+            <a:avLst/>
+          </a:prstGeom>
+          <a:noFill/>
+        </p:spPr>
+        <p:txBody>
+          <a:bodyPr wrap="square" anchor="t">
+            <a:spAutoFit/>
+          </a:bodyPr>
+          <a:lstStyle/>
+          <a:p>
+            <a:pPr algn="l">
+              <a:lnSpc>
+                <a:spcPct val="125000"/>
+              </a:lnSpc>
+            </a:pPr>
+            <a:r>
+              <a:rPr sz="1600" b="1">
+                <a:solidFill>
+                  <a:srgbClr val="1E3A5F"/>
+                </a:solidFill>
+                <a:latin typeface="Hiragino Sans"/>
+                <a:ea typeface="Hiragino Sans"/>
+              </a:rPr>
+              <a:t>(B) アプリ内に出典付きで表示するデータ</a:t>
+            </a:r>
+          </a:p>
+        </p:txBody>
+      </p:sp>
+      <p:sp>
+        <p:nvSpPr>
+          <p:cNvPr id="5" name="TextBox 4"/>
+          <p:cNvSpPr txBox="1"/>
+          <p:nvPr/>
+        </p:nvSpPr>
+        <p:spPr>
+          <a:xfrm>
+            <a:off x="868680" y="1920240"/>
+            <a:ext cx="10195560" cy="1234440"/>
           </a:xfrm>
           <a:prstGeom prst="rect">
             <a:avLst/>
@@ -6778,7 +7619,7 @@
                 <a:latin typeface="Hiragino Sans"/>
                 <a:ea typeface="Hiragino Sans"/>
               </a:rPr>
-              <a:t>・男女雇用平等参画状況調査（令和7年度）／東京都産業労働局／CC BY 4.0</a:t>
+              <a:t>・東京都不妊検査等助成事業／東京都福祉局／公的な制度情報</a:t>
             </a:r>
           </a:p>
           <a:p>
@@ -6795,9 +7636,117 @@
                 <a:latin typeface="Hiragino Sans"/>
                 <a:ea typeface="Hiragino Sans"/>
               </a:rPr>
-              <a:t>・男女平等参画に関する世論調査（令和2年度）／東京都（政策企画局・生活文化局）</a:t>
-            </a:r>
-          </a:p>
+              <a:t>・育児・介護休業法、労働基準法、母子保健法／厚生労働省・こども家庭庁／公的な法令情報</a:t>
+            </a:r>
+          </a:p>
+        </p:txBody>
+      </p:sp>
+      <p:sp>
+        <p:nvSpPr>
+          <p:cNvPr id="6" name="Rectangle 5"/>
+          <p:cNvSpPr/>
+          <p:nvPr/>
+        </p:nvSpPr>
+        <p:spPr>
+          <a:xfrm>
+            <a:off x="640080" y="3429000"/>
+            <a:ext cx="10881360" cy="2331720"/>
+          </a:xfrm>
+          <a:prstGeom prst="rect">
+            <a:avLst/>
+          </a:prstGeom>
+          <a:noFill/>
+          <a:ln w="9525">
+            <a:solidFill>
+              <a:srgbClr val="D9D0BC"/>
+            </a:solidFill>
+          </a:ln>
+          <a:effectLst/>
+        </p:spPr>
+        <p:style>
+          <a:lnRef idx="1">
+            <a:schemeClr val="accent1"/>
+          </a:lnRef>
+          <a:fillRef idx="3">
+            <a:schemeClr val="accent1"/>
+          </a:fillRef>
+          <a:effectRef idx="2">
+            <a:schemeClr val="accent1"/>
+          </a:effectRef>
+          <a:fontRef idx="minor">
+            <a:schemeClr val="lt1"/>
+          </a:fontRef>
+        </p:style>
+        <p:txBody>
+          <a:bodyPr rtlCol="0" anchor="ctr"/>
+          <a:lstStyle/>
+          <a:p>
+            <a:pPr algn="ctr"/>
+            <a:endParaRPr/>
+          </a:p>
+        </p:txBody>
+      </p:sp>
+      <p:sp>
+        <p:nvSpPr>
+          <p:cNvPr id="7" name="TextBox 6"/>
+          <p:cNvSpPr txBox="1"/>
+          <p:nvPr/>
+        </p:nvSpPr>
+        <p:spPr>
+          <a:xfrm>
+            <a:off x="868680" y="3566160"/>
+            <a:ext cx="10424160" cy="365760"/>
+          </a:xfrm>
+          <a:prstGeom prst="rect">
+            <a:avLst/>
+          </a:prstGeom>
+          <a:noFill/>
+        </p:spPr>
+        <p:txBody>
+          <a:bodyPr wrap="square" anchor="t">
+            <a:spAutoFit/>
+          </a:bodyPr>
+          <a:lstStyle/>
+          <a:p>
+            <a:pPr algn="l">
+              <a:lnSpc>
+                <a:spcPct val="125000"/>
+              </a:lnSpc>
+            </a:pPr>
+            <a:r>
+              <a:rPr sz="1600" b="1">
+                <a:solidFill>
+                  <a:srgbClr val="1E3A5F"/>
+                </a:solidFill>
+                <a:latin typeface="Hiragino Sans"/>
+                <a:ea typeface="Hiragino Sans"/>
+              </a:rPr>
+              <a:t>(A) 課題の根拠として資料で引用するデータ（利用者の画面には出さない）</a:t>
+            </a:r>
+          </a:p>
+        </p:txBody>
+      </p:sp>
+      <p:sp>
+        <p:nvSpPr>
+          <p:cNvPr id="8" name="TextBox 7"/>
+          <p:cNvSpPr txBox="1"/>
+          <p:nvPr/>
+        </p:nvSpPr>
+        <p:spPr>
+          <a:xfrm>
+            <a:off x="868680" y="3977639"/>
+            <a:ext cx="10195560" cy="1691640"/>
+          </a:xfrm>
+          <a:prstGeom prst="rect">
+            <a:avLst/>
+          </a:prstGeom>
+          <a:noFill/>
+        </p:spPr>
+        <p:txBody>
+          <a:bodyPr wrap="square" anchor="t">
+            <a:spAutoFit/>
+          </a:bodyPr>
+          <a:lstStyle/>
           <a:p>
             <a:pPr algn="l">
               <a:lnSpc>
@@ -6812,7 +7761,7 @@
                 <a:latin typeface="Hiragino Sans"/>
                 <a:ea typeface="Hiragino Sans"/>
               </a:rPr>
-              <a:t>・子育て支援制度レジストリ（東京デジタル2030ビジョン こどもDX）／東京都デジタルサービス局／</a:t>
+              <a:t>・男女雇用平等参画状況調査（令和7年度）／東京都産業労働局／CC BY 4.0</a:t>
             </a:r>
           </a:p>
           <a:p>
@@ -6829,7 +7778,7 @@
                 <a:latin typeface="Hiragino Sans"/>
                 <a:ea typeface="Hiragino Sans"/>
               </a:rPr>
-              <a:t>  CC BY 4.0（7,812件の根拠として引用。更新終了のため制度上限の一次情報は東京都福祉局の</a:t>
+              <a:t>・男女平等参画に関する世論調査（令和7年8月調査）／東京都政策企画局</a:t>
             </a:r>
           </a:p>
           <a:p>
@@ -6846,6 +7795,40 @@
                 <a:latin typeface="Hiragino Sans"/>
                 <a:ea typeface="Hiragino Sans"/>
               </a:rPr>
+              <a:t>・子育て支援制度レジストリ（東京デジタル2030ビジョン こどもDX）／東京都デジタルサービス局／</a:t>
+            </a:r>
+          </a:p>
+          <a:p>
+            <a:pPr algn="l">
+              <a:lnSpc>
+                <a:spcPct val="140000"/>
+              </a:lnSpc>
+            </a:pPr>
+            <a:r>
+              <a:rPr sz="1400" b="0">
+                <a:solidFill>
+                  <a:srgbClr val="20242B"/>
+                </a:solidFill>
+                <a:latin typeface="Hiragino Sans"/>
+                <a:ea typeface="Hiragino Sans"/>
+              </a:rPr>
+              <a:t>  CC BY 4.0（7,812件の根拠として引用。更新終了のため制度上限の一次情報は東京都福祉局の</a:t>
+            </a:r>
+          </a:p>
+          <a:p>
+            <a:pPr algn="l">
+              <a:lnSpc>
+                <a:spcPct val="140000"/>
+              </a:lnSpc>
+            </a:pPr>
+            <a:r>
+              <a:rPr sz="1400" b="0">
+                <a:solidFill>
+                  <a:srgbClr val="20242B"/>
+                </a:solidFill>
+                <a:latin typeface="Hiragino Sans"/>
+                <a:ea typeface="Hiragino Sans"/>
+              </a:rPr>
               <a:t>  公式ページを採用）</a:t>
             </a:r>
           </a:p>
@@ -6966,7 +7949,7 @@
                 <a:latin typeface="Hiragino Sans"/>
                 <a:ea typeface="Hiragino Sans"/>
               </a:rPr>
-              <a:t>07</a:t>
+              <a:t>08</a:t>
             </a:r>
           </a:p>
         </p:txBody>
@@ -7300,7 +8283,7 @@
 </file>
 
 <file path=ppt/theme/theme2.xml><?xml version="1.0" encoding="utf-8"?>
-<a:theme xmlns:a="http://schemas.openxmlformats.org/drawingml/2006/main" name="Office Theme">
+<a:theme xmlns:a="http://schemas.openxmlformats.org/drawingml/2006/main" name="Office テーマ">
   <a:themeElements>
     <a:clrScheme name="Office">
       <a:dk1>
@@ -7310,44 +8293,44 @@
         <a:sysClr val="window" lastClr="FFFFFF"/>
       </a:lt1>
       <a:dk2>
-        <a:srgbClr val="1F497D"/>
+        <a:srgbClr val="0E2841"/>
       </a:dk2>
       <a:lt2>
-        <a:srgbClr val="EEECE1"/>
+        <a:srgbClr val="E8E8E8"/>
       </a:lt2>
       <a:accent1>
-        <a:srgbClr val="4F81BD"/>
+        <a:srgbClr val="156082"/>
       </a:accent1>
       <a:accent2>
-        <a:srgbClr val="C0504D"/>
+        <a:srgbClr val="E97132"/>
       </a:accent2>
       <a:accent3>
-        <a:srgbClr val="9BBB59"/>
+        <a:srgbClr val="196B24"/>
       </a:accent3>
       <a:accent4>
-        <a:srgbClr val="8064A2"/>
+        <a:srgbClr val="0F9ED5"/>
       </a:accent4>
       <a:accent5>
-        <a:srgbClr val="4BACC6"/>
+        <a:srgbClr val="A02B93"/>
       </a:accent5>
       <a:accent6>
-        <a:srgbClr val="F79646"/>
+        <a:srgbClr val="4EA72E"/>
       </a:accent6>
       <a:hlink>
-        <a:srgbClr val="0000FF"/>
+        <a:srgbClr val="467886"/>
       </a:hlink>
       <a:folHlink>
-        <a:srgbClr val="800080"/>
+        <a:srgbClr val="96607D"/>
       </a:folHlink>
     </a:clrScheme>
     <a:fontScheme name="Office">
       <a:majorFont>
-        <a:latin typeface="Calibri"/>
+        <a:latin typeface="游ゴシック Light" panose="02110004020202020204"/>
         <a:ea typeface=""/>
         <a:cs typeface=""/>
-        <a:font script="Jpan" typeface="ＭＳ Ｐゴシック"/>
+        <a:font script="Jpan" typeface="游ゴシック Light"/>
         <a:font script="Hang" typeface="맑은 고딕"/>
-        <a:font script="Hans" typeface="宋体"/>
+        <a:font script="Hans" typeface="等线 Light"/>
         <a:font script="Hant" typeface="新細明體"/>
         <a:font script="Arab" typeface="Times New Roman"/>
         <a:font script="Hebr" typeface="Times New Roman"/>
@@ -7375,14 +8358,31 @@
         <a:font script="Viet" typeface="Times New Roman"/>
         <a:font script="Uigh" typeface="Microsoft Uighur"/>
         <a:font script="Geor" typeface="Sylfaen"/>
+        <a:font script="Armn" typeface="Arial"/>
+        <a:font script="Bugi" typeface="Leelawadee UI"/>
+        <a:font script="Bopo" typeface="Microsoft JhengHei"/>
+        <a:font script="Java" typeface="Javanese Text"/>
+        <a:font script="Lisu" typeface="Segoe UI"/>
+        <a:font script="Mymr" typeface="Myanmar Text"/>
+        <a:font script="Nkoo" typeface="Ebrima"/>
+        <a:font script="Olck" typeface="Nirmala UI"/>
+        <a:font script="Osma" typeface="Ebrima"/>
+        <a:font script="Phag" typeface="Phagspa"/>
+        <a:font script="Syrn" typeface="Estrangelo Edessa"/>
+        <a:font script="Syrj" typeface="Estrangelo Edessa"/>
+        <a:font script="Syre" typeface="Estrangelo Edessa"/>
+        <a:font script="Sora" typeface="Nirmala UI"/>
+        <a:font script="Tale" typeface="Microsoft Tai Le"/>
+        <a:font script="Talu" typeface="Microsoft New Tai Lue"/>
+        <a:font script="Tfng" typeface="Ebrima"/>
       </a:majorFont>
       <a:minorFont>
-        <a:latin typeface="Calibri"/>
+        <a:latin typeface="游ゴシック" panose="02110004020202020204"/>
         <a:ea typeface=""/>
         <a:cs typeface=""/>
-        <a:font script="Jpan" typeface="ＭＳ Ｐゴシック"/>
+        <a:font script="Jpan" typeface="游ゴシック"/>
         <a:font script="Hang" typeface="맑은 고딕"/>
-        <a:font script="Hans" typeface="宋体"/>
+        <a:font script="Hans" typeface="等线"/>
         <a:font script="Hant" typeface="新細明體"/>
         <a:font script="Arab" typeface="Arial"/>
         <a:font script="Hebr" typeface="Arial"/>
@@ -7410,6 +8410,23 @@
         <a:font script="Viet" typeface="Arial"/>
         <a:font script="Uigh" typeface="Microsoft Uighur"/>
         <a:font script="Geor" typeface="Sylfaen"/>
+        <a:font script="Armn" typeface="Arial"/>
+        <a:font script="Bugi" typeface="Leelawadee UI"/>
+        <a:font script="Bopo" typeface="Microsoft JhengHei"/>
+        <a:font script="Java" typeface="Javanese Text"/>
+        <a:font script="Lisu" typeface="Segoe UI"/>
+        <a:font script="Mymr" typeface="Myanmar Text"/>
+        <a:font script="Nkoo" typeface="Ebrima"/>
+        <a:font script="Olck" typeface="Nirmala UI"/>
+        <a:font script="Osma" typeface="Ebrima"/>
+        <a:font script="Phag" typeface="Phagspa"/>
+        <a:font script="Syrn" typeface="Estrangelo Edessa"/>
+        <a:font script="Syrj" typeface="Estrangelo Edessa"/>
+        <a:font script="Syre" typeface="Estrangelo Edessa"/>
+        <a:font script="Sora" typeface="Nirmala UI"/>
+        <a:font script="Tale" typeface="Microsoft Tai Le"/>
+        <a:font script="Talu" typeface="Microsoft New Tai Lue"/>
+        <a:font script="Tfng" typeface="Ebrima"/>
       </a:minorFont>
     </a:fontScheme>
     <a:fmtScheme name="Office">
@@ -7421,180 +8438,136 @@
           <a:gsLst>
             <a:gs pos="0">
               <a:schemeClr val="phClr">
-                <a:tint val="50000"/>
-                <a:satMod val="300000"/>
+                <a:lumMod val="110000"/>
+                <a:satMod val="105000"/>
+                <a:tint val="67000"/>
               </a:schemeClr>
             </a:gs>
-            <a:gs pos="35000">
+            <a:gs pos="50000">
               <a:schemeClr val="phClr">
-                <a:tint val="37000"/>
-                <a:satMod val="300000"/>
+                <a:lumMod val="105000"/>
+                <a:satMod val="103000"/>
+                <a:tint val="73000"/>
               </a:schemeClr>
             </a:gs>
             <a:gs pos="100000">
               <a:schemeClr val="phClr">
-                <a:tint val="15000"/>
-                <a:satMod val="350000"/>
+                <a:lumMod val="105000"/>
+                <a:satMod val="109000"/>
+                <a:tint val="81000"/>
               </a:schemeClr>
             </a:gs>
           </a:gsLst>
-          <a:lin ang="16200000" scaled="1"/>
+          <a:lin ang="5400000" scaled="0"/>
         </a:gradFill>
         <a:gradFill rotWithShape="1">
           <a:gsLst>
             <a:gs pos="0">
               <a:schemeClr val="phClr">
-                <a:tint val="100000"/>
+                <a:satMod val="103000"/>
+                <a:lumMod val="102000"/>
+                <a:tint val="94000"/>
+              </a:schemeClr>
+            </a:gs>
+            <a:gs pos="50000">
+              <a:schemeClr val="phClr">
+                <a:satMod val="110000"/>
+                <a:lumMod val="100000"/>
                 <a:shade val="100000"/>
-                <a:satMod val="130000"/>
               </a:schemeClr>
             </a:gs>
             <a:gs pos="100000">
               <a:schemeClr val="phClr">
-                <a:tint val="50000"/>
-                <a:shade val="100000"/>
-                <a:satMod val="350000"/>
+                <a:lumMod val="99000"/>
+                <a:satMod val="120000"/>
+                <a:shade val="78000"/>
               </a:schemeClr>
             </a:gs>
           </a:gsLst>
-          <a:lin ang="16200000" scaled="0"/>
+          <a:lin ang="5400000" scaled="0"/>
         </a:gradFill>
       </a:fillStyleLst>
       <a:lnStyleLst>
-        <a:ln w="9525" cap="flat" cmpd="sng" algn="ctr">
+        <a:ln w="12700" cap="flat" cmpd="sng" algn="ctr">
           <a:solidFill>
-            <a:schemeClr val="phClr">
-              <a:shade val="95000"/>
-              <a:satMod val="105000"/>
-            </a:schemeClr>
+            <a:schemeClr val="phClr"/>
           </a:solidFill>
           <a:prstDash val="solid"/>
+          <a:miter lim="800000"/>
+        </a:ln>
+        <a:ln w="19050" cap="flat" cmpd="sng" algn="ctr">
+          <a:solidFill>
+            <a:schemeClr val="phClr"/>
+          </a:solidFill>
+          <a:prstDash val="solid"/>
+          <a:miter lim="800000"/>
         </a:ln>
         <a:ln w="25400" cap="flat" cmpd="sng" algn="ctr">
           <a:solidFill>
             <a:schemeClr val="phClr"/>
           </a:solidFill>
           <a:prstDash val="solid"/>
-        </a:ln>
-        <a:ln w="38100" cap="flat" cmpd="sng" algn="ctr">
-          <a:solidFill>
-            <a:schemeClr val="phClr"/>
-          </a:solidFill>
-          <a:prstDash val="solid"/>
+          <a:miter lim="800000"/>
         </a:ln>
       </a:lnStyleLst>
       <a:effectStyleLst>
         <a:effectStyle>
+          <a:effectLst/>
+        </a:effectStyle>
+        <a:effectStyle>
+          <a:effectLst/>
+        </a:effectStyle>
+        <a:effectStyle>
           <a:effectLst>
-            <a:outerShdw blurRad="40000" dist="20000" dir="5400000" rotWithShape="0">
+            <a:outerShdw blurRad="57150" dist="19050" dir="5400000" algn="ctr" rotWithShape="0">
               <a:srgbClr val="000000">
-                <a:alpha val="38000"/>
+                <a:alpha val="63000"/>
               </a:srgbClr>
             </a:outerShdw>
           </a:effectLst>
-        </a:effectStyle>
-        <a:effectStyle>
-          <a:effectLst>
-            <a:outerShdw blurRad="40000" dist="23000" dir="5400000" rotWithShape="0">
-              <a:srgbClr val="000000">
-                <a:alpha val="35000"/>
-              </a:srgbClr>
-            </a:outerShdw>
-          </a:effectLst>
-        </a:effectStyle>
-        <a:effectStyle>
-          <a:effectLst>
-            <a:outerShdw blurRad="40000" dist="23000" dir="5400000" rotWithShape="0">
-              <a:srgbClr val="000000">
-                <a:alpha val="35000"/>
-              </a:srgbClr>
-            </a:outerShdw>
-          </a:effectLst>
-          <a:scene3d>
-            <a:camera prst="orthographicFront">
-              <a:rot lat="0" lon="0" rev="0"/>
-            </a:camera>
-            <a:lightRig rig="threePt" dir="t">
-              <a:rot lat="0" lon="0" rev="1200000"/>
-            </a:lightRig>
-          </a:scene3d>
-          <a:sp3d>
-            <a:bevelT w="63500" h="25400"/>
-          </a:sp3d>
         </a:effectStyle>
       </a:effectStyleLst>
       <a:bgFillStyleLst>
         <a:solidFill>
           <a:schemeClr val="phClr"/>
         </a:solidFill>
+        <a:solidFill>
+          <a:schemeClr val="phClr">
+            <a:tint val="95000"/>
+            <a:satMod val="170000"/>
+          </a:schemeClr>
+        </a:solidFill>
         <a:gradFill rotWithShape="1">
           <a:gsLst>
             <a:gs pos="0">
               <a:schemeClr val="phClr">
-                <a:tint val="40000"/>
-                <a:satMod val="350000"/>
+                <a:tint val="93000"/>
+                <a:satMod val="150000"/>
+                <a:shade val="98000"/>
+                <a:lumMod val="102000"/>
               </a:schemeClr>
             </a:gs>
-            <a:gs pos="40000">
+            <a:gs pos="50000">
               <a:schemeClr val="phClr">
-                <a:tint val="45000"/>
-                <a:shade val="99000"/>
-                <a:satMod val="350000"/>
+                <a:tint val="98000"/>
+                <a:satMod val="130000"/>
+                <a:shade val="90000"/>
+                <a:lumMod val="103000"/>
               </a:schemeClr>
             </a:gs>
             <a:gs pos="100000">
               <a:schemeClr val="phClr">
-                <a:shade val="20000"/>
-                <a:satMod val="255000"/>
+                <a:shade val="63000"/>
+                <a:satMod val="120000"/>
               </a:schemeClr>
             </a:gs>
           </a:gsLst>
-          <a:path path="circle">
-            <a:fillToRect l="50000" t="-80000" r="50000" b="180000"/>
-          </a:path>
-        </a:gradFill>
-        <a:gradFill rotWithShape="1">
-          <a:gsLst>
-            <a:gs pos="0">
-              <a:schemeClr val="phClr">
-                <a:tint val="80000"/>
-                <a:satMod val="300000"/>
-              </a:schemeClr>
-            </a:gs>
-            <a:gs pos="100000">
-              <a:schemeClr val="phClr">
-                <a:shade val="30000"/>
-                <a:satMod val="200000"/>
-              </a:schemeClr>
-            </a:gs>
-          </a:gsLst>
-          <a:path path="circle">
-            <a:fillToRect l="50000" t="50000" r="50000" b="50000"/>
-          </a:path>
+          <a:lin ang="5400000" scaled="0"/>
         </a:gradFill>
       </a:bgFillStyleLst>
     </a:fmtScheme>
   </a:themeElements>
   <a:objectDefaults>
-    <a:spDef>
-      <a:spPr/>
-      <a:bodyPr/>
-      <a:lstStyle/>
-      <a:style>
-        <a:lnRef idx="1">
-          <a:schemeClr val="accent1"/>
-        </a:lnRef>
-        <a:fillRef idx="3">
-          <a:schemeClr val="accent1"/>
-        </a:fillRef>
-        <a:effectRef idx="2">
-          <a:schemeClr val="accent1"/>
-        </a:effectRef>
-        <a:fontRef idx="minor">
-          <a:schemeClr val="lt1"/>
-        </a:fontRef>
-      </a:style>
-    </a:spDef>
     <a:lnDef>
       <a:spPr/>
       <a:bodyPr/>
@@ -7616,5 +8589,10 @@
     </a:lnDef>
   </a:objectDefaults>
   <a:extraClrSchemeLst/>
+  <a:extLst>
+    <a:ext uri="{05A4C25C-085E-4340-85A3-A5531E510DB2}">
+      <thm15:themeFamily xmlns:thm15="http://schemas.microsoft.com/office/thememl/2012/main" name="Office Theme" id="{2E142A2C-CD16-42D6-873A-C26D2A0506FA}" vid="{1BDDFF52-6CD6-40A5-AB3C-68EB2F1E4D0A}"/>
+    </a:ext>
+  </a:extLst>
 </a:theme>
 </file>